--- a/docs/ai-smart-crm-proposal.pptx
+++ b/docs/ai-smart-crm-proposal.pptx
@@ -2129,7 +2129,7 @@
         </p:nvSpPr>
         <p:spPr>
           <a:xfrm>
-            <a:off x="566928" y="1572768"/>
+            <a:off x="566928" y="1280160"/>
             <a:ext cx="11057839" cy="310896"/>
           </a:xfrm>
           <a:prstGeom prst="rect">
@@ -2168,27 +2168,24 @@
         </p:nvSpPr>
         <p:spPr>
           <a:xfrm>
-            <a:off x="566928" y="2057400"/>
-            <a:ext cx="9509760" cy="1920240"/>
-          </a:xfrm>
-          <a:prstGeom prst="rect">
-            <a:avLst/>
-          </a:prstGeom>
-          <a:noFill/>
-          <a:ln/>
-        </p:spPr>
-        <p:txBody>
-          <a:bodyPr wrap="square" lIns="0" tIns="0" rIns="0" bIns="0" rtlCol="0" anchor="t"/>
-          <a:lstStyle/>
-          <a:p>
-            <a:pPr indent="0" marL="0">
-              <a:lnSpc>
-                <a:spcPts val="6200"/>
-              </a:lnSpc>
-              <a:buNone/>
-            </a:pPr>
-            <a:r>
-              <a:rPr lang="en-US" sz="4700" b="1" dirty="0">
+            <a:off x="566928" y="1719072"/>
+            <a:ext cx="9509760" cy="1051560"/>
+          </a:xfrm>
+          <a:prstGeom prst="rect">
+            <a:avLst/>
+          </a:prstGeom>
+          <a:noFill/>
+          <a:ln/>
+        </p:spPr>
+        <p:txBody>
+          <a:bodyPr wrap="square" lIns="0" tIns="0" rIns="0" bIns="0" rtlCol="0" anchor="ctr"/>
+          <a:lstStyle/>
+          <a:p>
+            <a:pPr indent="0" marL="0">
+              <a:buNone/>
+            </a:pPr>
+            <a:r>
+              <a:rPr lang="en-US" sz="6400" b="1" dirty="0">
                 <a:solidFill>
                   <a:srgbClr val="FFFFFF"/>
                 </a:solidFill>
@@ -2196,19 +2193,13 @@
                 <a:ea typeface="Malgun Gothic" pitchFamily="34" charset="-122"/>
                 <a:cs typeface="Malgun Gothic" pitchFamily="34" charset="-120"/>
               </a:rPr>
-              <a:t>난임 전문병원을 위한</a:t>
-            </a:r>
-            <a:endParaRPr lang="en-US" sz="4700" dirty="0"/>
-          </a:p>
-          <a:p>
-            <a:pPr indent="0" marL="0">
-              <a:lnSpc>
-                <a:spcPts val="6200"/>
-              </a:lnSpc>
-              <a:buNone/>
-            </a:pPr>
-            <a:r>
-              <a:rPr lang="en-US" sz="4700" b="1" dirty="0">
+              <a:t>피움</a:t>
+            </a:r>
+            <a:pPr indent="0" marL="0">
+              <a:buNone/>
+            </a:pPr>
+            <a:r>
+              <a:rPr lang="en-US" sz="2200" b="1" spc="300" kern="0" dirty="0">
                 <a:solidFill>
                   <a:srgbClr val="7FD8C9"/>
                 </a:solidFill>
@@ -2216,9 +2207,9 @@
                 <a:ea typeface="Malgun Gothic" pitchFamily="34" charset="-122"/>
                 <a:cs typeface="Malgun Gothic" pitchFamily="34" charset="-120"/>
               </a:rPr>
-              <a:t>AI 스마트 CRM</a:t>
-            </a:r>
-            <a:endParaRPr lang="en-US" sz="4700" dirty="0"/>
+              <a:t>   Pium</a:t>
+            </a:r>
+            <a:endParaRPr lang="en-US" sz="6400" dirty="0"/>
           </a:p>
         </p:txBody>
       </p:sp>
@@ -2230,23 +2221,98 @@
         </p:nvSpPr>
         <p:spPr>
           <a:xfrm>
-            <a:off x="566928" y="4224528"/>
-            <a:ext cx="8778240" cy="822960"/>
-          </a:xfrm>
-          <a:prstGeom prst="rect">
-            <a:avLst/>
-          </a:prstGeom>
-          <a:noFill/>
-          <a:ln/>
-        </p:spPr>
-        <p:txBody>
-          <a:bodyPr wrap="square" lIns="0" tIns="0" rIns="0" bIns="0" rtlCol="0" anchor="t"/>
-          <a:lstStyle/>
-          <a:p>
-            <a:pPr indent="0" marL="0">
-              <a:lnSpc>
-                <a:spcPts val="2400"/>
-              </a:lnSpc>
+            <a:off x="566928" y="3127248"/>
+            <a:ext cx="9509760" cy="502920"/>
+          </a:xfrm>
+          <a:prstGeom prst="rect">
+            <a:avLst/>
+          </a:prstGeom>
+          <a:noFill/>
+          <a:ln/>
+        </p:spPr>
+        <p:txBody>
+          <a:bodyPr wrap="square" lIns="0" tIns="0" rIns="0" bIns="0" rtlCol="0" anchor="ctr"/>
+          <a:lstStyle/>
+          <a:p>
+            <a:pPr indent="0" marL="0">
+              <a:buNone/>
+            </a:pPr>
+            <a:r>
+              <a:rPr lang="en-US" sz="3000" b="1" dirty="0">
+                <a:solidFill>
+                  <a:srgbClr val="7FD8C9"/>
+                </a:solidFill>
+                <a:latin typeface="Malgun Gothic" pitchFamily="34" charset="0"/>
+                <a:ea typeface="Malgun Gothic" pitchFamily="34" charset="-122"/>
+                <a:cs typeface="Malgun Gothic" pitchFamily="34" charset="-120"/>
+              </a:rPr>
+              <a:t>난임 전문병원 AI 스마트 CRM</a:t>
+            </a:r>
+            <a:endParaRPr lang="en-US" sz="3000" dirty="0"/>
+          </a:p>
+        </p:txBody>
+      </p:sp>
+      <p:sp>
+        <p:nvSpPr>
+          <p:cNvPr id="5" name="Text 3"/>
+          <p:cNvSpPr/>
+          <p:nvPr/>
+        </p:nvSpPr>
+        <p:spPr>
+          <a:xfrm>
+            <a:off x="566928" y="3858768"/>
+            <a:ext cx="9509760" cy="365760"/>
+          </a:xfrm>
+          <a:prstGeom prst="rect">
+            <a:avLst/>
+          </a:prstGeom>
+          <a:noFill/>
+          <a:ln/>
+        </p:spPr>
+        <p:txBody>
+          <a:bodyPr wrap="square" lIns="0" tIns="0" rIns="0" bIns="0" rtlCol="0" anchor="ctr"/>
+          <a:lstStyle/>
+          <a:p>
+            <a:pPr indent="0" marL="0">
+              <a:buNone/>
+            </a:pPr>
+            <a:r>
+              <a:rPr lang="en-US" sz="1700" b="1" dirty="0">
+                <a:solidFill>
+                  <a:srgbClr val="FFFFFF"/>
+                </a:solidFill>
+                <a:latin typeface="Malgun Gothic" pitchFamily="34" charset="0"/>
+                <a:ea typeface="Malgun Gothic" pitchFamily="34" charset="-122"/>
+                <a:cs typeface="Malgun Gothic" pitchFamily="34" charset="-120"/>
+              </a:rPr>
+              <a:t>한 주기도 놓치지 않게.</a:t>
+            </a:r>
+            <a:endParaRPr lang="en-US" sz="1700" dirty="0"/>
+          </a:p>
+        </p:txBody>
+      </p:sp>
+      <p:sp>
+        <p:nvSpPr>
+          <p:cNvPr id="6" name="Text 4"/>
+          <p:cNvSpPr/>
+          <p:nvPr/>
+        </p:nvSpPr>
+        <p:spPr>
+          <a:xfrm>
+            <a:off x="566928" y="4498848"/>
+            <a:ext cx="9052560" cy="365760"/>
+          </a:xfrm>
+          <a:prstGeom prst="rect">
+            <a:avLst/>
+          </a:prstGeom>
+          <a:noFill/>
+          <a:ln/>
+        </p:spPr>
+        <p:txBody>
+          <a:bodyPr wrap="square" lIns="0" tIns="0" rIns="0" bIns="0" rtlCol="0" anchor="ctr"/>
+          <a:lstStyle/>
+          <a:p>
+            <a:pPr indent="0" marL="0">
               <a:buNone/>
             </a:pPr>
             <a:r>
@@ -2258,35 +2324,15 @@
                 <a:ea typeface="Malgun Gothic" pitchFamily="34" charset="-122"/>
                 <a:cs typeface="Malgun Gothic" pitchFamily="34" charset="-120"/>
               </a:rPr>
-              <a:t>난임 진료는 날짜가 아니라 주기로 움직입니다.</a:t>
+              <a:t>국내 난임 분야 1위 마리아병원에서 검증된 예약 · CRM 코어 위에 AI 레이어를 얹었습니다.</a:t>
             </a:r>
             <a:endParaRPr lang="en-US" sz="1400" dirty="0"/>
           </a:p>
-          <a:p>
-            <a:pPr indent="0" marL="0">
-              <a:lnSpc>
-                <a:spcPts val="2400"/>
-              </a:lnSpc>
-              <a:buNone/>
-            </a:pPr>
-            <a:r>
-              <a:rPr lang="en-US" sz="1400" dirty="0">
-                <a:solidFill>
-                  <a:srgbClr val="AFC7C4"/>
-                </a:solidFill>
-                <a:latin typeface="Malgun Gothic" pitchFamily="34" charset="0"/>
-                <a:ea typeface="Malgun Gothic" pitchFamily="34" charset="-122"/>
-                <a:cs typeface="Malgun Gothic" pitchFamily="34" charset="-120"/>
-              </a:rPr>
-              <a:t>국내 난임 분야 1위 병원에서 검증된 예약 · CRM 코어 위에 AI 레이어를 얹어 제공합니다.</a:t>
-            </a:r>
-            <a:endParaRPr lang="en-US" sz="1400" dirty="0"/>
-          </a:p>
-        </p:txBody>
-      </p:sp>
-      <p:sp>
-        <p:nvSpPr>
-          <p:cNvPr id="5" name="Text 3"/>
+        </p:txBody>
+      </p:sp>
+      <p:sp>
+        <p:nvSpPr>
+          <p:cNvPr id="7" name="Text 5"/>
           <p:cNvSpPr/>
           <p:nvPr/>
         </p:nvSpPr>
@@ -2325,7 +2371,7 @@
       </p:sp>
       <p:sp>
         <p:nvSpPr>
-          <p:cNvPr id="6" name="Text 4"/>
+          <p:cNvPr id="8" name="Text 6"/>
           <p:cNvSpPr/>
           <p:nvPr/>
         </p:nvSpPr>
@@ -2364,7 +2410,7 @@
       </p:sp>
       <p:sp>
         <p:nvSpPr>
-          <p:cNvPr id="7" name="Text 5"/>
+          <p:cNvPr id="9" name="Text 7"/>
           <p:cNvSpPr/>
           <p:nvPr/>
         </p:nvSpPr>
@@ -2403,7 +2449,7 @@
       </p:sp>
       <p:sp>
         <p:nvSpPr>
-          <p:cNvPr id="8" name="Text 6"/>
+          <p:cNvPr id="10" name="Text 8"/>
           <p:cNvSpPr/>
           <p:nvPr/>
         </p:nvSpPr>
@@ -2442,7 +2488,7 @@
       </p:sp>
       <p:sp>
         <p:nvSpPr>
-          <p:cNvPr id="9" name="Text 7"/>
+          <p:cNvPr id="11" name="Text 9"/>
           <p:cNvSpPr/>
           <p:nvPr/>
         </p:nvSpPr>
@@ -2481,7 +2527,7 @@
       </p:sp>
       <p:sp>
         <p:nvSpPr>
-          <p:cNvPr id="10" name="Text 8"/>
+          <p:cNvPr id="12" name="Text 10"/>
           <p:cNvSpPr/>
           <p:nvPr/>
         </p:nvSpPr>
@@ -2520,7 +2566,7 @@
       </p:sp>
       <p:sp>
         <p:nvSpPr>
-          <p:cNvPr id="11" name="Text 9"/>
+          <p:cNvPr id="13" name="Text 11"/>
           <p:cNvSpPr/>
           <p:nvPr/>
         </p:nvSpPr>
@@ -2559,7 +2605,7 @@
       </p:sp>
       <p:sp>
         <p:nvSpPr>
-          <p:cNvPr id="12" name="Text 10"/>
+          <p:cNvPr id="14" name="Text 12"/>
           <p:cNvSpPr/>
           <p:nvPr/>
         </p:nvSpPr>
@@ -2598,7 +2644,7 @@
       </p:sp>
       <p:sp>
         <p:nvSpPr>
-          <p:cNvPr id="13" name="Text 11"/>
+          <p:cNvPr id="15" name="Text 13"/>
           <p:cNvSpPr/>
           <p:nvPr/>
         </p:nvSpPr>
@@ -2629,7 +2675,7 @@
                 <a:ea typeface="Malgun Gothic" pitchFamily="34" charset="-122"/>
                 <a:cs typeface="Malgun Gothic" pitchFamily="34" charset="-120"/>
               </a:rPr>
-              <a:t>사업 소개서 · Rev. 1.0</a:t>
+              <a:t>피움 (Pium) · 사업 소개서 · Rev. 1.0</a:t>
             </a:r>
             <a:endParaRPr lang="en-US" sz="1050" dirty="0"/>
           </a:p>
@@ -2781,7 +2827,7 @@
                 <a:ea typeface="Malgun Gothic" pitchFamily="34" charset="-122"/>
                 <a:cs typeface="Malgun Gothic" pitchFamily="34" charset="-120"/>
               </a:rPr>
-              <a:t>병원별 독립 인스턴스로 구축합니다. 데이터베이스와 도메인이 병원마다 분리되므로 타 병원과 데이터가 섞이지 않습니다.</a:t>
+              <a:t>피움은 병원별 독립 인스턴스로 구축합니다. 데이터베이스와 도메인이 병원마다 분리되므로 타 병원과 데이터가 섞이지 않습니다.</a:t>
             </a:r>
             <a:endParaRPr lang="en-US" sz="1350" dirty="0"/>
           </a:p>
@@ -8385,7 +8431,7 @@
                 <a:ea typeface="Malgun Gothic" pitchFamily="34" charset="-122"/>
                 <a:cs typeface="Malgun Gothic" pitchFamily="34" charset="-120"/>
               </a:rPr>
-              <a:t>Core</a:t>
+              <a:t>피움 Core</a:t>
             </a:r>
             <a:endParaRPr lang="en-US" sz="2000" dirty="0"/>
           </a:p>
@@ -8631,7 +8677,7 @@
                 <a:ea typeface="Malgun Gothic" pitchFamily="34" charset="-122"/>
                 <a:cs typeface="Malgun Gothic" pitchFamily="34" charset="-120"/>
               </a:rPr>
-              <a:t>Smart</a:t>
+              <a:t>피움 Smart</a:t>
             </a:r>
             <a:endParaRPr lang="en-US" sz="2000" dirty="0"/>
           </a:p>
@@ -8816,7 +8862,7 @@
                 <a:ea typeface="Malgun Gothic" pitchFamily="34" charset="-122"/>
                 <a:cs typeface="Malgun Gothic" pitchFamily="34" charset="-120"/>
               </a:rPr>
-              <a:t>Core 전체 포함</a:t>
+              <a:t>피움 Core 전체 포함</a:t>
             </a:r>
             <a:endParaRPr lang="en-US" sz="1150" dirty="0"/>
           </a:p>
@@ -8985,7 +9031,7 @@
                 <a:ea typeface="Malgun Gothic" pitchFamily="34" charset="-122"/>
                 <a:cs typeface="Malgun Gothic" pitchFamily="34" charset="-120"/>
               </a:rPr>
-              <a:t>Enterprise</a:t>
+              <a:t>피움 Enterprise</a:t>
             </a:r>
             <a:endParaRPr lang="en-US" sz="2000" dirty="0"/>
           </a:p>
@@ -9109,7 +9155,7 @@
                 <a:ea typeface="Malgun Gothic" pitchFamily="34" charset="-122"/>
                 <a:cs typeface="Malgun Gothic" pitchFamily="34" charset="-120"/>
               </a:rPr>
-              <a:t>Smart 전체 포함</a:t>
+              <a:t>피움 Smart 전체 포함</a:t>
             </a:r>
             <a:endParaRPr lang="en-US" sz="1150" dirty="0"/>
           </a:p>
@@ -10251,7 +10297,7 @@
                 <a:ea typeface="Malgun Gothic" pitchFamily="34" charset="-122"/>
                 <a:cs typeface="Malgun Gothic" pitchFamily="34" charset="-120"/>
               </a:rPr>
-              <a:t>난임 전문병원 AI 스마트 CRM · 사업 소개서 · Rev. 1.0</a:t>
+              <a:t>피움 (Pium) · 난임 전문병원 AI 스마트 CRM · 사업 소개서 · Rev. 1.0</a:t>
             </a:r>
             <a:endParaRPr lang="en-US" sz="1000" dirty="0"/>
           </a:p>
@@ -13650,7 +13696,7 @@
                 <a:ea typeface="Malgun Gothic" pitchFamily="34" charset="-122"/>
                 <a:cs typeface="Malgun Gothic" pitchFamily="34" charset="-120"/>
               </a:rPr>
-              <a:t>신규 병원 도입 시 이 코어가 그대로 시작점이 됩니다.</a:t>
+              <a:t>이 코어가 곧 피움의 시작점이며, 신규 병원 도입 시 그대로 제공됩니다.</a:t>
             </a:r>
             <a:endParaRPr lang="en-US" sz="1350" dirty="0"/>
           </a:p>

--- a/docs/ai-smart-crm-proposal.pptx
+++ b/docs/ai-smart-crm-proposal.pptx
@@ -20,9 +20,10 @@
     <p:sldId id="268" r:id="rId14"/>
     <p:sldId id="269" r:id="rId15"/>
     <p:sldId id="270" r:id="rId16"/>
+    <p:sldId id="271" r:id="rId17"/>
   </p:sldIdLst>
   <p:notesMasterIdLst>
-    <p:notesMasterId r:id="rId17"/>
+    <p:notesMasterId r:id="rId18"/>
   </p:notesMasterIdLst>
   <p:sldSz cx="12192000" cy="6858000"/>
   <p:notesSz cx="6858000" cy="12192000"/>
@@ -692,7 +693,7 @@
           <a:p>
             <a:r>
               <a:rPr lang="en-US" dirty="0"/>
-              <a:t>여기서 과장된 수치를 제시하지 않는 것이 오히려 신뢰를 얻는 지점입니다.</a:t>
+              <a:t>이 표의 핵심은 숫자가 아니라 산출식을 전부 공개한다는 점입니다. 병원이 자기 숫자를 넣어 직접 계산하게 하면, 우리가 제시한 수치를 방어할 필요가 없어집니다. 달성률 50%로 깎아둔 것도 같은 이유입니다.</a:t>
             </a:r>
             <a:endParaRPr lang="en-US" dirty="0"/>
           </a:p>
@@ -780,7 +781,7 @@
           <a:p>
             <a:r>
               <a:rPr lang="en-US" dirty="0"/>
-              <a:t/>
+              <a:t>레퍼런스 병원의 숫자를 팔지 않는다는 점을 분명히 말씀드리는 슬라이드입니다. 듣는 쪽에서는 "그럼 우리 숫자도 안 팔겠구나"로 읽힙니다.</a:t>
             </a:r>
             <a:endParaRPr lang="en-US" dirty="0"/>
           </a:p>
@@ -868,7 +869,7 @@
           <a:p>
             <a:r>
               <a:rPr lang="en-US" dirty="0"/>
-              <a:t/>
+              <a:t>병원장이 가장 먼저 묻는 것은 "우리 직원이 얼마나 붙어야 하느냐"입니다. 40시간이라는 숫자를 먼저 드리면 그 다음 대화가 쉬워집니다. 5주차 무위약 중단 조항은 계약 문턱을 낮추는 장치입니다.</a:t>
             </a:r>
             <a:endParaRPr lang="en-US" dirty="0"/>
           </a:p>
@@ -1044,7 +1045,7 @@
           <a:p>
             <a:r>
               <a:rPr lang="en-US" dirty="0"/>
-              <a:t>연락처 4개 항목은 실제 정보로 교체해야 합니다.</a:t>
+              <a:t>구간을 의료진 수로만 나눈 이유를 물으면: 예약 건수 종량제로 하면 병원이 쓸수록 비용이 오르는 구조가 되어, 도입 후 "많이 쓰면 손해"라는 인식이 생깁니다. 실비를 마진 없이 공개하는 것도 같은 맥락입니다.</a:t>
             </a:r>
             <a:endParaRPr lang="en-US" dirty="0"/>
           </a:p>
@@ -1068,6 +1069,94 @@
             <a:fld id="{F7021451-1387-4CA6-816F-3879F97B5CBC}" type="slidenum">
               <a:rPr lang="en-US"/>
               <a:t>15</a:t>
+            </a:fld>
+            <a:endParaRPr lang="en-US"/>
+          </a:p>
+        </p:txBody>
+      </p:sp>
+    </p:spTree>
+    <p:extLst>
+      <p:ext uri="{BB962C8B-B14F-4D97-AF65-F5344CB8AC3E}">
+        <p14:creationId xmlns:p14="http://schemas.microsoft.com/office/powerpoint/2010/main" val="1024086991"/>
+      </p:ext>
+    </p:extLst>
+  </p:cSld>
+  <p:clrMapOvr>
+    <a:masterClrMapping/>
+  </p:clrMapOvr>
+</p:notes>
+</file>
+
+<file path=ppt/notesSlides/notesSlide16.xml><?xml version="1.0" encoding="utf-8"?>
+<p:notes xmlns:a="http://schemas.openxmlformats.org/drawingml/2006/main" xmlns:r="http://schemas.openxmlformats.org/officeDocument/2006/relationships" xmlns:p="http://schemas.openxmlformats.org/presentationml/2006/main">
+  <p:cSld>
+    <p:spTree>
+      <p:nvGrpSpPr>
+        <p:cNvPr id="1" name=""/>
+        <p:cNvGrpSpPr/>
+        <p:nvPr/>
+      </p:nvGrpSpPr>
+      <p:grpSpPr>
+        <a:xfrm>
+          <a:off x="0" y="0"/>
+          <a:ext cx="0" cy="0"/>
+          <a:chOff x="0" y="0"/>
+          <a:chExt cx="0" cy="0"/>
+        </a:xfrm>
+      </p:grpSpPr>
+      <p:sp>
+        <p:nvSpPr>
+          <p:cNvPr id="2" name="Slide Image Placeholder 1"/>
+          <p:cNvSpPr>
+            <a:spLocks noGrp="1" noRot="1" noChangeAspect="1"/>
+          </p:cNvSpPr>
+          <p:nvPr>
+            <p:ph type="sldImg"/>
+          </p:nvPr>
+        </p:nvSpPr>
+        <p:spPr/>
+      </p:sp>
+      <p:sp>
+        <p:nvSpPr>
+          <p:cNvPr id="3" name="Notes Placeholder 2"/>
+          <p:cNvSpPr>
+            <a:spLocks noGrp="1"/>
+          </p:cNvSpPr>
+          <p:nvPr>
+            <p:ph type="body" idx="1"/>
+          </p:nvPr>
+        </p:nvSpPr>
+        <p:spPr/>
+        <p:txBody>
+          <a:bodyPr/>
+          <a:lstStyle/>
+          <a:p>
+            <a:r>
+              <a:rPr lang="en-US" dirty="0"/>
+              <a:t>연락처 4개 항목은 실제 정보로 교체해야 합니다.</a:t>
+            </a:r>
+            <a:endParaRPr lang="en-US" dirty="0"/>
+          </a:p>
+        </p:txBody>
+      </p:sp>
+      <p:sp>
+        <p:nvSpPr>
+          <p:cNvPr id="4" name="Slide Number Placeholder 3"/>
+          <p:cNvSpPr>
+            <a:spLocks noGrp="1"/>
+          </p:cNvSpPr>
+          <p:nvPr>
+            <p:ph type="sldNum" sz="quarter" idx="10"/>
+          </p:nvPr>
+        </p:nvSpPr>
+        <p:spPr/>
+        <p:txBody>
+          <a:bodyPr/>
+          <a:lstStyle/>
+          <a:p>
+            <a:fld id="{F7021451-1387-4CA6-816F-3879F97B5CBC}" type="slidenum">
+              <a:rPr lang="en-US"/>
+              <a:t>16</a:t>
             </a:fld>
             <a:endParaRPr lang="en-US"/>
           </a:p>
@@ -2675,7 +2764,7 @@
                 <a:ea typeface="Malgun Gothic" pitchFamily="34" charset="-122"/>
                 <a:cs typeface="Malgun Gothic" pitchFamily="34" charset="-120"/>
               </a:rPr>
-              <a:t>피움 (Pium) · 사업 소개서 · Rev. 1.0</a:t>
+              <a:t>피움 (Pium) · 사업 소개서 · Rev. 1.1</a:t>
             </a:r>
             <a:endParaRPr lang="en-US" sz="1050" dirty="0"/>
           </a:p>
@@ -4997,7 +5086,7 @@
                 <a:ea typeface="Malgun Gothic" pitchFamily="34" charset="-122"/>
                 <a:cs typeface="Malgun Gothic" pitchFamily="34" charset="-120"/>
               </a:rPr>
-              <a:t>효과</a:t>
+              <a:t>성과</a:t>
             </a:r>
             <a:endParaRPr lang="en-US" sz="1150" dirty="0"/>
           </a:p>
@@ -5036,7 +5125,7 @@
                 <a:ea typeface="Malgun Gothic" pitchFamily="34" charset="-122"/>
                 <a:cs typeface="Malgun Gothic" pitchFamily="34" charset="-120"/>
               </a:rPr>
-              <a:t>무엇을, 어떻게 측정할 것인가</a:t>
+              <a:t>성과를 숫자로 환산하는 방법</a:t>
             </a:r>
             <a:endParaRPr lang="en-US" sz="3100" dirty="0"/>
           </a:p>
@@ -5051,7 +5140,7 @@
         <p:spPr>
           <a:xfrm>
             <a:off x="566928" y="1426464"/>
-            <a:ext cx="10241280" cy="475488"/>
+            <a:ext cx="10241280" cy="548640"/>
           </a:xfrm>
           <a:prstGeom prst="rect">
             <a:avLst/>
@@ -5078,22 +5167,1545 @@
                 <a:ea typeface="Malgun Gothic" pitchFamily="34" charset="-122"/>
                 <a:cs typeface="Malgun Gothic" pitchFamily="34" charset="-120"/>
               </a:rPr>
-              <a:t>도입 첫 달을 기준선으로 측정하고, 분기마다 실측값을 리포트로 제공합니다.</a:t>
+              <a:t>의료진 6인 · 월 예약 2,400건 규모를 가정한 예시입니다. 입력값은 사전 진단에서 귀 병원 실측치로 대체됩니다. 이 표는 약속이 아니라, 병원이 자기 숫자로 검증하는 계산 모델입니다.</a:t>
             </a:r>
             <a:endParaRPr lang="en-US" sz="1350" dirty="0"/>
           </a:p>
         </p:txBody>
       </p:sp>
-      <p:sp>
-        <p:nvSpPr>
-          <p:cNvPr id="5" name="Shape 3"/>
-          <p:cNvSpPr/>
-          <p:nvPr/>
-        </p:nvSpPr>
-        <p:spPr>
-          <a:xfrm>
-            <a:off x="566928" y="2011680"/>
-            <a:ext cx="3417722" cy="1298448"/>
+      <p:graphicFrame>
+        <p:nvGraphicFramePr>
+          <p:cNvPr id="12" name="Table 0"/>
+          <p:cNvGraphicFramePr>
+            <a:graphicFrameLocks noGrp="1"/>
+          </p:cNvGraphicFramePr>
+          <p:nvPr>
+            <p:extLst>
+              <p:ext uri="{D42A27DB-BD31-4B8C-83A1-F6EECF244321}">
+                <p14:modId xmlns:p14="http://schemas.microsoft.com/office/powerpoint/2010/main" val="1579011935"/>
+              </p:ext>
+            </p:extLst>
+          </p:nvPr>
+        </p:nvGraphicFramePr>
+        <p:xfrm>
+          <a:off x="566928" y="2157984"/>
+          <a:ext cx="11057839" cy="914400"/>
+        </p:xfrm>
+        <a:graphic>
+          <a:graphicData uri="http://schemas.openxmlformats.org/drawingml/2006/table">
+            <a:tbl>
+              <a:tblPr/>
+              <a:tblGrid>
+                <a:gridCol w="2468880"/>
+                <a:gridCol w="3931920"/>
+                <a:gridCol w="3017520"/>
+                <a:gridCol w="1639519"/>
+              </a:tblGrid>
+              <a:tr h="320040">
+                <a:tc>
+                  <a:txBody>
+                    <a:bodyPr/>
+                    <a:lstStyle/>
+                    <a:p>
+                      <a:pPr algn="l" indent="0" marL="0">
+                        <a:buNone/>
+                      </a:pPr>
+                      <a:r>
+                        <a:rPr lang="en-US" sz="1000" b="1" dirty="0">
+                          <a:solidFill>
+                            <a:srgbClr val="8C9A99"/>
+                          </a:solidFill>
+                          <a:latin typeface="Malgun Gothic" pitchFamily="34" charset="0"/>
+                          <a:ea typeface="Malgun Gothic" pitchFamily="34" charset="-122"/>
+                          <a:cs typeface="Malgun Gothic" pitchFamily="34" charset="-120"/>
+                        </a:rPr>
+                        <a:t>효과 항목</a:t>
+                      </a:r>
+                      <a:endParaRPr lang="en-US" sz="1000" dirty="0">
+                        <a:latin typeface="Malgun Gothic" charset="0"/>
+                        <a:ea typeface="Malgun Gothic" charset="0"/>
+                        <a:cs typeface="Malgun Gothic" charset="0"/>
+                      </a:endParaRPr>
+                    </a:p>
+                  </a:txBody>
+                  <a:tcPr marL="0" marR="76200" marT="50800" marB="50800" anchor="b">
+                    <a:lnL w="0" cap="flat" cmpd="sng" algn="ctr">
+                      <a:noFill/>
+                    </a:lnL>
+                    <a:lnR w="0" cap="flat" cmpd="sng" algn="ctr">
+                      <a:noFill/>
+                    </a:lnR>
+                    <a:lnT w="0" cap="flat" cmpd="sng" algn="ctr">
+                      <a:noFill/>
+                    </a:lnT>
+                    <a:lnB w="17780" cap="flat" cmpd="sng" algn="ctr">
+                      <a:solidFill>
+                        <a:srgbClr val="12191A"/>
+                      </a:solidFill>
+                      <a:prstDash val="solid"/>
+                      <a:round/>
+                      <a:headEnd type="none" w="med" len="med"/>
+                      <a:tailEnd type="none" w="med" len="med"/>
+                    </a:lnB>
+                    <a:solidFill>
+                      <a:srgbClr val="FBFAF7"/>
+                    </a:solidFill>
+                  </a:tcPr>
+                </a:tc>
+                <a:tc>
+                  <a:txBody>
+                    <a:bodyPr/>
+                    <a:lstStyle/>
+                    <a:p>
+                      <a:pPr algn="l" indent="0" marL="0">
+                        <a:buNone/>
+                      </a:pPr>
+                      <a:r>
+                        <a:rPr lang="en-US" sz="1000" b="1" dirty="0">
+                          <a:solidFill>
+                            <a:srgbClr val="8C9A99"/>
+                          </a:solidFill>
+                          <a:latin typeface="Malgun Gothic" pitchFamily="34" charset="0"/>
+                          <a:ea typeface="Malgun Gothic" pitchFamily="34" charset="-122"/>
+                          <a:cs typeface="Malgun Gothic" pitchFamily="34" charset="-120"/>
+                        </a:rPr>
+                        <a:t>산출식</a:t>
+                      </a:r>
+                      <a:endParaRPr lang="en-US" sz="1000" dirty="0">
+                        <a:latin typeface="Malgun Gothic" charset="0"/>
+                        <a:ea typeface="Malgun Gothic" charset="0"/>
+                        <a:cs typeface="Malgun Gothic" charset="0"/>
+                      </a:endParaRPr>
+                    </a:p>
+                  </a:txBody>
+                  <a:tcPr marL="0" marR="76200" marT="50800" marB="50800" anchor="b">
+                    <a:lnL w="0" cap="flat" cmpd="sng" algn="ctr">
+                      <a:noFill/>
+                    </a:lnL>
+                    <a:lnR w="0" cap="flat" cmpd="sng" algn="ctr">
+                      <a:noFill/>
+                    </a:lnR>
+                    <a:lnT w="0" cap="flat" cmpd="sng" algn="ctr">
+                      <a:noFill/>
+                    </a:lnT>
+                    <a:lnB w="17780" cap="flat" cmpd="sng" algn="ctr">
+                      <a:solidFill>
+                        <a:srgbClr val="12191A"/>
+                      </a:solidFill>
+                      <a:prstDash val="solid"/>
+                      <a:round/>
+                      <a:headEnd type="none" w="med" len="med"/>
+                      <a:tailEnd type="none" w="med" len="med"/>
+                    </a:lnB>
+                    <a:solidFill>
+                      <a:srgbClr val="FBFAF7"/>
+                    </a:solidFill>
+                  </a:tcPr>
+                </a:tc>
+                <a:tc>
+                  <a:txBody>
+                    <a:bodyPr/>
+                    <a:lstStyle/>
+                    <a:p>
+                      <a:pPr algn="l" indent="0" marL="0">
+                        <a:buNone/>
+                      </a:pPr>
+                      <a:r>
+                        <a:rPr lang="en-US" sz="1000" b="1" dirty="0">
+                          <a:solidFill>
+                            <a:srgbClr val="8C9A99"/>
+                          </a:solidFill>
+                          <a:latin typeface="Malgun Gothic" pitchFamily="34" charset="0"/>
+                          <a:ea typeface="Malgun Gothic" pitchFamily="34" charset="-122"/>
+                          <a:cs typeface="Malgun Gothic" pitchFamily="34" charset="-120"/>
+                        </a:rPr>
+                        <a:t>예시 입력값</a:t>
+                      </a:r>
+                      <a:endParaRPr lang="en-US" sz="1000" dirty="0">
+                        <a:latin typeface="Malgun Gothic" charset="0"/>
+                        <a:ea typeface="Malgun Gothic" charset="0"/>
+                        <a:cs typeface="Malgun Gothic" charset="0"/>
+                      </a:endParaRPr>
+                    </a:p>
+                  </a:txBody>
+                  <a:tcPr marL="0" marR="76200" marT="50800" marB="50800" anchor="b">
+                    <a:lnL w="0" cap="flat" cmpd="sng" algn="ctr">
+                      <a:noFill/>
+                    </a:lnL>
+                    <a:lnR w="0" cap="flat" cmpd="sng" algn="ctr">
+                      <a:noFill/>
+                    </a:lnR>
+                    <a:lnT w="0" cap="flat" cmpd="sng" algn="ctr">
+                      <a:noFill/>
+                    </a:lnT>
+                    <a:lnB w="17780" cap="flat" cmpd="sng" algn="ctr">
+                      <a:solidFill>
+                        <a:srgbClr val="12191A"/>
+                      </a:solidFill>
+                      <a:prstDash val="solid"/>
+                      <a:round/>
+                      <a:headEnd type="none" w="med" len="med"/>
+                      <a:tailEnd type="none" w="med" len="med"/>
+                    </a:lnB>
+                    <a:solidFill>
+                      <a:srgbClr val="FBFAF7"/>
+                    </a:solidFill>
+                  </a:tcPr>
+                </a:tc>
+                <a:tc>
+                  <a:txBody>
+                    <a:bodyPr/>
+                    <a:lstStyle/>
+                    <a:p>
+                      <a:pPr algn="r" indent="0" marL="0">
+                        <a:buNone/>
+                      </a:pPr>
+                      <a:r>
+                        <a:rPr lang="en-US" sz="1000" b="1" dirty="0">
+                          <a:solidFill>
+                            <a:srgbClr val="8C9A99"/>
+                          </a:solidFill>
+                          <a:latin typeface="Malgun Gothic" pitchFamily="34" charset="0"/>
+                          <a:ea typeface="Malgun Gothic" pitchFamily="34" charset="-122"/>
+                          <a:cs typeface="Malgun Gothic" pitchFamily="34" charset="-120"/>
+                        </a:rPr>
+                        <a:t>월 효과</a:t>
+                      </a:r>
+                      <a:endParaRPr lang="en-US" sz="1000" dirty="0">
+                        <a:latin typeface="Malgun Gothic" charset="0"/>
+                        <a:ea typeface="Malgun Gothic" charset="0"/>
+                        <a:cs typeface="Malgun Gothic" charset="0"/>
+                      </a:endParaRPr>
+                    </a:p>
+                  </a:txBody>
+                  <a:tcPr marL="0" marR="76200" marT="50800" marB="50800" anchor="b">
+                    <a:lnL w="0" cap="flat" cmpd="sng" algn="ctr">
+                      <a:noFill/>
+                    </a:lnL>
+                    <a:lnR w="0" cap="flat" cmpd="sng" algn="ctr">
+                      <a:noFill/>
+                    </a:lnR>
+                    <a:lnT w="0" cap="flat" cmpd="sng" algn="ctr">
+                      <a:noFill/>
+                    </a:lnT>
+                    <a:lnB w="17780" cap="flat" cmpd="sng" algn="ctr">
+                      <a:solidFill>
+                        <a:srgbClr val="12191A"/>
+                      </a:solidFill>
+                      <a:prstDash val="solid"/>
+                      <a:round/>
+                      <a:headEnd type="none" w="med" len="med"/>
+                      <a:tailEnd type="none" w="med" len="med"/>
+                    </a:lnB>
+                    <a:solidFill>
+                      <a:srgbClr val="FBFAF7"/>
+                    </a:solidFill>
+                  </a:tcPr>
+                </a:tc>
+              </a:tr>
+              <a:tr h="320040">
+                <a:tc>
+                  <a:txBody>
+                    <a:bodyPr/>
+                    <a:lstStyle/>
+                    <a:p>
+                      <a:pPr algn="l" indent="0" marL="0">
+                        <a:buNone/>
+                      </a:pPr>
+                      <a:r>
+                        <a:rPr lang="en-US" sz="1150" b="1" dirty="0">
+                          <a:solidFill>
+                            <a:srgbClr val="12191A"/>
+                          </a:solidFill>
+                          <a:latin typeface="Malgun Gothic" pitchFamily="34" charset="0"/>
+                          <a:ea typeface="Malgun Gothic" pitchFamily="34" charset="-122"/>
+                          <a:cs typeface="Malgun Gothic" pitchFamily="34" charset="-120"/>
+                        </a:rPr>
+                        <a:t>노쇼 감소</a:t>
+                      </a:r>
+                      <a:endParaRPr lang="en-US" sz="1150" dirty="0">
+                        <a:latin typeface="Malgun Gothic" charset="0"/>
+                        <a:ea typeface="Malgun Gothic" charset="0"/>
+                        <a:cs typeface="Malgun Gothic" charset="0"/>
+                      </a:endParaRPr>
+                    </a:p>
+                  </a:txBody>
+                  <a:tcPr marL="0" marR="76200" marT="50800" marB="50800" anchor="ctr">
+                    <a:lnL w="0" cap="flat" cmpd="sng" algn="ctr">
+                      <a:noFill/>
+                    </a:lnL>
+                    <a:lnR w="0" cap="flat" cmpd="sng" algn="ctr">
+                      <a:noFill/>
+                    </a:lnR>
+                    <a:lnT w="0" cap="flat" cmpd="sng" algn="ctr">
+                      <a:noFill/>
+                    </a:lnT>
+                    <a:lnB w="6350" cap="flat" cmpd="sng" algn="ctr">
+                      <a:solidFill>
+                        <a:srgbClr val="E1E4DE"/>
+                      </a:solidFill>
+                      <a:prstDash val="solid"/>
+                      <a:round/>
+                      <a:headEnd type="none" w="med" len="med"/>
+                      <a:tailEnd type="none" w="med" len="med"/>
+                    </a:lnB>
+                  </a:tcPr>
+                </a:tc>
+                <a:tc>
+                  <a:txBody>
+                    <a:bodyPr/>
+                    <a:lstStyle/>
+                    <a:p>
+                      <a:pPr algn="l" indent="0" marL="0">
+                        <a:buNone/>
+                      </a:pPr>
+                      <a:r>
+                        <a:rPr lang="en-US" sz="1050" dirty="0">
+                          <a:solidFill>
+                            <a:srgbClr val="5F6F70"/>
+                          </a:solidFill>
+                          <a:latin typeface="Malgun Gothic" pitchFamily="34" charset="0"/>
+                          <a:ea typeface="Malgun Gothic" pitchFamily="34" charset="-122"/>
+                          <a:cs typeface="Malgun Gothic" pitchFamily="34" charset="-120"/>
+                        </a:rPr>
+                        <a:t>예약수 × 노쇼율 × 감소율 × 건당 진료수익</a:t>
+                      </a:r>
+                      <a:endParaRPr lang="en-US" sz="1050" dirty="0">
+                        <a:latin typeface="Malgun Gothic" charset="0"/>
+                        <a:ea typeface="Malgun Gothic" charset="0"/>
+                        <a:cs typeface="Malgun Gothic" charset="0"/>
+                      </a:endParaRPr>
+                    </a:p>
+                  </a:txBody>
+                  <a:tcPr marL="0" marR="76200" marT="50800" marB="50800" anchor="ctr">
+                    <a:lnL w="0" cap="flat" cmpd="sng" algn="ctr">
+                      <a:noFill/>
+                    </a:lnL>
+                    <a:lnR w="0" cap="flat" cmpd="sng" algn="ctr">
+                      <a:noFill/>
+                    </a:lnR>
+                    <a:lnT w="0" cap="flat" cmpd="sng" algn="ctr">
+                      <a:noFill/>
+                    </a:lnT>
+                    <a:lnB w="6350" cap="flat" cmpd="sng" algn="ctr">
+                      <a:solidFill>
+                        <a:srgbClr val="E1E4DE"/>
+                      </a:solidFill>
+                      <a:prstDash val="solid"/>
+                      <a:round/>
+                      <a:headEnd type="none" w="med" len="med"/>
+                      <a:tailEnd type="none" w="med" len="med"/>
+                    </a:lnB>
+                  </a:tcPr>
+                </a:tc>
+                <a:tc>
+                  <a:txBody>
+                    <a:bodyPr/>
+                    <a:lstStyle/>
+                    <a:p>
+                      <a:pPr algn="l" indent="0" marL="0">
+                        <a:buNone/>
+                      </a:pPr>
+                      <a:r>
+                        <a:rPr lang="en-US" sz="1150" dirty="0">
+                          <a:solidFill>
+                            <a:srgbClr val="5F6F70"/>
+                          </a:solidFill>
+                          <a:latin typeface="Malgun Gothic" pitchFamily="34" charset="0"/>
+                          <a:ea typeface="Malgun Gothic" pitchFamily="34" charset="-122"/>
+                          <a:cs typeface="Malgun Gothic" pitchFamily="34" charset="-120"/>
+                        </a:rPr>
+                        <a:t>2,400건 × 12% × 30% × 8만원</a:t>
+                      </a:r>
+                      <a:endParaRPr lang="en-US" sz="1150" dirty="0">
+                        <a:latin typeface="Malgun Gothic" charset="0"/>
+                        <a:ea typeface="Malgun Gothic" charset="0"/>
+                        <a:cs typeface="Malgun Gothic" charset="0"/>
+                      </a:endParaRPr>
+                    </a:p>
+                  </a:txBody>
+                  <a:tcPr marL="0" marR="76200" marT="50800" marB="50800" anchor="ctr">
+                    <a:lnL w="0" cap="flat" cmpd="sng" algn="ctr">
+                      <a:noFill/>
+                    </a:lnL>
+                    <a:lnR w="0" cap="flat" cmpd="sng" algn="ctr">
+                      <a:noFill/>
+                    </a:lnR>
+                    <a:lnT w="0" cap="flat" cmpd="sng" algn="ctr">
+                      <a:noFill/>
+                    </a:lnT>
+                    <a:lnB w="6350" cap="flat" cmpd="sng" algn="ctr">
+                      <a:solidFill>
+                        <a:srgbClr val="E1E4DE"/>
+                      </a:solidFill>
+                      <a:prstDash val="solid"/>
+                      <a:round/>
+                      <a:headEnd type="none" w="med" len="med"/>
+                      <a:tailEnd type="none" w="med" len="med"/>
+                    </a:lnB>
+                  </a:tcPr>
+                </a:tc>
+                <a:tc>
+                  <a:txBody>
+                    <a:bodyPr/>
+                    <a:lstStyle/>
+                    <a:p>
+                      <a:pPr algn="r" indent="0" marL="0">
+                        <a:buNone/>
+                      </a:pPr>
+                      <a:r>
+                        <a:rPr lang="en-US" sz="1150" b="1" dirty="0">
+                          <a:solidFill>
+                            <a:srgbClr val="12191A"/>
+                          </a:solidFill>
+                          <a:latin typeface="Malgun Gothic" pitchFamily="34" charset="0"/>
+                          <a:ea typeface="Malgun Gothic" pitchFamily="34" charset="-122"/>
+                          <a:cs typeface="Malgun Gothic" pitchFamily="34" charset="-120"/>
+                        </a:rPr>
+                        <a:t>691만원</a:t>
+                      </a:r>
+                      <a:endParaRPr lang="en-US" sz="1150" dirty="0">
+                        <a:latin typeface="Malgun Gothic" charset="0"/>
+                        <a:ea typeface="Malgun Gothic" charset="0"/>
+                        <a:cs typeface="Malgun Gothic" charset="0"/>
+                      </a:endParaRPr>
+                    </a:p>
+                  </a:txBody>
+                  <a:tcPr marL="0" marR="76200" marT="50800" marB="50800" anchor="ctr">
+                    <a:lnL w="0" cap="flat" cmpd="sng" algn="ctr">
+                      <a:noFill/>
+                    </a:lnL>
+                    <a:lnR w="0" cap="flat" cmpd="sng" algn="ctr">
+                      <a:noFill/>
+                    </a:lnR>
+                    <a:lnT w="0" cap="flat" cmpd="sng" algn="ctr">
+                      <a:noFill/>
+                    </a:lnT>
+                    <a:lnB w="6350" cap="flat" cmpd="sng" algn="ctr">
+                      <a:solidFill>
+                        <a:srgbClr val="E1E4DE"/>
+                      </a:solidFill>
+                      <a:prstDash val="solid"/>
+                      <a:round/>
+                      <a:headEnd type="none" w="med" len="med"/>
+                      <a:tailEnd type="none" w="med" len="med"/>
+                    </a:lnB>
+                  </a:tcPr>
+                </a:tc>
+              </a:tr>
+              <a:tr h="320040">
+                <a:tc>
+                  <a:txBody>
+                    <a:bodyPr/>
+                    <a:lstStyle/>
+                    <a:p>
+                      <a:pPr algn="l" indent="0" marL="0">
+                        <a:buNone/>
+                      </a:pPr>
+                      <a:r>
+                        <a:rPr lang="en-US" sz="1150" b="1" dirty="0">
+                          <a:solidFill>
+                            <a:srgbClr val="12191A"/>
+                          </a:solidFill>
+                          <a:latin typeface="Malgun Gothic" pitchFamily="34" charset="0"/>
+                          <a:ea typeface="Malgun Gothic" pitchFamily="34" charset="-122"/>
+                          <a:cs typeface="Malgun Gothic" pitchFamily="34" charset="-120"/>
+                        </a:rPr>
+                        <a:t>시술 슬롯 공실 회복</a:t>
+                      </a:r>
+                      <a:endParaRPr lang="en-US" sz="1150" dirty="0">
+                        <a:latin typeface="Malgun Gothic" charset="0"/>
+                        <a:ea typeface="Malgun Gothic" charset="0"/>
+                        <a:cs typeface="Malgun Gothic" charset="0"/>
+                      </a:endParaRPr>
+                    </a:p>
+                  </a:txBody>
+                  <a:tcPr marL="0" marR="76200" marT="50800" marB="50800" anchor="ctr">
+                    <a:lnL w="0" cap="flat" cmpd="sng" algn="ctr">
+                      <a:noFill/>
+                    </a:lnL>
+                    <a:lnR w="0" cap="flat" cmpd="sng" algn="ctr">
+                      <a:noFill/>
+                    </a:lnR>
+                    <a:lnT w="0" cap="flat" cmpd="sng" algn="ctr">
+                      <a:noFill/>
+                    </a:lnT>
+                    <a:lnB w="6350" cap="flat" cmpd="sng" algn="ctr">
+                      <a:solidFill>
+                        <a:srgbClr val="E1E4DE"/>
+                      </a:solidFill>
+                      <a:prstDash val="solid"/>
+                      <a:round/>
+                      <a:headEnd type="none" w="med" len="med"/>
+                      <a:tailEnd type="none" w="med" len="med"/>
+                    </a:lnB>
+                  </a:tcPr>
+                </a:tc>
+                <a:tc>
+                  <a:txBody>
+                    <a:bodyPr/>
+                    <a:lstStyle/>
+                    <a:p>
+                      <a:pPr algn="l" indent="0" marL="0">
+                        <a:buNone/>
+                      </a:pPr>
+                      <a:r>
+                        <a:rPr lang="en-US" sz="1050" dirty="0">
+                          <a:solidFill>
+                            <a:srgbClr val="5F6F70"/>
+                          </a:solidFill>
+                          <a:latin typeface="Malgun Gothic" pitchFamily="34" charset="0"/>
+                          <a:ea typeface="Malgun Gothic" pitchFamily="34" charset="-122"/>
+                          <a:cs typeface="Malgun Gothic" pitchFamily="34" charset="-120"/>
+                        </a:rPr>
+                        <a:t>월 공실 슬롯 × 대체 배정률 × 슬롯 기여수익</a:t>
+                      </a:r>
+                      <a:endParaRPr lang="en-US" sz="1050" dirty="0">
+                        <a:latin typeface="Malgun Gothic" charset="0"/>
+                        <a:ea typeface="Malgun Gothic" charset="0"/>
+                        <a:cs typeface="Malgun Gothic" charset="0"/>
+                      </a:endParaRPr>
+                    </a:p>
+                  </a:txBody>
+                  <a:tcPr marL="0" marR="76200" marT="50800" marB="50800" anchor="ctr">
+                    <a:lnL w="0" cap="flat" cmpd="sng" algn="ctr">
+                      <a:noFill/>
+                    </a:lnL>
+                    <a:lnR w="0" cap="flat" cmpd="sng" algn="ctr">
+                      <a:noFill/>
+                    </a:lnR>
+                    <a:lnT w="0" cap="flat" cmpd="sng" algn="ctr">
+                      <a:noFill/>
+                    </a:lnT>
+                    <a:lnB w="6350" cap="flat" cmpd="sng" algn="ctr">
+                      <a:solidFill>
+                        <a:srgbClr val="E1E4DE"/>
+                      </a:solidFill>
+                      <a:prstDash val="solid"/>
+                      <a:round/>
+                      <a:headEnd type="none" w="med" len="med"/>
+                      <a:tailEnd type="none" w="med" len="med"/>
+                    </a:lnB>
+                  </a:tcPr>
+                </a:tc>
+                <a:tc>
+                  <a:txBody>
+                    <a:bodyPr/>
+                    <a:lstStyle/>
+                    <a:p>
+                      <a:pPr algn="l" indent="0" marL="0">
+                        <a:buNone/>
+                      </a:pPr>
+                      <a:r>
+                        <a:rPr lang="en-US" sz="1150" dirty="0">
+                          <a:solidFill>
+                            <a:srgbClr val="5F6F70"/>
+                          </a:solidFill>
+                          <a:latin typeface="Malgun Gothic" pitchFamily="34" charset="0"/>
+                          <a:ea typeface="Malgun Gothic" pitchFamily="34" charset="-122"/>
+                          <a:cs typeface="Malgun Gothic" pitchFamily="34" charset="-120"/>
+                        </a:rPr>
+                        <a:t>40슬롯 × 30% × 25만원</a:t>
+                      </a:r>
+                      <a:endParaRPr lang="en-US" sz="1150" dirty="0">
+                        <a:latin typeface="Malgun Gothic" charset="0"/>
+                        <a:ea typeface="Malgun Gothic" charset="0"/>
+                        <a:cs typeface="Malgun Gothic" charset="0"/>
+                      </a:endParaRPr>
+                    </a:p>
+                  </a:txBody>
+                  <a:tcPr marL="0" marR="76200" marT="50800" marB="50800" anchor="ctr">
+                    <a:lnL w="0" cap="flat" cmpd="sng" algn="ctr">
+                      <a:noFill/>
+                    </a:lnL>
+                    <a:lnR w="0" cap="flat" cmpd="sng" algn="ctr">
+                      <a:noFill/>
+                    </a:lnR>
+                    <a:lnT w="0" cap="flat" cmpd="sng" algn="ctr">
+                      <a:noFill/>
+                    </a:lnT>
+                    <a:lnB w="6350" cap="flat" cmpd="sng" algn="ctr">
+                      <a:solidFill>
+                        <a:srgbClr val="E1E4DE"/>
+                      </a:solidFill>
+                      <a:prstDash val="solid"/>
+                      <a:round/>
+                      <a:headEnd type="none" w="med" len="med"/>
+                      <a:tailEnd type="none" w="med" len="med"/>
+                    </a:lnB>
+                  </a:tcPr>
+                </a:tc>
+                <a:tc>
+                  <a:txBody>
+                    <a:bodyPr/>
+                    <a:lstStyle/>
+                    <a:p>
+                      <a:pPr algn="r" indent="0" marL="0">
+                        <a:buNone/>
+                      </a:pPr>
+                      <a:r>
+                        <a:rPr lang="en-US" sz="1150" b="1" dirty="0">
+                          <a:solidFill>
+                            <a:srgbClr val="12191A"/>
+                          </a:solidFill>
+                          <a:latin typeface="Malgun Gothic" pitchFamily="34" charset="0"/>
+                          <a:ea typeface="Malgun Gothic" pitchFamily="34" charset="-122"/>
+                          <a:cs typeface="Malgun Gothic" pitchFamily="34" charset="-120"/>
+                        </a:rPr>
+                        <a:t>300만원</a:t>
+                      </a:r>
+                      <a:endParaRPr lang="en-US" sz="1150" dirty="0">
+                        <a:latin typeface="Malgun Gothic" charset="0"/>
+                        <a:ea typeface="Malgun Gothic" charset="0"/>
+                        <a:cs typeface="Malgun Gothic" charset="0"/>
+                      </a:endParaRPr>
+                    </a:p>
+                  </a:txBody>
+                  <a:tcPr marL="0" marR="76200" marT="50800" marB="50800" anchor="ctr">
+                    <a:lnL w="0" cap="flat" cmpd="sng" algn="ctr">
+                      <a:noFill/>
+                    </a:lnL>
+                    <a:lnR w="0" cap="flat" cmpd="sng" algn="ctr">
+                      <a:noFill/>
+                    </a:lnR>
+                    <a:lnT w="0" cap="flat" cmpd="sng" algn="ctr">
+                      <a:noFill/>
+                    </a:lnT>
+                    <a:lnB w="6350" cap="flat" cmpd="sng" algn="ctr">
+                      <a:solidFill>
+                        <a:srgbClr val="E1E4DE"/>
+                      </a:solidFill>
+                      <a:prstDash val="solid"/>
+                      <a:round/>
+                      <a:headEnd type="none" w="med" len="med"/>
+                      <a:tailEnd type="none" w="med" len="med"/>
+                    </a:lnB>
+                  </a:tcPr>
+                </a:tc>
+              </a:tr>
+              <a:tr h="320040">
+                <a:tc>
+                  <a:txBody>
+                    <a:bodyPr/>
+                    <a:lstStyle/>
+                    <a:p>
+                      <a:pPr algn="l" indent="0" marL="0">
+                        <a:buNone/>
+                      </a:pPr>
+                      <a:r>
+                        <a:rPr lang="en-US" sz="1150" b="1" dirty="0">
+                          <a:solidFill>
+                            <a:srgbClr val="12191A"/>
+                          </a:solidFill>
+                          <a:latin typeface="Malgun Gothic" pitchFamily="34" charset="0"/>
+                          <a:ea typeface="Malgun Gothic" pitchFamily="34" charset="-122"/>
+                          <a:cs typeface="Malgun Gothic" pitchFamily="34" charset="-120"/>
+                        </a:rPr>
+                        <a:t>데스크 콜 절감</a:t>
+                      </a:r>
+                      <a:endParaRPr lang="en-US" sz="1150" dirty="0">
+                        <a:latin typeface="Malgun Gothic" charset="0"/>
+                        <a:ea typeface="Malgun Gothic" charset="0"/>
+                        <a:cs typeface="Malgun Gothic" charset="0"/>
+                      </a:endParaRPr>
+                    </a:p>
+                  </a:txBody>
+                  <a:tcPr marL="0" marR="76200" marT="50800" marB="50800" anchor="ctr">
+                    <a:lnL w="0" cap="flat" cmpd="sng" algn="ctr">
+                      <a:noFill/>
+                    </a:lnL>
+                    <a:lnR w="0" cap="flat" cmpd="sng" algn="ctr">
+                      <a:noFill/>
+                    </a:lnR>
+                    <a:lnT w="0" cap="flat" cmpd="sng" algn="ctr">
+                      <a:noFill/>
+                    </a:lnT>
+                    <a:lnB w="6350" cap="flat" cmpd="sng" algn="ctr">
+                      <a:solidFill>
+                        <a:srgbClr val="E1E4DE"/>
+                      </a:solidFill>
+                      <a:prstDash val="solid"/>
+                      <a:round/>
+                      <a:headEnd type="none" w="med" len="med"/>
+                      <a:tailEnd type="none" w="med" len="med"/>
+                    </a:lnB>
+                  </a:tcPr>
+                </a:tc>
+                <a:tc>
+                  <a:txBody>
+                    <a:bodyPr/>
+                    <a:lstStyle/>
+                    <a:p>
+                      <a:pPr algn="l" indent="0" marL="0">
+                        <a:buNone/>
+                      </a:pPr>
+                      <a:r>
+                        <a:rPr lang="en-US" sz="1050" dirty="0">
+                          <a:solidFill>
+                            <a:srgbClr val="5F6F70"/>
+                          </a:solidFill>
+                          <a:latin typeface="Malgun Gothic" pitchFamily="34" charset="0"/>
+                          <a:ea typeface="Malgun Gothic" pitchFamily="34" charset="-122"/>
+                          <a:cs typeface="Malgun Gothic" pitchFamily="34" charset="-120"/>
+                        </a:rPr>
+                        <a:t>월 콜수 × 셀프 전환율 × 처리시간 × 인건비</a:t>
+                      </a:r>
+                      <a:endParaRPr lang="en-US" sz="1050" dirty="0">
+                        <a:latin typeface="Malgun Gothic" charset="0"/>
+                        <a:ea typeface="Malgun Gothic" charset="0"/>
+                        <a:cs typeface="Malgun Gothic" charset="0"/>
+                      </a:endParaRPr>
+                    </a:p>
+                  </a:txBody>
+                  <a:tcPr marL="0" marR="76200" marT="50800" marB="50800" anchor="ctr">
+                    <a:lnL w="0" cap="flat" cmpd="sng" algn="ctr">
+                      <a:noFill/>
+                    </a:lnL>
+                    <a:lnR w="0" cap="flat" cmpd="sng" algn="ctr">
+                      <a:noFill/>
+                    </a:lnR>
+                    <a:lnT w="0" cap="flat" cmpd="sng" algn="ctr">
+                      <a:noFill/>
+                    </a:lnT>
+                    <a:lnB w="6350" cap="flat" cmpd="sng" algn="ctr">
+                      <a:solidFill>
+                        <a:srgbClr val="E1E4DE"/>
+                      </a:solidFill>
+                      <a:prstDash val="solid"/>
+                      <a:round/>
+                      <a:headEnd type="none" w="med" len="med"/>
+                      <a:tailEnd type="none" w="med" len="med"/>
+                    </a:lnB>
+                  </a:tcPr>
+                </a:tc>
+                <a:tc>
+                  <a:txBody>
+                    <a:bodyPr/>
+                    <a:lstStyle/>
+                    <a:p>
+                      <a:pPr algn="l" indent="0" marL="0">
+                        <a:buNone/>
+                      </a:pPr>
+                      <a:r>
+                        <a:rPr lang="en-US" sz="1150" dirty="0">
+                          <a:solidFill>
+                            <a:srgbClr val="5F6F70"/>
+                          </a:solidFill>
+                          <a:latin typeface="Malgun Gothic" pitchFamily="34" charset="0"/>
+                          <a:ea typeface="Malgun Gothic" pitchFamily="34" charset="-122"/>
+                          <a:cs typeface="Malgun Gothic" pitchFamily="34" charset="-120"/>
+                        </a:rPr>
+                        <a:t>1,800콜 × 40% × 3분 × 2.2만원/h</a:t>
+                      </a:r>
+                      <a:endParaRPr lang="en-US" sz="1150" dirty="0">
+                        <a:latin typeface="Malgun Gothic" charset="0"/>
+                        <a:ea typeface="Malgun Gothic" charset="0"/>
+                        <a:cs typeface="Malgun Gothic" charset="0"/>
+                      </a:endParaRPr>
+                    </a:p>
+                  </a:txBody>
+                  <a:tcPr marL="0" marR="76200" marT="50800" marB="50800" anchor="ctr">
+                    <a:lnL w="0" cap="flat" cmpd="sng" algn="ctr">
+                      <a:noFill/>
+                    </a:lnL>
+                    <a:lnR w="0" cap="flat" cmpd="sng" algn="ctr">
+                      <a:noFill/>
+                    </a:lnR>
+                    <a:lnT w="0" cap="flat" cmpd="sng" algn="ctr">
+                      <a:noFill/>
+                    </a:lnT>
+                    <a:lnB w="6350" cap="flat" cmpd="sng" algn="ctr">
+                      <a:solidFill>
+                        <a:srgbClr val="E1E4DE"/>
+                      </a:solidFill>
+                      <a:prstDash val="solid"/>
+                      <a:round/>
+                      <a:headEnd type="none" w="med" len="med"/>
+                      <a:tailEnd type="none" w="med" len="med"/>
+                    </a:lnB>
+                  </a:tcPr>
+                </a:tc>
+                <a:tc>
+                  <a:txBody>
+                    <a:bodyPr/>
+                    <a:lstStyle/>
+                    <a:p>
+                      <a:pPr algn="r" indent="0" marL="0">
+                        <a:buNone/>
+                      </a:pPr>
+                      <a:r>
+                        <a:rPr lang="en-US" sz="1150" b="1" dirty="0">
+                          <a:solidFill>
+                            <a:srgbClr val="12191A"/>
+                          </a:solidFill>
+                          <a:latin typeface="Malgun Gothic" pitchFamily="34" charset="0"/>
+                          <a:ea typeface="Malgun Gothic" pitchFamily="34" charset="-122"/>
+                          <a:cs typeface="Malgun Gothic" pitchFamily="34" charset="-120"/>
+                        </a:rPr>
+                        <a:t>79만원</a:t>
+                      </a:r>
+                      <a:endParaRPr lang="en-US" sz="1150" dirty="0">
+                        <a:latin typeface="Malgun Gothic" charset="0"/>
+                        <a:ea typeface="Malgun Gothic" charset="0"/>
+                        <a:cs typeface="Malgun Gothic" charset="0"/>
+                      </a:endParaRPr>
+                    </a:p>
+                  </a:txBody>
+                  <a:tcPr marL="0" marR="76200" marT="50800" marB="50800" anchor="ctr">
+                    <a:lnL w="0" cap="flat" cmpd="sng" algn="ctr">
+                      <a:noFill/>
+                    </a:lnL>
+                    <a:lnR w="0" cap="flat" cmpd="sng" algn="ctr">
+                      <a:noFill/>
+                    </a:lnR>
+                    <a:lnT w="0" cap="flat" cmpd="sng" algn="ctr">
+                      <a:noFill/>
+                    </a:lnT>
+                    <a:lnB w="6350" cap="flat" cmpd="sng" algn="ctr">
+                      <a:solidFill>
+                        <a:srgbClr val="E1E4DE"/>
+                      </a:solidFill>
+                      <a:prstDash val="solid"/>
+                      <a:round/>
+                      <a:headEnd type="none" w="med" len="med"/>
+                      <a:tailEnd type="none" w="med" len="med"/>
+                    </a:lnB>
+                  </a:tcPr>
+                </a:tc>
+              </a:tr>
+              <a:tr h="320040">
+                <a:tc>
+                  <a:txBody>
+                    <a:bodyPr/>
+                    <a:lstStyle/>
+                    <a:p>
+                      <a:pPr algn="l" indent="0" marL="0">
+                        <a:buNone/>
+                      </a:pPr>
+                      <a:r>
+                        <a:rPr lang="en-US" sz="1150" b="1" dirty="0">
+                          <a:solidFill>
+                            <a:srgbClr val="12191A"/>
+                          </a:solidFill>
+                          <a:latin typeface="Malgun Gothic" pitchFamily="34" charset="0"/>
+                          <a:ea typeface="Malgun Gothic" pitchFamily="34" charset="-122"/>
+                          <a:cs typeface="Malgun Gothic" pitchFamily="34" charset="-120"/>
+                        </a:rPr>
+                        <a:t>주기 리콜 재진입</a:t>
+                      </a:r>
+                      <a:endParaRPr lang="en-US" sz="1150" dirty="0">
+                        <a:latin typeface="Malgun Gothic" charset="0"/>
+                        <a:ea typeface="Malgun Gothic" charset="0"/>
+                        <a:cs typeface="Malgun Gothic" charset="0"/>
+                      </a:endParaRPr>
+                    </a:p>
+                  </a:txBody>
+                  <a:tcPr marL="0" marR="76200" marT="50800" marB="50800" anchor="ctr">
+                    <a:lnL w="0" cap="flat" cmpd="sng" algn="ctr">
+                      <a:noFill/>
+                    </a:lnL>
+                    <a:lnR w="0" cap="flat" cmpd="sng" algn="ctr">
+                      <a:noFill/>
+                    </a:lnR>
+                    <a:lnT w="0" cap="flat" cmpd="sng" algn="ctr">
+                      <a:noFill/>
+                    </a:lnT>
+                    <a:lnB w="6350" cap="flat" cmpd="sng" algn="ctr">
+                      <a:solidFill>
+                        <a:srgbClr val="E1E4DE"/>
+                      </a:solidFill>
+                      <a:prstDash val="solid"/>
+                      <a:round/>
+                      <a:headEnd type="none" w="med" len="med"/>
+                      <a:tailEnd type="none" w="med" len="med"/>
+                    </a:lnB>
+                  </a:tcPr>
+                </a:tc>
+                <a:tc>
+                  <a:txBody>
+                    <a:bodyPr/>
+                    <a:lstStyle/>
+                    <a:p>
+                      <a:pPr algn="l" indent="0" marL="0">
+                        <a:buNone/>
+                      </a:pPr>
+                      <a:r>
+                        <a:rPr lang="en-US" sz="1050" dirty="0">
+                          <a:solidFill>
+                            <a:srgbClr val="5F6F70"/>
+                          </a:solidFill>
+                          <a:latin typeface="Malgun Gothic" pitchFamily="34" charset="0"/>
+                          <a:ea typeface="Malgun Gothic" pitchFamily="34" charset="-122"/>
+                          <a:cs typeface="Malgun Gothic" pitchFamily="34" charset="-120"/>
+                        </a:rPr>
+                        <a:t>판정 후 미재방문 × 리콜 반응률 × 건당 수익</a:t>
+                      </a:r>
+                      <a:endParaRPr lang="en-US" sz="1050" dirty="0">
+                        <a:latin typeface="Malgun Gothic" charset="0"/>
+                        <a:ea typeface="Malgun Gothic" charset="0"/>
+                        <a:cs typeface="Malgun Gothic" charset="0"/>
+                      </a:endParaRPr>
+                    </a:p>
+                  </a:txBody>
+                  <a:tcPr marL="0" marR="76200" marT="50800" marB="50800" anchor="ctr">
+                    <a:lnL w="0" cap="flat" cmpd="sng" algn="ctr">
+                      <a:noFill/>
+                    </a:lnL>
+                    <a:lnR w="0" cap="flat" cmpd="sng" algn="ctr">
+                      <a:noFill/>
+                    </a:lnR>
+                    <a:lnT w="0" cap="flat" cmpd="sng" algn="ctr">
+                      <a:noFill/>
+                    </a:lnT>
+                    <a:lnB w="6350" cap="flat" cmpd="sng" algn="ctr">
+                      <a:solidFill>
+                        <a:srgbClr val="E1E4DE"/>
+                      </a:solidFill>
+                      <a:prstDash val="solid"/>
+                      <a:round/>
+                      <a:headEnd type="none" w="med" len="med"/>
+                      <a:tailEnd type="none" w="med" len="med"/>
+                    </a:lnB>
+                  </a:tcPr>
+                </a:tc>
+                <a:tc>
+                  <a:txBody>
+                    <a:bodyPr/>
+                    <a:lstStyle/>
+                    <a:p>
+                      <a:pPr algn="l" indent="0" marL="0">
+                        <a:buNone/>
+                      </a:pPr>
+                      <a:r>
+                        <a:rPr lang="en-US" sz="1150" dirty="0">
+                          <a:solidFill>
+                            <a:srgbClr val="5F6F70"/>
+                          </a:solidFill>
+                          <a:latin typeface="Malgun Gothic" pitchFamily="34" charset="0"/>
+                          <a:ea typeface="Malgun Gothic" pitchFamily="34" charset="-122"/>
+                          <a:cs typeface="Malgun Gothic" pitchFamily="34" charset="-120"/>
+                        </a:rPr>
+                        <a:t>60명 × 15% × 8만원</a:t>
+                      </a:r>
+                      <a:endParaRPr lang="en-US" sz="1150" dirty="0">
+                        <a:latin typeface="Malgun Gothic" charset="0"/>
+                        <a:ea typeface="Malgun Gothic" charset="0"/>
+                        <a:cs typeface="Malgun Gothic" charset="0"/>
+                      </a:endParaRPr>
+                    </a:p>
+                  </a:txBody>
+                  <a:tcPr marL="0" marR="76200" marT="50800" marB="50800" anchor="ctr">
+                    <a:lnL w="0" cap="flat" cmpd="sng" algn="ctr">
+                      <a:noFill/>
+                    </a:lnL>
+                    <a:lnR w="0" cap="flat" cmpd="sng" algn="ctr">
+                      <a:noFill/>
+                    </a:lnR>
+                    <a:lnT w="0" cap="flat" cmpd="sng" algn="ctr">
+                      <a:noFill/>
+                    </a:lnT>
+                    <a:lnB w="6350" cap="flat" cmpd="sng" algn="ctr">
+                      <a:solidFill>
+                        <a:srgbClr val="E1E4DE"/>
+                      </a:solidFill>
+                      <a:prstDash val="solid"/>
+                      <a:round/>
+                      <a:headEnd type="none" w="med" len="med"/>
+                      <a:tailEnd type="none" w="med" len="med"/>
+                    </a:lnB>
+                  </a:tcPr>
+                </a:tc>
+                <a:tc>
+                  <a:txBody>
+                    <a:bodyPr/>
+                    <a:lstStyle/>
+                    <a:p>
+                      <a:pPr algn="r" indent="0" marL="0">
+                        <a:buNone/>
+                      </a:pPr>
+                      <a:r>
+                        <a:rPr lang="en-US" sz="1150" b="1" dirty="0">
+                          <a:solidFill>
+                            <a:srgbClr val="12191A"/>
+                          </a:solidFill>
+                          <a:latin typeface="Malgun Gothic" pitchFamily="34" charset="0"/>
+                          <a:ea typeface="Malgun Gothic" pitchFamily="34" charset="-122"/>
+                          <a:cs typeface="Malgun Gothic" pitchFamily="34" charset="-120"/>
+                        </a:rPr>
+                        <a:t>72만원</a:t>
+                      </a:r>
+                      <a:endParaRPr lang="en-US" sz="1150" dirty="0">
+                        <a:latin typeface="Malgun Gothic" charset="0"/>
+                        <a:ea typeface="Malgun Gothic" charset="0"/>
+                        <a:cs typeface="Malgun Gothic" charset="0"/>
+                      </a:endParaRPr>
+                    </a:p>
+                  </a:txBody>
+                  <a:tcPr marL="0" marR="76200" marT="50800" marB="50800" anchor="ctr">
+                    <a:lnL w="0" cap="flat" cmpd="sng" algn="ctr">
+                      <a:noFill/>
+                    </a:lnL>
+                    <a:lnR w="0" cap="flat" cmpd="sng" algn="ctr">
+                      <a:noFill/>
+                    </a:lnR>
+                    <a:lnT w="0" cap="flat" cmpd="sng" algn="ctr">
+                      <a:noFill/>
+                    </a:lnT>
+                    <a:lnB w="6350" cap="flat" cmpd="sng" algn="ctr">
+                      <a:solidFill>
+                        <a:srgbClr val="E1E4DE"/>
+                      </a:solidFill>
+                      <a:prstDash val="solid"/>
+                      <a:round/>
+                      <a:headEnd type="none" w="med" len="med"/>
+                      <a:tailEnd type="none" w="med" len="med"/>
+                    </a:lnB>
+                  </a:tcPr>
+                </a:tc>
+              </a:tr>
+              <a:tr h="320040">
+                <a:tc>
+                  <a:txBody>
+                    <a:bodyPr/>
+                    <a:lstStyle/>
+                    <a:p>
+                      <a:pPr algn="l" indent="0" marL="0">
+                        <a:buNone/>
+                      </a:pPr>
+                      <a:r>
+                        <a:rPr lang="en-US" sz="1150" b="1" dirty="0">
+                          <a:solidFill>
+                            <a:srgbClr val="12191A"/>
+                          </a:solidFill>
+                          <a:latin typeface="Malgun Gothic" pitchFamily="34" charset="0"/>
+                          <a:ea typeface="Malgun Gothic" pitchFamily="34" charset="-122"/>
+                          <a:cs typeface="Malgun Gothic" pitchFamily="34" charset="-120"/>
+                        </a:rPr>
+                        <a:t>합계 (이론치)</a:t>
+                      </a:r>
+                      <a:endParaRPr lang="en-US" sz="1150" dirty="0">
+                        <a:latin typeface="Malgun Gothic" charset="0"/>
+                        <a:ea typeface="Malgun Gothic" charset="0"/>
+                        <a:cs typeface="Malgun Gothic" charset="0"/>
+                      </a:endParaRPr>
+                    </a:p>
+                  </a:txBody>
+                  <a:tcPr marL="0" marR="76200" marT="50800" marB="50800" anchor="ctr">
+                    <a:lnL w="0" cap="flat" cmpd="sng" algn="ctr">
+                      <a:noFill/>
+                    </a:lnL>
+                    <a:lnR w="0" cap="flat" cmpd="sng" algn="ctr">
+                      <a:noFill/>
+                    </a:lnR>
+                    <a:lnT w="0" cap="flat" cmpd="sng" algn="ctr">
+                      <a:noFill/>
+                    </a:lnT>
+                    <a:lnB w="15240" cap="flat" cmpd="sng" algn="ctr">
+                      <a:solidFill>
+                        <a:srgbClr val="BBD3CE"/>
+                      </a:solidFill>
+                      <a:prstDash val="solid"/>
+                      <a:round/>
+                      <a:headEnd type="none" w="med" len="med"/>
+                      <a:tailEnd type="none" w="med" len="med"/>
+                    </a:lnB>
+                  </a:tcPr>
+                </a:tc>
+                <a:tc>
+                  <a:txBody>
+                    <a:bodyPr/>
+                    <a:lstStyle/>
+                    <a:p>
+                      <a:pPr algn="l" indent="0" marL="0">
+                        <a:buNone/>
+                      </a:pPr>
+                      <a:r>
+                        <a:rPr lang="en-US" sz="1050" b="1" dirty="0">
+                          <a:solidFill>
+                            <a:srgbClr val="5F6F70"/>
+                          </a:solidFill>
+                          <a:latin typeface="Malgun Gothic" pitchFamily="34" charset="0"/>
+                          <a:ea typeface="Malgun Gothic" pitchFamily="34" charset="-122"/>
+                          <a:cs typeface="Malgun Gothic" pitchFamily="34" charset="-120"/>
+                        </a:rPr>
+                        <a:t>4개 항목 단순 합</a:t>
+                      </a:r>
+                      <a:endParaRPr lang="en-US" sz="1050" dirty="0">
+                        <a:latin typeface="Malgun Gothic" charset="0"/>
+                        <a:ea typeface="Malgun Gothic" charset="0"/>
+                        <a:cs typeface="Malgun Gothic" charset="0"/>
+                      </a:endParaRPr>
+                    </a:p>
+                  </a:txBody>
+                  <a:tcPr marL="0" marR="76200" marT="50800" marB="50800" anchor="ctr">
+                    <a:lnL w="0" cap="flat" cmpd="sng" algn="ctr">
+                      <a:noFill/>
+                    </a:lnL>
+                    <a:lnR w="0" cap="flat" cmpd="sng" algn="ctr">
+                      <a:noFill/>
+                    </a:lnR>
+                    <a:lnT w="0" cap="flat" cmpd="sng" algn="ctr">
+                      <a:noFill/>
+                    </a:lnT>
+                    <a:lnB w="15240" cap="flat" cmpd="sng" algn="ctr">
+                      <a:solidFill>
+                        <a:srgbClr val="BBD3CE"/>
+                      </a:solidFill>
+                      <a:prstDash val="solid"/>
+                      <a:round/>
+                      <a:headEnd type="none" w="med" len="med"/>
+                      <a:tailEnd type="none" w="med" len="med"/>
+                    </a:lnB>
+                  </a:tcPr>
+                </a:tc>
+                <a:tc>
+                  <a:txBody>
+                    <a:bodyPr/>
+                    <a:lstStyle/>
+                    <a:p>
+                      <a:pPr algn="l" indent="0" marL="0">
+                        <a:buNone/>
+                      </a:pPr>
+                      <a:r>
+                        <a:rPr lang="en-US" sz="1150" b="1" dirty="0">
+                          <a:solidFill>
+                            <a:srgbClr val="5F6F70"/>
+                          </a:solidFill>
+                          <a:latin typeface="Malgun Gothic" pitchFamily="34" charset="0"/>
+                          <a:ea typeface="Malgun Gothic" pitchFamily="34" charset="-122"/>
+                          <a:cs typeface="Malgun Gothic" pitchFamily="34" charset="-120"/>
+                        </a:rPr>
+                        <a:t>—</a:t>
+                      </a:r>
+                      <a:endParaRPr lang="en-US" sz="1150" dirty="0">
+                        <a:latin typeface="Malgun Gothic" charset="0"/>
+                        <a:ea typeface="Malgun Gothic" charset="0"/>
+                        <a:cs typeface="Malgun Gothic" charset="0"/>
+                      </a:endParaRPr>
+                    </a:p>
+                  </a:txBody>
+                  <a:tcPr marL="0" marR="76200" marT="50800" marB="50800" anchor="ctr">
+                    <a:lnL w="0" cap="flat" cmpd="sng" algn="ctr">
+                      <a:noFill/>
+                    </a:lnL>
+                    <a:lnR w="0" cap="flat" cmpd="sng" algn="ctr">
+                      <a:noFill/>
+                    </a:lnR>
+                    <a:lnT w="0" cap="flat" cmpd="sng" algn="ctr">
+                      <a:noFill/>
+                    </a:lnT>
+                    <a:lnB w="15240" cap="flat" cmpd="sng" algn="ctr">
+                      <a:solidFill>
+                        <a:srgbClr val="BBD3CE"/>
+                      </a:solidFill>
+                      <a:prstDash val="solid"/>
+                      <a:round/>
+                      <a:headEnd type="none" w="med" len="med"/>
+                      <a:tailEnd type="none" w="med" len="med"/>
+                    </a:lnB>
+                  </a:tcPr>
+                </a:tc>
+                <a:tc>
+                  <a:txBody>
+                    <a:bodyPr/>
+                    <a:lstStyle/>
+                    <a:p>
+                      <a:pPr algn="r" indent="0" marL="0">
+                        <a:buNone/>
+                      </a:pPr>
+                      <a:r>
+                        <a:rPr lang="en-US" sz="1150" b="1" dirty="0">
+                          <a:solidFill>
+                            <a:srgbClr val="12191A"/>
+                          </a:solidFill>
+                          <a:latin typeface="Malgun Gothic" pitchFamily="34" charset="0"/>
+                          <a:ea typeface="Malgun Gothic" pitchFamily="34" charset="-122"/>
+                          <a:cs typeface="Malgun Gothic" pitchFamily="34" charset="-120"/>
+                        </a:rPr>
+                        <a:t>1,142만원</a:t>
+                      </a:r>
+                      <a:endParaRPr lang="en-US" sz="1150" dirty="0">
+                        <a:latin typeface="Malgun Gothic" charset="0"/>
+                        <a:ea typeface="Malgun Gothic" charset="0"/>
+                        <a:cs typeface="Malgun Gothic" charset="0"/>
+                      </a:endParaRPr>
+                    </a:p>
+                  </a:txBody>
+                  <a:tcPr marL="0" marR="76200" marT="50800" marB="50800" anchor="ctr">
+                    <a:lnL w="0" cap="flat" cmpd="sng" algn="ctr">
+                      <a:noFill/>
+                    </a:lnL>
+                    <a:lnR w="0" cap="flat" cmpd="sng" algn="ctr">
+                      <a:noFill/>
+                    </a:lnR>
+                    <a:lnT w="0" cap="flat" cmpd="sng" algn="ctr">
+                      <a:noFill/>
+                    </a:lnT>
+                    <a:lnB w="15240" cap="flat" cmpd="sng" algn="ctr">
+                      <a:solidFill>
+                        <a:srgbClr val="BBD3CE"/>
+                      </a:solidFill>
+                      <a:prstDash val="solid"/>
+                      <a:round/>
+                      <a:headEnd type="none" w="med" len="med"/>
+                      <a:tailEnd type="none" w="med" len="med"/>
+                    </a:lnB>
+                  </a:tcPr>
+                </a:tc>
+              </a:tr>
+              <a:tr h="320040">
+                <a:tc>
+                  <a:txBody>
+                    <a:bodyPr/>
+                    <a:lstStyle/>
+                    <a:p>
+                      <a:pPr algn="l" indent="0" marL="0">
+                        <a:buNone/>
+                      </a:pPr>
+                      <a:r>
+                        <a:rPr lang="en-US" sz="1150" b="1" dirty="0">
+                          <a:solidFill>
+                            <a:srgbClr val="12191A"/>
+                          </a:solidFill>
+                          <a:latin typeface="Malgun Gothic" pitchFamily="34" charset="0"/>
+                          <a:ea typeface="Malgun Gothic" pitchFamily="34" charset="-122"/>
+                          <a:cs typeface="Malgun Gothic" pitchFamily="34" charset="-120"/>
+                        </a:rPr>
+                        <a:t>보수 반영</a:t>
+                      </a:r>
+                      <a:endParaRPr lang="en-US" sz="1150" dirty="0">
+                        <a:latin typeface="Malgun Gothic" charset="0"/>
+                        <a:ea typeface="Malgun Gothic" charset="0"/>
+                        <a:cs typeface="Malgun Gothic" charset="0"/>
+                      </a:endParaRPr>
+                    </a:p>
+                  </a:txBody>
+                  <a:tcPr marL="0" marR="76200" marT="50800" marB="50800" anchor="ctr">
+                    <a:lnL w="0" cap="flat" cmpd="sng" algn="ctr">
+                      <a:noFill/>
+                    </a:lnL>
+                    <a:lnR w="0" cap="flat" cmpd="sng" algn="ctr">
+                      <a:noFill/>
+                    </a:lnR>
+                    <a:lnT w="0" cap="flat" cmpd="sng" algn="ctr">
+                      <a:noFill/>
+                    </a:lnT>
+                    <a:lnB w="6350" cap="flat" cmpd="sng" algn="ctr">
+                      <a:solidFill>
+                        <a:srgbClr val="E1E4DE"/>
+                      </a:solidFill>
+                      <a:prstDash val="solid"/>
+                      <a:round/>
+                      <a:headEnd type="none" w="med" len="med"/>
+                      <a:tailEnd type="none" w="med" len="med"/>
+                    </a:lnB>
+                    <a:solidFill>
+                      <a:srgbClr val="EDF3F1"/>
+                    </a:solidFill>
+                  </a:tcPr>
+                </a:tc>
+                <a:tc>
+                  <a:txBody>
+                    <a:bodyPr/>
+                    <a:lstStyle/>
+                    <a:p>
+                      <a:pPr algn="l" indent="0" marL="0">
+                        <a:buNone/>
+                      </a:pPr>
+                      <a:r>
+                        <a:rPr lang="en-US" sz="1050" b="1" dirty="0">
+                          <a:solidFill>
+                            <a:srgbClr val="5F6F70"/>
+                          </a:solidFill>
+                          <a:latin typeface="Malgun Gothic" pitchFamily="34" charset="0"/>
+                          <a:ea typeface="Malgun Gothic" pitchFamily="34" charset="-122"/>
+                          <a:cs typeface="Malgun Gothic" pitchFamily="34" charset="-120"/>
+                        </a:rPr>
+                        <a:t>합계 × 달성률 50%</a:t>
+                      </a:r>
+                      <a:endParaRPr lang="en-US" sz="1050" dirty="0">
+                        <a:latin typeface="Malgun Gothic" charset="0"/>
+                        <a:ea typeface="Malgun Gothic" charset="0"/>
+                        <a:cs typeface="Malgun Gothic" charset="0"/>
+                      </a:endParaRPr>
+                    </a:p>
+                  </a:txBody>
+                  <a:tcPr marL="0" marR="76200" marT="50800" marB="50800" anchor="ctr">
+                    <a:lnL w="0" cap="flat" cmpd="sng" algn="ctr">
+                      <a:noFill/>
+                    </a:lnL>
+                    <a:lnR w="0" cap="flat" cmpd="sng" algn="ctr">
+                      <a:noFill/>
+                    </a:lnR>
+                    <a:lnT w="0" cap="flat" cmpd="sng" algn="ctr">
+                      <a:noFill/>
+                    </a:lnT>
+                    <a:lnB w="6350" cap="flat" cmpd="sng" algn="ctr">
+                      <a:solidFill>
+                        <a:srgbClr val="E1E4DE"/>
+                      </a:solidFill>
+                      <a:prstDash val="solid"/>
+                      <a:round/>
+                      <a:headEnd type="none" w="med" len="med"/>
+                      <a:tailEnd type="none" w="med" len="med"/>
+                    </a:lnB>
+                    <a:solidFill>
+                      <a:srgbClr val="EDF3F1"/>
+                    </a:solidFill>
+                  </a:tcPr>
+                </a:tc>
+                <a:tc>
+                  <a:txBody>
+                    <a:bodyPr/>
+                    <a:lstStyle/>
+                    <a:p>
+                      <a:pPr algn="l" indent="0" marL="0">
+                        <a:buNone/>
+                      </a:pPr>
+                      <a:r>
+                        <a:rPr lang="en-US" sz="1150" b="1" dirty="0">
+                          <a:solidFill>
+                            <a:srgbClr val="5F6F70"/>
+                          </a:solidFill>
+                          <a:latin typeface="Malgun Gothic" pitchFamily="34" charset="0"/>
+                          <a:ea typeface="Malgun Gothic" pitchFamily="34" charset="-122"/>
+                          <a:cs typeface="Malgun Gothic" pitchFamily="34" charset="-120"/>
+                        </a:rPr>
+                        <a:t>현장 정착 편차를 감안한 할인</a:t>
+                      </a:r>
+                      <a:endParaRPr lang="en-US" sz="1150" dirty="0">
+                        <a:latin typeface="Malgun Gothic" charset="0"/>
+                        <a:ea typeface="Malgun Gothic" charset="0"/>
+                        <a:cs typeface="Malgun Gothic" charset="0"/>
+                      </a:endParaRPr>
+                    </a:p>
+                  </a:txBody>
+                  <a:tcPr marL="0" marR="76200" marT="50800" marB="50800" anchor="ctr">
+                    <a:lnL w="0" cap="flat" cmpd="sng" algn="ctr">
+                      <a:noFill/>
+                    </a:lnL>
+                    <a:lnR w="0" cap="flat" cmpd="sng" algn="ctr">
+                      <a:noFill/>
+                    </a:lnR>
+                    <a:lnT w="0" cap="flat" cmpd="sng" algn="ctr">
+                      <a:noFill/>
+                    </a:lnT>
+                    <a:lnB w="6350" cap="flat" cmpd="sng" algn="ctr">
+                      <a:solidFill>
+                        <a:srgbClr val="E1E4DE"/>
+                      </a:solidFill>
+                      <a:prstDash val="solid"/>
+                      <a:round/>
+                      <a:headEnd type="none" w="med" len="med"/>
+                      <a:tailEnd type="none" w="med" len="med"/>
+                    </a:lnB>
+                    <a:solidFill>
+                      <a:srgbClr val="EDF3F1"/>
+                    </a:solidFill>
+                  </a:tcPr>
+                </a:tc>
+                <a:tc>
+                  <a:txBody>
+                    <a:bodyPr/>
+                    <a:lstStyle/>
+                    <a:p>
+                      <a:pPr algn="r" indent="0" marL="0">
+                        <a:buNone/>
+                      </a:pPr>
+                      <a:r>
+                        <a:rPr lang="en-US" sz="1150" b="1" dirty="0">
+                          <a:solidFill>
+                            <a:srgbClr val="12191A"/>
+                          </a:solidFill>
+                          <a:latin typeface="Malgun Gothic" pitchFamily="34" charset="0"/>
+                          <a:ea typeface="Malgun Gothic" pitchFamily="34" charset="-122"/>
+                          <a:cs typeface="Malgun Gothic" pitchFamily="34" charset="-120"/>
+                        </a:rPr>
+                        <a:t>571만원</a:t>
+                      </a:r>
+                      <a:endParaRPr lang="en-US" sz="1150" dirty="0">
+                        <a:latin typeface="Malgun Gothic" charset="0"/>
+                        <a:ea typeface="Malgun Gothic" charset="0"/>
+                        <a:cs typeface="Malgun Gothic" charset="0"/>
+                      </a:endParaRPr>
+                    </a:p>
+                  </a:txBody>
+                  <a:tcPr marL="0" marR="76200" marT="50800" marB="50800" anchor="ctr">
+                    <a:lnL w="0" cap="flat" cmpd="sng" algn="ctr">
+                      <a:noFill/>
+                    </a:lnL>
+                    <a:lnR w="0" cap="flat" cmpd="sng" algn="ctr">
+                      <a:noFill/>
+                    </a:lnR>
+                    <a:lnT w="0" cap="flat" cmpd="sng" algn="ctr">
+                      <a:noFill/>
+                    </a:lnT>
+                    <a:lnB w="6350" cap="flat" cmpd="sng" algn="ctr">
+                      <a:solidFill>
+                        <a:srgbClr val="E1E4DE"/>
+                      </a:solidFill>
+                      <a:prstDash val="solid"/>
+                      <a:round/>
+                      <a:headEnd type="none" w="med" len="med"/>
+                      <a:tailEnd type="none" w="med" len="med"/>
+                    </a:lnB>
+                    <a:solidFill>
+                      <a:srgbClr val="EDF3F1"/>
+                    </a:solidFill>
+                  </a:tcPr>
+                </a:tc>
+              </a:tr>
+            </a:tbl>
+          </a:graphicData>
+        </a:graphic>
+      </p:graphicFrame>
+      <p:sp>
+        <p:nvSpPr>
+          <p:cNvPr id="6" name="Shape 3"/>
+          <p:cNvSpPr/>
+          <p:nvPr/>
+        </p:nvSpPr>
+        <p:spPr>
+          <a:xfrm>
+            <a:off x="566928" y="4718304"/>
+            <a:ext cx="3417722" cy="1060704"/>
+          </a:xfrm>
+          <a:prstGeom prst="rect">
+            <a:avLst/>
+          </a:prstGeom>
+          <a:solidFill>
+            <a:srgbClr val="EDF3F1"/>
+          </a:solidFill>
+          <a:ln/>
+        </p:spPr>
+      </p:sp>
+      <p:sp>
+        <p:nvSpPr>
+          <p:cNvPr id="7" name="Text 4"/>
+          <p:cNvSpPr/>
+          <p:nvPr/>
+        </p:nvSpPr>
+        <p:spPr>
+          <a:xfrm>
+            <a:off x="841248" y="4828032"/>
+            <a:ext cx="2869082" cy="237744"/>
+          </a:xfrm>
+          <a:prstGeom prst="rect">
+            <a:avLst/>
+          </a:prstGeom>
+          <a:noFill/>
+          <a:ln/>
+        </p:spPr>
+        <p:txBody>
+          <a:bodyPr wrap="square" lIns="0" tIns="0" rIns="0" bIns="0" rtlCol="0" anchor="ctr"/>
+          <a:lstStyle/>
+          <a:p>
+            <a:pPr indent="0" marL="0">
+              <a:buNone/>
+            </a:pPr>
+            <a:r>
+              <a:rPr lang="en-US" sz="1050" b="1" dirty="0">
+                <a:solidFill>
+                  <a:srgbClr val="8C9A99"/>
+                </a:solidFill>
+                <a:latin typeface="Malgun Gothic" pitchFamily="34" charset="0"/>
+                <a:ea typeface="Malgun Gothic" pitchFamily="34" charset="-122"/>
+                <a:cs typeface="Malgun Gothic" pitchFamily="34" charset="-120"/>
+              </a:rPr>
+              <a:t>월 순효과</a:t>
+            </a:r>
+            <a:endParaRPr lang="en-US" sz="1050" dirty="0"/>
+          </a:p>
+        </p:txBody>
+      </p:sp>
+      <p:sp>
+        <p:nvSpPr>
+          <p:cNvPr id="8" name="Text 5"/>
+          <p:cNvSpPr/>
+          <p:nvPr/>
+        </p:nvSpPr>
+        <p:spPr>
+          <a:xfrm>
+            <a:off x="841248" y="5065776"/>
+            <a:ext cx="2869082" cy="384048"/>
+          </a:xfrm>
+          <a:prstGeom prst="rect">
+            <a:avLst/>
+          </a:prstGeom>
+          <a:noFill/>
+          <a:ln/>
+        </p:spPr>
+        <p:txBody>
+          <a:bodyPr wrap="square" lIns="0" tIns="0" rIns="0" bIns="0" rtlCol="0" anchor="ctr"/>
+          <a:lstStyle/>
+          <a:p>
+            <a:pPr indent="0" marL="0">
+              <a:buNone/>
+            </a:pPr>
+            <a:r>
+              <a:rPr lang="en-US" sz="2300" b="1" dirty="0">
+                <a:solidFill>
+                  <a:srgbClr val="0D5257"/>
+                </a:solidFill>
+                <a:latin typeface="Malgun Gothic" pitchFamily="34" charset="0"/>
+                <a:ea typeface="Malgun Gothic" pitchFamily="34" charset="-122"/>
+                <a:cs typeface="Malgun Gothic" pitchFamily="34" charset="-120"/>
+              </a:rPr>
+              <a:t>393만원</a:t>
+            </a:r>
+            <a:endParaRPr lang="en-US" sz="2300" dirty="0"/>
+          </a:p>
+        </p:txBody>
+      </p:sp>
+      <p:sp>
+        <p:nvSpPr>
+          <p:cNvPr id="9" name="Text 6"/>
+          <p:cNvSpPr/>
+          <p:nvPr/>
+        </p:nvSpPr>
+        <p:spPr>
+          <a:xfrm>
+            <a:off x="841248" y="5449824"/>
+            <a:ext cx="2869082" cy="256032"/>
+          </a:xfrm>
+          <a:prstGeom prst="rect">
+            <a:avLst/>
+          </a:prstGeom>
+          <a:noFill/>
+          <a:ln/>
+        </p:spPr>
+        <p:txBody>
+          <a:bodyPr wrap="square" lIns="0" tIns="0" rIns="0" bIns="0" rtlCol="0" anchor="ctr"/>
+          <a:lstStyle/>
+          <a:p>
+            <a:pPr indent="0" marL="0">
+              <a:buNone/>
+            </a:pPr>
+            <a:r>
+              <a:rPr lang="en-US" sz="950" dirty="0">
+                <a:solidFill>
+                  <a:srgbClr val="5F6F70"/>
+                </a:solidFill>
+                <a:latin typeface="Malgun Gothic" pitchFamily="34" charset="0"/>
+                <a:ea typeface="Malgun Gothic" pitchFamily="34" charset="-122"/>
+                <a:cs typeface="Malgun Gothic" pitchFamily="34" charset="-120"/>
+              </a:rPr>
+              <a:t>보수 반영 571만원 − 구독료 169만원 − 발송 실비 9만원</a:t>
+            </a:r>
+            <a:endParaRPr lang="en-US" sz="950" dirty="0"/>
+          </a:p>
+        </p:txBody>
+      </p:sp>
+      <p:sp>
+        <p:nvSpPr>
+          <p:cNvPr id="10" name="Shape 7"/>
+          <p:cNvSpPr/>
+          <p:nvPr/>
+        </p:nvSpPr>
+        <p:spPr>
+          <a:xfrm>
+            <a:off x="4386986" y="4718304"/>
+            <a:ext cx="3417722" cy="1060704"/>
           </a:xfrm>
           <a:prstGeom prst="rect">
             <a:avLst/>
@@ -5111,69 +6723,69 @@
       </p:sp>
       <p:sp>
         <p:nvSpPr>
-          <p:cNvPr id="6" name="Text 4"/>
-          <p:cNvSpPr/>
-          <p:nvPr/>
-        </p:nvSpPr>
-        <p:spPr>
-          <a:xfrm>
-            <a:off x="859536" y="2194560"/>
-            <a:ext cx="2832506" cy="274320"/>
-          </a:xfrm>
-          <a:prstGeom prst="rect">
-            <a:avLst/>
-          </a:prstGeom>
-          <a:noFill/>
-          <a:ln/>
-        </p:spPr>
-        <p:txBody>
-          <a:bodyPr wrap="square" lIns="0" tIns="0" rIns="0" bIns="0" rtlCol="0" anchor="ctr"/>
-          <a:lstStyle/>
-          <a:p>
-            <a:pPr indent="0" marL="0">
-              <a:buNone/>
-            </a:pPr>
-            <a:r>
-              <a:rPr lang="en-US" sz="1300" b="1" dirty="0">
-                <a:solidFill>
-                  <a:srgbClr val="12191A"/>
-                </a:solidFill>
-                <a:latin typeface="Malgun Gothic" pitchFamily="34" charset="0"/>
-                <a:ea typeface="Malgun Gothic" pitchFamily="34" charset="-122"/>
-                <a:cs typeface="Malgun Gothic" pitchFamily="34" charset="-120"/>
-              </a:rPr>
-              <a:t>예약 전화 인입</a:t>
-            </a:r>
-            <a:endParaRPr lang="en-US" sz="1300" dirty="0"/>
-          </a:p>
-        </p:txBody>
-      </p:sp>
-      <p:sp>
-        <p:nvSpPr>
-          <p:cNvPr id="7" name="Text 5"/>
-          <p:cNvSpPr/>
-          <p:nvPr/>
-        </p:nvSpPr>
-        <p:spPr>
-          <a:xfrm>
-            <a:off x="859536" y="2487168"/>
-            <a:ext cx="2832506" cy="402336"/>
-          </a:xfrm>
-          <a:prstGeom prst="rect">
-            <a:avLst/>
-          </a:prstGeom>
-          <a:noFill/>
-          <a:ln/>
-        </p:spPr>
-        <p:txBody>
-          <a:bodyPr wrap="square" lIns="0" tIns="0" rIns="0" bIns="0" rtlCol="0" anchor="ctr"/>
-          <a:lstStyle/>
-          <a:p>
-            <a:pPr indent="0" marL="0">
-              <a:buNone/>
-            </a:pPr>
-            <a:r>
-              <a:rPr lang="en-US" sz="2400" b="1" dirty="0">
+          <p:cNvPr id="11" name="Text 8"/>
+          <p:cNvSpPr/>
+          <p:nvPr/>
+        </p:nvSpPr>
+        <p:spPr>
+          <a:xfrm>
+            <a:off x="4661306" y="4828032"/>
+            <a:ext cx="2869082" cy="237744"/>
+          </a:xfrm>
+          <a:prstGeom prst="rect">
+            <a:avLst/>
+          </a:prstGeom>
+          <a:noFill/>
+          <a:ln/>
+        </p:spPr>
+        <p:txBody>
+          <a:bodyPr wrap="square" lIns="0" tIns="0" rIns="0" bIns="0" rtlCol="0" anchor="ctr"/>
+          <a:lstStyle/>
+          <a:p>
+            <a:pPr indent="0" marL="0">
+              <a:buNone/>
+            </a:pPr>
+            <a:r>
+              <a:rPr lang="en-US" sz="1050" b="1" dirty="0">
+                <a:solidFill>
+                  <a:srgbClr val="8C9A99"/>
+                </a:solidFill>
+                <a:latin typeface="Malgun Gothic" pitchFamily="34" charset="0"/>
+                <a:ea typeface="Malgun Gothic" pitchFamily="34" charset="-122"/>
+                <a:cs typeface="Malgun Gothic" pitchFamily="34" charset="-120"/>
+              </a:rPr>
+              <a:t>투자 회수</a:t>
+            </a:r>
+            <a:endParaRPr lang="en-US" sz="1050" dirty="0"/>
+          </a:p>
+        </p:txBody>
+      </p:sp>
+      <p:sp>
+        <p:nvSpPr>
+          <p:cNvPr id="12" name="Text 9"/>
+          <p:cNvSpPr/>
+          <p:nvPr/>
+        </p:nvSpPr>
+        <p:spPr>
+          <a:xfrm>
+            <a:off x="4661306" y="5065776"/>
+            <a:ext cx="2869082" cy="384048"/>
+          </a:xfrm>
+          <a:prstGeom prst="rect">
+            <a:avLst/>
+          </a:prstGeom>
+          <a:noFill/>
+          <a:ln/>
+        </p:spPr>
+        <p:txBody>
+          <a:bodyPr wrap="square" lIns="0" tIns="0" rIns="0" bIns="0" rtlCol="0" anchor="ctr"/>
+          <a:lstStyle/>
+          <a:p>
+            <a:pPr indent="0" marL="0">
+              <a:buNone/>
+            </a:pPr>
+            <a:r>
+              <a:rPr lang="en-US" sz="2300" b="1" dirty="0">
                 <a:solidFill>
                   <a:srgbClr val="0D5257"/>
                 </a:solidFill>
@@ -5181,38 +6793,38 @@
                 <a:ea typeface="Malgun Gothic" pitchFamily="34" charset="-122"/>
                 <a:cs typeface="Malgun Gothic" pitchFamily="34" charset="-120"/>
               </a:rPr>
-              <a:t>감소</a:t>
-            </a:r>
-            <a:endParaRPr lang="en-US" sz="2400" dirty="0"/>
-          </a:p>
-        </p:txBody>
-      </p:sp>
-      <p:sp>
-        <p:nvSpPr>
-          <p:cNvPr id="8" name="Text 6"/>
-          <p:cNvSpPr/>
-          <p:nvPr/>
-        </p:nvSpPr>
-        <p:spPr>
-          <a:xfrm>
-            <a:off x="859536" y="2907792"/>
-            <a:ext cx="2832506" cy="274320"/>
-          </a:xfrm>
-          <a:prstGeom prst="rect">
-            <a:avLst/>
-          </a:prstGeom>
-          <a:noFill/>
-          <a:ln/>
-        </p:spPr>
-        <p:txBody>
-          <a:bodyPr wrap="square" lIns="0" tIns="0" rIns="0" bIns="0" rtlCol="0" anchor="ctr"/>
-          <a:lstStyle/>
-          <a:p>
-            <a:pPr indent="0" marL="0">
-              <a:buNone/>
-            </a:pPr>
-            <a:r>
-              <a:rPr lang="en-US" sz="1050" dirty="0">
+              <a:t>약 6개월</a:t>
+            </a:r>
+            <a:endParaRPr lang="en-US" sz="2300" dirty="0"/>
+          </a:p>
+        </p:txBody>
+      </p:sp>
+      <p:sp>
+        <p:nvSpPr>
+          <p:cNvPr id="13" name="Text 10"/>
+          <p:cNvSpPr/>
+          <p:nvPr/>
+        </p:nvSpPr>
+        <p:spPr>
+          <a:xfrm>
+            <a:off x="4661306" y="5449824"/>
+            <a:ext cx="2869082" cy="256032"/>
+          </a:xfrm>
+          <a:prstGeom prst="rect">
+            <a:avLst/>
+          </a:prstGeom>
+          <a:noFill/>
+          <a:ln/>
+        </p:spPr>
+        <p:txBody>
+          <a:bodyPr wrap="square" lIns="0" tIns="0" rIns="0" bIns="0" rtlCol="0" anchor="ctr"/>
+          <a:lstStyle/>
+          <a:p>
+            <a:pPr indent="0" marL="0">
+              <a:buNone/>
+            </a:pPr>
+            <a:r>
+              <a:rPr lang="en-US" sz="950" dirty="0">
                 <a:solidFill>
                   <a:srgbClr val="5F6F70"/>
                 </a:solidFill>
@@ -5220,22 +6832,22 @@
                 <a:ea typeface="Malgun Gothic" pitchFamily="34" charset="-122"/>
                 <a:cs typeface="Malgun Gothic" pitchFamily="34" charset="-120"/>
               </a:rPr>
-              <a:t>웹 · 카카오 셀프 예약 전환율</a:t>
-            </a:r>
-            <a:endParaRPr lang="en-US" sz="1050" dirty="0"/>
-          </a:p>
-        </p:txBody>
-      </p:sp>
-      <p:sp>
-        <p:nvSpPr>
-          <p:cNvPr id="9" name="Shape 7"/>
-          <p:cNvSpPr/>
-          <p:nvPr/>
-        </p:nvSpPr>
-        <p:spPr>
-          <a:xfrm>
-            <a:off x="4386986" y="2011680"/>
-            <a:ext cx="3417722" cy="1298448"/>
+              <a:t>구축비 2,400만원 ÷ 월 순효과 393만원</a:t>
+            </a:r>
+            <a:endParaRPr lang="en-US" sz="950" dirty="0"/>
+          </a:p>
+        </p:txBody>
+      </p:sp>
+      <p:sp>
+        <p:nvSpPr>
+          <p:cNvPr id="14" name="Shape 11"/>
+          <p:cNvSpPr/>
+          <p:nvPr/>
+        </p:nvSpPr>
+        <p:spPr>
+          <a:xfrm>
+            <a:off x="8207045" y="4718304"/>
+            <a:ext cx="3417722" cy="1060704"/>
           </a:xfrm>
           <a:prstGeom prst="rect">
             <a:avLst/>
@@ -5253,69 +6865,69 @@
       </p:sp>
       <p:sp>
         <p:nvSpPr>
-          <p:cNvPr id="10" name="Text 8"/>
-          <p:cNvSpPr/>
-          <p:nvPr/>
-        </p:nvSpPr>
-        <p:spPr>
-          <a:xfrm>
-            <a:off x="4679594" y="2194560"/>
-            <a:ext cx="2832506" cy="274320"/>
-          </a:xfrm>
-          <a:prstGeom prst="rect">
-            <a:avLst/>
-          </a:prstGeom>
-          <a:noFill/>
-          <a:ln/>
-        </p:spPr>
-        <p:txBody>
-          <a:bodyPr wrap="square" lIns="0" tIns="0" rIns="0" bIns="0" rtlCol="0" anchor="ctr"/>
-          <a:lstStyle/>
-          <a:p>
-            <a:pPr indent="0" marL="0">
-              <a:buNone/>
-            </a:pPr>
-            <a:r>
-              <a:rPr lang="en-US" sz="1300" b="1" dirty="0">
-                <a:solidFill>
-                  <a:srgbClr val="12191A"/>
-                </a:solidFill>
-                <a:latin typeface="Malgun Gothic" pitchFamily="34" charset="0"/>
-                <a:ea typeface="Malgun Gothic" pitchFamily="34" charset="-122"/>
-                <a:cs typeface="Malgun Gothic" pitchFamily="34" charset="-120"/>
-              </a:rPr>
-              <a:t>노쇼율</a:t>
-            </a:r>
-            <a:endParaRPr lang="en-US" sz="1300" dirty="0"/>
-          </a:p>
-        </p:txBody>
-      </p:sp>
-      <p:sp>
-        <p:nvSpPr>
-          <p:cNvPr id="11" name="Text 9"/>
-          <p:cNvSpPr/>
-          <p:nvPr/>
-        </p:nvSpPr>
-        <p:spPr>
-          <a:xfrm>
-            <a:off x="4679594" y="2487168"/>
-            <a:ext cx="2832506" cy="402336"/>
-          </a:xfrm>
-          <a:prstGeom prst="rect">
-            <a:avLst/>
-          </a:prstGeom>
-          <a:noFill/>
-          <a:ln/>
-        </p:spPr>
-        <p:txBody>
-          <a:bodyPr wrap="square" lIns="0" tIns="0" rIns="0" bIns="0" rtlCol="0" anchor="ctr"/>
-          <a:lstStyle/>
-          <a:p>
-            <a:pPr indent="0" marL="0">
-              <a:buNone/>
-            </a:pPr>
-            <a:r>
-              <a:rPr lang="en-US" sz="2400" b="1" dirty="0">
+          <p:cNvPr id="15" name="Text 12"/>
+          <p:cNvSpPr/>
+          <p:nvPr/>
+        </p:nvSpPr>
+        <p:spPr>
+          <a:xfrm>
+            <a:off x="8481365" y="4828032"/>
+            <a:ext cx="2869082" cy="237744"/>
+          </a:xfrm>
+          <a:prstGeom prst="rect">
+            <a:avLst/>
+          </a:prstGeom>
+          <a:noFill/>
+          <a:ln/>
+        </p:spPr>
+        <p:txBody>
+          <a:bodyPr wrap="square" lIns="0" tIns="0" rIns="0" bIns="0" rtlCol="0" anchor="ctr"/>
+          <a:lstStyle/>
+          <a:p>
+            <a:pPr indent="0" marL="0">
+              <a:buNone/>
+            </a:pPr>
+            <a:r>
+              <a:rPr lang="en-US" sz="1050" b="1" dirty="0">
+                <a:solidFill>
+                  <a:srgbClr val="8C9A99"/>
+                </a:solidFill>
+                <a:latin typeface="Malgun Gothic" pitchFamily="34" charset="0"/>
+                <a:ea typeface="Malgun Gothic" pitchFamily="34" charset="-122"/>
+                <a:cs typeface="Malgun Gothic" pitchFamily="34" charset="-120"/>
+              </a:rPr>
+              <a:t>1년 누적 순증</a:t>
+            </a:r>
+            <a:endParaRPr lang="en-US" sz="1050" dirty="0"/>
+          </a:p>
+        </p:txBody>
+      </p:sp>
+      <p:sp>
+        <p:nvSpPr>
+          <p:cNvPr id="16" name="Text 13"/>
+          <p:cNvSpPr/>
+          <p:nvPr/>
+        </p:nvSpPr>
+        <p:spPr>
+          <a:xfrm>
+            <a:off x="8481365" y="5065776"/>
+            <a:ext cx="2869082" cy="384048"/>
+          </a:xfrm>
+          <a:prstGeom prst="rect">
+            <a:avLst/>
+          </a:prstGeom>
+          <a:noFill/>
+          <a:ln/>
+        </p:spPr>
+        <p:txBody>
+          <a:bodyPr wrap="square" lIns="0" tIns="0" rIns="0" bIns="0" rtlCol="0" anchor="ctr"/>
+          <a:lstStyle/>
+          <a:p>
+            <a:pPr indent="0" marL="0">
+              <a:buNone/>
+            </a:pPr>
+            <a:r>
+              <a:rPr lang="en-US" sz="2300" b="1" dirty="0">
                 <a:solidFill>
                   <a:srgbClr val="0D5257"/>
                 </a:solidFill>
@@ -5323,22 +6935,61 @@
                 <a:ea typeface="Malgun Gothic" pitchFamily="34" charset="-122"/>
                 <a:cs typeface="Malgun Gothic" pitchFamily="34" charset="-120"/>
               </a:rPr>
-              <a:t>감소</a:t>
-            </a:r>
-            <a:endParaRPr lang="en-US" sz="2400" dirty="0"/>
-          </a:p>
-        </p:txBody>
-      </p:sp>
-      <p:sp>
-        <p:nvSpPr>
-          <p:cNvPr id="12" name="Text 10"/>
-          <p:cNvSpPr/>
-          <p:nvPr/>
-        </p:nvSpPr>
-        <p:spPr>
-          <a:xfrm>
-            <a:off x="4679594" y="2907792"/>
-            <a:ext cx="2832506" cy="274320"/>
+              <a:t>2,316만원</a:t>
+            </a:r>
+            <a:endParaRPr lang="en-US" sz="2300" dirty="0"/>
+          </a:p>
+        </p:txBody>
+      </p:sp>
+      <p:sp>
+        <p:nvSpPr>
+          <p:cNvPr id="17" name="Text 14"/>
+          <p:cNvSpPr/>
+          <p:nvPr/>
+        </p:nvSpPr>
+        <p:spPr>
+          <a:xfrm>
+            <a:off x="8481365" y="5449824"/>
+            <a:ext cx="2869082" cy="256032"/>
+          </a:xfrm>
+          <a:prstGeom prst="rect">
+            <a:avLst/>
+          </a:prstGeom>
+          <a:noFill/>
+          <a:ln/>
+        </p:spPr>
+        <p:txBody>
+          <a:bodyPr wrap="square" lIns="0" tIns="0" rIns="0" bIns="0" rtlCol="0" anchor="ctr"/>
+          <a:lstStyle/>
+          <a:p>
+            <a:pPr indent="0" marL="0">
+              <a:buNone/>
+            </a:pPr>
+            <a:r>
+              <a:rPr lang="en-US" sz="950" dirty="0">
+                <a:solidFill>
+                  <a:srgbClr val="5F6F70"/>
+                </a:solidFill>
+                <a:latin typeface="Malgun Gothic" pitchFamily="34" charset="0"/>
+                <a:ea typeface="Malgun Gothic" pitchFamily="34" charset="-122"/>
+                <a:cs typeface="Malgun Gothic" pitchFamily="34" charset="-120"/>
+              </a:rPr>
+              <a:t>연 순효과 4,716만원 − 구축비 2,400만원</a:t>
+            </a:r>
+            <a:endParaRPr lang="en-US" sz="950" dirty="0"/>
+          </a:p>
+        </p:txBody>
+      </p:sp>
+      <p:sp>
+        <p:nvSpPr>
+          <p:cNvPr id="18" name="Text 15"/>
+          <p:cNvSpPr/>
+          <p:nvPr/>
+        </p:nvSpPr>
+        <p:spPr>
+          <a:xfrm>
+            <a:off x="566928" y="5907024"/>
+            <a:ext cx="10234879" cy="329184"/>
           </a:xfrm>
           <a:prstGeom prst="rect">
             <a:avLst/>
@@ -5362,7 +7013,7 @@
                 <a:ea typeface="Malgun Gothic" pitchFamily="34" charset="-122"/>
                 <a:cs typeface="Malgun Gothic" pitchFamily="34" charset="-120"/>
               </a:rPr>
-              <a:t>리마인더 + 예측 확인 발송 전후 비교</a:t>
+              <a:t>예시 입력값은 가정치이며 특정 병원의 실적이 아닙니다. 노쇼율 · 진료 단가 · 콜 인입량은 병원마다 편차가 크므로, 사전 진단에서 실측치를 확인한 뒤 숫자로 약속 가능한 목표치만 별도 제안서에 명시합니다.</a:t>
             </a:r>
             <a:endParaRPr lang="en-US" sz="1050" dirty="0"/>
           </a:p>
@@ -5370,657 +7021,7 @@
       </p:sp>
       <p:sp>
         <p:nvSpPr>
-          <p:cNvPr id="13" name="Shape 11"/>
-          <p:cNvSpPr/>
-          <p:nvPr/>
-        </p:nvSpPr>
-        <p:spPr>
-          <a:xfrm>
-            <a:off x="8207045" y="2011680"/>
-            <a:ext cx="3417722" cy="1298448"/>
-          </a:xfrm>
-          <a:prstGeom prst="rect">
-            <a:avLst/>
-          </a:prstGeom>
-          <a:solidFill>
-            <a:srgbClr val="FFFFFF"/>
-          </a:solidFill>
-          <a:ln w="9525">
-            <a:solidFill>
-              <a:srgbClr val="E1E4DE"/>
-            </a:solidFill>
-            <a:prstDash val="solid"/>
-          </a:ln>
-        </p:spPr>
-      </p:sp>
-      <p:sp>
-        <p:nvSpPr>
-          <p:cNvPr id="14" name="Text 12"/>
-          <p:cNvSpPr/>
-          <p:nvPr/>
-        </p:nvSpPr>
-        <p:spPr>
-          <a:xfrm>
-            <a:off x="8499653" y="2194560"/>
-            <a:ext cx="2832506" cy="274320"/>
-          </a:xfrm>
-          <a:prstGeom prst="rect">
-            <a:avLst/>
-          </a:prstGeom>
-          <a:noFill/>
-          <a:ln/>
-        </p:spPr>
-        <p:txBody>
-          <a:bodyPr wrap="square" lIns="0" tIns="0" rIns="0" bIns="0" rtlCol="0" anchor="ctr"/>
-          <a:lstStyle/>
-          <a:p>
-            <a:pPr indent="0" marL="0">
-              <a:buNone/>
-            </a:pPr>
-            <a:r>
-              <a:rPr lang="en-US" sz="1300" b="1" dirty="0">
-                <a:solidFill>
-                  <a:srgbClr val="12191A"/>
-                </a:solidFill>
-                <a:latin typeface="Malgun Gothic" pitchFamily="34" charset="0"/>
-                <a:ea typeface="Malgun Gothic" pitchFamily="34" charset="-122"/>
-                <a:cs typeface="Malgun Gothic" pitchFamily="34" charset="-120"/>
-              </a:rPr>
-              <a:t>시술 슬롯 가동률</a:t>
-            </a:r>
-            <a:endParaRPr lang="en-US" sz="1300" dirty="0"/>
-          </a:p>
-        </p:txBody>
-      </p:sp>
-      <p:sp>
-        <p:nvSpPr>
-          <p:cNvPr id="15" name="Text 13"/>
-          <p:cNvSpPr/>
-          <p:nvPr/>
-        </p:nvSpPr>
-        <p:spPr>
-          <a:xfrm>
-            <a:off x="8499653" y="2487168"/>
-            <a:ext cx="2832506" cy="402336"/>
-          </a:xfrm>
-          <a:prstGeom prst="rect">
-            <a:avLst/>
-          </a:prstGeom>
-          <a:noFill/>
-          <a:ln/>
-        </p:spPr>
-        <p:txBody>
-          <a:bodyPr wrap="square" lIns="0" tIns="0" rIns="0" bIns="0" rtlCol="0" anchor="ctr"/>
-          <a:lstStyle/>
-          <a:p>
-            <a:pPr indent="0" marL="0">
-              <a:buNone/>
-            </a:pPr>
-            <a:r>
-              <a:rPr lang="en-US" sz="2400" b="1" dirty="0">
-                <a:solidFill>
-                  <a:srgbClr val="0D5257"/>
-                </a:solidFill>
-                <a:latin typeface="Malgun Gothic" pitchFamily="34" charset="0"/>
-                <a:ea typeface="Malgun Gothic" pitchFamily="34" charset="-122"/>
-                <a:cs typeface="Malgun Gothic" pitchFamily="34" charset="-120"/>
-              </a:rPr>
-              <a:t>상승</a:t>
-            </a:r>
-            <a:endParaRPr lang="en-US" sz="2400" dirty="0"/>
-          </a:p>
-        </p:txBody>
-      </p:sp>
-      <p:sp>
-        <p:nvSpPr>
-          <p:cNvPr id="16" name="Text 14"/>
-          <p:cNvSpPr/>
-          <p:nvPr/>
-        </p:nvSpPr>
-        <p:spPr>
-          <a:xfrm>
-            <a:off x="8499653" y="2907792"/>
-            <a:ext cx="2832506" cy="274320"/>
-          </a:xfrm>
-          <a:prstGeom prst="rect">
-            <a:avLst/>
-          </a:prstGeom>
-          <a:noFill/>
-          <a:ln/>
-        </p:spPr>
-        <p:txBody>
-          <a:bodyPr wrap="square" lIns="0" tIns="0" rIns="0" bIns="0" rtlCol="0" anchor="ctr"/>
-          <a:lstStyle/>
-          <a:p>
-            <a:pPr indent="0" marL="0">
-              <a:buNone/>
-            </a:pPr>
-            <a:r>
-              <a:rPr lang="en-US" sz="1050" dirty="0">
-                <a:solidFill>
-                  <a:srgbClr val="5F6F70"/>
-                </a:solidFill>
-                <a:latin typeface="Malgun Gothic" pitchFamily="34" charset="0"/>
-                <a:ea typeface="Malgun Gothic" pitchFamily="34" charset="-122"/>
-                <a:cs typeface="Malgun Gothic" pitchFamily="34" charset="-120"/>
-              </a:rPr>
-              <a:t>공실 슬롯 대체 배정 건수</a:t>
-            </a:r>
-            <a:endParaRPr lang="en-US" sz="1050" dirty="0"/>
-          </a:p>
-        </p:txBody>
-      </p:sp>
-      <p:sp>
-        <p:nvSpPr>
-          <p:cNvPr id="17" name="Shape 15"/>
-          <p:cNvSpPr/>
-          <p:nvPr/>
-        </p:nvSpPr>
-        <p:spPr>
-          <a:xfrm>
-            <a:off x="566928" y="3584448"/>
-            <a:ext cx="3417722" cy="1298448"/>
-          </a:xfrm>
-          <a:prstGeom prst="rect">
-            <a:avLst/>
-          </a:prstGeom>
-          <a:solidFill>
-            <a:srgbClr val="FFFFFF"/>
-          </a:solidFill>
-          <a:ln w="9525">
-            <a:solidFill>
-              <a:srgbClr val="E1E4DE"/>
-            </a:solidFill>
-            <a:prstDash val="solid"/>
-          </a:ln>
-        </p:spPr>
-      </p:sp>
-      <p:sp>
-        <p:nvSpPr>
-          <p:cNvPr id="18" name="Text 16"/>
-          <p:cNvSpPr/>
-          <p:nvPr/>
-        </p:nvSpPr>
-        <p:spPr>
-          <a:xfrm>
-            <a:off x="859536" y="3767328"/>
-            <a:ext cx="2832506" cy="274320"/>
-          </a:xfrm>
-          <a:prstGeom prst="rect">
-            <a:avLst/>
-          </a:prstGeom>
-          <a:noFill/>
-          <a:ln/>
-        </p:spPr>
-        <p:txBody>
-          <a:bodyPr wrap="square" lIns="0" tIns="0" rIns="0" bIns="0" rtlCol="0" anchor="ctr"/>
-          <a:lstStyle/>
-          <a:p>
-            <a:pPr indent="0" marL="0">
-              <a:buNone/>
-            </a:pPr>
-            <a:r>
-              <a:rPr lang="en-US" sz="1300" b="1" dirty="0">
-                <a:solidFill>
-                  <a:srgbClr val="12191A"/>
-                </a:solidFill>
-                <a:latin typeface="Malgun Gothic" pitchFamily="34" charset="0"/>
-                <a:ea typeface="Malgun Gothic" pitchFamily="34" charset="-122"/>
-                <a:cs typeface="Malgun Gothic" pitchFamily="34" charset="-120"/>
-              </a:rPr>
-              <a:t>주기 재진입률</a:t>
-            </a:r>
-            <a:endParaRPr lang="en-US" sz="1300" dirty="0"/>
-          </a:p>
-        </p:txBody>
-      </p:sp>
-      <p:sp>
-        <p:nvSpPr>
-          <p:cNvPr id="19" name="Text 17"/>
-          <p:cNvSpPr/>
-          <p:nvPr/>
-        </p:nvSpPr>
-        <p:spPr>
-          <a:xfrm>
-            <a:off x="859536" y="4059936"/>
-            <a:ext cx="2832506" cy="402336"/>
-          </a:xfrm>
-          <a:prstGeom prst="rect">
-            <a:avLst/>
-          </a:prstGeom>
-          <a:noFill/>
-          <a:ln/>
-        </p:spPr>
-        <p:txBody>
-          <a:bodyPr wrap="square" lIns="0" tIns="0" rIns="0" bIns="0" rtlCol="0" anchor="ctr"/>
-          <a:lstStyle/>
-          <a:p>
-            <a:pPr indent="0" marL="0">
-              <a:buNone/>
-            </a:pPr>
-            <a:r>
-              <a:rPr lang="en-US" sz="2400" b="1" dirty="0">
-                <a:solidFill>
-                  <a:srgbClr val="0D5257"/>
-                </a:solidFill>
-                <a:latin typeface="Malgun Gothic" pitchFamily="34" charset="0"/>
-                <a:ea typeface="Malgun Gothic" pitchFamily="34" charset="-122"/>
-                <a:cs typeface="Malgun Gothic" pitchFamily="34" charset="-120"/>
-              </a:rPr>
-              <a:t>상승</a:t>
-            </a:r>
-            <a:endParaRPr lang="en-US" sz="2400" dirty="0"/>
-          </a:p>
-        </p:txBody>
-      </p:sp>
-      <p:sp>
-        <p:nvSpPr>
-          <p:cNvPr id="20" name="Text 18"/>
-          <p:cNvSpPr/>
-          <p:nvPr/>
-        </p:nvSpPr>
-        <p:spPr>
-          <a:xfrm>
-            <a:off x="859536" y="4480560"/>
-            <a:ext cx="2832506" cy="274320"/>
-          </a:xfrm>
-          <a:prstGeom prst="rect">
-            <a:avLst/>
-          </a:prstGeom>
-          <a:noFill/>
-          <a:ln/>
-        </p:spPr>
-        <p:txBody>
-          <a:bodyPr wrap="square" lIns="0" tIns="0" rIns="0" bIns="0" rtlCol="0" anchor="ctr"/>
-          <a:lstStyle/>
-          <a:p>
-            <a:pPr indent="0" marL="0">
-              <a:buNone/>
-            </a:pPr>
-            <a:r>
-              <a:rPr lang="en-US" sz="1050" dirty="0">
-                <a:solidFill>
-                  <a:srgbClr val="5F6F70"/>
-                </a:solidFill>
-                <a:latin typeface="Malgun Gothic" pitchFamily="34" charset="0"/>
-                <a:ea typeface="Malgun Gothic" pitchFamily="34" charset="-122"/>
-                <a:cs typeface="Malgun Gothic" pitchFamily="34" charset="-120"/>
-              </a:rPr>
-              <a:t>판정 후 90일 내 재방문 비율</a:t>
-            </a:r>
-            <a:endParaRPr lang="en-US" sz="1050" dirty="0"/>
-          </a:p>
-        </p:txBody>
-      </p:sp>
-      <p:sp>
-        <p:nvSpPr>
-          <p:cNvPr id="21" name="Shape 19"/>
-          <p:cNvSpPr/>
-          <p:nvPr/>
-        </p:nvSpPr>
-        <p:spPr>
-          <a:xfrm>
-            <a:off x="4386986" y="3584448"/>
-            <a:ext cx="3417722" cy="1298448"/>
-          </a:xfrm>
-          <a:prstGeom prst="rect">
-            <a:avLst/>
-          </a:prstGeom>
-          <a:solidFill>
-            <a:srgbClr val="FFFFFF"/>
-          </a:solidFill>
-          <a:ln w="9525">
-            <a:solidFill>
-              <a:srgbClr val="E1E4DE"/>
-            </a:solidFill>
-            <a:prstDash val="solid"/>
-          </a:ln>
-        </p:spPr>
-      </p:sp>
-      <p:sp>
-        <p:nvSpPr>
-          <p:cNvPr id="22" name="Text 20"/>
-          <p:cNvSpPr/>
-          <p:nvPr/>
-        </p:nvSpPr>
-        <p:spPr>
-          <a:xfrm>
-            <a:off x="4679594" y="3767328"/>
-            <a:ext cx="2832506" cy="274320"/>
-          </a:xfrm>
-          <a:prstGeom prst="rect">
-            <a:avLst/>
-          </a:prstGeom>
-          <a:noFill/>
-          <a:ln/>
-        </p:spPr>
-        <p:txBody>
-          <a:bodyPr wrap="square" lIns="0" tIns="0" rIns="0" bIns="0" rtlCol="0" anchor="ctr"/>
-          <a:lstStyle/>
-          <a:p>
-            <a:pPr indent="0" marL="0">
-              <a:buNone/>
-            </a:pPr>
-            <a:r>
-              <a:rPr lang="en-US" sz="1300" b="1" dirty="0">
-                <a:solidFill>
-                  <a:srgbClr val="12191A"/>
-                </a:solidFill>
-                <a:latin typeface="Malgun Gothic" pitchFamily="34" charset="0"/>
-                <a:ea typeface="Malgun Gothic" pitchFamily="34" charset="-122"/>
-                <a:cs typeface="Malgun Gothic" pitchFamily="34" charset="-120"/>
-              </a:rPr>
-              <a:t>예약 처리 시간</a:t>
-            </a:r>
-            <a:endParaRPr lang="en-US" sz="1300" dirty="0"/>
-          </a:p>
-        </p:txBody>
-      </p:sp>
-      <p:sp>
-        <p:nvSpPr>
-          <p:cNvPr id="23" name="Text 21"/>
-          <p:cNvSpPr/>
-          <p:nvPr/>
-        </p:nvSpPr>
-        <p:spPr>
-          <a:xfrm>
-            <a:off x="4679594" y="4059936"/>
-            <a:ext cx="2832506" cy="402336"/>
-          </a:xfrm>
-          <a:prstGeom prst="rect">
-            <a:avLst/>
-          </a:prstGeom>
-          <a:noFill/>
-          <a:ln/>
-        </p:spPr>
-        <p:txBody>
-          <a:bodyPr wrap="square" lIns="0" tIns="0" rIns="0" bIns="0" rtlCol="0" anchor="ctr"/>
-          <a:lstStyle/>
-          <a:p>
-            <a:pPr indent="0" marL="0">
-              <a:buNone/>
-            </a:pPr>
-            <a:r>
-              <a:rPr lang="en-US" sz="2400" b="1" dirty="0">
-                <a:solidFill>
-                  <a:srgbClr val="0D5257"/>
-                </a:solidFill>
-                <a:latin typeface="Malgun Gothic" pitchFamily="34" charset="0"/>
-                <a:ea typeface="Malgun Gothic" pitchFamily="34" charset="-122"/>
-                <a:cs typeface="Malgun Gothic" pitchFamily="34" charset="-120"/>
-              </a:rPr>
-              <a:t>단축</a:t>
-            </a:r>
-            <a:endParaRPr lang="en-US" sz="2400" dirty="0"/>
-          </a:p>
-        </p:txBody>
-      </p:sp>
-      <p:sp>
-        <p:nvSpPr>
-          <p:cNvPr id="24" name="Text 22"/>
-          <p:cNvSpPr/>
-          <p:nvPr/>
-        </p:nvSpPr>
-        <p:spPr>
-          <a:xfrm>
-            <a:off x="4679594" y="4480560"/>
-            <a:ext cx="2832506" cy="274320"/>
-          </a:xfrm>
-          <a:prstGeom prst="rect">
-            <a:avLst/>
-          </a:prstGeom>
-          <a:noFill/>
-          <a:ln/>
-        </p:spPr>
-        <p:txBody>
-          <a:bodyPr wrap="square" lIns="0" tIns="0" rIns="0" bIns="0" rtlCol="0" anchor="ctr"/>
-          <a:lstStyle/>
-          <a:p>
-            <a:pPr indent="0" marL="0">
-              <a:buNone/>
-            </a:pPr>
-            <a:r>
-              <a:rPr lang="en-US" sz="1050" dirty="0">
-                <a:solidFill>
-                  <a:srgbClr val="5F6F70"/>
-                </a:solidFill>
-                <a:latin typeface="Malgun Gothic" pitchFamily="34" charset="0"/>
-                <a:ea typeface="Malgun Gothic" pitchFamily="34" charset="-122"/>
-                <a:cs typeface="Malgun Gothic" pitchFamily="34" charset="-120"/>
-              </a:rPr>
-              <a:t>건당 데스크 처리 소요 시간</a:t>
-            </a:r>
-            <a:endParaRPr lang="en-US" sz="1050" dirty="0"/>
-          </a:p>
-        </p:txBody>
-      </p:sp>
-      <p:sp>
-        <p:nvSpPr>
-          <p:cNvPr id="25" name="Shape 23"/>
-          <p:cNvSpPr/>
-          <p:nvPr/>
-        </p:nvSpPr>
-        <p:spPr>
-          <a:xfrm>
-            <a:off x="8207045" y="3584448"/>
-            <a:ext cx="3417722" cy="1298448"/>
-          </a:xfrm>
-          <a:prstGeom prst="rect">
-            <a:avLst/>
-          </a:prstGeom>
-          <a:solidFill>
-            <a:srgbClr val="FFFFFF"/>
-          </a:solidFill>
-          <a:ln w="9525">
-            <a:solidFill>
-              <a:srgbClr val="E1E4DE"/>
-            </a:solidFill>
-            <a:prstDash val="solid"/>
-          </a:ln>
-        </p:spPr>
-      </p:sp>
-      <p:sp>
-        <p:nvSpPr>
-          <p:cNvPr id="26" name="Text 24"/>
-          <p:cNvSpPr/>
-          <p:nvPr/>
-        </p:nvSpPr>
-        <p:spPr>
-          <a:xfrm>
-            <a:off x="8499653" y="3767328"/>
-            <a:ext cx="2832506" cy="274320"/>
-          </a:xfrm>
-          <a:prstGeom prst="rect">
-            <a:avLst/>
-          </a:prstGeom>
-          <a:noFill/>
-          <a:ln/>
-        </p:spPr>
-        <p:txBody>
-          <a:bodyPr wrap="square" lIns="0" tIns="0" rIns="0" bIns="0" rtlCol="0" anchor="ctr"/>
-          <a:lstStyle/>
-          <a:p>
-            <a:pPr indent="0" marL="0">
-              <a:buNone/>
-            </a:pPr>
-            <a:r>
-              <a:rPr lang="en-US" sz="1300" b="1" dirty="0">
-                <a:solidFill>
-                  <a:srgbClr val="12191A"/>
-                </a:solidFill>
-                <a:latin typeface="Malgun Gothic" pitchFamily="34" charset="0"/>
-                <a:ea typeface="Malgun Gothic" pitchFamily="34" charset="-122"/>
-                <a:cs typeface="Malgun Gothic" pitchFamily="34" charset="-120"/>
-              </a:rPr>
-              <a:t>데이터 정합성</a:t>
-            </a:r>
-            <a:endParaRPr lang="en-US" sz="1300" dirty="0"/>
-          </a:p>
-        </p:txBody>
-      </p:sp>
-      <p:sp>
-        <p:nvSpPr>
-          <p:cNvPr id="27" name="Text 25"/>
-          <p:cNvSpPr/>
-          <p:nvPr/>
-        </p:nvSpPr>
-        <p:spPr>
-          <a:xfrm>
-            <a:off x="8499653" y="4059936"/>
-            <a:ext cx="2832506" cy="402336"/>
-          </a:xfrm>
-          <a:prstGeom prst="rect">
-            <a:avLst/>
-          </a:prstGeom>
-          <a:noFill/>
-          <a:ln/>
-        </p:spPr>
-        <p:txBody>
-          <a:bodyPr wrap="square" lIns="0" tIns="0" rIns="0" bIns="0" rtlCol="0" anchor="ctr"/>
-          <a:lstStyle/>
-          <a:p>
-            <a:pPr indent="0" marL="0">
-              <a:buNone/>
-            </a:pPr>
-            <a:r>
-              <a:rPr lang="en-US" sz="2400" b="1" dirty="0">
-                <a:solidFill>
-                  <a:srgbClr val="0D5257"/>
-                </a:solidFill>
-                <a:latin typeface="Malgun Gothic" pitchFamily="34" charset="0"/>
-                <a:ea typeface="Malgun Gothic" pitchFamily="34" charset="-122"/>
-                <a:cs typeface="Malgun Gothic" pitchFamily="34" charset="-120"/>
-              </a:rPr>
-              <a:t>개선</a:t>
-            </a:r>
-            <a:endParaRPr lang="en-US" sz="2400" dirty="0"/>
-          </a:p>
-        </p:txBody>
-      </p:sp>
-      <p:sp>
-        <p:nvSpPr>
-          <p:cNvPr id="28" name="Text 26"/>
-          <p:cNvSpPr/>
-          <p:nvPr/>
-        </p:nvSpPr>
-        <p:spPr>
-          <a:xfrm>
-            <a:off x="8499653" y="4480560"/>
-            <a:ext cx="2832506" cy="274320"/>
-          </a:xfrm>
-          <a:prstGeom prst="rect">
-            <a:avLst/>
-          </a:prstGeom>
-          <a:noFill/>
-          <a:ln/>
-        </p:spPr>
-        <p:txBody>
-          <a:bodyPr wrap="square" lIns="0" tIns="0" rIns="0" bIns="0" rtlCol="0" anchor="ctr"/>
-          <a:lstStyle/>
-          <a:p>
-            <a:pPr indent="0" marL="0">
-              <a:buNone/>
-            </a:pPr>
-            <a:r>
-              <a:rPr lang="en-US" sz="1050" dirty="0">
-                <a:solidFill>
-                  <a:srgbClr val="5F6F70"/>
-                </a:solidFill>
-                <a:latin typeface="Malgun Gothic" pitchFamily="34" charset="0"/>
-                <a:ea typeface="Malgun Gothic" pitchFamily="34" charset="-122"/>
-                <a:cs typeface="Malgun Gothic" pitchFamily="34" charset="-120"/>
-              </a:rPr>
-              <a:t>EMR 미반영 예약 건수 추이</a:t>
-            </a:r>
-            <a:endParaRPr lang="en-US" sz="1050" dirty="0"/>
-          </a:p>
-        </p:txBody>
-      </p:sp>
-      <p:sp>
-        <p:nvSpPr>
-          <p:cNvPr id="29" name="Shape 27"/>
-          <p:cNvSpPr/>
-          <p:nvPr/>
-        </p:nvSpPr>
-        <p:spPr>
-          <a:xfrm>
-            <a:off x="566928" y="5230368"/>
-            <a:ext cx="11057839" cy="932688"/>
-          </a:xfrm>
-          <a:prstGeom prst="rect">
-            <a:avLst/>
-          </a:prstGeom>
-          <a:solidFill>
-            <a:srgbClr val="EDF3F1"/>
-          </a:solidFill>
-          <a:ln/>
-        </p:spPr>
-      </p:sp>
-      <p:sp>
-        <p:nvSpPr>
-          <p:cNvPr id="30" name="Text 28"/>
-          <p:cNvSpPr/>
-          <p:nvPr/>
-        </p:nvSpPr>
-        <p:spPr>
-          <a:xfrm>
-            <a:off x="896112" y="5358384"/>
-            <a:ext cx="10399471" cy="694944"/>
-          </a:xfrm>
-          <a:prstGeom prst="rect">
-            <a:avLst/>
-          </a:prstGeom>
-          <a:noFill/>
-          <a:ln/>
-        </p:spPr>
-        <p:txBody>
-          <a:bodyPr wrap="square" lIns="0" tIns="0" rIns="0" bIns="0" rtlCol="0" anchor="ctr"/>
-          <a:lstStyle/>
-          <a:p>
-            <a:pPr indent="0" marL="0">
-              <a:lnSpc>
-                <a:spcPts val="1800"/>
-              </a:lnSpc>
-              <a:buNone/>
-            </a:pPr>
-            <a:r>
-              <a:rPr lang="en-US" sz="1150" dirty="0">
-                <a:solidFill>
-                  <a:srgbClr val="0D5257"/>
-                </a:solidFill>
-                <a:latin typeface="Malgun Gothic" pitchFamily="34" charset="0"/>
-                <a:ea typeface="Malgun Gothic" pitchFamily="34" charset="-122"/>
-                <a:cs typeface="Malgun Gothic" pitchFamily="34" charset="-120"/>
-              </a:rPr>
-              <a:t>구체적 개선 수치는 병원의 현재 운영 방식 · 환자 구성 · 기존 시스템 유무에 따라 편차가 큽니다. 사전 진단에서 귀 병원의 실제 데이터를 확인한 뒤 숫자로 약속 가능한 목표치를 별도 제안서에 명시합니다.</a:t>
-            </a:r>
-            <a:endParaRPr lang="en-US" sz="1150" dirty="0"/>
-          </a:p>
-          <a:p>
-            <a:pPr indent="0" marL="0">
-              <a:lnSpc>
-                <a:spcPts val="1800"/>
-              </a:lnSpc>
-              <a:buNone/>
-            </a:pPr>
-            <a:r>
-              <a:rPr lang="en-US" sz="1150" dirty="0">
-                <a:solidFill>
-                  <a:srgbClr val="0D5257"/>
-                </a:solidFill>
-                <a:latin typeface="Malgun Gothic" pitchFamily="34" charset="0"/>
-                <a:ea typeface="Malgun Gothic" pitchFamily="34" charset="-122"/>
-                <a:cs typeface="Malgun Gothic" pitchFamily="34" charset="-120"/>
-              </a:rPr>
-              <a:t>검증되지 않은 일반화된 수치를 앞세우지 않는 것이 저희 원칙입니다.</a:t>
-            </a:r>
-            <a:endParaRPr lang="en-US" sz="1150" dirty="0"/>
-          </a:p>
-        </p:txBody>
-      </p:sp>
-      <p:sp>
-        <p:nvSpPr>
-          <p:cNvPr id="31" name="Text 29"/>
+          <p:cNvPr id="19" name="Text 16"/>
           <p:cNvSpPr/>
           <p:nvPr/>
         </p:nvSpPr>
@@ -6122,7 +7123,7 @@
                 <a:ea typeface="Malgun Gothic" pitchFamily="34" charset="-122"/>
                 <a:cs typeface="Malgun Gothic" pitchFamily="34" charset="-120"/>
               </a:rPr>
-              <a:t>일정</a:t>
+              <a:t>성과</a:t>
             </a:r>
             <a:endParaRPr lang="en-US" sz="1150" dirty="0"/>
           </a:p>
@@ -6161,7 +7162,7 @@
                 <a:ea typeface="Malgun Gothic" pitchFamily="34" charset="-122"/>
                 <a:cs typeface="Malgun Gothic" pitchFamily="34" charset="-120"/>
               </a:rPr>
-              <a:t>도입 절차 — 표준 12주</a:t>
+              <a:t>성과를 증명하는 방식</a:t>
             </a:r>
             <a:endParaRPr lang="en-US" sz="3100" dirty="0"/>
           </a:p>
@@ -6176,7 +7177,7 @@
         <p:spPr>
           <a:xfrm>
             <a:off x="566928" y="1426464"/>
-            <a:ext cx="10241280" cy="475488"/>
+            <a:ext cx="10241280" cy="548640"/>
           </a:xfrm>
           <a:prstGeom prst="rect">
             <a:avLst/>
@@ -6203,7 +7204,7 @@
                 <a:ea typeface="Malgun Gothic" pitchFamily="34" charset="-122"/>
                 <a:cs typeface="Malgun Gothic" pitchFamily="34" charset="-120"/>
               </a:rPr>
-              <a:t>코어가 이미 완성되어 있으므로, 기간의 대부분은 개발이 아니라 귀 병원의 진료 규칙을 시스템에 반영하는 작업에 쓰입니다.</a:t>
+              <a:t>도입 첫 달을 기준선으로 고정하고, 같은 지표를 같은 방식으로 매 분기 측정해 리포트로 제출합니다.</a:t>
             </a:r>
             <a:endParaRPr lang="en-US" sz="1350" dirty="0"/>
           </a:p>
@@ -6217,8 +7218,28 @@
         </p:nvSpPr>
         <p:spPr>
           <a:xfrm>
-            <a:off x="566928" y="2048256"/>
-            <a:ext cx="402336" cy="402336"/>
+            <a:off x="566928" y="2157984"/>
+            <a:ext cx="310896" cy="310896"/>
+          </a:xfrm>
+          <a:prstGeom prst="ellipse">
+            <a:avLst/>
+          </a:prstGeom>
+          <a:solidFill>
+            <a:srgbClr val="EDF3F1"/>
+          </a:solidFill>
+          <a:ln/>
+        </p:spPr>
+      </p:sp>
+      <p:sp>
+        <p:nvSpPr>
+          <p:cNvPr id="6" name="Shape 4"/>
+          <p:cNvSpPr/>
+          <p:nvPr/>
+        </p:nvSpPr>
+        <p:spPr>
+          <a:xfrm>
+            <a:off x="672084" y="2263140"/>
+            <a:ext cx="100584" cy="100584"/>
           </a:xfrm>
           <a:prstGeom prst="ellipse">
             <a:avLst/>
@@ -6231,79 +7252,40 @@
       </p:sp>
       <p:sp>
         <p:nvSpPr>
-          <p:cNvPr id="6" name="Text 4"/>
-          <p:cNvSpPr/>
-          <p:nvPr/>
-        </p:nvSpPr>
-        <p:spPr>
-          <a:xfrm>
-            <a:off x="566928" y="2048256"/>
-            <a:ext cx="402336" cy="402336"/>
-          </a:xfrm>
-          <a:prstGeom prst="rect">
-            <a:avLst/>
-          </a:prstGeom>
-          <a:noFill/>
-          <a:ln/>
-        </p:spPr>
-        <p:txBody>
-          <a:bodyPr wrap="square" lIns="0" tIns="0" rIns="0" bIns="0" rtlCol="0" anchor="ctr"/>
-          <a:lstStyle/>
-          <a:p>
-            <a:pPr algn="ctr" indent="0" marL="0">
-              <a:buNone/>
-            </a:pPr>
-            <a:r>
-              <a:rPr lang="en-US" sz="1100" b="1" dirty="0">
-                <a:solidFill>
-                  <a:srgbClr val="FFFFFF"/>
-                </a:solidFill>
-                <a:latin typeface="Malgun Gothic" pitchFamily="34" charset="0"/>
-                <a:ea typeface="Malgun Gothic" pitchFamily="34" charset="-122"/>
-                <a:cs typeface="Malgun Gothic" pitchFamily="34" charset="-120"/>
-              </a:rPr>
-              <a:t>01</a:t>
-            </a:r>
-            <a:endParaRPr lang="en-US" sz="1100" dirty="0"/>
-          </a:p>
-        </p:txBody>
-      </p:sp>
-      <p:sp>
-        <p:nvSpPr>
           <p:cNvPr id="7" name="Text 5"/>
           <p:cNvSpPr/>
           <p:nvPr/>
         </p:nvSpPr>
         <p:spPr>
           <a:xfrm>
-            <a:off x="1170432" y="2048256"/>
-            <a:ext cx="1371600" cy="402336"/>
-          </a:xfrm>
-          <a:prstGeom prst="rect">
-            <a:avLst/>
-          </a:prstGeom>
-          <a:noFill/>
-          <a:ln/>
-        </p:spPr>
-        <p:txBody>
-          <a:bodyPr wrap="square" lIns="0" tIns="0" rIns="0" bIns="0" rtlCol="0" anchor="ctr"/>
-          <a:lstStyle/>
-          <a:p>
-            <a:pPr indent="0" marL="0">
-              <a:buNone/>
-            </a:pPr>
-            <a:r>
-              <a:rPr lang="en-US" sz="1100" b="1" dirty="0">
-                <a:solidFill>
-                  <a:srgbClr val="2E8F87"/>
-                </a:solidFill>
-                <a:latin typeface="Malgun Gothic" pitchFamily="34" charset="0"/>
-                <a:ea typeface="Malgun Gothic" pitchFamily="34" charset="-122"/>
-                <a:cs typeface="Malgun Gothic" pitchFamily="34" charset="-120"/>
-              </a:rPr>
-              <a:t>1 – 2주차</a:t>
-            </a:r>
-            <a:endParaRPr lang="en-US" sz="1100" dirty="0"/>
+            <a:off x="1024128" y="2130552"/>
+            <a:ext cx="2923946" cy="365760"/>
+          </a:xfrm>
+          <a:prstGeom prst="rect">
+            <a:avLst/>
+          </a:prstGeom>
+          <a:noFill/>
+          <a:ln/>
+        </p:spPr>
+        <p:txBody>
+          <a:bodyPr wrap="square" lIns="0" tIns="0" rIns="0" bIns="0" rtlCol="0" anchor="ctr"/>
+          <a:lstStyle/>
+          <a:p>
+            <a:pPr indent="0" marL="0">
+              <a:buNone/>
+            </a:pPr>
+            <a:r>
+              <a:rPr lang="en-US" sz="1450" b="1" dirty="0">
+                <a:solidFill>
+                  <a:srgbClr val="12191A"/>
+                </a:solidFill>
+                <a:latin typeface="Malgun Gothic" pitchFamily="34" charset="0"/>
+                <a:ea typeface="Malgun Gothic" pitchFamily="34" charset="-122"/>
+                <a:cs typeface="Malgun Gothic" pitchFamily="34" charset="-120"/>
+              </a:rPr>
+              <a:t>노쇼율</a:t>
+            </a:r>
+            <a:endParaRPr lang="en-US" sz="1450" dirty="0"/>
           </a:p>
         </p:txBody>
       </p:sp>
@@ -6315,59 +7297,23 @@
         </p:nvSpPr>
         <p:spPr>
           <a:xfrm>
-            <a:off x="2615184" y="2048256"/>
-            <a:ext cx="2743200" cy="402336"/>
-          </a:xfrm>
-          <a:prstGeom prst="rect">
-            <a:avLst/>
-          </a:prstGeom>
-          <a:noFill/>
-          <a:ln/>
-        </p:spPr>
-        <p:txBody>
-          <a:bodyPr wrap="square" lIns="0" tIns="0" rIns="0" bIns="0" rtlCol="0" anchor="ctr"/>
-          <a:lstStyle/>
-          <a:p>
-            <a:pPr indent="0" marL="0">
-              <a:buNone/>
-            </a:pPr>
-            <a:r>
-              <a:rPr lang="en-US" sz="1400" b="1" dirty="0">
-                <a:solidFill>
-                  <a:srgbClr val="12191A"/>
-                </a:solidFill>
-                <a:latin typeface="Malgun Gothic" pitchFamily="34" charset="0"/>
-                <a:ea typeface="Malgun Gothic" pitchFamily="34" charset="-122"/>
-                <a:cs typeface="Malgun Gothic" pitchFamily="34" charset="-120"/>
-              </a:rPr>
-              <a:t>진단 &amp; 요건 확정</a:t>
-            </a:r>
-            <a:endParaRPr lang="en-US" sz="1400" dirty="0"/>
-          </a:p>
-        </p:txBody>
-      </p:sp>
-      <p:sp>
-        <p:nvSpPr>
-          <p:cNvPr id="9" name="Text 7"/>
-          <p:cNvSpPr/>
-          <p:nvPr/>
-        </p:nvSpPr>
-        <p:spPr>
-          <a:xfrm>
-            <a:off x="5504688" y="2048256"/>
-            <a:ext cx="6120079" cy="402336"/>
-          </a:xfrm>
-          <a:prstGeom prst="rect">
-            <a:avLst/>
-          </a:prstGeom>
-          <a:noFill/>
-          <a:ln/>
-        </p:spPr>
-        <p:txBody>
-          <a:bodyPr wrap="square" lIns="0" tIns="0" rIns="0" bIns="0" rtlCol="0" anchor="ctr"/>
-          <a:lstStyle/>
-          <a:p>
-            <a:pPr indent="0" marL="0">
+            <a:off x="566928" y="2633472"/>
+            <a:ext cx="3198266" cy="1005840"/>
+          </a:xfrm>
+          <a:prstGeom prst="rect">
+            <a:avLst/>
+          </a:prstGeom>
+          <a:noFill/>
+          <a:ln/>
+        </p:spPr>
+        <p:txBody>
+          <a:bodyPr wrap="square" lIns="0" tIns="0" rIns="0" bIns="0" rtlCol="0" anchor="t"/>
+          <a:lstStyle/>
+          <a:p>
+            <a:pPr indent="0" marL="0">
+              <a:lnSpc>
+                <a:spcPts val="1800"/>
+              </a:lnSpc>
               <a:buNone/>
             </a:pPr>
             <a:r>
@@ -6379,7 +7325,7 @@
                 <a:ea typeface="Malgun Gothic" pitchFamily="34" charset="-122"/>
                 <a:cs typeface="Malgun Gothic" pitchFamily="34" charset="-120"/>
               </a:rPr>
-              <a:t>현행 예약 · 상담 프로세스 관찰, 스케줄 규칙 정리, EMR 환경 확인, 기준 지표 측정</a:t>
+              <a:t>예약 대비 미방문 비율. 리마인더 발송 전후를 같은 요일 · 시간대로 비교합니다.</a:t>
             </a:r>
             <a:endParaRPr lang="en-US" sz="1150" dirty="0"/>
           </a:p>
@@ -6387,14 +7333,34 @@
       </p:sp>
       <p:sp>
         <p:nvSpPr>
+          <p:cNvPr id="9" name="Shape 7"/>
+          <p:cNvSpPr/>
+          <p:nvPr/>
+        </p:nvSpPr>
+        <p:spPr>
+          <a:xfrm>
+            <a:off x="4405274" y="2157984"/>
+            <a:ext cx="310896" cy="310896"/>
+          </a:xfrm>
+          <a:prstGeom prst="ellipse">
+            <a:avLst/>
+          </a:prstGeom>
+          <a:solidFill>
+            <a:srgbClr val="EDF3F1"/>
+          </a:solidFill>
+          <a:ln/>
+        </p:spPr>
+      </p:sp>
+      <p:sp>
+        <p:nvSpPr>
           <p:cNvPr id="10" name="Shape 8"/>
           <p:cNvSpPr/>
           <p:nvPr/>
         </p:nvSpPr>
         <p:spPr>
           <a:xfrm>
-            <a:off x="566928" y="2706624"/>
-            <a:ext cx="402336" cy="402336"/>
+            <a:off x="4510430" y="2263140"/>
+            <a:ext cx="100584" cy="100584"/>
           </a:xfrm>
           <a:prstGeom prst="ellipse">
             <a:avLst/>
@@ -6413,34 +7379,34 @@
         </p:nvSpPr>
         <p:spPr>
           <a:xfrm>
-            <a:off x="566928" y="2706624"/>
-            <a:ext cx="402336" cy="402336"/>
-          </a:xfrm>
-          <a:prstGeom prst="rect">
-            <a:avLst/>
-          </a:prstGeom>
-          <a:noFill/>
-          <a:ln/>
-        </p:spPr>
-        <p:txBody>
-          <a:bodyPr wrap="square" lIns="0" tIns="0" rIns="0" bIns="0" rtlCol="0" anchor="ctr"/>
-          <a:lstStyle/>
-          <a:p>
-            <a:pPr algn="ctr" indent="0" marL="0">
-              <a:buNone/>
-            </a:pPr>
-            <a:r>
-              <a:rPr lang="en-US" sz="1100" b="1" dirty="0">
-                <a:solidFill>
-                  <a:srgbClr val="FFFFFF"/>
-                </a:solidFill>
-                <a:latin typeface="Malgun Gothic" pitchFamily="34" charset="0"/>
-                <a:ea typeface="Malgun Gothic" pitchFamily="34" charset="-122"/>
-                <a:cs typeface="Malgun Gothic" pitchFamily="34" charset="-120"/>
-              </a:rPr>
-              <a:t>02</a:t>
-            </a:r>
-            <a:endParaRPr lang="en-US" sz="1100" dirty="0"/>
+            <a:off x="4862474" y="2130552"/>
+            <a:ext cx="2923946" cy="365760"/>
+          </a:xfrm>
+          <a:prstGeom prst="rect">
+            <a:avLst/>
+          </a:prstGeom>
+          <a:noFill/>
+          <a:ln/>
+        </p:spPr>
+        <p:txBody>
+          <a:bodyPr wrap="square" lIns="0" tIns="0" rIns="0" bIns="0" rtlCol="0" anchor="ctr"/>
+          <a:lstStyle/>
+          <a:p>
+            <a:pPr indent="0" marL="0">
+              <a:buNone/>
+            </a:pPr>
+            <a:r>
+              <a:rPr lang="en-US" sz="1450" b="1" dirty="0">
+                <a:solidFill>
+                  <a:srgbClr val="12191A"/>
+                </a:solidFill>
+                <a:latin typeface="Malgun Gothic" pitchFamily="34" charset="0"/>
+                <a:ea typeface="Malgun Gothic" pitchFamily="34" charset="-122"/>
+                <a:cs typeface="Malgun Gothic" pitchFamily="34" charset="-120"/>
+              </a:rPr>
+              <a:t>셀프 예약 비중</a:t>
+            </a:r>
+            <a:endParaRPr lang="en-US" sz="1450" dirty="0"/>
           </a:p>
         </p:txBody>
       </p:sp>
@@ -6452,98 +7418,23 @@
         </p:nvSpPr>
         <p:spPr>
           <a:xfrm>
-            <a:off x="1170432" y="2706624"/>
-            <a:ext cx="1371600" cy="402336"/>
-          </a:xfrm>
-          <a:prstGeom prst="rect">
-            <a:avLst/>
-          </a:prstGeom>
-          <a:noFill/>
-          <a:ln/>
-        </p:spPr>
-        <p:txBody>
-          <a:bodyPr wrap="square" lIns="0" tIns="0" rIns="0" bIns="0" rtlCol="0" anchor="ctr"/>
-          <a:lstStyle/>
-          <a:p>
-            <a:pPr indent="0" marL="0">
-              <a:buNone/>
-            </a:pPr>
-            <a:r>
-              <a:rPr lang="en-US" sz="1100" b="1" dirty="0">
-                <a:solidFill>
-                  <a:srgbClr val="2E8F87"/>
-                </a:solidFill>
-                <a:latin typeface="Malgun Gothic" pitchFamily="34" charset="0"/>
-                <a:ea typeface="Malgun Gothic" pitchFamily="34" charset="-122"/>
-                <a:cs typeface="Malgun Gothic" pitchFamily="34" charset="-120"/>
-              </a:rPr>
-              <a:t>3 – 5주차</a:t>
-            </a:r>
-            <a:endParaRPr lang="en-US" sz="1100" dirty="0"/>
-          </a:p>
-        </p:txBody>
-      </p:sp>
-      <p:sp>
-        <p:nvSpPr>
-          <p:cNvPr id="13" name="Text 11"/>
-          <p:cNvSpPr/>
-          <p:nvPr/>
-        </p:nvSpPr>
-        <p:spPr>
-          <a:xfrm>
-            <a:off x="2615184" y="2706624"/>
-            <a:ext cx="2743200" cy="402336"/>
-          </a:xfrm>
-          <a:prstGeom prst="rect">
-            <a:avLst/>
-          </a:prstGeom>
-          <a:noFill/>
-          <a:ln/>
-        </p:spPr>
-        <p:txBody>
-          <a:bodyPr wrap="square" lIns="0" tIns="0" rIns="0" bIns="0" rtlCol="0" anchor="ctr"/>
-          <a:lstStyle/>
-          <a:p>
-            <a:pPr indent="0" marL="0">
-              <a:buNone/>
-            </a:pPr>
-            <a:r>
-              <a:rPr lang="en-US" sz="1400" b="1" dirty="0">
-                <a:solidFill>
-                  <a:srgbClr val="12191A"/>
-                </a:solidFill>
-                <a:latin typeface="Malgun Gothic" pitchFamily="34" charset="0"/>
-                <a:ea typeface="Malgun Gothic" pitchFamily="34" charset="-122"/>
-                <a:cs typeface="Malgun Gothic" pitchFamily="34" charset="-120"/>
-              </a:rPr>
-              <a:t>코어 구축 &amp; 맞춤 설정</a:t>
-            </a:r>
-            <a:endParaRPr lang="en-US" sz="1400" dirty="0"/>
-          </a:p>
-        </p:txBody>
-      </p:sp>
-      <p:sp>
-        <p:nvSpPr>
-          <p:cNvPr id="14" name="Text 12"/>
-          <p:cNvSpPr/>
-          <p:nvPr/>
-        </p:nvSpPr>
-        <p:spPr>
-          <a:xfrm>
-            <a:off x="5504688" y="2706624"/>
-            <a:ext cx="6120079" cy="402336"/>
-          </a:xfrm>
-          <a:prstGeom prst="rect">
-            <a:avLst/>
-          </a:prstGeom>
-          <a:noFill/>
-          <a:ln/>
-        </p:spPr>
-        <p:txBody>
-          <a:bodyPr wrap="square" lIns="0" tIns="0" rIns="0" bIns="0" rtlCol="0" anchor="ctr"/>
-          <a:lstStyle/>
-          <a:p>
-            <a:pPr indent="0" marL="0">
+            <a:off x="4405274" y="2633472"/>
+            <a:ext cx="3198266" cy="1005840"/>
+          </a:xfrm>
+          <a:prstGeom prst="rect">
+            <a:avLst/>
+          </a:prstGeom>
+          <a:noFill/>
+          <a:ln/>
+        </p:spPr>
+        <p:txBody>
+          <a:bodyPr wrap="square" lIns="0" tIns="0" rIns="0" bIns="0" rtlCol="0" anchor="t"/>
+          <a:lstStyle/>
+          <a:p>
+            <a:pPr indent="0" marL="0">
+              <a:lnSpc>
+                <a:spcPts val="1800"/>
+              </a:lnSpc>
               <a:buNone/>
             </a:pPr>
             <a:r>
@@ -6555,7 +7446,7 @@
                 <a:ea typeface="Malgun Gothic" pitchFamily="34" charset="-122"/>
                 <a:cs typeface="Malgun Gothic" pitchFamily="34" charset="-120"/>
               </a:rPr>
-              <a:t>전용 인스턴스 생성, 의료진 · 슬롯 규칙 설정, 브랜드 디자인 적용, 도메인 연결</a:t>
+              <a:t>전체 예약 중 웹 · 카카오 경유 비율. 데스크 콜 부하와 직결됩니다.</a:t>
             </a:r>
             <a:endParaRPr lang="en-US" sz="1150" dirty="0"/>
           </a:p>
@@ -6563,14 +7454,34 @@
       </p:sp>
       <p:sp>
         <p:nvSpPr>
-          <p:cNvPr id="15" name="Shape 13"/>
-          <p:cNvSpPr/>
-          <p:nvPr/>
-        </p:nvSpPr>
-        <p:spPr>
-          <a:xfrm>
-            <a:off x="566928" y="3364992"/>
-            <a:ext cx="402336" cy="402336"/>
+          <p:cNvPr id="13" name="Shape 11"/>
+          <p:cNvSpPr/>
+          <p:nvPr/>
+        </p:nvSpPr>
+        <p:spPr>
+          <a:xfrm>
+            <a:off x="8243621" y="2157984"/>
+            <a:ext cx="310896" cy="310896"/>
+          </a:xfrm>
+          <a:prstGeom prst="ellipse">
+            <a:avLst/>
+          </a:prstGeom>
+          <a:solidFill>
+            <a:srgbClr val="EDF3F1"/>
+          </a:solidFill>
+          <a:ln/>
+        </p:spPr>
+      </p:sp>
+      <p:sp>
+        <p:nvSpPr>
+          <p:cNvPr id="14" name="Shape 12"/>
+          <p:cNvSpPr/>
+          <p:nvPr/>
+        </p:nvSpPr>
+        <p:spPr>
+          <a:xfrm>
+            <a:off x="8348777" y="2263140"/>
+            <a:ext cx="100584" cy="100584"/>
           </a:xfrm>
           <a:prstGeom prst="ellipse">
             <a:avLst/>
@@ -6583,143 +7494,68 @@
       </p:sp>
       <p:sp>
         <p:nvSpPr>
+          <p:cNvPr id="15" name="Text 13"/>
+          <p:cNvSpPr/>
+          <p:nvPr/>
+        </p:nvSpPr>
+        <p:spPr>
+          <a:xfrm>
+            <a:off x="8700821" y="2130552"/>
+            <a:ext cx="2923946" cy="365760"/>
+          </a:xfrm>
+          <a:prstGeom prst="rect">
+            <a:avLst/>
+          </a:prstGeom>
+          <a:noFill/>
+          <a:ln/>
+        </p:spPr>
+        <p:txBody>
+          <a:bodyPr wrap="square" lIns="0" tIns="0" rIns="0" bIns="0" rtlCol="0" anchor="ctr"/>
+          <a:lstStyle/>
+          <a:p>
+            <a:pPr indent="0" marL="0">
+              <a:buNone/>
+            </a:pPr>
+            <a:r>
+              <a:rPr lang="en-US" sz="1450" b="1" dirty="0">
+                <a:solidFill>
+                  <a:srgbClr val="12191A"/>
+                </a:solidFill>
+                <a:latin typeface="Malgun Gothic" pitchFamily="34" charset="0"/>
+                <a:ea typeface="Malgun Gothic" pitchFamily="34" charset="-122"/>
+                <a:cs typeface="Malgun Gothic" pitchFamily="34" charset="-120"/>
+              </a:rPr>
+              <a:t>슬롯 가동률</a:t>
+            </a:r>
+            <a:endParaRPr lang="en-US" sz="1450" dirty="0"/>
+          </a:p>
+        </p:txBody>
+      </p:sp>
+      <p:sp>
+        <p:nvSpPr>
           <p:cNvPr id="16" name="Text 14"/>
           <p:cNvSpPr/>
           <p:nvPr/>
         </p:nvSpPr>
         <p:spPr>
           <a:xfrm>
-            <a:off x="566928" y="3364992"/>
-            <a:ext cx="402336" cy="402336"/>
-          </a:xfrm>
-          <a:prstGeom prst="rect">
-            <a:avLst/>
-          </a:prstGeom>
-          <a:noFill/>
-          <a:ln/>
-        </p:spPr>
-        <p:txBody>
-          <a:bodyPr wrap="square" lIns="0" tIns="0" rIns="0" bIns="0" rtlCol="0" anchor="ctr"/>
-          <a:lstStyle/>
-          <a:p>
-            <a:pPr algn="ctr" indent="0" marL="0">
-              <a:buNone/>
-            </a:pPr>
-            <a:r>
-              <a:rPr lang="en-US" sz="1100" b="1" dirty="0">
-                <a:solidFill>
-                  <a:srgbClr val="FFFFFF"/>
-                </a:solidFill>
-                <a:latin typeface="Malgun Gothic" pitchFamily="34" charset="0"/>
-                <a:ea typeface="Malgun Gothic" pitchFamily="34" charset="-122"/>
-                <a:cs typeface="Malgun Gothic" pitchFamily="34" charset="-120"/>
-              </a:rPr>
-              <a:t>03</a:t>
-            </a:r>
-            <a:endParaRPr lang="en-US" sz="1100" dirty="0"/>
-          </a:p>
-        </p:txBody>
-      </p:sp>
-      <p:sp>
-        <p:nvSpPr>
-          <p:cNvPr id="17" name="Text 15"/>
-          <p:cNvSpPr/>
-          <p:nvPr/>
-        </p:nvSpPr>
-        <p:spPr>
-          <a:xfrm>
-            <a:off x="1170432" y="3364992"/>
-            <a:ext cx="1371600" cy="402336"/>
-          </a:xfrm>
-          <a:prstGeom prst="rect">
-            <a:avLst/>
-          </a:prstGeom>
-          <a:noFill/>
-          <a:ln/>
-        </p:spPr>
-        <p:txBody>
-          <a:bodyPr wrap="square" lIns="0" tIns="0" rIns="0" bIns="0" rtlCol="0" anchor="ctr"/>
-          <a:lstStyle/>
-          <a:p>
-            <a:pPr indent="0" marL="0">
-              <a:buNone/>
-            </a:pPr>
-            <a:r>
-              <a:rPr lang="en-US" sz="1100" b="1" dirty="0">
-                <a:solidFill>
-                  <a:srgbClr val="2E8F87"/>
-                </a:solidFill>
-                <a:latin typeface="Malgun Gothic" pitchFamily="34" charset="0"/>
-                <a:ea typeface="Malgun Gothic" pitchFamily="34" charset="-122"/>
-                <a:cs typeface="Malgun Gothic" pitchFamily="34" charset="-120"/>
-              </a:rPr>
-              <a:t>5 – 7주차</a:t>
-            </a:r>
-            <a:endParaRPr lang="en-US" sz="1100" dirty="0"/>
-          </a:p>
-        </p:txBody>
-      </p:sp>
-      <p:sp>
-        <p:nvSpPr>
-          <p:cNvPr id="18" name="Text 16"/>
-          <p:cNvSpPr/>
-          <p:nvPr/>
-        </p:nvSpPr>
-        <p:spPr>
-          <a:xfrm>
-            <a:off x="2615184" y="3364992"/>
-            <a:ext cx="2743200" cy="402336"/>
-          </a:xfrm>
-          <a:prstGeom prst="rect">
-            <a:avLst/>
-          </a:prstGeom>
-          <a:noFill/>
-          <a:ln/>
-        </p:spPr>
-        <p:txBody>
-          <a:bodyPr wrap="square" lIns="0" tIns="0" rIns="0" bIns="0" rtlCol="0" anchor="ctr"/>
-          <a:lstStyle/>
-          <a:p>
-            <a:pPr indent="0" marL="0">
-              <a:buNone/>
-            </a:pPr>
-            <a:r>
-              <a:rPr lang="en-US" sz="1400" b="1" dirty="0">
-                <a:solidFill>
-                  <a:srgbClr val="12191A"/>
-                </a:solidFill>
-                <a:latin typeface="Malgun Gothic" pitchFamily="34" charset="0"/>
-                <a:ea typeface="Malgun Gothic" pitchFamily="34" charset="-122"/>
-                <a:cs typeface="Malgun Gothic" pitchFamily="34" charset="-120"/>
-              </a:rPr>
-              <a:t>알림톡 &amp; 채널 연동</a:t>
-            </a:r>
-            <a:endParaRPr lang="en-US" sz="1400" dirty="0"/>
-          </a:p>
-        </p:txBody>
-      </p:sp>
-      <p:sp>
-        <p:nvSpPr>
-          <p:cNvPr id="19" name="Text 17"/>
-          <p:cNvSpPr/>
-          <p:nvPr/>
-        </p:nvSpPr>
-        <p:spPr>
-          <a:xfrm>
-            <a:off x="5504688" y="3364992"/>
-            <a:ext cx="6120079" cy="402336"/>
-          </a:xfrm>
-          <a:prstGeom prst="rect">
-            <a:avLst/>
-          </a:prstGeom>
-          <a:noFill/>
-          <a:ln/>
-        </p:spPr>
-        <p:txBody>
-          <a:bodyPr wrap="square" lIns="0" tIns="0" rIns="0" bIns="0" rtlCol="0" anchor="ctr"/>
-          <a:lstStyle/>
-          <a:p>
-            <a:pPr indent="0" marL="0">
+            <a:off x="8243621" y="2633472"/>
+            <a:ext cx="3198266" cy="1005840"/>
+          </a:xfrm>
+          <a:prstGeom prst="rect">
+            <a:avLst/>
+          </a:prstGeom>
+          <a:noFill/>
+          <a:ln/>
+        </p:spPr>
+        <p:txBody>
+          <a:bodyPr wrap="square" lIns="0" tIns="0" rIns="0" bIns="0" rtlCol="0" anchor="t"/>
+          <a:lstStyle/>
+          <a:p>
+            <a:pPr indent="0" marL="0">
+              <a:lnSpc>
+                <a:spcPts val="1800"/>
+              </a:lnSpc>
               <a:buNone/>
             </a:pPr>
             <a:r>
@@ -6731,7 +7567,7 @@
                 <a:ea typeface="Malgun Gothic" pitchFamily="34" charset="-122"/>
                 <a:cs typeface="Malgun Gothic" pitchFamily="34" charset="-120"/>
               </a:rPr>
-              <a:t>카카오 채널 개설, 템플릿 등록 · 심사, 본인인증 연동, 발송 시나리오 검증</a:t>
+              <a:t>개설 슬롯 대비 실제 진료 건수. 공실 슬롯의 대체 배정 건수를 함께 셉니다.</a:t>
             </a:r>
             <a:endParaRPr lang="en-US" sz="1150" dirty="0"/>
           </a:p>
@@ -6739,14 +7575,34 @@
       </p:sp>
       <p:sp>
         <p:nvSpPr>
-          <p:cNvPr id="20" name="Shape 18"/>
-          <p:cNvSpPr/>
-          <p:nvPr/>
-        </p:nvSpPr>
-        <p:spPr>
-          <a:xfrm>
-            <a:off x="566928" y="4023360"/>
-            <a:ext cx="402336" cy="402336"/>
+          <p:cNvPr id="17" name="Shape 15"/>
+          <p:cNvSpPr/>
+          <p:nvPr/>
+        </p:nvSpPr>
+        <p:spPr>
+          <a:xfrm>
+            <a:off x="566928" y="3895344"/>
+            <a:ext cx="310896" cy="310896"/>
+          </a:xfrm>
+          <a:prstGeom prst="ellipse">
+            <a:avLst/>
+          </a:prstGeom>
+          <a:solidFill>
+            <a:srgbClr val="EDF3F1"/>
+          </a:solidFill>
+          <a:ln/>
+        </p:spPr>
+      </p:sp>
+      <p:sp>
+        <p:nvSpPr>
+          <p:cNvPr id="18" name="Shape 16"/>
+          <p:cNvSpPr/>
+          <p:nvPr/>
+        </p:nvSpPr>
+        <p:spPr>
+          <a:xfrm>
+            <a:off x="672084" y="4000500"/>
+            <a:ext cx="100584" cy="100584"/>
           </a:xfrm>
           <a:prstGeom prst="ellipse">
             <a:avLst/>
@@ -6759,108 +7615,30 @@
       </p:sp>
       <p:sp>
         <p:nvSpPr>
-          <p:cNvPr id="21" name="Text 19"/>
-          <p:cNvSpPr/>
-          <p:nvPr/>
-        </p:nvSpPr>
-        <p:spPr>
-          <a:xfrm>
-            <a:off x="566928" y="4023360"/>
-            <a:ext cx="402336" cy="402336"/>
-          </a:xfrm>
-          <a:prstGeom prst="rect">
-            <a:avLst/>
-          </a:prstGeom>
-          <a:noFill/>
-          <a:ln/>
-        </p:spPr>
-        <p:txBody>
-          <a:bodyPr wrap="square" lIns="0" tIns="0" rIns="0" bIns="0" rtlCol="0" anchor="ctr"/>
-          <a:lstStyle/>
-          <a:p>
-            <a:pPr algn="ctr" indent="0" marL="0">
-              <a:buNone/>
-            </a:pPr>
-            <a:r>
-              <a:rPr lang="en-US" sz="1100" b="1" dirty="0">
-                <a:solidFill>
-                  <a:srgbClr val="FFFFFF"/>
-                </a:solidFill>
-                <a:latin typeface="Malgun Gothic" pitchFamily="34" charset="0"/>
-                <a:ea typeface="Malgun Gothic" pitchFamily="34" charset="-122"/>
-                <a:cs typeface="Malgun Gothic" pitchFamily="34" charset="-120"/>
-              </a:rPr>
-              <a:t>04</a:t>
-            </a:r>
-            <a:endParaRPr lang="en-US" sz="1100" dirty="0"/>
-          </a:p>
-        </p:txBody>
-      </p:sp>
-      <p:sp>
-        <p:nvSpPr>
-          <p:cNvPr id="22" name="Text 20"/>
-          <p:cNvSpPr/>
-          <p:nvPr/>
-        </p:nvSpPr>
-        <p:spPr>
-          <a:xfrm>
-            <a:off x="1170432" y="4023360"/>
-            <a:ext cx="1371600" cy="402336"/>
-          </a:xfrm>
-          <a:prstGeom prst="rect">
-            <a:avLst/>
-          </a:prstGeom>
-          <a:noFill/>
-          <a:ln/>
-        </p:spPr>
-        <p:txBody>
-          <a:bodyPr wrap="square" lIns="0" tIns="0" rIns="0" bIns="0" rtlCol="0" anchor="ctr"/>
-          <a:lstStyle/>
-          <a:p>
-            <a:pPr indent="0" marL="0">
-              <a:buNone/>
-            </a:pPr>
-            <a:r>
-              <a:rPr lang="en-US" sz="1100" b="1" dirty="0">
-                <a:solidFill>
-                  <a:srgbClr val="2E8F87"/>
-                </a:solidFill>
-                <a:latin typeface="Malgun Gothic" pitchFamily="34" charset="0"/>
-                <a:ea typeface="Malgun Gothic" pitchFamily="34" charset="-122"/>
-                <a:cs typeface="Malgun Gothic" pitchFamily="34" charset="-120"/>
-              </a:rPr>
-              <a:t>6 – 9주차</a:t>
-            </a:r>
-            <a:endParaRPr lang="en-US" sz="1100" dirty="0"/>
-          </a:p>
-        </p:txBody>
-      </p:sp>
-      <p:sp>
-        <p:nvSpPr>
-          <p:cNvPr id="23" name="Text 21"/>
-          <p:cNvSpPr/>
-          <p:nvPr/>
-        </p:nvSpPr>
-        <p:spPr>
-          <a:xfrm>
-            <a:off x="2615184" y="4023360"/>
-            <a:ext cx="2743200" cy="402336"/>
-          </a:xfrm>
-          <a:prstGeom prst="rect">
-            <a:avLst/>
-          </a:prstGeom>
-          <a:noFill/>
-          <a:ln/>
-        </p:spPr>
-        <p:txBody>
-          <a:bodyPr wrap="square" lIns="0" tIns="0" rIns="0" bIns="0" rtlCol="0" anchor="ctr"/>
-          <a:lstStyle/>
-          <a:p>
-            <a:pPr indent="0" marL="0">
-              <a:buNone/>
-            </a:pPr>
-            <a:r>
-              <a:rPr lang="en-US" sz="1400" b="1" dirty="0">
+          <p:cNvPr id="19" name="Text 17"/>
+          <p:cNvSpPr/>
+          <p:nvPr/>
+        </p:nvSpPr>
+        <p:spPr>
+          <a:xfrm>
+            <a:off x="1024128" y="3867912"/>
+            <a:ext cx="2923946" cy="365760"/>
+          </a:xfrm>
+          <a:prstGeom prst="rect">
+            <a:avLst/>
+          </a:prstGeom>
+          <a:noFill/>
+          <a:ln/>
+        </p:spPr>
+        <p:txBody>
+          <a:bodyPr wrap="square" lIns="0" tIns="0" rIns="0" bIns="0" rtlCol="0" anchor="ctr"/>
+          <a:lstStyle/>
+          <a:p>
+            <a:pPr indent="0" marL="0">
+              <a:buNone/>
+            </a:pPr>
+            <a:r>
+              <a:rPr lang="en-US" sz="1450" b="1" dirty="0">
                 <a:solidFill>
                   <a:srgbClr val="12191A"/>
                 </a:solidFill>
@@ -6868,34 +7646,37 @@
                 <a:ea typeface="Malgun Gothic" pitchFamily="34" charset="-122"/>
                 <a:cs typeface="Malgun Gothic" pitchFamily="34" charset="-120"/>
               </a:rPr>
-              <a:t>AI 모듈 적용</a:t>
-            </a:r>
-            <a:endParaRPr lang="en-US" sz="1400" dirty="0"/>
-          </a:p>
-        </p:txBody>
-      </p:sp>
-      <p:sp>
-        <p:nvSpPr>
-          <p:cNvPr id="24" name="Text 22"/>
-          <p:cNvSpPr/>
-          <p:nvPr/>
-        </p:nvSpPr>
-        <p:spPr>
-          <a:xfrm>
-            <a:off x="5504688" y="4023360"/>
-            <a:ext cx="6120079" cy="402336"/>
-          </a:xfrm>
-          <a:prstGeom prst="rect">
-            <a:avLst/>
-          </a:prstGeom>
-          <a:noFill/>
-          <a:ln/>
-        </p:spPr>
-        <p:txBody>
-          <a:bodyPr wrap="square" lIns="0" tIns="0" rIns="0" bIns="0" rtlCol="0" anchor="ctr"/>
-          <a:lstStyle/>
-          <a:p>
-            <a:pPr indent="0" marL="0">
+              <a:t>주기 재진입률</a:t>
+            </a:r>
+            <a:endParaRPr lang="en-US" sz="1450" dirty="0"/>
+          </a:p>
+        </p:txBody>
+      </p:sp>
+      <p:sp>
+        <p:nvSpPr>
+          <p:cNvPr id="20" name="Text 18"/>
+          <p:cNvSpPr/>
+          <p:nvPr/>
+        </p:nvSpPr>
+        <p:spPr>
+          <a:xfrm>
+            <a:off x="566928" y="4370832"/>
+            <a:ext cx="3198266" cy="1005840"/>
+          </a:xfrm>
+          <a:prstGeom prst="rect">
+            <a:avLst/>
+          </a:prstGeom>
+          <a:noFill/>
+          <a:ln/>
+        </p:spPr>
+        <p:txBody>
+          <a:bodyPr wrap="square" lIns="0" tIns="0" rIns="0" bIns="0" rtlCol="0" anchor="t"/>
+          <a:lstStyle/>
+          <a:p>
+            <a:pPr indent="0" marL="0">
+              <a:lnSpc>
+                <a:spcPts val="1800"/>
+              </a:lnSpc>
               <a:buNone/>
             </a:pPr>
             <a:r>
@@ -6907,7 +7688,7 @@
                 <a:ea typeface="Malgun Gothic" pitchFamily="34" charset="-122"/>
                 <a:cs typeface="Malgun Gothic" pitchFamily="34" charset="-120"/>
               </a:rPr>
-              <a:t>과거 예약 데이터 이관 후 예측 모델 기준선 학습, 우선순위 높은 모듈부터 순차 활성화</a:t>
+              <a:t>판정 후 90일 내 재방문 비율. 리콜 대상군과 비대상군을 나눠 봅니다.</a:t>
             </a:r>
             <a:endParaRPr lang="en-US" sz="1150" dirty="0"/>
           </a:p>
@@ -6915,14 +7696,34 @@
       </p:sp>
       <p:sp>
         <p:nvSpPr>
-          <p:cNvPr id="25" name="Shape 23"/>
-          <p:cNvSpPr/>
-          <p:nvPr/>
-        </p:nvSpPr>
-        <p:spPr>
-          <a:xfrm>
-            <a:off x="566928" y="4681728"/>
-            <a:ext cx="402336" cy="402336"/>
+          <p:cNvPr id="21" name="Shape 19"/>
+          <p:cNvSpPr/>
+          <p:nvPr/>
+        </p:nvSpPr>
+        <p:spPr>
+          <a:xfrm>
+            <a:off x="4405274" y="3895344"/>
+            <a:ext cx="310896" cy="310896"/>
+          </a:xfrm>
+          <a:prstGeom prst="ellipse">
+            <a:avLst/>
+          </a:prstGeom>
+          <a:solidFill>
+            <a:srgbClr val="EDF3F1"/>
+          </a:solidFill>
+          <a:ln/>
+        </p:spPr>
+      </p:sp>
+      <p:sp>
+        <p:nvSpPr>
+          <p:cNvPr id="22" name="Shape 20"/>
+          <p:cNvSpPr/>
+          <p:nvPr/>
+        </p:nvSpPr>
+        <p:spPr>
+          <a:xfrm>
+            <a:off x="4510430" y="4000500"/>
+            <a:ext cx="100584" cy="100584"/>
           </a:xfrm>
           <a:prstGeom prst="ellipse">
             <a:avLst/>
@@ -6935,108 +7736,30 @@
       </p:sp>
       <p:sp>
         <p:nvSpPr>
-          <p:cNvPr id="26" name="Text 24"/>
-          <p:cNvSpPr/>
-          <p:nvPr/>
-        </p:nvSpPr>
-        <p:spPr>
-          <a:xfrm>
-            <a:off x="566928" y="4681728"/>
-            <a:ext cx="402336" cy="402336"/>
-          </a:xfrm>
-          <a:prstGeom prst="rect">
-            <a:avLst/>
-          </a:prstGeom>
-          <a:noFill/>
-          <a:ln/>
-        </p:spPr>
-        <p:txBody>
-          <a:bodyPr wrap="square" lIns="0" tIns="0" rIns="0" bIns="0" rtlCol="0" anchor="ctr"/>
-          <a:lstStyle/>
-          <a:p>
-            <a:pPr algn="ctr" indent="0" marL="0">
-              <a:buNone/>
-            </a:pPr>
-            <a:r>
-              <a:rPr lang="en-US" sz="1100" b="1" dirty="0">
-                <a:solidFill>
-                  <a:srgbClr val="FFFFFF"/>
-                </a:solidFill>
-                <a:latin typeface="Malgun Gothic" pitchFamily="34" charset="0"/>
-                <a:ea typeface="Malgun Gothic" pitchFamily="34" charset="-122"/>
-                <a:cs typeface="Malgun Gothic" pitchFamily="34" charset="-120"/>
-              </a:rPr>
-              <a:t>05</a:t>
-            </a:r>
-            <a:endParaRPr lang="en-US" sz="1100" dirty="0"/>
-          </a:p>
-        </p:txBody>
-      </p:sp>
-      <p:sp>
-        <p:nvSpPr>
-          <p:cNvPr id="27" name="Text 25"/>
-          <p:cNvSpPr/>
-          <p:nvPr/>
-        </p:nvSpPr>
-        <p:spPr>
-          <a:xfrm>
-            <a:off x="1170432" y="4681728"/>
-            <a:ext cx="1371600" cy="402336"/>
-          </a:xfrm>
-          <a:prstGeom prst="rect">
-            <a:avLst/>
-          </a:prstGeom>
-          <a:noFill/>
-          <a:ln/>
-        </p:spPr>
-        <p:txBody>
-          <a:bodyPr wrap="square" lIns="0" tIns="0" rIns="0" bIns="0" rtlCol="0" anchor="ctr"/>
-          <a:lstStyle/>
-          <a:p>
-            <a:pPr indent="0" marL="0">
-              <a:buNone/>
-            </a:pPr>
-            <a:r>
-              <a:rPr lang="en-US" sz="1100" b="1" dirty="0">
-                <a:solidFill>
-                  <a:srgbClr val="2E8F87"/>
-                </a:solidFill>
-                <a:latin typeface="Malgun Gothic" pitchFamily="34" charset="0"/>
-                <a:ea typeface="Malgun Gothic" pitchFamily="34" charset="-122"/>
-                <a:cs typeface="Malgun Gothic" pitchFamily="34" charset="-120"/>
-              </a:rPr>
-              <a:t>9 – 10주차</a:t>
-            </a:r>
-            <a:endParaRPr lang="en-US" sz="1100" dirty="0"/>
-          </a:p>
-        </p:txBody>
-      </p:sp>
-      <p:sp>
-        <p:nvSpPr>
-          <p:cNvPr id="28" name="Text 26"/>
-          <p:cNvSpPr/>
-          <p:nvPr/>
-        </p:nvSpPr>
-        <p:spPr>
-          <a:xfrm>
-            <a:off x="2615184" y="4681728"/>
-            <a:ext cx="2743200" cy="402336"/>
-          </a:xfrm>
-          <a:prstGeom prst="rect">
-            <a:avLst/>
-          </a:prstGeom>
-          <a:noFill/>
-          <a:ln/>
-        </p:spPr>
-        <p:txBody>
-          <a:bodyPr wrap="square" lIns="0" tIns="0" rIns="0" bIns="0" rtlCol="0" anchor="ctr"/>
-          <a:lstStyle/>
-          <a:p>
-            <a:pPr indent="0" marL="0">
-              <a:buNone/>
-            </a:pPr>
-            <a:r>
-              <a:rPr lang="en-US" sz="1400" b="1" dirty="0">
+          <p:cNvPr id="23" name="Text 21"/>
+          <p:cNvSpPr/>
+          <p:nvPr/>
+        </p:nvSpPr>
+        <p:spPr>
+          <a:xfrm>
+            <a:off x="4862474" y="3867912"/>
+            <a:ext cx="2923946" cy="365760"/>
+          </a:xfrm>
+          <a:prstGeom prst="rect">
+            <a:avLst/>
+          </a:prstGeom>
+          <a:noFill/>
+          <a:ln/>
+        </p:spPr>
+        <p:txBody>
+          <a:bodyPr wrap="square" lIns="0" tIns="0" rIns="0" bIns="0" rtlCol="0" anchor="ctr"/>
+          <a:lstStyle/>
+          <a:p>
+            <a:pPr indent="0" marL="0">
+              <a:buNone/>
+            </a:pPr>
+            <a:r>
+              <a:rPr lang="en-US" sz="1450" b="1" dirty="0">
                 <a:solidFill>
                   <a:srgbClr val="12191A"/>
                 </a:solidFill>
@@ -7044,34 +7767,37 @@
                 <a:ea typeface="Malgun Gothic" pitchFamily="34" charset="-122"/>
                 <a:cs typeface="Malgun Gothic" pitchFamily="34" charset="-120"/>
               </a:rPr>
-              <a:t>교육 &amp; 병행 운영</a:t>
-            </a:r>
-            <a:endParaRPr lang="en-US" sz="1400" dirty="0"/>
-          </a:p>
-        </p:txBody>
-      </p:sp>
-      <p:sp>
-        <p:nvSpPr>
-          <p:cNvPr id="29" name="Text 27"/>
-          <p:cNvSpPr/>
-          <p:nvPr/>
-        </p:nvSpPr>
-        <p:spPr>
-          <a:xfrm>
-            <a:off x="5504688" y="4681728"/>
-            <a:ext cx="6120079" cy="402336"/>
-          </a:xfrm>
-          <a:prstGeom prst="rect">
-            <a:avLst/>
-          </a:prstGeom>
-          <a:noFill/>
-          <a:ln/>
-        </p:spPr>
-        <p:txBody>
-          <a:bodyPr wrap="square" lIns="0" tIns="0" rIns="0" bIns="0" rtlCol="0" anchor="ctr"/>
-          <a:lstStyle/>
-          <a:p>
-            <a:pPr indent="0" marL="0">
+              <a:t>건당 처리 시간</a:t>
+            </a:r>
+            <a:endParaRPr lang="en-US" sz="1450" dirty="0"/>
+          </a:p>
+        </p:txBody>
+      </p:sp>
+      <p:sp>
+        <p:nvSpPr>
+          <p:cNvPr id="24" name="Text 22"/>
+          <p:cNvSpPr/>
+          <p:nvPr/>
+        </p:nvSpPr>
+        <p:spPr>
+          <a:xfrm>
+            <a:off x="4405274" y="4370832"/>
+            <a:ext cx="3198266" cy="1005840"/>
+          </a:xfrm>
+          <a:prstGeom prst="rect">
+            <a:avLst/>
+          </a:prstGeom>
+          <a:noFill/>
+          <a:ln/>
+        </p:spPr>
+        <p:txBody>
+          <a:bodyPr wrap="square" lIns="0" tIns="0" rIns="0" bIns="0" rtlCol="0" anchor="t"/>
+          <a:lstStyle/>
+          <a:p>
+            <a:pPr indent="0" marL="0">
+              <a:lnSpc>
+                <a:spcPts val="1800"/>
+              </a:lnSpc>
               <a:buNone/>
             </a:pPr>
             <a:r>
@@ -7083,7 +7809,7 @@
                 <a:ea typeface="Malgun Gothic" pitchFamily="34" charset="-122"/>
                 <a:cs typeface="Malgun Gothic" pitchFamily="34" charset="-120"/>
               </a:rPr>
-              <a:t>실사용자 교육, 기존 방식과 2주 병행 운영으로 리스크 제거, 현장 피드백 반영</a:t>
+              <a:t>예약 1건을 데스크가 처리하는 데 걸리는 시간. 도입 전 실측치와 비교합니다.</a:t>
             </a:r>
             <a:endParaRPr lang="en-US" sz="1150" dirty="0"/>
           </a:p>
@@ -7091,14 +7817,34 @@
       </p:sp>
       <p:sp>
         <p:nvSpPr>
-          <p:cNvPr id="30" name="Shape 28"/>
-          <p:cNvSpPr/>
-          <p:nvPr/>
-        </p:nvSpPr>
-        <p:spPr>
-          <a:xfrm>
-            <a:off x="566928" y="5340096"/>
-            <a:ext cx="402336" cy="402336"/>
+          <p:cNvPr id="25" name="Shape 23"/>
+          <p:cNvSpPr/>
+          <p:nvPr/>
+        </p:nvSpPr>
+        <p:spPr>
+          <a:xfrm>
+            <a:off x="8243621" y="3895344"/>
+            <a:ext cx="310896" cy="310896"/>
+          </a:xfrm>
+          <a:prstGeom prst="ellipse">
+            <a:avLst/>
+          </a:prstGeom>
+          <a:solidFill>
+            <a:srgbClr val="EDF3F1"/>
+          </a:solidFill>
+          <a:ln/>
+        </p:spPr>
+      </p:sp>
+      <p:sp>
+        <p:nvSpPr>
+          <p:cNvPr id="26" name="Shape 24"/>
+          <p:cNvSpPr/>
+          <p:nvPr/>
+        </p:nvSpPr>
+        <p:spPr>
+          <a:xfrm>
+            <a:off x="8348777" y="4000500"/>
+            <a:ext cx="100584" cy="100584"/>
           </a:xfrm>
           <a:prstGeom prst="ellipse">
             <a:avLst/>
@@ -7111,163 +7857,150 @@
       </p:sp>
       <p:sp>
         <p:nvSpPr>
+          <p:cNvPr id="27" name="Text 25"/>
+          <p:cNvSpPr/>
+          <p:nvPr/>
+        </p:nvSpPr>
+        <p:spPr>
+          <a:xfrm>
+            <a:off x="8700821" y="3867912"/>
+            <a:ext cx="2923946" cy="365760"/>
+          </a:xfrm>
+          <a:prstGeom prst="rect">
+            <a:avLst/>
+          </a:prstGeom>
+          <a:noFill/>
+          <a:ln/>
+        </p:spPr>
+        <p:txBody>
+          <a:bodyPr wrap="square" lIns="0" tIns="0" rIns="0" bIns="0" rtlCol="0" anchor="ctr"/>
+          <a:lstStyle/>
+          <a:p>
+            <a:pPr indent="0" marL="0">
+              <a:buNone/>
+            </a:pPr>
+            <a:r>
+              <a:rPr lang="en-US" sz="1450" b="1" dirty="0">
+                <a:solidFill>
+                  <a:srgbClr val="12191A"/>
+                </a:solidFill>
+                <a:latin typeface="Malgun Gothic" pitchFamily="34" charset="0"/>
+                <a:ea typeface="Malgun Gothic" pitchFamily="34" charset="-122"/>
+                <a:cs typeface="Malgun Gothic" pitchFamily="34" charset="-120"/>
+              </a:rPr>
+              <a:t>변경 요청 처리</a:t>
+            </a:r>
+            <a:endParaRPr lang="en-US" sz="1450" dirty="0"/>
+          </a:p>
+        </p:txBody>
+      </p:sp>
+      <p:sp>
+        <p:nvSpPr>
+          <p:cNvPr id="28" name="Text 26"/>
+          <p:cNvSpPr/>
+          <p:nvPr/>
+        </p:nvSpPr>
+        <p:spPr>
+          <a:xfrm>
+            <a:off x="8243621" y="4370832"/>
+            <a:ext cx="3198266" cy="1005840"/>
+          </a:xfrm>
+          <a:prstGeom prst="rect">
+            <a:avLst/>
+          </a:prstGeom>
+          <a:noFill/>
+          <a:ln/>
+        </p:spPr>
+        <p:txBody>
+          <a:bodyPr wrap="square" lIns="0" tIns="0" rIns="0" bIns="0" rtlCol="0" anchor="t"/>
+          <a:lstStyle/>
+          <a:p>
+            <a:pPr indent="0" marL="0">
+              <a:lnSpc>
+                <a:spcPts val="1800"/>
+              </a:lnSpc>
+              <a:buNone/>
+            </a:pPr>
+            <a:r>
+              <a:rPr lang="en-US" sz="1150" dirty="0">
+                <a:solidFill>
+                  <a:srgbClr val="5F6F70"/>
+                </a:solidFill>
+                <a:latin typeface="Malgun Gothic" pitchFamily="34" charset="0"/>
+                <a:ea typeface="Malgun Gothic" pitchFamily="34" charset="-122"/>
+                <a:cs typeface="Malgun Gothic" pitchFamily="34" charset="-120"/>
+              </a:rPr>
+              <a:t>환자 변경 · 취소 요청의 접수부터 확정까지 소요 시간과 누락 건수.</a:t>
+            </a:r>
+            <a:endParaRPr lang="en-US" sz="1150" dirty="0"/>
+          </a:p>
+        </p:txBody>
+      </p:sp>
+      <p:sp>
+        <p:nvSpPr>
+          <p:cNvPr id="29" name="Shape 27"/>
+          <p:cNvSpPr/>
+          <p:nvPr/>
+        </p:nvSpPr>
+        <p:spPr>
+          <a:xfrm>
+            <a:off x="566928" y="5632704"/>
+            <a:ext cx="10234879" cy="566928"/>
+          </a:xfrm>
+          <a:prstGeom prst="rect">
+            <a:avLst/>
+          </a:prstGeom>
+          <a:solidFill>
+            <a:srgbClr val="EDF3F1"/>
+          </a:solidFill>
+          <a:ln/>
+        </p:spPr>
+      </p:sp>
+      <p:sp>
+        <p:nvSpPr>
+          <p:cNvPr id="30" name="Text 28"/>
+          <p:cNvSpPr/>
+          <p:nvPr/>
+        </p:nvSpPr>
+        <p:spPr>
+          <a:xfrm>
+            <a:off x="859536" y="5632704"/>
+            <a:ext cx="9649663" cy="566928"/>
+          </a:xfrm>
+          <a:prstGeom prst="rect">
+            <a:avLst/>
+          </a:prstGeom>
+          <a:noFill/>
+          <a:ln/>
+        </p:spPr>
+        <p:txBody>
+          <a:bodyPr wrap="square" lIns="0" tIns="0" rIns="0" bIns="0" rtlCol="0" anchor="ctr"/>
+          <a:lstStyle/>
+          <a:p>
+            <a:pPr indent="0" marL="0">
+              <a:lnSpc>
+                <a:spcPts val="1600"/>
+              </a:lnSpc>
+              <a:buNone/>
+            </a:pPr>
+            <a:r>
+              <a:rPr lang="en-US" sz="1100" dirty="0">
+                <a:solidFill>
+                  <a:srgbClr val="0D5257"/>
+                </a:solidFill>
+                <a:latin typeface="Malgun Gothic" pitchFamily="34" charset="0"/>
+                <a:ea typeface="Malgun Gothic" pitchFamily="34" charset="-122"/>
+                <a:cs typeface="Malgun Gothic" pitchFamily="34" charset="-120"/>
+              </a:rPr>
+              <a:t>마리아병원의 노쇼율 · 콜 인입량 같은 실측 운영 수치는 병원의 자산이므로 공개하지 않습니다. 영업 자료에 다른 병원의 숫자를 쓰지 않는 것이 저희 원칙입니다.</a:t>
+            </a:r>
+            <a:endParaRPr lang="en-US" sz="1100" dirty="0"/>
+          </a:p>
+        </p:txBody>
+      </p:sp>
+      <p:sp>
+        <p:nvSpPr>
           <p:cNvPr id="31" name="Text 29"/>
-          <p:cNvSpPr/>
-          <p:nvPr/>
-        </p:nvSpPr>
-        <p:spPr>
-          <a:xfrm>
-            <a:off x="566928" y="5340096"/>
-            <a:ext cx="402336" cy="402336"/>
-          </a:xfrm>
-          <a:prstGeom prst="rect">
-            <a:avLst/>
-          </a:prstGeom>
-          <a:noFill/>
-          <a:ln/>
-        </p:spPr>
-        <p:txBody>
-          <a:bodyPr wrap="square" lIns="0" tIns="0" rIns="0" bIns="0" rtlCol="0" anchor="ctr"/>
-          <a:lstStyle/>
-          <a:p>
-            <a:pPr algn="ctr" indent="0" marL="0">
-              <a:buNone/>
-            </a:pPr>
-            <a:r>
-              <a:rPr lang="en-US" sz="1100" b="1" dirty="0">
-                <a:solidFill>
-                  <a:srgbClr val="FFFFFF"/>
-                </a:solidFill>
-                <a:latin typeface="Malgun Gothic" pitchFamily="34" charset="0"/>
-                <a:ea typeface="Malgun Gothic" pitchFamily="34" charset="-122"/>
-                <a:cs typeface="Malgun Gothic" pitchFamily="34" charset="-120"/>
-              </a:rPr>
-              <a:t>06</a:t>
-            </a:r>
-            <a:endParaRPr lang="en-US" sz="1100" dirty="0"/>
-          </a:p>
-        </p:txBody>
-      </p:sp>
-      <p:sp>
-        <p:nvSpPr>
-          <p:cNvPr id="32" name="Text 30"/>
-          <p:cNvSpPr/>
-          <p:nvPr/>
-        </p:nvSpPr>
-        <p:spPr>
-          <a:xfrm>
-            <a:off x="1170432" y="5340096"/>
-            <a:ext cx="1371600" cy="402336"/>
-          </a:xfrm>
-          <a:prstGeom prst="rect">
-            <a:avLst/>
-          </a:prstGeom>
-          <a:noFill/>
-          <a:ln/>
-        </p:spPr>
-        <p:txBody>
-          <a:bodyPr wrap="square" lIns="0" tIns="0" rIns="0" bIns="0" rtlCol="0" anchor="ctr"/>
-          <a:lstStyle/>
-          <a:p>
-            <a:pPr indent="0" marL="0">
-              <a:buNone/>
-            </a:pPr>
-            <a:r>
-              <a:rPr lang="en-US" sz="1100" b="1" dirty="0">
-                <a:solidFill>
-                  <a:srgbClr val="2E8F87"/>
-                </a:solidFill>
-                <a:latin typeface="Malgun Gothic" pitchFamily="34" charset="0"/>
-                <a:ea typeface="Malgun Gothic" pitchFamily="34" charset="-122"/>
-                <a:cs typeface="Malgun Gothic" pitchFamily="34" charset="-120"/>
-              </a:rPr>
-              <a:t>11 – 12주차</a:t>
-            </a:r>
-            <a:endParaRPr lang="en-US" sz="1100" dirty="0"/>
-          </a:p>
-        </p:txBody>
-      </p:sp>
-      <p:sp>
-        <p:nvSpPr>
-          <p:cNvPr id="33" name="Text 31"/>
-          <p:cNvSpPr/>
-          <p:nvPr/>
-        </p:nvSpPr>
-        <p:spPr>
-          <a:xfrm>
-            <a:off x="2615184" y="5340096"/>
-            <a:ext cx="2743200" cy="402336"/>
-          </a:xfrm>
-          <a:prstGeom prst="rect">
-            <a:avLst/>
-          </a:prstGeom>
-          <a:noFill/>
-          <a:ln/>
-        </p:spPr>
-        <p:txBody>
-          <a:bodyPr wrap="square" lIns="0" tIns="0" rIns="0" bIns="0" rtlCol="0" anchor="ctr"/>
-          <a:lstStyle/>
-          <a:p>
-            <a:pPr indent="0" marL="0">
-              <a:buNone/>
-            </a:pPr>
-            <a:r>
-              <a:rPr lang="en-US" sz="1400" b="1" dirty="0">
-                <a:solidFill>
-                  <a:srgbClr val="12191A"/>
-                </a:solidFill>
-                <a:latin typeface="Malgun Gothic" pitchFamily="34" charset="0"/>
-                <a:ea typeface="Malgun Gothic" pitchFamily="34" charset="-122"/>
-                <a:cs typeface="Malgun Gothic" pitchFamily="34" charset="-120"/>
-              </a:rPr>
-              <a:t>정식 오픈 &amp; 안정화</a:t>
-            </a:r>
-            <a:endParaRPr lang="en-US" sz="1400" dirty="0"/>
-          </a:p>
-        </p:txBody>
-      </p:sp>
-      <p:sp>
-        <p:nvSpPr>
-          <p:cNvPr id="34" name="Text 32"/>
-          <p:cNvSpPr/>
-          <p:nvPr/>
-        </p:nvSpPr>
-        <p:spPr>
-          <a:xfrm>
-            <a:off x="5504688" y="5340096"/>
-            <a:ext cx="6120079" cy="402336"/>
-          </a:xfrm>
-          <a:prstGeom prst="rect">
-            <a:avLst/>
-          </a:prstGeom>
-          <a:noFill/>
-          <a:ln/>
-        </p:spPr>
-        <p:txBody>
-          <a:bodyPr wrap="square" lIns="0" tIns="0" rIns="0" bIns="0" rtlCol="0" anchor="ctr"/>
-          <a:lstStyle/>
-          <a:p>
-            <a:pPr indent="0" marL="0">
-              <a:buNone/>
-            </a:pPr>
-            <a:r>
-              <a:rPr lang="en-US" sz="1150" dirty="0">
-                <a:solidFill>
-                  <a:srgbClr val="5F6F70"/>
-                </a:solidFill>
-                <a:latin typeface="Malgun Gothic" pitchFamily="34" charset="0"/>
-                <a:ea typeface="Malgun Gothic" pitchFamily="34" charset="-122"/>
-                <a:cs typeface="Malgun Gothic" pitchFamily="34" charset="-120"/>
-              </a:rPr>
-              <a:t>전면 전환, 초기 2주 밀착 대응, 지표 리포트 체계 가동</a:t>
-            </a:r>
-            <a:endParaRPr lang="en-US" sz="1150" dirty="0"/>
-          </a:p>
-        </p:txBody>
-      </p:sp>
-      <p:sp>
-        <p:nvSpPr>
-          <p:cNvPr id="35" name="Text 33"/>
           <p:cNvSpPr/>
           <p:nvPr/>
         </p:nvSpPr>
@@ -7369,7 +8102,7 @@
                 <a:ea typeface="Malgun Gothic" pitchFamily="34" charset="-122"/>
                 <a:cs typeface="Malgun Gothic" pitchFamily="34" charset="-120"/>
               </a:rPr>
-              <a:t>신뢰</a:t>
+              <a:t>도입</a:t>
             </a:r>
             <a:endParaRPr lang="en-US" sz="1150" dirty="0"/>
           </a:p>
@@ -7408,7 +8141,7 @@
                 <a:ea typeface="Malgun Gothic" pitchFamily="34" charset="-122"/>
                 <a:cs typeface="Malgun Gothic" pitchFamily="34" charset="-120"/>
               </a:rPr>
-              <a:t>보안 및 컴플라이언스</a:t>
+              <a:t>도입 방안 — 표준 12주</a:t>
             </a:r>
             <a:endParaRPr lang="en-US" sz="3100" dirty="0"/>
           </a:p>
@@ -7423,7 +8156,7 @@
         <p:spPr>
           <a:xfrm>
             <a:off x="566928" y="1426464"/>
-            <a:ext cx="10241280" cy="475488"/>
+            <a:ext cx="10241280" cy="548640"/>
           </a:xfrm>
           <a:prstGeom prst="rect">
             <a:avLst/>
@@ -7450,7 +8183,7 @@
                 <a:ea typeface="Malgun Gothic" pitchFamily="34" charset="-122"/>
                 <a:cs typeface="Malgun Gothic" pitchFamily="34" charset="-120"/>
               </a:rPr>
-              <a:t>난임 진료 정보는 가장 민감한 개인정보에 속합니다. 기술적 조치와 운영 규칙을 함께 설계합니다.</a:t>
+              <a:t>코어가 이미 완성되어 있으므로 기간의 대부분은 개발이 아니라 귀 병원의 진료 규칙을 반영하는 작업에 쓰입니다. 병원에서 실제로 필요한 시간을 단계마다 적었습니다.</a:t>
             </a:r>
             <a:endParaRPr lang="en-US" sz="1350" dirty="0"/>
           </a:p>
@@ -7458,16 +8191,1518 @@
       </p:sp>
       <p:sp>
         <p:nvSpPr>
-          <p:cNvPr id="5" name="Shape 3"/>
-          <p:cNvSpPr/>
-          <p:nvPr/>
-        </p:nvSpPr>
-        <p:spPr>
-          <a:xfrm>
-            <a:off x="566928" y="2048256"/>
-            <a:ext cx="310896" cy="310896"/>
+          <p:cNvPr id="5" name="Text 3"/>
+          <p:cNvSpPr/>
+          <p:nvPr/>
+        </p:nvSpPr>
+        <p:spPr>
+          <a:xfrm>
+            <a:off x="1133856" y="2066544"/>
+            <a:ext cx="1188720" cy="237744"/>
+          </a:xfrm>
+          <a:prstGeom prst="rect">
+            <a:avLst/>
+          </a:prstGeom>
+          <a:noFill/>
+          <a:ln/>
+        </p:spPr>
+        <p:txBody>
+          <a:bodyPr wrap="square" lIns="0" tIns="0" rIns="0" bIns="0" rtlCol="0" anchor="ctr"/>
+          <a:lstStyle/>
+          <a:p>
+            <a:pPr indent="0" marL="0">
+              <a:buNone/>
+            </a:pPr>
+            <a:r>
+              <a:rPr lang="en-US" sz="1000" b="1" dirty="0">
+                <a:solidFill>
+                  <a:srgbClr val="8C9A99"/>
+                </a:solidFill>
+                <a:latin typeface="Malgun Gothic" pitchFamily="34" charset="0"/>
+                <a:ea typeface="Malgun Gothic" pitchFamily="34" charset="-122"/>
+                <a:cs typeface="Malgun Gothic" pitchFamily="34" charset="-120"/>
+              </a:rPr>
+              <a:t>주차</a:t>
+            </a:r>
+            <a:endParaRPr lang="en-US" sz="1000" dirty="0"/>
+          </a:p>
+        </p:txBody>
+      </p:sp>
+      <p:sp>
+        <p:nvSpPr>
+          <p:cNvPr id="6" name="Text 4"/>
+          <p:cNvSpPr/>
+          <p:nvPr/>
+        </p:nvSpPr>
+        <p:spPr>
+          <a:xfrm>
+            <a:off x="2395728" y="2066544"/>
+            <a:ext cx="2286000" cy="237744"/>
+          </a:xfrm>
+          <a:prstGeom prst="rect">
+            <a:avLst/>
+          </a:prstGeom>
+          <a:noFill/>
+          <a:ln/>
+        </p:spPr>
+        <p:txBody>
+          <a:bodyPr wrap="square" lIns="0" tIns="0" rIns="0" bIns="0" rtlCol="0" anchor="ctr"/>
+          <a:lstStyle/>
+          <a:p>
+            <a:pPr indent="0" marL="0">
+              <a:buNone/>
+            </a:pPr>
+            <a:r>
+              <a:rPr lang="en-US" sz="1000" b="1" dirty="0">
+                <a:solidFill>
+                  <a:srgbClr val="8C9A99"/>
+                </a:solidFill>
+                <a:latin typeface="Malgun Gothic" pitchFamily="34" charset="0"/>
+                <a:ea typeface="Malgun Gothic" pitchFamily="34" charset="-122"/>
+                <a:cs typeface="Malgun Gothic" pitchFamily="34" charset="-120"/>
+              </a:rPr>
+              <a:t>단계</a:t>
+            </a:r>
+            <a:endParaRPr lang="en-US" sz="1000" dirty="0"/>
+          </a:p>
+        </p:txBody>
+      </p:sp>
+      <p:sp>
+        <p:nvSpPr>
+          <p:cNvPr id="7" name="Text 5"/>
+          <p:cNvSpPr/>
+          <p:nvPr/>
+        </p:nvSpPr>
+        <p:spPr>
+          <a:xfrm>
+            <a:off x="4773168" y="2066544"/>
+            <a:ext cx="3657600" cy="237744"/>
+          </a:xfrm>
+          <a:prstGeom prst="rect">
+            <a:avLst/>
+          </a:prstGeom>
+          <a:noFill/>
+          <a:ln/>
+        </p:spPr>
+        <p:txBody>
+          <a:bodyPr wrap="square" lIns="0" tIns="0" rIns="0" bIns="0" rtlCol="0" anchor="ctr"/>
+          <a:lstStyle/>
+          <a:p>
+            <a:pPr indent="0" marL="0">
+              <a:buNone/>
+            </a:pPr>
+            <a:r>
+              <a:rPr lang="en-US" sz="1000" b="1" dirty="0">
+                <a:solidFill>
+                  <a:srgbClr val="8C9A99"/>
+                </a:solidFill>
+                <a:latin typeface="Malgun Gothic" pitchFamily="34" charset="0"/>
+                <a:ea typeface="Malgun Gothic" pitchFamily="34" charset="-122"/>
+                <a:cs typeface="Malgun Gothic" pitchFamily="34" charset="-120"/>
+              </a:rPr>
+              <a:t>주요 작업</a:t>
+            </a:r>
+            <a:endParaRPr lang="en-US" sz="1000" dirty="0"/>
+          </a:p>
+        </p:txBody>
+      </p:sp>
+      <p:sp>
+        <p:nvSpPr>
+          <p:cNvPr id="8" name="Text 6"/>
+          <p:cNvSpPr/>
+          <p:nvPr/>
+        </p:nvSpPr>
+        <p:spPr>
+          <a:xfrm>
+            <a:off x="8567928" y="2066544"/>
+            <a:ext cx="3054096" cy="237744"/>
+          </a:xfrm>
+          <a:prstGeom prst="rect">
+            <a:avLst/>
+          </a:prstGeom>
+          <a:noFill/>
+          <a:ln/>
+        </p:spPr>
+        <p:txBody>
+          <a:bodyPr wrap="square" lIns="0" tIns="0" rIns="0" bIns="0" rtlCol="0" anchor="ctr"/>
+          <a:lstStyle/>
+          <a:p>
+            <a:pPr indent="0" marL="0">
+              <a:buNone/>
+            </a:pPr>
+            <a:r>
+              <a:rPr lang="en-US" sz="1000" b="1" dirty="0">
+                <a:solidFill>
+                  <a:srgbClr val="8C9A99"/>
+                </a:solidFill>
+                <a:latin typeface="Malgun Gothic" pitchFamily="34" charset="0"/>
+                <a:ea typeface="Malgun Gothic" pitchFamily="34" charset="-122"/>
+                <a:cs typeface="Malgun Gothic" pitchFamily="34" charset="-120"/>
+              </a:rPr>
+              <a:t>병원 측 투입</a:t>
+            </a:r>
+            <a:endParaRPr lang="en-US" sz="1000" dirty="0"/>
+          </a:p>
+        </p:txBody>
+      </p:sp>
+      <p:sp>
+        <p:nvSpPr>
+          <p:cNvPr id="9" name="Shape 7"/>
+          <p:cNvSpPr/>
+          <p:nvPr/>
+        </p:nvSpPr>
+        <p:spPr>
+          <a:xfrm>
+            <a:off x="566928" y="2322576"/>
+            <a:ext cx="11057839" cy="18288"/>
+          </a:xfrm>
+          <a:prstGeom prst="rect">
+            <a:avLst/>
+          </a:prstGeom>
+          <a:solidFill>
+            <a:srgbClr val="12191A"/>
+          </a:solidFill>
+          <a:ln/>
+        </p:spPr>
+      </p:sp>
+      <p:sp>
+        <p:nvSpPr>
+          <p:cNvPr id="10" name="Shape 8"/>
+          <p:cNvSpPr/>
+          <p:nvPr/>
+        </p:nvSpPr>
+        <p:spPr>
+          <a:xfrm>
+            <a:off x="566928" y="2523744"/>
+            <a:ext cx="384048" cy="384048"/>
           </a:xfrm>
           <a:prstGeom prst="ellipse">
+            <a:avLst/>
+          </a:prstGeom>
+          <a:solidFill>
+            <a:srgbClr val="0D5257"/>
+          </a:solidFill>
+          <a:ln/>
+        </p:spPr>
+      </p:sp>
+      <p:sp>
+        <p:nvSpPr>
+          <p:cNvPr id="11" name="Text 9"/>
+          <p:cNvSpPr/>
+          <p:nvPr/>
+        </p:nvSpPr>
+        <p:spPr>
+          <a:xfrm>
+            <a:off x="566928" y="2523744"/>
+            <a:ext cx="384048" cy="384048"/>
+          </a:xfrm>
+          <a:prstGeom prst="rect">
+            <a:avLst/>
+          </a:prstGeom>
+          <a:noFill/>
+          <a:ln/>
+        </p:spPr>
+        <p:txBody>
+          <a:bodyPr wrap="square" lIns="0" tIns="0" rIns="0" bIns="0" rtlCol="0" anchor="ctr"/>
+          <a:lstStyle/>
+          <a:p>
+            <a:pPr algn="ctr" indent="0" marL="0">
+              <a:buNone/>
+            </a:pPr>
+            <a:r>
+              <a:rPr lang="en-US" sz="1050" b="1" dirty="0">
+                <a:solidFill>
+                  <a:srgbClr val="FFFFFF"/>
+                </a:solidFill>
+                <a:latin typeface="Malgun Gothic" pitchFamily="34" charset="0"/>
+                <a:ea typeface="Malgun Gothic" pitchFamily="34" charset="-122"/>
+                <a:cs typeface="Malgun Gothic" pitchFamily="34" charset="-120"/>
+              </a:rPr>
+              <a:t>01</a:t>
+            </a:r>
+            <a:endParaRPr lang="en-US" sz="1050" dirty="0"/>
+          </a:p>
+        </p:txBody>
+      </p:sp>
+      <p:sp>
+        <p:nvSpPr>
+          <p:cNvPr id="12" name="Text 10"/>
+          <p:cNvSpPr/>
+          <p:nvPr/>
+        </p:nvSpPr>
+        <p:spPr>
+          <a:xfrm>
+            <a:off x="1133856" y="2468880"/>
+            <a:ext cx="1188720" cy="493776"/>
+          </a:xfrm>
+          <a:prstGeom prst="rect">
+            <a:avLst/>
+          </a:prstGeom>
+          <a:noFill/>
+          <a:ln/>
+        </p:spPr>
+        <p:txBody>
+          <a:bodyPr wrap="square" lIns="0" tIns="0" rIns="0" bIns="0" rtlCol="0" anchor="ctr"/>
+          <a:lstStyle/>
+          <a:p>
+            <a:pPr indent="0" marL="0">
+              <a:buNone/>
+            </a:pPr>
+            <a:r>
+              <a:rPr lang="en-US" sz="1050" b="1" dirty="0">
+                <a:solidFill>
+                  <a:srgbClr val="2E8F87"/>
+                </a:solidFill>
+                <a:latin typeface="Malgun Gothic" pitchFamily="34" charset="0"/>
+                <a:ea typeface="Malgun Gothic" pitchFamily="34" charset="-122"/>
+                <a:cs typeface="Malgun Gothic" pitchFamily="34" charset="-120"/>
+              </a:rPr>
+              <a:t>1 – 2주차</a:t>
+            </a:r>
+            <a:endParaRPr lang="en-US" sz="1050" dirty="0"/>
+          </a:p>
+        </p:txBody>
+      </p:sp>
+      <p:sp>
+        <p:nvSpPr>
+          <p:cNvPr id="13" name="Text 11"/>
+          <p:cNvSpPr/>
+          <p:nvPr/>
+        </p:nvSpPr>
+        <p:spPr>
+          <a:xfrm>
+            <a:off x="2395728" y="2468880"/>
+            <a:ext cx="2286000" cy="493776"/>
+          </a:xfrm>
+          <a:prstGeom prst="rect">
+            <a:avLst/>
+          </a:prstGeom>
+          <a:noFill/>
+          <a:ln/>
+        </p:spPr>
+        <p:txBody>
+          <a:bodyPr wrap="square" lIns="0" tIns="0" rIns="0" bIns="0" rtlCol="0" anchor="ctr"/>
+          <a:lstStyle/>
+          <a:p>
+            <a:pPr indent="0" marL="0">
+              <a:buNone/>
+            </a:pPr>
+            <a:r>
+              <a:rPr lang="en-US" sz="1300" b="1" dirty="0">
+                <a:solidFill>
+                  <a:srgbClr val="12191A"/>
+                </a:solidFill>
+                <a:latin typeface="Malgun Gothic" pitchFamily="34" charset="0"/>
+                <a:ea typeface="Malgun Gothic" pitchFamily="34" charset="-122"/>
+                <a:cs typeface="Malgun Gothic" pitchFamily="34" charset="-120"/>
+              </a:rPr>
+              <a:t>진단 &amp; 요건 확정</a:t>
+            </a:r>
+            <a:endParaRPr lang="en-US" sz="1300" dirty="0"/>
+          </a:p>
+        </p:txBody>
+      </p:sp>
+      <p:sp>
+        <p:nvSpPr>
+          <p:cNvPr id="14" name="Text 12"/>
+          <p:cNvSpPr/>
+          <p:nvPr/>
+        </p:nvSpPr>
+        <p:spPr>
+          <a:xfrm>
+            <a:off x="4773168" y="2468880"/>
+            <a:ext cx="3657600" cy="493776"/>
+          </a:xfrm>
+          <a:prstGeom prst="rect">
+            <a:avLst/>
+          </a:prstGeom>
+          <a:noFill/>
+          <a:ln/>
+        </p:spPr>
+        <p:txBody>
+          <a:bodyPr wrap="square" lIns="0" tIns="0" rIns="0" bIns="0" rtlCol="0" anchor="ctr"/>
+          <a:lstStyle/>
+          <a:p>
+            <a:pPr indent="0" marL="0">
+              <a:lnSpc>
+                <a:spcPts val="1400"/>
+              </a:lnSpc>
+              <a:buNone/>
+            </a:pPr>
+            <a:r>
+              <a:rPr lang="en-US" sz="1050" dirty="0">
+                <a:solidFill>
+                  <a:srgbClr val="5F6F70"/>
+                </a:solidFill>
+                <a:latin typeface="Malgun Gothic" pitchFamily="34" charset="0"/>
+                <a:ea typeface="Malgun Gothic" pitchFamily="34" charset="-122"/>
+                <a:cs typeface="Malgun Gothic" pitchFamily="34" charset="-120"/>
+              </a:rPr>
+              <a:t>현행 프로세스 관찰, 스케줄 규칙 정리, EMR 환경 확인, 기준 지표 측정</a:t>
+            </a:r>
+            <a:endParaRPr lang="en-US" sz="1050" dirty="0"/>
+          </a:p>
+        </p:txBody>
+      </p:sp>
+      <p:sp>
+        <p:nvSpPr>
+          <p:cNvPr id="15" name="Text 13"/>
+          <p:cNvSpPr/>
+          <p:nvPr/>
+        </p:nvSpPr>
+        <p:spPr>
+          <a:xfrm>
+            <a:off x="8567928" y="2468880"/>
+            <a:ext cx="3054096" cy="493776"/>
+          </a:xfrm>
+          <a:prstGeom prst="rect">
+            <a:avLst/>
+          </a:prstGeom>
+          <a:noFill/>
+          <a:ln/>
+        </p:spPr>
+        <p:txBody>
+          <a:bodyPr wrap="square" lIns="0" tIns="0" rIns="0" bIns="0" rtlCol="0" anchor="ctr"/>
+          <a:lstStyle/>
+          <a:p>
+            <a:pPr indent="0" marL="0">
+              <a:lnSpc>
+                <a:spcPts val="1400"/>
+              </a:lnSpc>
+              <a:buNone/>
+            </a:pPr>
+            <a:r>
+              <a:rPr lang="en-US" sz="1050" dirty="0">
+                <a:solidFill>
+                  <a:srgbClr val="8F6716"/>
+                </a:solidFill>
+                <a:latin typeface="Malgun Gothic" pitchFamily="34" charset="0"/>
+                <a:ea typeface="Malgun Gothic" pitchFamily="34" charset="-122"/>
+                <a:cs typeface="Malgun Gothic" pitchFamily="34" charset="-120"/>
+              </a:rPr>
+              <a:t>원무팀장 주 4시간 · 대표원장 60분</a:t>
+            </a:r>
+            <a:endParaRPr lang="en-US" sz="1050" dirty="0"/>
+          </a:p>
+        </p:txBody>
+      </p:sp>
+      <p:sp>
+        <p:nvSpPr>
+          <p:cNvPr id="16" name="Shape 14"/>
+          <p:cNvSpPr/>
+          <p:nvPr/>
+        </p:nvSpPr>
+        <p:spPr>
+          <a:xfrm>
+            <a:off x="566928" y="3099816"/>
+            <a:ext cx="384048" cy="384048"/>
+          </a:xfrm>
+          <a:prstGeom prst="ellipse">
+            <a:avLst/>
+          </a:prstGeom>
+          <a:solidFill>
+            <a:srgbClr val="0D5257"/>
+          </a:solidFill>
+          <a:ln/>
+        </p:spPr>
+      </p:sp>
+      <p:sp>
+        <p:nvSpPr>
+          <p:cNvPr id="17" name="Text 15"/>
+          <p:cNvSpPr/>
+          <p:nvPr/>
+        </p:nvSpPr>
+        <p:spPr>
+          <a:xfrm>
+            <a:off x="566928" y="3099816"/>
+            <a:ext cx="384048" cy="384048"/>
+          </a:xfrm>
+          <a:prstGeom prst="rect">
+            <a:avLst/>
+          </a:prstGeom>
+          <a:noFill/>
+          <a:ln/>
+        </p:spPr>
+        <p:txBody>
+          <a:bodyPr wrap="square" lIns="0" tIns="0" rIns="0" bIns="0" rtlCol="0" anchor="ctr"/>
+          <a:lstStyle/>
+          <a:p>
+            <a:pPr algn="ctr" indent="0" marL="0">
+              <a:buNone/>
+            </a:pPr>
+            <a:r>
+              <a:rPr lang="en-US" sz="1050" b="1" dirty="0">
+                <a:solidFill>
+                  <a:srgbClr val="FFFFFF"/>
+                </a:solidFill>
+                <a:latin typeface="Malgun Gothic" pitchFamily="34" charset="0"/>
+                <a:ea typeface="Malgun Gothic" pitchFamily="34" charset="-122"/>
+                <a:cs typeface="Malgun Gothic" pitchFamily="34" charset="-120"/>
+              </a:rPr>
+              <a:t>02</a:t>
+            </a:r>
+            <a:endParaRPr lang="en-US" sz="1050" dirty="0"/>
+          </a:p>
+        </p:txBody>
+      </p:sp>
+      <p:sp>
+        <p:nvSpPr>
+          <p:cNvPr id="18" name="Text 16"/>
+          <p:cNvSpPr/>
+          <p:nvPr/>
+        </p:nvSpPr>
+        <p:spPr>
+          <a:xfrm>
+            <a:off x="1133856" y="3044952"/>
+            <a:ext cx="1188720" cy="493776"/>
+          </a:xfrm>
+          <a:prstGeom prst="rect">
+            <a:avLst/>
+          </a:prstGeom>
+          <a:noFill/>
+          <a:ln/>
+        </p:spPr>
+        <p:txBody>
+          <a:bodyPr wrap="square" lIns="0" tIns="0" rIns="0" bIns="0" rtlCol="0" anchor="ctr"/>
+          <a:lstStyle/>
+          <a:p>
+            <a:pPr indent="0" marL="0">
+              <a:buNone/>
+            </a:pPr>
+            <a:r>
+              <a:rPr lang="en-US" sz="1050" b="1" dirty="0">
+                <a:solidFill>
+                  <a:srgbClr val="2E8F87"/>
+                </a:solidFill>
+                <a:latin typeface="Malgun Gothic" pitchFamily="34" charset="0"/>
+                <a:ea typeface="Malgun Gothic" pitchFamily="34" charset="-122"/>
+                <a:cs typeface="Malgun Gothic" pitchFamily="34" charset="-120"/>
+              </a:rPr>
+              <a:t>3 – 5주차</a:t>
+            </a:r>
+            <a:endParaRPr lang="en-US" sz="1050" dirty="0"/>
+          </a:p>
+        </p:txBody>
+      </p:sp>
+      <p:sp>
+        <p:nvSpPr>
+          <p:cNvPr id="19" name="Text 17"/>
+          <p:cNvSpPr/>
+          <p:nvPr/>
+        </p:nvSpPr>
+        <p:spPr>
+          <a:xfrm>
+            <a:off x="2395728" y="3044952"/>
+            <a:ext cx="2286000" cy="493776"/>
+          </a:xfrm>
+          <a:prstGeom prst="rect">
+            <a:avLst/>
+          </a:prstGeom>
+          <a:noFill/>
+          <a:ln/>
+        </p:spPr>
+        <p:txBody>
+          <a:bodyPr wrap="square" lIns="0" tIns="0" rIns="0" bIns="0" rtlCol="0" anchor="ctr"/>
+          <a:lstStyle/>
+          <a:p>
+            <a:pPr indent="0" marL="0">
+              <a:buNone/>
+            </a:pPr>
+            <a:r>
+              <a:rPr lang="en-US" sz="1300" b="1" dirty="0">
+                <a:solidFill>
+                  <a:srgbClr val="12191A"/>
+                </a:solidFill>
+                <a:latin typeface="Malgun Gothic" pitchFamily="34" charset="0"/>
+                <a:ea typeface="Malgun Gothic" pitchFamily="34" charset="-122"/>
+                <a:cs typeface="Malgun Gothic" pitchFamily="34" charset="-120"/>
+              </a:rPr>
+              <a:t>코어 구축 &amp; 맞춤 설정</a:t>
+            </a:r>
+            <a:endParaRPr lang="en-US" sz="1300" dirty="0"/>
+          </a:p>
+        </p:txBody>
+      </p:sp>
+      <p:sp>
+        <p:nvSpPr>
+          <p:cNvPr id="20" name="Text 18"/>
+          <p:cNvSpPr/>
+          <p:nvPr/>
+        </p:nvSpPr>
+        <p:spPr>
+          <a:xfrm>
+            <a:off x="4773168" y="3044952"/>
+            <a:ext cx="3657600" cy="493776"/>
+          </a:xfrm>
+          <a:prstGeom prst="rect">
+            <a:avLst/>
+          </a:prstGeom>
+          <a:noFill/>
+          <a:ln/>
+        </p:spPr>
+        <p:txBody>
+          <a:bodyPr wrap="square" lIns="0" tIns="0" rIns="0" bIns="0" rtlCol="0" anchor="ctr"/>
+          <a:lstStyle/>
+          <a:p>
+            <a:pPr indent="0" marL="0">
+              <a:lnSpc>
+                <a:spcPts val="1400"/>
+              </a:lnSpc>
+              <a:buNone/>
+            </a:pPr>
+            <a:r>
+              <a:rPr lang="en-US" sz="1050" dirty="0">
+                <a:solidFill>
+                  <a:srgbClr val="5F6F70"/>
+                </a:solidFill>
+                <a:latin typeface="Malgun Gothic" pitchFamily="34" charset="0"/>
+                <a:ea typeface="Malgun Gothic" pitchFamily="34" charset="-122"/>
+                <a:cs typeface="Malgun Gothic" pitchFamily="34" charset="-120"/>
+              </a:rPr>
+              <a:t>전용 인스턴스 생성, 의료진 · 슬롯 규칙 설정, 브랜드 적용, 도메인 연결</a:t>
+            </a:r>
+            <a:endParaRPr lang="en-US" sz="1050" dirty="0"/>
+          </a:p>
+        </p:txBody>
+      </p:sp>
+      <p:sp>
+        <p:nvSpPr>
+          <p:cNvPr id="21" name="Text 19"/>
+          <p:cNvSpPr/>
+          <p:nvPr/>
+        </p:nvSpPr>
+        <p:spPr>
+          <a:xfrm>
+            <a:off x="8567928" y="3044952"/>
+            <a:ext cx="3054096" cy="493776"/>
+          </a:xfrm>
+          <a:prstGeom prst="rect">
+            <a:avLst/>
+          </a:prstGeom>
+          <a:noFill/>
+          <a:ln/>
+        </p:spPr>
+        <p:txBody>
+          <a:bodyPr wrap="square" lIns="0" tIns="0" rIns="0" bIns="0" rtlCol="0" anchor="ctr"/>
+          <a:lstStyle/>
+          <a:p>
+            <a:pPr indent="0" marL="0">
+              <a:lnSpc>
+                <a:spcPts val="1400"/>
+              </a:lnSpc>
+              <a:buNone/>
+            </a:pPr>
+            <a:r>
+              <a:rPr lang="en-US" sz="1050" dirty="0">
+                <a:solidFill>
+                  <a:srgbClr val="8F6716"/>
+                </a:solidFill>
+                <a:latin typeface="Malgun Gothic" pitchFamily="34" charset="0"/>
+                <a:ea typeface="Malgun Gothic" pitchFamily="34" charset="-122"/>
+                <a:cs typeface="Malgun Gothic" pitchFamily="34" charset="-120"/>
+              </a:rPr>
+              <a:t>진료 시간표 확정본 · 검수 90분</a:t>
+            </a:r>
+            <a:endParaRPr lang="en-US" sz="1050" dirty="0"/>
+          </a:p>
+        </p:txBody>
+      </p:sp>
+      <p:sp>
+        <p:nvSpPr>
+          <p:cNvPr id="22" name="Shape 20"/>
+          <p:cNvSpPr/>
+          <p:nvPr/>
+        </p:nvSpPr>
+        <p:spPr>
+          <a:xfrm>
+            <a:off x="566928" y="3675888"/>
+            <a:ext cx="384048" cy="384048"/>
+          </a:xfrm>
+          <a:prstGeom prst="ellipse">
+            <a:avLst/>
+          </a:prstGeom>
+          <a:solidFill>
+            <a:srgbClr val="0D5257"/>
+          </a:solidFill>
+          <a:ln/>
+        </p:spPr>
+      </p:sp>
+      <p:sp>
+        <p:nvSpPr>
+          <p:cNvPr id="23" name="Text 21"/>
+          <p:cNvSpPr/>
+          <p:nvPr/>
+        </p:nvSpPr>
+        <p:spPr>
+          <a:xfrm>
+            <a:off x="566928" y="3675888"/>
+            <a:ext cx="384048" cy="384048"/>
+          </a:xfrm>
+          <a:prstGeom prst="rect">
+            <a:avLst/>
+          </a:prstGeom>
+          <a:noFill/>
+          <a:ln/>
+        </p:spPr>
+        <p:txBody>
+          <a:bodyPr wrap="square" lIns="0" tIns="0" rIns="0" bIns="0" rtlCol="0" anchor="ctr"/>
+          <a:lstStyle/>
+          <a:p>
+            <a:pPr algn="ctr" indent="0" marL="0">
+              <a:buNone/>
+            </a:pPr>
+            <a:r>
+              <a:rPr lang="en-US" sz="1050" b="1" dirty="0">
+                <a:solidFill>
+                  <a:srgbClr val="FFFFFF"/>
+                </a:solidFill>
+                <a:latin typeface="Malgun Gothic" pitchFamily="34" charset="0"/>
+                <a:ea typeface="Malgun Gothic" pitchFamily="34" charset="-122"/>
+                <a:cs typeface="Malgun Gothic" pitchFamily="34" charset="-120"/>
+              </a:rPr>
+              <a:t>03</a:t>
+            </a:r>
+            <a:endParaRPr lang="en-US" sz="1050" dirty="0"/>
+          </a:p>
+        </p:txBody>
+      </p:sp>
+      <p:sp>
+        <p:nvSpPr>
+          <p:cNvPr id="24" name="Text 22"/>
+          <p:cNvSpPr/>
+          <p:nvPr/>
+        </p:nvSpPr>
+        <p:spPr>
+          <a:xfrm>
+            <a:off x="1133856" y="3621024"/>
+            <a:ext cx="1188720" cy="493776"/>
+          </a:xfrm>
+          <a:prstGeom prst="rect">
+            <a:avLst/>
+          </a:prstGeom>
+          <a:noFill/>
+          <a:ln/>
+        </p:spPr>
+        <p:txBody>
+          <a:bodyPr wrap="square" lIns="0" tIns="0" rIns="0" bIns="0" rtlCol="0" anchor="ctr"/>
+          <a:lstStyle/>
+          <a:p>
+            <a:pPr indent="0" marL="0">
+              <a:buNone/>
+            </a:pPr>
+            <a:r>
+              <a:rPr lang="en-US" sz="1050" b="1" dirty="0">
+                <a:solidFill>
+                  <a:srgbClr val="2E8F87"/>
+                </a:solidFill>
+                <a:latin typeface="Malgun Gothic" pitchFamily="34" charset="0"/>
+                <a:ea typeface="Malgun Gothic" pitchFamily="34" charset="-122"/>
+                <a:cs typeface="Malgun Gothic" pitchFamily="34" charset="-120"/>
+              </a:rPr>
+              <a:t>5 – 7주차</a:t>
+            </a:r>
+            <a:endParaRPr lang="en-US" sz="1050" dirty="0"/>
+          </a:p>
+        </p:txBody>
+      </p:sp>
+      <p:sp>
+        <p:nvSpPr>
+          <p:cNvPr id="25" name="Text 23"/>
+          <p:cNvSpPr/>
+          <p:nvPr/>
+        </p:nvSpPr>
+        <p:spPr>
+          <a:xfrm>
+            <a:off x="2395728" y="3621024"/>
+            <a:ext cx="2286000" cy="493776"/>
+          </a:xfrm>
+          <a:prstGeom prst="rect">
+            <a:avLst/>
+          </a:prstGeom>
+          <a:noFill/>
+          <a:ln/>
+        </p:spPr>
+        <p:txBody>
+          <a:bodyPr wrap="square" lIns="0" tIns="0" rIns="0" bIns="0" rtlCol="0" anchor="ctr"/>
+          <a:lstStyle/>
+          <a:p>
+            <a:pPr indent="0" marL="0">
+              <a:buNone/>
+            </a:pPr>
+            <a:r>
+              <a:rPr lang="en-US" sz="1300" b="1" dirty="0">
+                <a:solidFill>
+                  <a:srgbClr val="12191A"/>
+                </a:solidFill>
+                <a:latin typeface="Malgun Gothic" pitchFamily="34" charset="0"/>
+                <a:ea typeface="Malgun Gothic" pitchFamily="34" charset="-122"/>
+                <a:cs typeface="Malgun Gothic" pitchFamily="34" charset="-120"/>
+              </a:rPr>
+              <a:t>알림톡 &amp; 채널 연동</a:t>
+            </a:r>
+            <a:endParaRPr lang="en-US" sz="1300" dirty="0"/>
+          </a:p>
+        </p:txBody>
+      </p:sp>
+      <p:sp>
+        <p:nvSpPr>
+          <p:cNvPr id="26" name="Text 24"/>
+          <p:cNvSpPr/>
+          <p:nvPr/>
+        </p:nvSpPr>
+        <p:spPr>
+          <a:xfrm>
+            <a:off x="4773168" y="3621024"/>
+            <a:ext cx="3657600" cy="493776"/>
+          </a:xfrm>
+          <a:prstGeom prst="rect">
+            <a:avLst/>
+          </a:prstGeom>
+          <a:noFill/>
+          <a:ln/>
+        </p:spPr>
+        <p:txBody>
+          <a:bodyPr wrap="square" lIns="0" tIns="0" rIns="0" bIns="0" rtlCol="0" anchor="ctr"/>
+          <a:lstStyle/>
+          <a:p>
+            <a:pPr indent="0" marL="0">
+              <a:lnSpc>
+                <a:spcPts val="1400"/>
+              </a:lnSpc>
+              <a:buNone/>
+            </a:pPr>
+            <a:r>
+              <a:rPr lang="en-US" sz="1050" dirty="0">
+                <a:solidFill>
+                  <a:srgbClr val="5F6F70"/>
+                </a:solidFill>
+                <a:latin typeface="Malgun Gothic" pitchFamily="34" charset="0"/>
+                <a:ea typeface="Malgun Gothic" pitchFamily="34" charset="-122"/>
+                <a:cs typeface="Malgun Gothic" pitchFamily="34" charset="-120"/>
+              </a:rPr>
+              <a:t>카카오 채널 개설, 템플릿 등록 · 심사, 본인인증 연동, 발송 검증</a:t>
+            </a:r>
+            <a:endParaRPr lang="en-US" sz="1050" dirty="0"/>
+          </a:p>
+        </p:txBody>
+      </p:sp>
+      <p:sp>
+        <p:nvSpPr>
+          <p:cNvPr id="27" name="Text 25"/>
+          <p:cNvSpPr/>
+          <p:nvPr/>
+        </p:nvSpPr>
+        <p:spPr>
+          <a:xfrm>
+            <a:off x="8567928" y="3621024"/>
+            <a:ext cx="3054096" cy="493776"/>
+          </a:xfrm>
+          <a:prstGeom prst="rect">
+            <a:avLst/>
+          </a:prstGeom>
+          <a:noFill/>
+          <a:ln/>
+        </p:spPr>
+        <p:txBody>
+          <a:bodyPr wrap="square" lIns="0" tIns="0" rIns="0" bIns="0" rtlCol="0" anchor="ctr"/>
+          <a:lstStyle/>
+          <a:p>
+            <a:pPr indent="0" marL="0">
+              <a:lnSpc>
+                <a:spcPts val="1400"/>
+              </a:lnSpc>
+              <a:buNone/>
+            </a:pPr>
+            <a:r>
+              <a:rPr lang="en-US" sz="1050" dirty="0">
+                <a:solidFill>
+                  <a:srgbClr val="8F6716"/>
+                </a:solidFill>
+                <a:latin typeface="Malgun Gothic" pitchFamily="34" charset="0"/>
+                <a:ea typeface="Malgun Gothic" pitchFamily="34" charset="-122"/>
+                <a:cs typeface="Malgun Gothic" pitchFamily="34" charset="-120"/>
+              </a:rPr>
+              <a:t>사업자등록증 · 문구 검수 1회</a:t>
+            </a:r>
+            <a:endParaRPr lang="en-US" sz="1050" dirty="0"/>
+          </a:p>
+        </p:txBody>
+      </p:sp>
+      <p:sp>
+        <p:nvSpPr>
+          <p:cNvPr id="28" name="Shape 26"/>
+          <p:cNvSpPr/>
+          <p:nvPr/>
+        </p:nvSpPr>
+        <p:spPr>
+          <a:xfrm>
+            <a:off x="566928" y="4251960"/>
+            <a:ext cx="384048" cy="384048"/>
+          </a:xfrm>
+          <a:prstGeom prst="ellipse">
+            <a:avLst/>
+          </a:prstGeom>
+          <a:solidFill>
+            <a:srgbClr val="0D5257"/>
+          </a:solidFill>
+          <a:ln/>
+        </p:spPr>
+      </p:sp>
+      <p:sp>
+        <p:nvSpPr>
+          <p:cNvPr id="29" name="Text 27"/>
+          <p:cNvSpPr/>
+          <p:nvPr/>
+        </p:nvSpPr>
+        <p:spPr>
+          <a:xfrm>
+            <a:off x="566928" y="4251960"/>
+            <a:ext cx="384048" cy="384048"/>
+          </a:xfrm>
+          <a:prstGeom prst="rect">
+            <a:avLst/>
+          </a:prstGeom>
+          <a:noFill/>
+          <a:ln/>
+        </p:spPr>
+        <p:txBody>
+          <a:bodyPr wrap="square" lIns="0" tIns="0" rIns="0" bIns="0" rtlCol="0" anchor="ctr"/>
+          <a:lstStyle/>
+          <a:p>
+            <a:pPr algn="ctr" indent="0" marL="0">
+              <a:buNone/>
+            </a:pPr>
+            <a:r>
+              <a:rPr lang="en-US" sz="1050" b="1" dirty="0">
+                <a:solidFill>
+                  <a:srgbClr val="FFFFFF"/>
+                </a:solidFill>
+                <a:latin typeface="Malgun Gothic" pitchFamily="34" charset="0"/>
+                <a:ea typeface="Malgun Gothic" pitchFamily="34" charset="-122"/>
+                <a:cs typeface="Malgun Gothic" pitchFamily="34" charset="-120"/>
+              </a:rPr>
+              <a:t>04</a:t>
+            </a:r>
+            <a:endParaRPr lang="en-US" sz="1050" dirty="0"/>
+          </a:p>
+        </p:txBody>
+      </p:sp>
+      <p:sp>
+        <p:nvSpPr>
+          <p:cNvPr id="30" name="Text 28"/>
+          <p:cNvSpPr/>
+          <p:nvPr/>
+        </p:nvSpPr>
+        <p:spPr>
+          <a:xfrm>
+            <a:off x="1133856" y="4197096"/>
+            <a:ext cx="1188720" cy="493776"/>
+          </a:xfrm>
+          <a:prstGeom prst="rect">
+            <a:avLst/>
+          </a:prstGeom>
+          <a:noFill/>
+          <a:ln/>
+        </p:spPr>
+        <p:txBody>
+          <a:bodyPr wrap="square" lIns="0" tIns="0" rIns="0" bIns="0" rtlCol="0" anchor="ctr"/>
+          <a:lstStyle/>
+          <a:p>
+            <a:pPr indent="0" marL="0">
+              <a:buNone/>
+            </a:pPr>
+            <a:r>
+              <a:rPr lang="en-US" sz="1050" b="1" dirty="0">
+                <a:solidFill>
+                  <a:srgbClr val="2E8F87"/>
+                </a:solidFill>
+                <a:latin typeface="Malgun Gothic" pitchFamily="34" charset="0"/>
+                <a:ea typeface="Malgun Gothic" pitchFamily="34" charset="-122"/>
+                <a:cs typeface="Malgun Gothic" pitchFamily="34" charset="-120"/>
+              </a:rPr>
+              <a:t>6 – 9주차</a:t>
+            </a:r>
+            <a:endParaRPr lang="en-US" sz="1050" dirty="0"/>
+          </a:p>
+        </p:txBody>
+      </p:sp>
+      <p:sp>
+        <p:nvSpPr>
+          <p:cNvPr id="31" name="Text 29"/>
+          <p:cNvSpPr/>
+          <p:nvPr/>
+        </p:nvSpPr>
+        <p:spPr>
+          <a:xfrm>
+            <a:off x="2395728" y="4197096"/>
+            <a:ext cx="2286000" cy="493776"/>
+          </a:xfrm>
+          <a:prstGeom prst="rect">
+            <a:avLst/>
+          </a:prstGeom>
+          <a:noFill/>
+          <a:ln/>
+        </p:spPr>
+        <p:txBody>
+          <a:bodyPr wrap="square" lIns="0" tIns="0" rIns="0" bIns="0" rtlCol="0" anchor="ctr"/>
+          <a:lstStyle/>
+          <a:p>
+            <a:pPr indent="0" marL="0">
+              <a:buNone/>
+            </a:pPr>
+            <a:r>
+              <a:rPr lang="en-US" sz="1300" b="1" dirty="0">
+                <a:solidFill>
+                  <a:srgbClr val="12191A"/>
+                </a:solidFill>
+                <a:latin typeface="Malgun Gothic" pitchFamily="34" charset="0"/>
+                <a:ea typeface="Malgun Gothic" pitchFamily="34" charset="-122"/>
+                <a:cs typeface="Malgun Gothic" pitchFamily="34" charset="-120"/>
+              </a:rPr>
+              <a:t>AI 모듈 적용</a:t>
+            </a:r>
+            <a:endParaRPr lang="en-US" sz="1300" dirty="0"/>
+          </a:p>
+        </p:txBody>
+      </p:sp>
+      <p:sp>
+        <p:nvSpPr>
+          <p:cNvPr id="32" name="Text 30"/>
+          <p:cNvSpPr/>
+          <p:nvPr/>
+        </p:nvSpPr>
+        <p:spPr>
+          <a:xfrm>
+            <a:off x="4773168" y="4197096"/>
+            <a:ext cx="3657600" cy="493776"/>
+          </a:xfrm>
+          <a:prstGeom prst="rect">
+            <a:avLst/>
+          </a:prstGeom>
+          <a:noFill/>
+          <a:ln/>
+        </p:spPr>
+        <p:txBody>
+          <a:bodyPr wrap="square" lIns="0" tIns="0" rIns="0" bIns="0" rtlCol="0" anchor="ctr"/>
+          <a:lstStyle/>
+          <a:p>
+            <a:pPr indent="0" marL="0">
+              <a:lnSpc>
+                <a:spcPts val="1400"/>
+              </a:lnSpc>
+              <a:buNone/>
+            </a:pPr>
+            <a:r>
+              <a:rPr lang="en-US" sz="1050" dirty="0">
+                <a:solidFill>
+                  <a:srgbClr val="5F6F70"/>
+                </a:solidFill>
+                <a:latin typeface="Malgun Gothic" pitchFamily="34" charset="0"/>
+                <a:ea typeface="Malgun Gothic" pitchFamily="34" charset="-122"/>
+                <a:cs typeface="Malgun Gothic" pitchFamily="34" charset="-120"/>
+              </a:rPr>
+              <a:t>과거 예약 데이터 이관 후 예측 모델 기준선 학습, 순차 활성화</a:t>
+            </a:r>
+            <a:endParaRPr lang="en-US" sz="1050" dirty="0"/>
+          </a:p>
+        </p:txBody>
+      </p:sp>
+      <p:sp>
+        <p:nvSpPr>
+          <p:cNvPr id="33" name="Text 31"/>
+          <p:cNvSpPr/>
+          <p:nvPr/>
+        </p:nvSpPr>
+        <p:spPr>
+          <a:xfrm>
+            <a:off x="8567928" y="4197096"/>
+            <a:ext cx="3054096" cy="493776"/>
+          </a:xfrm>
+          <a:prstGeom prst="rect">
+            <a:avLst/>
+          </a:prstGeom>
+          <a:noFill/>
+          <a:ln/>
+        </p:spPr>
+        <p:txBody>
+          <a:bodyPr wrap="square" lIns="0" tIns="0" rIns="0" bIns="0" rtlCol="0" anchor="ctr"/>
+          <a:lstStyle/>
+          <a:p>
+            <a:pPr indent="0" marL="0">
+              <a:lnSpc>
+                <a:spcPts val="1400"/>
+              </a:lnSpc>
+              <a:buNone/>
+            </a:pPr>
+            <a:r>
+              <a:rPr lang="en-US" sz="1050" dirty="0">
+                <a:solidFill>
+                  <a:srgbClr val="8F6716"/>
+                </a:solidFill>
+                <a:latin typeface="Malgun Gothic" pitchFamily="34" charset="0"/>
+                <a:ea typeface="Malgun Gothic" pitchFamily="34" charset="-122"/>
+                <a:cs typeface="Malgun Gothic" pitchFamily="34" charset="-120"/>
+              </a:rPr>
+              <a:t>최근 6개월 예약 이력 제공</a:t>
+            </a:r>
+            <a:endParaRPr lang="en-US" sz="1050" dirty="0"/>
+          </a:p>
+        </p:txBody>
+      </p:sp>
+      <p:sp>
+        <p:nvSpPr>
+          <p:cNvPr id="34" name="Shape 32"/>
+          <p:cNvSpPr/>
+          <p:nvPr/>
+        </p:nvSpPr>
+        <p:spPr>
+          <a:xfrm>
+            <a:off x="566928" y="4828032"/>
+            <a:ext cx="384048" cy="384048"/>
+          </a:xfrm>
+          <a:prstGeom prst="ellipse">
+            <a:avLst/>
+          </a:prstGeom>
+          <a:solidFill>
+            <a:srgbClr val="0D5257"/>
+          </a:solidFill>
+          <a:ln/>
+        </p:spPr>
+      </p:sp>
+      <p:sp>
+        <p:nvSpPr>
+          <p:cNvPr id="35" name="Text 33"/>
+          <p:cNvSpPr/>
+          <p:nvPr/>
+        </p:nvSpPr>
+        <p:spPr>
+          <a:xfrm>
+            <a:off x="566928" y="4828032"/>
+            <a:ext cx="384048" cy="384048"/>
+          </a:xfrm>
+          <a:prstGeom prst="rect">
+            <a:avLst/>
+          </a:prstGeom>
+          <a:noFill/>
+          <a:ln/>
+        </p:spPr>
+        <p:txBody>
+          <a:bodyPr wrap="square" lIns="0" tIns="0" rIns="0" bIns="0" rtlCol="0" anchor="ctr"/>
+          <a:lstStyle/>
+          <a:p>
+            <a:pPr algn="ctr" indent="0" marL="0">
+              <a:buNone/>
+            </a:pPr>
+            <a:r>
+              <a:rPr lang="en-US" sz="1050" b="1" dirty="0">
+                <a:solidFill>
+                  <a:srgbClr val="FFFFFF"/>
+                </a:solidFill>
+                <a:latin typeface="Malgun Gothic" pitchFamily="34" charset="0"/>
+                <a:ea typeface="Malgun Gothic" pitchFamily="34" charset="-122"/>
+                <a:cs typeface="Malgun Gothic" pitchFamily="34" charset="-120"/>
+              </a:rPr>
+              <a:t>05</a:t>
+            </a:r>
+            <a:endParaRPr lang="en-US" sz="1050" dirty="0"/>
+          </a:p>
+        </p:txBody>
+      </p:sp>
+      <p:sp>
+        <p:nvSpPr>
+          <p:cNvPr id="36" name="Text 34"/>
+          <p:cNvSpPr/>
+          <p:nvPr/>
+        </p:nvSpPr>
+        <p:spPr>
+          <a:xfrm>
+            <a:off x="1133856" y="4773168"/>
+            <a:ext cx="1188720" cy="493776"/>
+          </a:xfrm>
+          <a:prstGeom prst="rect">
+            <a:avLst/>
+          </a:prstGeom>
+          <a:noFill/>
+          <a:ln/>
+        </p:spPr>
+        <p:txBody>
+          <a:bodyPr wrap="square" lIns="0" tIns="0" rIns="0" bIns="0" rtlCol="0" anchor="ctr"/>
+          <a:lstStyle/>
+          <a:p>
+            <a:pPr indent="0" marL="0">
+              <a:buNone/>
+            </a:pPr>
+            <a:r>
+              <a:rPr lang="en-US" sz="1050" b="1" dirty="0">
+                <a:solidFill>
+                  <a:srgbClr val="2E8F87"/>
+                </a:solidFill>
+                <a:latin typeface="Malgun Gothic" pitchFamily="34" charset="0"/>
+                <a:ea typeface="Malgun Gothic" pitchFamily="34" charset="-122"/>
+                <a:cs typeface="Malgun Gothic" pitchFamily="34" charset="-120"/>
+              </a:rPr>
+              <a:t>9 – 10주차</a:t>
+            </a:r>
+            <a:endParaRPr lang="en-US" sz="1050" dirty="0"/>
+          </a:p>
+        </p:txBody>
+      </p:sp>
+      <p:sp>
+        <p:nvSpPr>
+          <p:cNvPr id="37" name="Text 35"/>
+          <p:cNvSpPr/>
+          <p:nvPr/>
+        </p:nvSpPr>
+        <p:spPr>
+          <a:xfrm>
+            <a:off x="2395728" y="4773168"/>
+            <a:ext cx="2286000" cy="493776"/>
+          </a:xfrm>
+          <a:prstGeom prst="rect">
+            <a:avLst/>
+          </a:prstGeom>
+          <a:noFill/>
+          <a:ln/>
+        </p:spPr>
+        <p:txBody>
+          <a:bodyPr wrap="square" lIns="0" tIns="0" rIns="0" bIns="0" rtlCol="0" anchor="ctr"/>
+          <a:lstStyle/>
+          <a:p>
+            <a:pPr indent="0" marL="0">
+              <a:buNone/>
+            </a:pPr>
+            <a:r>
+              <a:rPr lang="en-US" sz="1300" b="1" dirty="0">
+                <a:solidFill>
+                  <a:srgbClr val="12191A"/>
+                </a:solidFill>
+                <a:latin typeface="Malgun Gothic" pitchFamily="34" charset="0"/>
+                <a:ea typeface="Malgun Gothic" pitchFamily="34" charset="-122"/>
+                <a:cs typeface="Malgun Gothic" pitchFamily="34" charset="-120"/>
+              </a:rPr>
+              <a:t>교육 &amp; 병행 운영</a:t>
+            </a:r>
+            <a:endParaRPr lang="en-US" sz="1300" dirty="0"/>
+          </a:p>
+        </p:txBody>
+      </p:sp>
+      <p:sp>
+        <p:nvSpPr>
+          <p:cNvPr id="38" name="Text 36"/>
+          <p:cNvSpPr/>
+          <p:nvPr/>
+        </p:nvSpPr>
+        <p:spPr>
+          <a:xfrm>
+            <a:off x="4773168" y="4773168"/>
+            <a:ext cx="3657600" cy="493776"/>
+          </a:xfrm>
+          <a:prstGeom prst="rect">
+            <a:avLst/>
+          </a:prstGeom>
+          <a:noFill/>
+          <a:ln/>
+        </p:spPr>
+        <p:txBody>
+          <a:bodyPr wrap="square" lIns="0" tIns="0" rIns="0" bIns="0" rtlCol="0" anchor="ctr"/>
+          <a:lstStyle/>
+          <a:p>
+            <a:pPr indent="0" marL="0">
+              <a:lnSpc>
+                <a:spcPts val="1400"/>
+              </a:lnSpc>
+              <a:buNone/>
+            </a:pPr>
+            <a:r>
+              <a:rPr lang="en-US" sz="1050" dirty="0">
+                <a:solidFill>
+                  <a:srgbClr val="5F6F70"/>
+                </a:solidFill>
+                <a:latin typeface="Malgun Gothic" pitchFamily="34" charset="0"/>
+                <a:ea typeface="Malgun Gothic" pitchFamily="34" charset="-122"/>
+                <a:cs typeface="Malgun Gothic" pitchFamily="34" charset="-120"/>
+              </a:rPr>
+              <a:t>실사용자 교육 후 기존 방식과 2주 병행 운영, 현장 피드백 반영</a:t>
+            </a:r>
+            <a:endParaRPr lang="en-US" sz="1050" dirty="0"/>
+          </a:p>
+        </p:txBody>
+      </p:sp>
+      <p:sp>
+        <p:nvSpPr>
+          <p:cNvPr id="39" name="Text 37"/>
+          <p:cNvSpPr/>
+          <p:nvPr/>
+        </p:nvSpPr>
+        <p:spPr>
+          <a:xfrm>
+            <a:off x="8567928" y="4773168"/>
+            <a:ext cx="3054096" cy="493776"/>
+          </a:xfrm>
+          <a:prstGeom prst="rect">
+            <a:avLst/>
+          </a:prstGeom>
+          <a:noFill/>
+          <a:ln/>
+        </p:spPr>
+        <p:txBody>
+          <a:bodyPr wrap="square" lIns="0" tIns="0" rIns="0" bIns="0" rtlCol="0" anchor="ctr"/>
+          <a:lstStyle/>
+          <a:p>
+            <a:pPr indent="0" marL="0">
+              <a:lnSpc>
+                <a:spcPts val="1400"/>
+              </a:lnSpc>
+              <a:buNone/>
+            </a:pPr>
+            <a:r>
+              <a:rPr lang="en-US" sz="1050" dirty="0">
+                <a:solidFill>
+                  <a:srgbClr val="8F6716"/>
+                </a:solidFill>
+                <a:latin typeface="Malgun Gothic" pitchFamily="34" charset="0"/>
+                <a:ea typeface="Malgun Gothic" pitchFamily="34" charset="-122"/>
+                <a:cs typeface="Malgun Gothic" pitchFamily="34" charset="-120"/>
+              </a:rPr>
+              <a:t>데스크 전원 2시간 × 2회</a:t>
+            </a:r>
+            <a:endParaRPr lang="en-US" sz="1050" dirty="0"/>
+          </a:p>
+        </p:txBody>
+      </p:sp>
+      <p:sp>
+        <p:nvSpPr>
+          <p:cNvPr id="40" name="Shape 38"/>
+          <p:cNvSpPr/>
+          <p:nvPr/>
+        </p:nvSpPr>
+        <p:spPr>
+          <a:xfrm>
+            <a:off x="566928" y="5404104"/>
+            <a:ext cx="384048" cy="384048"/>
+          </a:xfrm>
+          <a:prstGeom prst="ellipse">
+            <a:avLst/>
+          </a:prstGeom>
+          <a:solidFill>
+            <a:srgbClr val="0D5257"/>
+          </a:solidFill>
+          <a:ln/>
+        </p:spPr>
+      </p:sp>
+      <p:sp>
+        <p:nvSpPr>
+          <p:cNvPr id="41" name="Text 39"/>
+          <p:cNvSpPr/>
+          <p:nvPr/>
+        </p:nvSpPr>
+        <p:spPr>
+          <a:xfrm>
+            <a:off x="566928" y="5404104"/>
+            <a:ext cx="384048" cy="384048"/>
+          </a:xfrm>
+          <a:prstGeom prst="rect">
+            <a:avLst/>
+          </a:prstGeom>
+          <a:noFill/>
+          <a:ln/>
+        </p:spPr>
+        <p:txBody>
+          <a:bodyPr wrap="square" lIns="0" tIns="0" rIns="0" bIns="0" rtlCol="0" anchor="ctr"/>
+          <a:lstStyle/>
+          <a:p>
+            <a:pPr algn="ctr" indent="0" marL="0">
+              <a:buNone/>
+            </a:pPr>
+            <a:r>
+              <a:rPr lang="en-US" sz="1050" b="1" dirty="0">
+                <a:solidFill>
+                  <a:srgbClr val="FFFFFF"/>
+                </a:solidFill>
+                <a:latin typeface="Malgun Gothic" pitchFamily="34" charset="0"/>
+                <a:ea typeface="Malgun Gothic" pitchFamily="34" charset="-122"/>
+                <a:cs typeface="Malgun Gothic" pitchFamily="34" charset="-120"/>
+              </a:rPr>
+              <a:t>06</a:t>
+            </a:r>
+            <a:endParaRPr lang="en-US" sz="1050" dirty="0"/>
+          </a:p>
+        </p:txBody>
+      </p:sp>
+      <p:sp>
+        <p:nvSpPr>
+          <p:cNvPr id="42" name="Text 40"/>
+          <p:cNvSpPr/>
+          <p:nvPr/>
+        </p:nvSpPr>
+        <p:spPr>
+          <a:xfrm>
+            <a:off x="1133856" y="5349240"/>
+            <a:ext cx="1188720" cy="493776"/>
+          </a:xfrm>
+          <a:prstGeom prst="rect">
+            <a:avLst/>
+          </a:prstGeom>
+          <a:noFill/>
+          <a:ln/>
+        </p:spPr>
+        <p:txBody>
+          <a:bodyPr wrap="square" lIns="0" tIns="0" rIns="0" bIns="0" rtlCol="0" anchor="ctr"/>
+          <a:lstStyle/>
+          <a:p>
+            <a:pPr indent="0" marL="0">
+              <a:buNone/>
+            </a:pPr>
+            <a:r>
+              <a:rPr lang="en-US" sz="1050" b="1" dirty="0">
+                <a:solidFill>
+                  <a:srgbClr val="2E8F87"/>
+                </a:solidFill>
+                <a:latin typeface="Malgun Gothic" pitchFamily="34" charset="0"/>
+                <a:ea typeface="Malgun Gothic" pitchFamily="34" charset="-122"/>
+                <a:cs typeface="Malgun Gothic" pitchFamily="34" charset="-120"/>
+              </a:rPr>
+              <a:t>11 – 12주차</a:t>
+            </a:r>
+            <a:endParaRPr lang="en-US" sz="1050" dirty="0"/>
+          </a:p>
+        </p:txBody>
+      </p:sp>
+      <p:sp>
+        <p:nvSpPr>
+          <p:cNvPr id="43" name="Text 41"/>
+          <p:cNvSpPr/>
+          <p:nvPr/>
+        </p:nvSpPr>
+        <p:spPr>
+          <a:xfrm>
+            <a:off x="2395728" y="5349240"/>
+            <a:ext cx="2286000" cy="493776"/>
+          </a:xfrm>
+          <a:prstGeom prst="rect">
+            <a:avLst/>
+          </a:prstGeom>
+          <a:noFill/>
+          <a:ln/>
+        </p:spPr>
+        <p:txBody>
+          <a:bodyPr wrap="square" lIns="0" tIns="0" rIns="0" bIns="0" rtlCol="0" anchor="ctr"/>
+          <a:lstStyle/>
+          <a:p>
+            <a:pPr indent="0" marL="0">
+              <a:buNone/>
+            </a:pPr>
+            <a:r>
+              <a:rPr lang="en-US" sz="1300" b="1" dirty="0">
+                <a:solidFill>
+                  <a:srgbClr val="12191A"/>
+                </a:solidFill>
+                <a:latin typeface="Malgun Gothic" pitchFamily="34" charset="0"/>
+                <a:ea typeface="Malgun Gothic" pitchFamily="34" charset="-122"/>
+                <a:cs typeface="Malgun Gothic" pitchFamily="34" charset="-120"/>
+              </a:rPr>
+              <a:t>정식 오픈 &amp; 안정화</a:t>
+            </a:r>
+            <a:endParaRPr lang="en-US" sz="1300" dirty="0"/>
+          </a:p>
+        </p:txBody>
+      </p:sp>
+      <p:sp>
+        <p:nvSpPr>
+          <p:cNvPr id="44" name="Text 42"/>
+          <p:cNvSpPr/>
+          <p:nvPr/>
+        </p:nvSpPr>
+        <p:spPr>
+          <a:xfrm>
+            <a:off x="4773168" y="5349240"/>
+            <a:ext cx="3657600" cy="493776"/>
+          </a:xfrm>
+          <a:prstGeom prst="rect">
+            <a:avLst/>
+          </a:prstGeom>
+          <a:noFill/>
+          <a:ln/>
+        </p:spPr>
+        <p:txBody>
+          <a:bodyPr wrap="square" lIns="0" tIns="0" rIns="0" bIns="0" rtlCol="0" anchor="ctr"/>
+          <a:lstStyle/>
+          <a:p>
+            <a:pPr indent="0" marL="0">
+              <a:lnSpc>
+                <a:spcPts val="1400"/>
+              </a:lnSpc>
+              <a:buNone/>
+            </a:pPr>
+            <a:r>
+              <a:rPr lang="en-US" sz="1050" dirty="0">
+                <a:solidFill>
+                  <a:srgbClr val="5F6F70"/>
+                </a:solidFill>
+                <a:latin typeface="Malgun Gothic" pitchFamily="34" charset="0"/>
+                <a:ea typeface="Malgun Gothic" pitchFamily="34" charset="-122"/>
+                <a:cs typeface="Malgun Gothic" pitchFamily="34" charset="-120"/>
+              </a:rPr>
+              <a:t>전면 전환, 초기 2주 밀착 대응, 지표 리포트 체계 가동</a:t>
+            </a:r>
+            <a:endParaRPr lang="en-US" sz="1050" dirty="0"/>
+          </a:p>
+        </p:txBody>
+      </p:sp>
+      <p:sp>
+        <p:nvSpPr>
+          <p:cNvPr id="45" name="Text 43"/>
+          <p:cNvSpPr/>
+          <p:nvPr/>
+        </p:nvSpPr>
+        <p:spPr>
+          <a:xfrm>
+            <a:off x="8567928" y="5349240"/>
+            <a:ext cx="3054096" cy="493776"/>
+          </a:xfrm>
+          <a:prstGeom prst="rect">
+            <a:avLst/>
+          </a:prstGeom>
+          <a:noFill/>
+          <a:ln/>
+        </p:spPr>
+        <p:txBody>
+          <a:bodyPr wrap="square" lIns="0" tIns="0" rIns="0" bIns="0" rtlCol="0" anchor="ctr"/>
+          <a:lstStyle/>
+          <a:p>
+            <a:pPr indent="0" marL="0">
+              <a:lnSpc>
+                <a:spcPts val="1400"/>
+              </a:lnSpc>
+              <a:buNone/>
+            </a:pPr>
+            <a:r>
+              <a:rPr lang="en-US" sz="1050" dirty="0">
+                <a:solidFill>
+                  <a:srgbClr val="8F6716"/>
+                </a:solidFill>
+                <a:latin typeface="Malgun Gothic" pitchFamily="34" charset="0"/>
+                <a:ea typeface="Malgun Gothic" pitchFamily="34" charset="-122"/>
+                <a:cs typeface="Malgun Gothic" pitchFamily="34" charset="-120"/>
+              </a:rPr>
+              <a:t>오픈 당일 원무팀 입회</a:t>
+            </a:r>
+            <a:endParaRPr lang="en-US" sz="1050" dirty="0"/>
+          </a:p>
+        </p:txBody>
+      </p:sp>
+      <p:sp>
+        <p:nvSpPr>
+          <p:cNvPr id="46" name="Shape 44"/>
+          <p:cNvSpPr/>
+          <p:nvPr/>
+        </p:nvSpPr>
+        <p:spPr>
+          <a:xfrm>
+            <a:off x="566928" y="5760720"/>
+            <a:ext cx="10234879" cy="585216"/>
+          </a:xfrm>
+          <a:prstGeom prst="rect">
             <a:avLst/>
           </a:prstGeom>
           <a:solidFill>
@@ -7478,713 +9713,49 @@
       </p:sp>
       <p:sp>
         <p:nvSpPr>
-          <p:cNvPr id="6" name="Shape 4"/>
-          <p:cNvSpPr/>
-          <p:nvPr/>
-        </p:nvSpPr>
-        <p:spPr>
-          <a:xfrm>
-            <a:off x="672084" y="2153412"/>
-            <a:ext cx="100584" cy="100584"/>
-          </a:xfrm>
-          <a:prstGeom prst="ellipse">
-            <a:avLst/>
-          </a:prstGeom>
-          <a:solidFill>
-            <a:srgbClr val="0D5257"/>
-          </a:solidFill>
-          <a:ln/>
-        </p:spPr>
-      </p:sp>
-      <p:sp>
-        <p:nvSpPr>
-          <p:cNvPr id="7" name="Text 5"/>
-          <p:cNvSpPr/>
-          <p:nvPr/>
-        </p:nvSpPr>
-        <p:spPr>
-          <a:xfrm>
-            <a:off x="1024128" y="2020824"/>
-            <a:ext cx="2923946" cy="365760"/>
-          </a:xfrm>
-          <a:prstGeom prst="rect">
-            <a:avLst/>
-          </a:prstGeom>
-          <a:noFill/>
-          <a:ln/>
-        </p:spPr>
-        <p:txBody>
-          <a:bodyPr wrap="square" lIns="0" tIns="0" rIns="0" bIns="0" rtlCol="0" anchor="ctr"/>
-          <a:lstStyle/>
-          <a:p>
-            <a:pPr indent="0" marL="0">
-              <a:buNone/>
-            </a:pPr>
-            <a:r>
-              <a:rPr lang="en-US" sz="1450" b="1" dirty="0">
-                <a:solidFill>
-                  <a:srgbClr val="12191A"/>
-                </a:solidFill>
-                <a:latin typeface="Malgun Gothic" pitchFamily="34" charset="0"/>
-                <a:ea typeface="Malgun Gothic" pitchFamily="34" charset="-122"/>
-                <a:cs typeface="Malgun Gothic" pitchFamily="34" charset="-120"/>
-              </a:rPr>
-              <a:t>국내 리전 보관</a:t>
-            </a:r>
-            <a:endParaRPr lang="en-US" sz="1450" dirty="0"/>
-          </a:p>
-        </p:txBody>
-      </p:sp>
-      <p:sp>
-        <p:nvSpPr>
-          <p:cNvPr id="8" name="Text 6"/>
-          <p:cNvSpPr/>
-          <p:nvPr/>
-        </p:nvSpPr>
-        <p:spPr>
-          <a:xfrm>
-            <a:off x="566928" y="2523744"/>
-            <a:ext cx="3198266" cy="1097280"/>
-          </a:xfrm>
-          <a:prstGeom prst="rect">
-            <a:avLst/>
-          </a:prstGeom>
-          <a:noFill/>
-          <a:ln/>
-        </p:spPr>
-        <p:txBody>
-          <a:bodyPr wrap="square" lIns="0" tIns="0" rIns="0" bIns="0" rtlCol="0" anchor="t"/>
+          <p:cNvPr id="47" name="Text 45"/>
+          <p:cNvSpPr/>
+          <p:nvPr/>
+        </p:nvSpPr>
+        <p:spPr>
+          <a:xfrm>
+            <a:off x="841248" y="5760720"/>
+            <a:ext cx="9686239" cy="585216"/>
+          </a:xfrm>
+          <a:prstGeom prst="rect">
+            <a:avLst/>
+          </a:prstGeom>
+          <a:noFill/>
+          <a:ln/>
+        </p:spPr>
+        <p:txBody>
+          <a:bodyPr wrap="square" lIns="0" tIns="0" rIns="0" bIns="0" rtlCol="0" anchor="ctr"/>
           <a:lstStyle/>
           <a:p>
             <a:pPr indent="0" marL="0">
               <a:lnSpc>
-                <a:spcPts val="1800"/>
+                <a:spcPts val="1400"/>
               </a:lnSpc>
               <a:buNone/>
             </a:pPr>
             <a:r>
-              <a:rPr lang="en-US" sz="1150" dirty="0">
-                <a:solidFill>
-                  <a:srgbClr val="5F6F70"/>
-                </a:solidFill>
-                <a:latin typeface="Malgun Gothic" pitchFamily="34" charset="0"/>
-                <a:ea typeface="Malgun Gothic" pitchFamily="34" charset="-122"/>
-                <a:cs typeface="Malgun Gothic" pitchFamily="34" charset="-120"/>
-              </a:rPr>
-              <a:t>데이터베이스와 애플리케이션 모두 국내(서울) 리전에서 운영합니다. 환자 정보는 국외로 이전되지 않습니다.</a:t>
-            </a:r>
-            <a:endParaRPr lang="en-US" sz="1150" dirty="0"/>
-          </a:p>
-        </p:txBody>
-      </p:sp>
-      <p:sp>
-        <p:nvSpPr>
-          <p:cNvPr id="9" name="Shape 7"/>
-          <p:cNvSpPr/>
-          <p:nvPr/>
-        </p:nvSpPr>
-        <p:spPr>
-          <a:xfrm>
-            <a:off x="4405274" y="2048256"/>
-            <a:ext cx="310896" cy="310896"/>
-          </a:xfrm>
-          <a:prstGeom prst="ellipse">
-            <a:avLst/>
-          </a:prstGeom>
-          <a:solidFill>
-            <a:srgbClr val="EDF3F1"/>
-          </a:solidFill>
-          <a:ln/>
-        </p:spPr>
-      </p:sp>
-      <p:sp>
-        <p:nvSpPr>
-          <p:cNvPr id="10" name="Shape 8"/>
-          <p:cNvSpPr/>
-          <p:nvPr/>
-        </p:nvSpPr>
-        <p:spPr>
-          <a:xfrm>
-            <a:off x="4510430" y="2153412"/>
-            <a:ext cx="100584" cy="100584"/>
-          </a:xfrm>
-          <a:prstGeom prst="ellipse">
-            <a:avLst/>
-          </a:prstGeom>
-          <a:solidFill>
-            <a:srgbClr val="0D5257"/>
-          </a:solidFill>
-          <a:ln/>
-        </p:spPr>
-      </p:sp>
-      <p:sp>
-        <p:nvSpPr>
-          <p:cNvPr id="11" name="Text 9"/>
-          <p:cNvSpPr/>
-          <p:nvPr/>
-        </p:nvSpPr>
-        <p:spPr>
-          <a:xfrm>
-            <a:off x="4862474" y="2020824"/>
-            <a:ext cx="2923946" cy="365760"/>
-          </a:xfrm>
-          <a:prstGeom prst="rect">
-            <a:avLst/>
-          </a:prstGeom>
-          <a:noFill/>
-          <a:ln/>
-        </p:spPr>
-        <p:txBody>
-          <a:bodyPr wrap="square" lIns="0" tIns="0" rIns="0" bIns="0" rtlCol="0" anchor="ctr"/>
-          <a:lstStyle/>
-          <a:p>
-            <a:pPr indent="0" marL="0">
-              <a:buNone/>
-            </a:pPr>
-            <a:r>
-              <a:rPr lang="en-US" sz="1450" b="1" dirty="0">
-                <a:solidFill>
-                  <a:srgbClr val="12191A"/>
-                </a:solidFill>
-                <a:latin typeface="Malgun Gothic" pitchFamily="34" charset="0"/>
-                <a:ea typeface="Malgun Gothic" pitchFamily="34" charset="-122"/>
-                <a:cs typeface="Malgun Gothic" pitchFamily="34" charset="-120"/>
-              </a:rPr>
-              <a:t>병원별 데이터 분리</a:t>
-            </a:r>
-            <a:endParaRPr lang="en-US" sz="1450" dirty="0"/>
-          </a:p>
-        </p:txBody>
-      </p:sp>
-      <p:sp>
-        <p:nvSpPr>
-          <p:cNvPr id="12" name="Text 10"/>
-          <p:cNvSpPr/>
-          <p:nvPr/>
-        </p:nvSpPr>
-        <p:spPr>
-          <a:xfrm>
-            <a:off x="4405274" y="2523744"/>
-            <a:ext cx="3198266" cy="1097280"/>
-          </a:xfrm>
-          <a:prstGeom prst="rect">
-            <a:avLst/>
-          </a:prstGeom>
-          <a:noFill/>
-          <a:ln/>
-        </p:spPr>
-        <p:txBody>
-          <a:bodyPr wrap="square" lIns="0" tIns="0" rIns="0" bIns="0" rtlCol="0" anchor="t"/>
-          <a:lstStyle/>
-          <a:p>
-            <a:pPr indent="0" marL="0">
-              <a:lnSpc>
-                <a:spcPts val="1800"/>
-              </a:lnSpc>
-              <a:buNone/>
-            </a:pPr>
-            <a:r>
-              <a:rPr lang="en-US" sz="1150" dirty="0">
-                <a:solidFill>
-                  <a:srgbClr val="5F6F70"/>
-                </a:solidFill>
-                <a:latin typeface="Malgun Gothic" pitchFamily="34" charset="0"/>
-                <a:ea typeface="Malgun Gothic" pitchFamily="34" charset="-122"/>
-                <a:cs typeface="Malgun Gothic" pitchFamily="34" charset="-120"/>
-              </a:rPr>
-              <a:t>병원마다 독립 데이터베이스 · 독립 도메인으로 구축합니다. 타 병원과 데이터가 공유되는 구조가 아닙니다.</a:t>
-            </a:r>
-            <a:endParaRPr lang="en-US" sz="1150" dirty="0"/>
-          </a:p>
-        </p:txBody>
-      </p:sp>
-      <p:sp>
-        <p:nvSpPr>
-          <p:cNvPr id="13" name="Shape 11"/>
-          <p:cNvSpPr/>
-          <p:nvPr/>
-        </p:nvSpPr>
-        <p:spPr>
-          <a:xfrm>
-            <a:off x="8243621" y="2048256"/>
-            <a:ext cx="310896" cy="310896"/>
-          </a:xfrm>
-          <a:prstGeom prst="ellipse">
-            <a:avLst/>
-          </a:prstGeom>
-          <a:solidFill>
-            <a:srgbClr val="EDF3F1"/>
-          </a:solidFill>
-          <a:ln/>
-        </p:spPr>
-      </p:sp>
-      <p:sp>
-        <p:nvSpPr>
-          <p:cNvPr id="14" name="Shape 12"/>
-          <p:cNvSpPr/>
-          <p:nvPr/>
-        </p:nvSpPr>
-        <p:spPr>
-          <a:xfrm>
-            <a:off x="8348777" y="2153412"/>
-            <a:ext cx="100584" cy="100584"/>
-          </a:xfrm>
-          <a:prstGeom prst="ellipse">
-            <a:avLst/>
-          </a:prstGeom>
-          <a:solidFill>
-            <a:srgbClr val="0D5257"/>
-          </a:solidFill>
-          <a:ln/>
-        </p:spPr>
-      </p:sp>
-      <p:sp>
-        <p:nvSpPr>
-          <p:cNvPr id="15" name="Text 13"/>
-          <p:cNvSpPr/>
-          <p:nvPr/>
-        </p:nvSpPr>
-        <p:spPr>
-          <a:xfrm>
-            <a:off x="8700821" y="2020824"/>
-            <a:ext cx="2923946" cy="365760"/>
-          </a:xfrm>
-          <a:prstGeom prst="rect">
-            <a:avLst/>
-          </a:prstGeom>
-          <a:noFill/>
-          <a:ln/>
-        </p:spPr>
-        <p:txBody>
-          <a:bodyPr wrap="square" lIns="0" tIns="0" rIns="0" bIns="0" rtlCol="0" anchor="ctr"/>
-          <a:lstStyle/>
-          <a:p>
-            <a:pPr indent="0" marL="0">
-              <a:buNone/>
-            </a:pPr>
-            <a:r>
-              <a:rPr lang="en-US" sz="1450" b="1" dirty="0">
-                <a:solidFill>
-                  <a:srgbClr val="12191A"/>
-                </a:solidFill>
-                <a:latin typeface="Malgun Gothic" pitchFamily="34" charset="0"/>
-                <a:ea typeface="Malgun Gothic" pitchFamily="34" charset="-122"/>
-                <a:cs typeface="Malgun Gothic" pitchFamily="34" charset="-120"/>
-              </a:rPr>
-              <a:t>접근 권한 &amp; 감사 로그</a:t>
-            </a:r>
-            <a:endParaRPr lang="en-US" sz="1450" dirty="0"/>
-          </a:p>
-        </p:txBody>
-      </p:sp>
-      <p:sp>
-        <p:nvSpPr>
-          <p:cNvPr id="16" name="Text 14"/>
-          <p:cNvSpPr/>
-          <p:nvPr/>
-        </p:nvSpPr>
-        <p:spPr>
-          <a:xfrm>
-            <a:off x="8243621" y="2523744"/>
-            <a:ext cx="3198266" cy="1097280"/>
-          </a:xfrm>
-          <a:prstGeom prst="rect">
-            <a:avLst/>
-          </a:prstGeom>
-          <a:noFill/>
-          <a:ln/>
-        </p:spPr>
-        <p:txBody>
-          <a:bodyPr wrap="square" lIns="0" tIns="0" rIns="0" bIns="0" rtlCol="0" anchor="t"/>
-          <a:lstStyle/>
-          <a:p>
-            <a:pPr indent="0" marL="0">
-              <a:lnSpc>
-                <a:spcPts val="1800"/>
-              </a:lnSpc>
-              <a:buNone/>
-            </a:pPr>
-            <a:r>
-              <a:rPr lang="en-US" sz="1150" dirty="0">
-                <a:solidFill>
-                  <a:srgbClr val="5F6F70"/>
-                </a:solidFill>
-                <a:latin typeface="Malgun Gothic" pitchFamily="34" charset="0"/>
-                <a:ea typeface="Malgun Gothic" pitchFamily="34" charset="-122"/>
-                <a:cs typeface="Malgun Gothic" pitchFamily="34" charset="-120"/>
-              </a:rPr>
-              <a:t>관리자 역할 기반 권한 분리, 환자 정보 조회 · 변경 이력 기록. 누가 언제 무엇을 바꿨는지 추적 가능합니다.</a:t>
-            </a:r>
-            <a:endParaRPr lang="en-US" sz="1150" dirty="0"/>
-          </a:p>
-        </p:txBody>
-      </p:sp>
-      <p:sp>
-        <p:nvSpPr>
-          <p:cNvPr id="17" name="Shape 15"/>
-          <p:cNvSpPr/>
-          <p:nvPr/>
-        </p:nvSpPr>
-        <p:spPr>
-          <a:xfrm>
-            <a:off x="566928" y="3877056"/>
-            <a:ext cx="310896" cy="310896"/>
-          </a:xfrm>
-          <a:prstGeom prst="ellipse">
-            <a:avLst/>
-          </a:prstGeom>
-          <a:solidFill>
-            <a:srgbClr val="EDF3F1"/>
-          </a:solidFill>
-          <a:ln/>
-        </p:spPr>
-      </p:sp>
-      <p:sp>
-        <p:nvSpPr>
-          <p:cNvPr id="18" name="Shape 16"/>
-          <p:cNvSpPr/>
-          <p:nvPr/>
-        </p:nvSpPr>
-        <p:spPr>
-          <a:xfrm>
-            <a:off x="672084" y="3982212"/>
-            <a:ext cx="100584" cy="100584"/>
-          </a:xfrm>
-          <a:prstGeom prst="ellipse">
-            <a:avLst/>
-          </a:prstGeom>
-          <a:solidFill>
-            <a:srgbClr val="0D5257"/>
-          </a:solidFill>
-          <a:ln/>
-        </p:spPr>
-      </p:sp>
-      <p:sp>
-        <p:nvSpPr>
-          <p:cNvPr id="19" name="Text 17"/>
-          <p:cNvSpPr/>
-          <p:nvPr/>
-        </p:nvSpPr>
-        <p:spPr>
-          <a:xfrm>
-            <a:off x="1024128" y="3849624"/>
-            <a:ext cx="2923946" cy="365760"/>
-          </a:xfrm>
-          <a:prstGeom prst="rect">
-            <a:avLst/>
-          </a:prstGeom>
-          <a:noFill/>
-          <a:ln/>
-        </p:spPr>
-        <p:txBody>
-          <a:bodyPr wrap="square" lIns="0" tIns="0" rIns="0" bIns="0" rtlCol="0" anchor="ctr"/>
-          <a:lstStyle/>
-          <a:p>
-            <a:pPr indent="0" marL="0">
-              <a:buNone/>
-            </a:pPr>
-            <a:r>
-              <a:rPr lang="en-US" sz="1450" b="1" dirty="0">
-                <a:solidFill>
-                  <a:srgbClr val="12191A"/>
-                </a:solidFill>
-                <a:latin typeface="Malgun Gothic" pitchFamily="34" charset="0"/>
-                <a:ea typeface="Malgun Gothic" pitchFamily="34" charset="-122"/>
-                <a:cs typeface="Malgun Gothic" pitchFamily="34" charset="-120"/>
-              </a:rPr>
-              <a:t>AI 학습 데이터 통제</a:t>
-            </a:r>
-            <a:endParaRPr lang="en-US" sz="1450" dirty="0"/>
-          </a:p>
-        </p:txBody>
-      </p:sp>
-      <p:sp>
-        <p:nvSpPr>
-          <p:cNvPr id="20" name="Text 18"/>
-          <p:cNvSpPr/>
-          <p:nvPr/>
-        </p:nvSpPr>
-        <p:spPr>
-          <a:xfrm>
-            <a:off x="566928" y="4352544"/>
-            <a:ext cx="3198266" cy="1097280"/>
-          </a:xfrm>
-          <a:prstGeom prst="rect">
-            <a:avLst/>
-          </a:prstGeom>
-          <a:noFill/>
-          <a:ln/>
-        </p:spPr>
-        <p:txBody>
-          <a:bodyPr wrap="square" lIns="0" tIns="0" rIns="0" bIns="0" rtlCol="0" anchor="t"/>
-          <a:lstStyle/>
-          <a:p>
-            <a:pPr indent="0" marL="0">
-              <a:lnSpc>
-                <a:spcPts val="1800"/>
-              </a:lnSpc>
-              <a:buNone/>
-            </a:pPr>
-            <a:r>
-              <a:rPr lang="en-US" sz="1150" dirty="0">
-                <a:solidFill>
-                  <a:srgbClr val="5F6F70"/>
-                </a:solidFill>
-                <a:latin typeface="Malgun Gothic" pitchFamily="34" charset="0"/>
-                <a:ea typeface="Malgun Gothic" pitchFamily="34" charset="-122"/>
-                <a:cs typeface="Malgun Gothic" pitchFamily="34" charset="-120"/>
-              </a:rPr>
-              <a:t>환자 데이터는 외부 모델의 학습에 사용되지 않습니다. AI 처리 시 식별정보는 최소화하여 전달합니다.</a:t>
-            </a:r>
-            <a:endParaRPr lang="en-US" sz="1150" dirty="0"/>
-          </a:p>
-        </p:txBody>
-      </p:sp>
-      <p:sp>
-        <p:nvSpPr>
-          <p:cNvPr id="21" name="Shape 19"/>
-          <p:cNvSpPr/>
-          <p:nvPr/>
-        </p:nvSpPr>
-        <p:spPr>
-          <a:xfrm>
-            <a:off x="4405274" y="3877056"/>
-            <a:ext cx="310896" cy="310896"/>
-          </a:xfrm>
-          <a:prstGeom prst="ellipse">
-            <a:avLst/>
-          </a:prstGeom>
-          <a:solidFill>
-            <a:srgbClr val="EDF3F1"/>
-          </a:solidFill>
-          <a:ln/>
-        </p:spPr>
-      </p:sp>
-      <p:sp>
-        <p:nvSpPr>
-          <p:cNvPr id="22" name="Shape 20"/>
-          <p:cNvSpPr/>
-          <p:nvPr/>
-        </p:nvSpPr>
-        <p:spPr>
-          <a:xfrm>
-            <a:off x="4510430" y="3982212"/>
-            <a:ext cx="100584" cy="100584"/>
-          </a:xfrm>
-          <a:prstGeom prst="ellipse">
-            <a:avLst/>
-          </a:prstGeom>
-          <a:solidFill>
-            <a:srgbClr val="0D5257"/>
-          </a:solidFill>
-          <a:ln/>
-        </p:spPr>
-      </p:sp>
-      <p:sp>
-        <p:nvSpPr>
-          <p:cNvPr id="23" name="Text 21"/>
-          <p:cNvSpPr/>
-          <p:nvPr/>
-        </p:nvSpPr>
-        <p:spPr>
-          <a:xfrm>
-            <a:off x="4862474" y="3849624"/>
-            <a:ext cx="2923946" cy="365760"/>
-          </a:xfrm>
-          <a:prstGeom prst="rect">
-            <a:avLst/>
-          </a:prstGeom>
-          <a:noFill/>
-          <a:ln/>
-        </p:spPr>
-        <p:txBody>
-          <a:bodyPr wrap="square" lIns="0" tIns="0" rIns="0" bIns="0" rtlCol="0" anchor="ctr"/>
-          <a:lstStyle/>
-          <a:p>
-            <a:pPr indent="0" marL="0">
-              <a:buNone/>
-            </a:pPr>
-            <a:r>
-              <a:rPr lang="en-US" sz="1450" b="1" dirty="0">
-                <a:solidFill>
-                  <a:srgbClr val="12191A"/>
-                </a:solidFill>
-                <a:latin typeface="Malgun Gothic" pitchFamily="34" charset="0"/>
-                <a:ea typeface="Malgun Gothic" pitchFamily="34" charset="-122"/>
-                <a:cs typeface="Malgun Gothic" pitchFamily="34" charset="-120"/>
-              </a:rPr>
-              <a:t>본인인증 기반 접근</a:t>
-            </a:r>
-            <a:endParaRPr lang="en-US" sz="1450" dirty="0"/>
-          </a:p>
-        </p:txBody>
-      </p:sp>
-      <p:sp>
-        <p:nvSpPr>
-          <p:cNvPr id="24" name="Text 22"/>
-          <p:cNvSpPr/>
-          <p:nvPr/>
-        </p:nvSpPr>
-        <p:spPr>
-          <a:xfrm>
-            <a:off x="4405274" y="4352544"/>
-            <a:ext cx="3198266" cy="1097280"/>
-          </a:xfrm>
-          <a:prstGeom prst="rect">
-            <a:avLst/>
-          </a:prstGeom>
-          <a:noFill/>
-          <a:ln/>
-        </p:spPr>
-        <p:txBody>
-          <a:bodyPr wrap="square" lIns="0" tIns="0" rIns="0" bIns="0" rtlCol="0" anchor="t"/>
-          <a:lstStyle/>
-          <a:p>
-            <a:pPr indent="0" marL="0">
-              <a:lnSpc>
-                <a:spcPts val="1800"/>
-              </a:lnSpc>
-              <a:buNone/>
-            </a:pPr>
-            <a:r>
-              <a:rPr lang="en-US" sz="1150" dirty="0">
-                <a:solidFill>
-                  <a:srgbClr val="5F6F70"/>
-                </a:solidFill>
-                <a:latin typeface="Malgun Gothic" pitchFamily="34" charset="0"/>
-                <a:ea typeface="Malgun Gothic" pitchFamily="34" charset="-122"/>
-                <a:cs typeface="Malgun Gothic" pitchFamily="34" charset="-120"/>
-              </a:rPr>
-              <a:t>환자 예약 조회는 휴대폰 또는 카카오 인증을 거칩니다. 이름 · 생년월일만으로 타인 예약이 조회되지 않습니다.</a:t>
-            </a:r>
-            <a:endParaRPr lang="en-US" sz="1150" dirty="0"/>
-          </a:p>
-        </p:txBody>
-      </p:sp>
-      <p:sp>
-        <p:nvSpPr>
-          <p:cNvPr id="25" name="Shape 23"/>
-          <p:cNvSpPr/>
-          <p:nvPr/>
-        </p:nvSpPr>
-        <p:spPr>
-          <a:xfrm>
-            <a:off x="8243621" y="3877056"/>
-            <a:ext cx="310896" cy="310896"/>
-          </a:xfrm>
-          <a:prstGeom prst="ellipse">
-            <a:avLst/>
-          </a:prstGeom>
-          <a:solidFill>
-            <a:srgbClr val="EDF3F1"/>
-          </a:solidFill>
-          <a:ln/>
-        </p:spPr>
-      </p:sp>
-      <p:sp>
-        <p:nvSpPr>
-          <p:cNvPr id="26" name="Shape 24"/>
-          <p:cNvSpPr/>
-          <p:nvPr/>
-        </p:nvSpPr>
-        <p:spPr>
-          <a:xfrm>
-            <a:off x="8348777" y="3982212"/>
-            <a:ext cx="100584" cy="100584"/>
-          </a:xfrm>
-          <a:prstGeom prst="ellipse">
-            <a:avLst/>
-          </a:prstGeom>
-          <a:solidFill>
-            <a:srgbClr val="0D5257"/>
-          </a:solidFill>
-          <a:ln/>
-        </p:spPr>
-      </p:sp>
-      <p:sp>
-        <p:nvSpPr>
-          <p:cNvPr id="27" name="Text 25"/>
-          <p:cNvSpPr/>
-          <p:nvPr/>
-        </p:nvSpPr>
-        <p:spPr>
-          <a:xfrm>
-            <a:off x="8700821" y="3849624"/>
-            <a:ext cx="2923946" cy="365760"/>
-          </a:xfrm>
-          <a:prstGeom prst="rect">
-            <a:avLst/>
-          </a:prstGeom>
-          <a:noFill/>
-          <a:ln/>
-        </p:spPr>
-        <p:txBody>
-          <a:bodyPr wrap="square" lIns="0" tIns="0" rIns="0" bIns="0" rtlCol="0" anchor="ctr"/>
-          <a:lstStyle/>
-          <a:p>
-            <a:pPr indent="0" marL="0">
-              <a:buNone/>
-            </a:pPr>
-            <a:r>
-              <a:rPr lang="en-US" sz="1450" b="1" dirty="0">
-                <a:solidFill>
-                  <a:srgbClr val="12191A"/>
-                </a:solidFill>
-                <a:latin typeface="Malgun Gothic" pitchFamily="34" charset="0"/>
-                <a:ea typeface="Malgun Gothic" pitchFamily="34" charset="-122"/>
-                <a:cs typeface="Malgun Gothic" pitchFamily="34" charset="-120"/>
-              </a:rPr>
-              <a:t>백업 &amp; 복구</a:t>
-            </a:r>
-            <a:endParaRPr lang="en-US" sz="1450" dirty="0"/>
-          </a:p>
-        </p:txBody>
-      </p:sp>
-      <p:sp>
-        <p:nvSpPr>
-          <p:cNvPr id="28" name="Text 26"/>
-          <p:cNvSpPr/>
-          <p:nvPr/>
-        </p:nvSpPr>
-        <p:spPr>
-          <a:xfrm>
-            <a:off x="8243621" y="4352544"/>
-            <a:ext cx="3198266" cy="1097280"/>
-          </a:xfrm>
-          <a:prstGeom prst="rect">
-            <a:avLst/>
-          </a:prstGeom>
-          <a:noFill/>
-          <a:ln/>
-        </p:spPr>
-        <p:txBody>
-          <a:bodyPr wrap="square" lIns="0" tIns="0" rIns="0" bIns="0" rtlCol="0" anchor="t"/>
-          <a:lstStyle/>
-          <a:p>
-            <a:pPr indent="0" marL="0">
-              <a:lnSpc>
-                <a:spcPts val="1800"/>
-              </a:lnSpc>
-              <a:buNone/>
-            </a:pPr>
-            <a:r>
-              <a:rPr lang="en-US" sz="1150" dirty="0">
-                <a:solidFill>
-                  <a:srgbClr val="5F6F70"/>
-                </a:solidFill>
-                <a:latin typeface="Malgun Gothic" pitchFamily="34" charset="0"/>
-                <a:ea typeface="Malgun Gothic" pitchFamily="34" charset="-122"/>
-                <a:cs typeface="Malgun Gothic" pitchFamily="34" charset="-120"/>
-              </a:rPr>
-              <a:t>일일 자동 백업과 시점 복구를 운영하며, 장애 대응 절차와 연락 체계를 계약에 명시합니다.</a:t>
-            </a:r>
-            <a:endParaRPr lang="en-US" sz="1150" dirty="0"/>
-          </a:p>
-        </p:txBody>
-      </p:sp>
-      <p:sp>
-        <p:nvSpPr>
-          <p:cNvPr id="29" name="Text 27"/>
+              <a:rPr lang="en-US" sz="1050" b="1" dirty="0">
+                <a:solidFill>
+                  <a:srgbClr val="0D5257"/>
+                </a:solidFill>
+                <a:latin typeface="Malgun Gothic" pitchFamily="34" charset="0"/>
+                <a:ea typeface="Malgun Gothic" pitchFamily="34" charset="-122"/>
+                <a:cs typeface="Malgun Gothic" pitchFamily="34" charset="-120"/>
+              </a:rPr>
+              <a:t>병원 총 투입 12주 합계 약 40시간   ·   EMR 연계 없고 의료진 10인 이하면 8주로 단축   ·   2주 병행 운영 후 전환   ·   5주차 검수에서 위약금 없이 중단 가능</a:t>
+            </a:r>
+            <a:endParaRPr lang="en-US" sz="1050" dirty="0"/>
+          </a:p>
+        </p:txBody>
+      </p:sp>
+      <p:sp>
+        <p:nvSpPr>
+          <p:cNvPr id="48" name="Text 46"/>
           <p:cNvSpPr/>
           <p:nvPr/>
         </p:nvSpPr>
@@ -8286,7 +9857,7 @@
                 <a:ea typeface="Malgun Gothic" pitchFamily="34" charset="-122"/>
                 <a:cs typeface="Malgun Gothic" pitchFamily="34" charset="-120"/>
               </a:rPr>
-              <a:t>비용</a:t>
+              <a:t>신뢰</a:t>
             </a:r>
             <a:endParaRPr lang="en-US" sz="1150" dirty="0"/>
           </a:p>
@@ -8325,7 +9896,7 @@
                 <a:ea typeface="Malgun Gothic" pitchFamily="34" charset="-122"/>
                 <a:cs typeface="Malgun Gothic" pitchFamily="34" charset="-120"/>
               </a:rPr>
-              <a:t>도입 방식과 비용</a:t>
+              <a:t>보안 및 컴플라이언스</a:t>
             </a:r>
             <a:endParaRPr lang="en-US" sz="3100" dirty="0"/>
           </a:p>
@@ -8367,7 +9938,7 @@
                 <a:ea typeface="Malgun Gothic" pitchFamily="34" charset="-122"/>
                 <a:cs typeface="Malgun Gothic" pitchFamily="34" charset="-120"/>
               </a:rPr>
-              <a:t>초기 구축비와 월 운영비로 구성합니다. 병원 규모(의료진 수 · 월 예약 건수)와 선택 모듈에 따라 조정되며, 아래는 협의 기준안입니다.</a:t>
+              <a:t>난임 진료 정보는 가장 민감한 개인정보에 속합니다. 기술적 조치와 운영 규칙을 함께 설계합니다.</a:t>
             </a:r>
             <a:endParaRPr lang="en-US" sz="1350" dirty="0"/>
           </a:p>
@@ -8382,260 +9953,9 @@
         <p:spPr>
           <a:xfrm>
             <a:off x="566928" y="2048256"/>
-            <a:ext cx="3381146" cy="3602736"/>
-          </a:xfrm>
-          <a:prstGeom prst="rect">
-            <a:avLst/>
-          </a:prstGeom>
-          <a:solidFill>
-            <a:srgbClr val="FFFFFF"/>
-          </a:solidFill>
-          <a:ln w="9525">
-            <a:solidFill>
-              <a:srgbClr val="E1E4DE"/>
-            </a:solidFill>
-            <a:prstDash val="solid"/>
-          </a:ln>
-        </p:spPr>
-      </p:sp>
-      <p:sp>
-        <p:nvSpPr>
-          <p:cNvPr id="6" name="Text 4"/>
-          <p:cNvSpPr/>
-          <p:nvPr/>
-        </p:nvSpPr>
-        <p:spPr>
-          <a:xfrm>
-            <a:off x="896112" y="2249424"/>
-            <a:ext cx="2722778" cy="384048"/>
-          </a:xfrm>
-          <a:prstGeom prst="rect">
-            <a:avLst/>
-          </a:prstGeom>
-          <a:noFill/>
-          <a:ln/>
-        </p:spPr>
-        <p:txBody>
-          <a:bodyPr wrap="square" lIns="0" tIns="0" rIns="0" bIns="0" rtlCol="0" anchor="ctr"/>
-          <a:lstStyle/>
-          <a:p>
-            <a:pPr indent="0" marL="0">
-              <a:buNone/>
-            </a:pPr>
-            <a:r>
-              <a:rPr lang="en-US" sz="2000" b="1" dirty="0">
-                <a:solidFill>
-                  <a:srgbClr val="12191A"/>
-                </a:solidFill>
-                <a:latin typeface="Malgun Gothic" pitchFamily="34" charset="0"/>
-                <a:ea typeface="Malgun Gothic" pitchFamily="34" charset="-122"/>
-                <a:cs typeface="Malgun Gothic" pitchFamily="34" charset="-120"/>
-              </a:rPr>
-              <a:t>피움 Core</a:t>
-            </a:r>
-            <a:endParaRPr lang="en-US" sz="2000" dirty="0"/>
-          </a:p>
-        </p:txBody>
-      </p:sp>
-      <p:sp>
-        <p:nvSpPr>
-          <p:cNvPr id="7" name="Text 5"/>
-          <p:cNvSpPr/>
-          <p:nvPr/>
-        </p:nvSpPr>
-        <p:spPr>
-          <a:xfrm>
-            <a:off x="896112" y="2670048"/>
-            <a:ext cx="2722778" cy="274320"/>
-          </a:xfrm>
-          <a:prstGeom prst="rect">
-            <a:avLst/>
-          </a:prstGeom>
-          <a:noFill/>
-          <a:ln/>
-        </p:spPr>
-        <p:txBody>
-          <a:bodyPr wrap="square" lIns="0" tIns="0" rIns="0" bIns="0" rtlCol="0" anchor="ctr"/>
-          <a:lstStyle/>
-          <a:p>
-            <a:pPr indent="0" marL="0">
-              <a:buNone/>
-            </a:pPr>
-            <a:r>
-              <a:rPr lang="en-US" sz="1200" b="1" dirty="0">
-                <a:solidFill>
-                  <a:srgbClr val="8F6716"/>
-                </a:solidFill>
-                <a:latin typeface="Malgun Gothic" pitchFamily="34" charset="0"/>
-                <a:ea typeface="Malgun Gothic" pitchFamily="34" charset="-122"/>
-                <a:cs typeface="Malgun Gothic" pitchFamily="34" charset="-120"/>
-              </a:rPr>
-              <a:t>구축비 + 월 운영비 · 협의</a:t>
-            </a:r>
-            <a:endParaRPr lang="en-US" sz="1200" dirty="0"/>
-          </a:p>
-        </p:txBody>
-      </p:sp>
-      <p:sp>
-        <p:nvSpPr>
-          <p:cNvPr id="8" name="Text 6"/>
-          <p:cNvSpPr/>
-          <p:nvPr/>
-        </p:nvSpPr>
-        <p:spPr>
-          <a:xfrm>
-            <a:off x="896112" y="2962656"/>
-            <a:ext cx="2722778" cy="512064"/>
-          </a:xfrm>
-          <a:prstGeom prst="rect">
-            <a:avLst/>
-          </a:prstGeom>
-          <a:noFill/>
-          <a:ln/>
-        </p:spPr>
-        <p:txBody>
-          <a:bodyPr wrap="square" lIns="0" tIns="0" rIns="0" bIns="0" rtlCol="0" anchor="t"/>
-          <a:lstStyle/>
-          <a:p>
-            <a:pPr indent="0" marL="0">
-              <a:lnSpc>
-                <a:spcPts val="1700"/>
-              </a:lnSpc>
-              <a:buNone/>
-            </a:pPr>
-            <a:r>
-              <a:rPr lang="en-US" sz="1100" dirty="0">
-                <a:solidFill>
-                  <a:srgbClr val="5F6F70"/>
-                </a:solidFill>
-                <a:latin typeface="Malgun Gothic" pitchFamily="34" charset="0"/>
-                <a:ea typeface="Malgun Gothic" pitchFamily="34" charset="-122"/>
-                <a:cs typeface="Malgun Gothic" pitchFamily="34" charset="-120"/>
-              </a:rPr>
-              <a:t>의료진 3인 이하 / 예약 시스템 첫 도입</a:t>
-            </a:r>
-            <a:endParaRPr lang="en-US" sz="1100" dirty="0"/>
-          </a:p>
-        </p:txBody>
-      </p:sp>
-      <p:sp>
-        <p:nvSpPr>
-          <p:cNvPr id="9" name="Text 7"/>
-          <p:cNvSpPr/>
-          <p:nvPr/>
-        </p:nvSpPr>
-        <p:spPr>
-          <a:xfrm>
-            <a:off x="896112" y="3566160"/>
-            <a:ext cx="2722778" cy="1920240"/>
-          </a:xfrm>
-          <a:prstGeom prst="rect">
-            <a:avLst/>
-          </a:prstGeom>
-          <a:noFill/>
-          <a:ln/>
-        </p:spPr>
-        <p:txBody>
-          <a:bodyPr wrap="square" lIns="0" tIns="0" rIns="0" bIns="0" rtlCol="0" anchor="t"/>
-          <a:lstStyle/>
-          <a:p>
-            <a:pPr marL="342900" indent="-342900">
-              <a:spcAft>
-                <a:spcPts val="600"/>
-              </a:spcAft>
-              <a:buSzPct val="100000"/>
-              <a:buChar char="•"/>
-            </a:pPr>
-            <a:r>
-              <a:rPr lang="en-US" sz="1150" dirty="0">
-                <a:solidFill>
-                  <a:srgbClr val="354445"/>
-                </a:solidFill>
-                <a:latin typeface="Malgun Gothic" pitchFamily="34" charset="0"/>
-                <a:ea typeface="Malgun Gothic" pitchFamily="34" charset="-122"/>
-                <a:cs typeface="Malgun Gothic" pitchFamily="34" charset="-120"/>
-              </a:rPr>
-              <a:t>환자 예약 웹 &amp; 데스크 관리자</a:t>
-            </a:r>
-            <a:endParaRPr lang="en-US" sz="1150" dirty="0"/>
-          </a:p>
-          <a:p>
-            <a:pPr marL="342900" indent="-342900">
-              <a:spcAft>
-                <a:spcPts val="600"/>
-              </a:spcAft>
-              <a:buSzPct val="100000"/>
-              <a:buChar char="•"/>
-            </a:pPr>
-            <a:r>
-              <a:rPr lang="en-US" sz="1150" dirty="0">
-                <a:solidFill>
-                  <a:srgbClr val="354445"/>
-                </a:solidFill>
-                <a:latin typeface="Malgun Gothic" pitchFamily="34" charset="0"/>
-                <a:ea typeface="Malgun Gothic" pitchFamily="34" charset="-122"/>
-                <a:cs typeface="Malgun Gothic" pitchFamily="34" charset="-120"/>
-              </a:rPr>
-              <a:t>의료진 스케줄 &amp; 변경 승인</a:t>
-            </a:r>
-            <a:endParaRPr lang="en-US" sz="1150" dirty="0"/>
-          </a:p>
-          <a:p>
-            <a:pPr marL="342900" indent="-342900">
-              <a:spcAft>
-                <a:spcPts val="600"/>
-              </a:spcAft>
-              <a:buSzPct val="100000"/>
-              <a:buChar char="•"/>
-            </a:pPr>
-            <a:r>
-              <a:rPr lang="en-US" sz="1150" dirty="0">
-                <a:solidFill>
-                  <a:srgbClr val="354445"/>
-                </a:solidFill>
-                <a:latin typeface="Malgun Gothic" pitchFamily="34" charset="0"/>
-                <a:ea typeface="Malgun Gothic" pitchFamily="34" charset="-122"/>
-                <a:cs typeface="Malgun Gothic" pitchFamily="34" charset="-120"/>
-              </a:rPr>
-              <a:t>카카오 알림톡 7종</a:t>
-            </a:r>
-            <a:endParaRPr lang="en-US" sz="1150" dirty="0"/>
-          </a:p>
-          <a:p>
-            <a:pPr marL="342900" indent="-342900">
-              <a:spcAft>
-                <a:spcPts val="600"/>
-              </a:spcAft>
-              <a:buSzPct val="100000"/>
-              <a:buChar char="•"/>
-            </a:pPr>
-            <a:r>
-              <a:rPr lang="en-US" sz="1150" dirty="0">
-                <a:solidFill>
-                  <a:srgbClr val="354445"/>
-                </a:solidFill>
-                <a:latin typeface="Malgun Gothic" pitchFamily="34" charset="0"/>
-                <a:ea typeface="Malgun Gothic" pitchFamily="34" charset="-122"/>
-                <a:cs typeface="Malgun Gothic" pitchFamily="34" charset="-120"/>
-              </a:rPr>
-              <a:t>기본 통계 대시보드</a:t>
-            </a:r>
-            <a:endParaRPr lang="en-US" sz="1150" dirty="0"/>
-          </a:p>
-        </p:txBody>
-      </p:sp>
-      <p:sp>
-        <p:nvSpPr>
-          <p:cNvPr id="10" name="Shape 8"/>
-          <p:cNvSpPr/>
-          <p:nvPr/>
-        </p:nvSpPr>
-        <p:spPr>
-          <a:xfrm>
-            <a:off x="4405274" y="2048256"/>
-            <a:ext cx="3381146" cy="3602736"/>
-          </a:xfrm>
-          <a:prstGeom prst="rect">
+            <a:ext cx="310896" cy="310896"/>
+          </a:xfrm>
+          <a:prstGeom prst="ellipse">
             <a:avLst/>
           </a:prstGeom>
           <a:solidFill>
@@ -8646,142 +9966,265 @@
       </p:sp>
       <p:sp>
         <p:nvSpPr>
+          <p:cNvPr id="6" name="Shape 4"/>
+          <p:cNvSpPr/>
+          <p:nvPr/>
+        </p:nvSpPr>
+        <p:spPr>
+          <a:xfrm>
+            <a:off x="672084" y="2153412"/>
+            <a:ext cx="100584" cy="100584"/>
+          </a:xfrm>
+          <a:prstGeom prst="ellipse">
+            <a:avLst/>
+          </a:prstGeom>
+          <a:solidFill>
+            <a:srgbClr val="0D5257"/>
+          </a:solidFill>
+          <a:ln/>
+        </p:spPr>
+      </p:sp>
+      <p:sp>
+        <p:nvSpPr>
+          <p:cNvPr id="7" name="Text 5"/>
+          <p:cNvSpPr/>
+          <p:nvPr/>
+        </p:nvSpPr>
+        <p:spPr>
+          <a:xfrm>
+            <a:off x="1024128" y="2020824"/>
+            <a:ext cx="2923946" cy="365760"/>
+          </a:xfrm>
+          <a:prstGeom prst="rect">
+            <a:avLst/>
+          </a:prstGeom>
+          <a:noFill/>
+          <a:ln/>
+        </p:spPr>
+        <p:txBody>
+          <a:bodyPr wrap="square" lIns="0" tIns="0" rIns="0" bIns="0" rtlCol="0" anchor="ctr"/>
+          <a:lstStyle/>
+          <a:p>
+            <a:pPr indent="0" marL="0">
+              <a:buNone/>
+            </a:pPr>
+            <a:r>
+              <a:rPr lang="en-US" sz="1450" b="1" dirty="0">
+                <a:solidFill>
+                  <a:srgbClr val="12191A"/>
+                </a:solidFill>
+                <a:latin typeface="Malgun Gothic" pitchFamily="34" charset="0"/>
+                <a:ea typeface="Malgun Gothic" pitchFamily="34" charset="-122"/>
+                <a:cs typeface="Malgun Gothic" pitchFamily="34" charset="-120"/>
+              </a:rPr>
+              <a:t>국내 리전 보관</a:t>
+            </a:r>
+            <a:endParaRPr lang="en-US" sz="1450" dirty="0"/>
+          </a:p>
+        </p:txBody>
+      </p:sp>
+      <p:sp>
+        <p:nvSpPr>
+          <p:cNvPr id="8" name="Text 6"/>
+          <p:cNvSpPr/>
+          <p:nvPr/>
+        </p:nvSpPr>
+        <p:spPr>
+          <a:xfrm>
+            <a:off x="566928" y="2523744"/>
+            <a:ext cx="3198266" cy="1097280"/>
+          </a:xfrm>
+          <a:prstGeom prst="rect">
+            <a:avLst/>
+          </a:prstGeom>
+          <a:noFill/>
+          <a:ln/>
+        </p:spPr>
+        <p:txBody>
+          <a:bodyPr wrap="square" lIns="0" tIns="0" rIns="0" bIns="0" rtlCol="0" anchor="t"/>
+          <a:lstStyle/>
+          <a:p>
+            <a:pPr indent="0" marL="0">
+              <a:lnSpc>
+                <a:spcPts val="1800"/>
+              </a:lnSpc>
+              <a:buNone/>
+            </a:pPr>
+            <a:r>
+              <a:rPr lang="en-US" sz="1150" dirty="0">
+                <a:solidFill>
+                  <a:srgbClr val="5F6F70"/>
+                </a:solidFill>
+                <a:latin typeface="Malgun Gothic" pitchFamily="34" charset="0"/>
+                <a:ea typeface="Malgun Gothic" pitchFamily="34" charset="-122"/>
+                <a:cs typeface="Malgun Gothic" pitchFamily="34" charset="-120"/>
+              </a:rPr>
+              <a:t>데이터베이스와 애플리케이션 모두 국내(서울) 리전에서 운영합니다. 환자 정보는 국외로 이전되지 않습니다.</a:t>
+            </a:r>
+            <a:endParaRPr lang="en-US" sz="1150" dirty="0"/>
+          </a:p>
+        </p:txBody>
+      </p:sp>
+      <p:sp>
+        <p:nvSpPr>
+          <p:cNvPr id="9" name="Shape 7"/>
+          <p:cNvSpPr/>
+          <p:nvPr/>
+        </p:nvSpPr>
+        <p:spPr>
+          <a:xfrm>
+            <a:off x="4405274" y="2048256"/>
+            <a:ext cx="310896" cy="310896"/>
+          </a:xfrm>
+          <a:prstGeom prst="ellipse">
+            <a:avLst/>
+          </a:prstGeom>
+          <a:solidFill>
+            <a:srgbClr val="EDF3F1"/>
+          </a:solidFill>
+          <a:ln/>
+        </p:spPr>
+      </p:sp>
+      <p:sp>
+        <p:nvSpPr>
+          <p:cNvPr id="10" name="Shape 8"/>
+          <p:cNvSpPr/>
+          <p:nvPr/>
+        </p:nvSpPr>
+        <p:spPr>
+          <a:xfrm>
+            <a:off x="4510430" y="2153412"/>
+            <a:ext cx="100584" cy="100584"/>
+          </a:xfrm>
+          <a:prstGeom prst="ellipse">
+            <a:avLst/>
+          </a:prstGeom>
+          <a:solidFill>
+            <a:srgbClr val="0D5257"/>
+          </a:solidFill>
+          <a:ln/>
+        </p:spPr>
+      </p:sp>
+      <p:sp>
+        <p:nvSpPr>
           <p:cNvPr id="11" name="Text 9"/>
           <p:cNvSpPr/>
           <p:nvPr/>
         </p:nvSpPr>
         <p:spPr>
           <a:xfrm>
-            <a:off x="4734458" y="2249424"/>
-            <a:ext cx="2722778" cy="384048"/>
-          </a:xfrm>
-          <a:prstGeom prst="rect">
-            <a:avLst/>
-          </a:prstGeom>
-          <a:noFill/>
-          <a:ln/>
-        </p:spPr>
-        <p:txBody>
-          <a:bodyPr wrap="square" lIns="0" tIns="0" rIns="0" bIns="0" rtlCol="0" anchor="ctr"/>
-          <a:lstStyle/>
-          <a:p>
-            <a:pPr indent="0" marL="0">
-              <a:buNone/>
-            </a:pPr>
-            <a:r>
-              <a:rPr lang="en-US" sz="2000" b="1" dirty="0">
-                <a:solidFill>
-                  <a:srgbClr val="0D5257"/>
-                </a:solidFill>
-                <a:latin typeface="Malgun Gothic" pitchFamily="34" charset="0"/>
-                <a:ea typeface="Malgun Gothic" pitchFamily="34" charset="-122"/>
-                <a:cs typeface="Malgun Gothic" pitchFamily="34" charset="-120"/>
-              </a:rPr>
-              <a:t>피움 Smart</a:t>
-            </a:r>
-            <a:endParaRPr lang="en-US" sz="2000" dirty="0"/>
-          </a:p>
-        </p:txBody>
-      </p:sp>
-      <p:sp>
-        <p:nvSpPr>
-          <p:cNvPr id="12" name="Shape 10"/>
-          <p:cNvSpPr/>
-          <p:nvPr/>
-        </p:nvSpPr>
-        <p:spPr>
-          <a:xfrm>
-            <a:off x="6734861" y="2322576"/>
-            <a:ext cx="731520" cy="274320"/>
-          </a:xfrm>
-          <a:prstGeom prst="roundRect">
-            <a:avLst>
-              <a:gd name="adj" fmla="val 46667"/>
-            </a:avLst>
+            <a:off x="4862474" y="2020824"/>
+            <a:ext cx="2923946" cy="365760"/>
+          </a:xfrm>
+          <a:prstGeom prst="rect">
+            <a:avLst/>
+          </a:prstGeom>
+          <a:noFill/>
+          <a:ln/>
+        </p:spPr>
+        <p:txBody>
+          <a:bodyPr wrap="square" lIns="0" tIns="0" rIns="0" bIns="0" rtlCol="0" anchor="ctr"/>
+          <a:lstStyle/>
+          <a:p>
+            <a:pPr indent="0" marL="0">
+              <a:buNone/>
+            </a:pPr>
+            <a:r>
+              <a:rPr lang="en-US" sz="1450" b="1" dirty="0">
+                <a:solidFill>
+                  <a:srgbClr val="12191A"/>
+                </a:solidFill>
+                <a:latin typeface="Malgun Gothic" pitchFamily="34" charset="0"/>
+                <a:ea typeface="Malgun Gothic" pitchFamily="34" charset="-122"/>
+                <a:cs typeface="Malgun Gothic" pitchFamily="34" charset="-120"/>
+              </a:rPr>
+              <a:t>병원별 데이터 분리</a:t>
+            </a:r>
+            <a:endParaRPr lang="en-US" sz="1450" dirty="0"/>
+          </a:p>
+        </p:txBody>
+      </p:sp>
+      <p:sp>
+        <p:nvSpPr>
+          <p:cNvPr id="12" name="Text 10"/>
+          <p:cNvSpPr/>
+          <p:nvPr/>
+        </p:nvSpPr>
+        <p:spPr>
+          <a:xfrm>
+            <a:off x="4405274" y="2523744"/>
+            <a:ext cx="3198266" cy="1097280"/>
+          </a:xfrm>
+          <a:prstGeom prst="rect">
+            <a:avLst/>
+          </a:prstGeom>
+          <a:noFill/>
+          <a:ln/>
+        </p:spPr>
+        <p:txBody>
+          <a:bodyPr wrap="square" lIns="0" tIns="0" rIns="0" bIns="0" rtlCol="0" anchor="t"/>
+          <a:lstStyle/>
+          <a:p>
+            <a:pPr indent="0" marL="0">
+              <a:lnSpc>
+                <a:spcPts val="1800"/>
+              </a:lnSpc>
+              <a:buNone/>
+            </a:pPr>
+            <a:r>
+              <a:rPr lang="en-US" sz="1150" dirty="0">
+                <a:solidFill>
+                  <a:srgbClr val="5F6F70"/>
+                </a:solidFill>
+                <a:latin typeface="Malgun Gothic" pitchFamily="34" charset="0"/>
+                <a:ea typeface="Malgun Gothic" pitchFamily="34" charset="-122"/>
+                <a:cs typeface="Malgun Gothic" pitchFamily="34" charset="-120"/>
+              </a:rPr>
+              <a:t>병원마다 독립 데이터베이스 · 독립 도메인으로 구축합니다. 타 병원과 데이터가 공유되는 구조가 아닙니다.</a:t>
+            </a:r>
+            <a:endParaRPr lang="en-US" sz="1150" dirty="0"/>
+          </a:p>
+        </p:txBody>
+      </p:sp>
+      <p:sp>
+        <p:nvSpPr>
+          <p:cNvPr id="13" name="Shape 11"/>
+          <p:cNvSpPr/>
+          <p:nvPr/>
+        </p:nvSpPr>
+        <p:spPr>
+          <a:xfrm>
+            <a:off x="8243621" y="2048256"/>
+            <a:ext cx="310896" cy="310896"/>
+          </a:xfrm>
+          <a:prstGeom prst="ellipse">
+            <a:avLst/>
           </a:prstGeom>
           <a:solidFill>
-            <a:srgbClr val="F7F1E2"/>
+            <a:srgbClr val="EDF3F1"/>
           </a:solidFill>
           <a:ln/>
         </p:spPr>
       </p:sp>
       <p:sp>
         <p:nvSpPr>
-          <p:cNvPr id="13" name="Text 11"/>
-          <p:cNvSpPr/>
-          <p:nvPr/>
-        </p:nvSpPr>
-        <p:spPr>
-          <a:xfrm>
-            <a:off x="6734861" y="2322576"/>
-            <a:ext cx="731520" cy="274320"/>
-          </a:xfrm>
-          <a:prstGeom prst="rect">
-            <a:avLst/>
-          </a:prstGeom>
-          <a:noFill/>
-          <a:ln/>
-        </p:spPr>
-        <p:txBody>
-          <a:bodyPr wrap="square" lIns="0" tIns="0" rIns="0" bIns="0" rtlCol="0" anchor="ctr"/>
-          <a:lstStyle/>
-          <a:p>
-            <a:pPr algn="ctr" indent="0" marL="0">
-              <a:buNone/>
-            </a:pPr>
-            <a:r>
-              <a:rPr lang="en-US" sz="950" b="1" dirty="0">
-                <a:solidFill>
-                  <a:srgbClr val="8F6716"/>
-                </a:solidFill>
-                <a:latin typeface="Malgun Gothic" pitchFamily="34" charset="0"/>
-                <a:ea typeface="Malgun Gothic" pitchFamily="34" charset="-122"/>
-                <a:cs typeface="Malgun Gothic" pitchFamily="34" charset="-120"/>
-              </a:rPr>
-              <a:t>권장</a:t>
-            </a:r>
-            <a:endParaRPr lang="en-US" sz="950" dirty="0"/>
-          </a:p>
-        </p:txBody>
-      </p:sp>
-      <p:sp>
-        <p:nvSpPr>
-          <p:cNvPr id="14" name="Text 12"/>
-          <p:cNvSpPr/>
-          <p:nvPr/>
-        </p:nvSpPr>
-        <p:spPr>
-          <a:xfrm>
-            <a:off x="4734458" y="2670048"/>
-            <a:ext cx="2722778" cy="274320"/>
-          </a:xfrm>
-          <a:prstGeom prst="rect">
-            <a:avLst/>
-          </a:prstGeom>
-          <a:noFill/>
-          <a:ln/>
-        </p:spPr>
-        <p:txBody>
-          <a:bodyPr wrap="square" lIns="0" tIns="0" rIns="0" bIns="0" rtlCol="0" anchor="ctr"/>
-          <a:lstStyle/>
-          <a:p>
-            <a:pPr indent="0" marL="0">
-              <a:buNone/>
-            </a:pPr>
-            <a:r>
-              <a:rPr lang="en-US" sz="1200" b="1" dirty="0">
-                <a:solidFill>
-                  <a:srgbClr val="8F6716"/>
-                </a:solidFill>
-                <a:latin typeface="Malgun Gothic" pitchFamily="34" charset="0"/>
-                <a:ea typeface="Malgun Gothic" pitchFamily="34" charset="-122"/>
-                <a:cs typeface="Malgun Gothic" pitchFamily="34" charset="-120"/>
-              </a:rPr>
-              <a:t>구축비 + 월 운영비 · 협의</a:t>
-            </a:r>
-            <a:endParaRPr lang="en-US" sz="1200" dirty="0"/>
-          </a:p>
-        </p:txBody>
+          <p:cNvPr id="14" name="Shape 12"/>
+          <p:cNvSpPr/>
+          <p:nvPr/>
+        </p:nvSpPr>
+        <p:spPr>
+          <a:xfrm>
+            <a:off x="8348777" y="2153412"/>
+            <a:ext cx="100584" cy="100584"/>
+          </a:xfrm>
+          <a:prstGeom prst="ellipse">
+            <a:avLst/>
+          </a:prstGeom>
+          <a:solidFill>
+            <a:srgbClr val="0D5257"/>
+          </a:solidFill>
+          <a:ln/>
+        </p:spPr>
       </p:sp>
       <p:sp>
         <p:nvSpPr>
@@ -8791,8 +10234,47 @@
         </p:nvSpPr>
         <p:spPr>
           <a:xfrm>
-            <a:off x="4734458" y="2962656"/>
-            <a:ext cx="2722778" cy="512064"/>
+            <a:off x="8700821" y="2020824"/>
+            <a:ext cx="2923946" cy="365760"/>
+          </a:xfrm>
+          <a:prstGeom prst="rect">
+            <a:avLst/>
+          </a:prstGeom>
+          <a:noFill/>
+          <a:ln/>
+        </p:spPr>
+        <p:txBody>
+          <a:bodyPr wrap="square" lIns="0" tIns="0" rIns="0" bIns="0" rtlCol="0" anchor="ctr"/>
+          <a:lstStyle/>
+          <a:p>
+            <a:pPr indent="0" marL="0">
+              <a:buNone/>
+            </a:pPr>
+            <a:r>
+              <a:rPr lang="en-US" sz="1450" b="1" dirty="0">
+                <a:solidFill>
+                  <a:srgbClr val="12191A"/>
+                </a:solidFill>
+                <a:latin typeface="Malgun Gothic" pitchFamily="34" charset="0"/>
+                <a:ea typeface="Malgun Gothic" pitchFamily="34" charset="-122"/>
+                <a:cs typeface="Malgun Gothic" pitchFamily="34" charset="-120"/>
+              </a:rPr>
+              <a:t>접근 권한 &amp; 감사 로그</a:t>
+            </a:r>
+            <a:endParaRPr lang="en-US" sz="1450" dirty="0"/>
+          </a:p>
+        </p:txBody>
+      </p:sp>
+      <p:sp>
+        <p:nvSpPr>
+          <p:cNvPr id="16" name="Text 14"/>
+          <p:cNvSpPr/>
+          <p:nvPr/>
+        </p:nvSpPr>
+        <p:spPr>
+          <a:xfrm>
+            <a:off x="8243621" y="2523744"/>
+            <a:ext cx="3198266" cy="1097280"/>
           </a:xfrm>
           <a:prstGeom prst="rect">
             <a:avLst/>
@@ -8806,12 +10288,12 @@
           <a:p>
             <a:pPr indent="0" marL="0">
               <a:lnSpc>
-                <a:spcPts val="1700"/>
+                <a:spcPts val="1800"/>
               </a:lnSpc>
               <a:buNone/>
             </a:pPr>
             <a:r>
-              <a:rPr lang="en-US" sz="1100" dirty="0">
+              <a:rPr lang="en-US" sz="1150" dirty="0">
                 <a:solidFill>
                   <a:srgbClr val="5F6F70"/>
                 </a:solidFill>
@@ -8819,22 +10301,101 @@
                 <a:ea typeface="Malgun Gothic" pitchFamily="34" charset="-122"/>
                 <a:cs typeface="Malgun Gothic" pitchFamily="34" charset="-120"/>
               </a:rPr>
-              <a:t>의료진 4–10인 / 노쇼와 콜 부하가 실제 비용인 병원</a:t>
-            </a:r>
-            <a:endParaRPr lang="en-US" sz="1100" dirty="0"/>
-          </a:p>
-        </p:txBody>
-      </p:sp>
-      <p:sp>
-        <p:nvSpPr>
-          <p:cNvPr id="16" name="Text 14"/>
-          <p:cNvSpPr/>
-          <p:nvPr/>
-        </p:nvSpPr>
-        <p:spPr>
-          <a:xfrm>
-            <a:off x="4734458" y="3566160"/>
-            <a:ext cx="2722778" cy="1920240"/>
+              <a:t>관리자 역할 기반 권한 분리, 환자 정보 조회 · 변경 이력 기록. 누가 언제 무엇을 바꿨는지 추적 가능합니다.</a:t>
+            </a:r>
+            <a:endParaRPr lang="en-US" sz="1150" dirty="0"/>
+          </a:p>
+        </p:txBody>
+      </p:sp>
+      <p:sp>
+        <p:nvSpPr>
+          <p:cNvPr id="17" name="Shape 15"/>
+          <p:cNvSpPr/>
+          <p:nvPr/>
+        </p:nvSpPr>
+        <p:spPr>
+          <a:xfrm>
+            <a:off x="566928" y="3877056"/>
+            <a:ext cx="310896" cy="310896"/>
+          </a:xfrm>
+          <a:prstGeom prst="ellipse">
+            <a:avLst/>
+          </a:prstGeom>
+          <a:solidFill>
+            <a:srgbClr val="EDF3F1"/>
+          </a:solidFill>
+          <a:ln/>
+        </p:spPr>
+      </p:sp>
+      <p:sp>
+        <p:nvSpPr>
+          <p:cNvPr id="18" name="Shape 16"/>
+          <p:cNvSpPr/>
+          <p:nvPr/>
+        </p:nvSpPr>
+        <p:spPr>
+          <a:xfrm>
+            <a:off x="672084" y="3982212"/>
+            <a:ext cx="100584" cy="100584"/>
+          </a:xfrm>
+          <a:prstGeom prst="ellipse">
+            <a:avLst/>
+          </a:prstGeom>
+          <a:solidFill>
+            <a:srgbClr val="0D5257"/>
+          </a:solidFill>
+          <a:ln/>
+        </p:spPr>
+      </p:sp>
+      <p:sp>
+        <p:nvSpPr>
+          <p:cNvPr id="19" name="Text 17"/>
+          <p:cNvSpPr/>
+          <p:nvPr/>
+        </p:nvSpPr>
+        <p:spPr>
+          <a:xfrm>
+            <a:off x="1024128" y="3849624"/>
+            <a:ext cx="2923946" cy="365760"/>
+          </a:xfrm>
+          <a:prstGeom prst="rect">
+            <a:avLst/>
+          </a:prstGeom>
+          <a:noFill/>
+          <a:ln/>
+        </p:spPr>
+        <p:txBody>
+          <a:bodyPr wrap="square" lIns="0" tIns="0" rIns="0" bIns="0" rtlCol="0" anchor="ctr"/>
+          <a:lstStyle/>
+          <a:p>
+            <a:pPr indent="0" marL="0">
+              <a:buNone/>
+            </a:pPr>
+            <a:r>
+              <a:rPr lang="en-US" sz="1450" b="1" dirty="0">
+                <a:solidFill>
+                  <a:srgbClr val="12191A"/>
+                </a:solidFill>
+                <a:latin typeface="Malgun Gothic" pitchFamily="34" charset="0"/>
+                <a:ea typeface="Malgun Gothic" pitchFamily="34" charset="-122"/>
+                <a:cs typeface="Malgun Gothic" pitchFamily="34" charset="-120"/>
+              </a:rPr>
+              <a:t>AI 학습 데이터 통제</a:t>
+            </a:r>
+            <a:endParaRPr lang="en-US" sz="1450" dirty="0"/>
+          </a:p>
+        </p:txBody>
+      </p:sp>
+      <p:sp>
+        <p:nvSpPr>
+          <p:cNvPr id="20" name="Text 18"/>
+          <p:cNvSpPr/>
+          <p:nvPr/>
+        </p:nvSpPr>
+        <p:spPr>
+          <a:xfrm>
+            <a:off x="566928" y="4352544"/>
+            <a:ext cx="3198266" cy="1097280"/>
           </a:xfrm>
           <a:prstGeom prst="rect">
             <a:avLst/>
@@ -8846,447 +10407,272 @@
           <a:bodyPr wrap="square" lIns="0" tIns="0" rIns="0" bIns="0" rtlCol="0" anchor="t"/>
           <a:lstStyle/>
           <a:p>
-            <a:pPr marL="342900" indent="-342900">
-              <a:spcAft>
-                <a:spcPts val="600"/>
-              </a:spcAft>
-              <a:buSzPct val="100000"/>
-              <a:buChar char="•"/>
+            <a:pPr indent="0" marL="0">
+              <a:lnSpc>
+                <a:spcPts val="1800"/>
+              </a:lnSpc>
+              <a:buNone/>
             </a:pPr>
             <a:r>
               <a:rPr lang="en-US" sz="1150" dirty="0">
                 <a:solidFill>
-                  <a:srgbClr val="354445"/>
-                </a:solidFill>
-                <a:latin typeface="Malgun Gothic" pitchFamily="34" charset="0"/>
-                <a:ea typeface="Malgun Gothic" pitchFamily="34" charset="-122"/>
-                <a:cs typeface="Malgun Gothic" pitchFamily="34" charset="-120"/>
-              </a:rPr>
-              <a:t>피움 Core 전체 포함</a:t>
+                  <a:srgbClr val="5F6F70"/>
+                </a:solidFill>
+                <a:latin typeface="Malgun Gothic" pitchFamily="34" charset="0"/>
+                <a:ea typeface="Malgun Gothic" pitchFamily="34" charset="-122"/>
+                <a:cs typeface="Malgun Gothic" pitchFamily="34" charset="-120"/>
+              </a:rPr>
+              <a:t>환자 데이터는 외부 모델의 학습에 사용되지 않습니다. AI 처리 시 식별정보는 최소화하여 전달합니다.</a:t>
             </a:r>
             <a:endParaRPr lang="en-US" sz="1150" dirty="0"/>
           </a:p>
-          <a:p>
-            <a:pPr marL="342900" indent="-342900">
-              <a:spcAft>
-                <a:spcPts val="600"/>
-              </a:spcAft>
-              <a:buSzPct val="100000"/>
-              <a:buChar char="•"/>
+        </p:txBody>
+      </p:sp>
+      <p:sp>
+        <p:nvSpPr>
+          <p:cNvPr id="21" name="Shape 19"/>
+          <p:cNvSpPr/>
+          <p:nvPr/>
+        </p:nvSpPr>
+        <p:spPr>
+          <a:xfrm>
+            <a:off x="4405274" y="3877056"/>
+            <a:ext cx="310896" cy="310896"/>
+          </a:xfrm>
+          <a:prstGeom prst="ellipse">
+            <a:avLst/>
+          </a:prstGeom>
+          <a:solidFill>
+            <a:srgbClr val="EDF3F1"/>
+          </a:solidFill>
+          <a:ln/>
+        </p:spPr>
+      </p:sp>
+      <p:sp>
+        <p:nvSpPr>
+          <p:cNvPr id="22" name="Shape 20"/>
+          <p:cNvSpPr/>
+          <p:nvPr/>
+        </p:nvSpPr>
+        <p:spPr>
+          <a:xfrm>
+            <a:off x="4510430" y="3982212"/>
+            <a:ext cx="100584" cy="100584"/>
+          </a:xfrm>
+          <a:prstGeom prst="ellipse">
+            <a:avLst/>
+          </a:prstGeom>
+          <a:solidFill>
+            <a:srgbClr val="0D5257"/>
+          </a:solidFill>
+          <a:ln/>
+        </p:spPr>
+      </p:sp>
+      <p:sp>
+        <p:nvSpPr>
+          <p:cNvPr id="23" name="Text 21"/>
+          <p:cNvSpPr/>
+          <p:nvPr/>
+        </p:nvSpPr>
+        <p:spPr>
+          <a:xfrm>
+            <a:off x="4862474" y="3849624"/>
+            <a:ext cx="2923946" cy="365760"/>
+          </a:xfrm>
+          <a:prstGeom prst="rect">
+            <a:avLst/>
+          </a:prstGeom>
+          <a:noFill/>
+          <a:ln/>
+        </p:spPr>
+        <p:txBody>
+          <a:bodyPr wrap="square" lIns="0" tIns="0" rIns="0" bIns="0" rtlCol="0" anchor="ctr"/>
+          <a:lstStyle/>
+          <a:p>
+            <a:pPr indent="0" marL="0">
+              <a:buNone/>
+            </a:pPr>
+            <a:r>
+              <a:rPr lang="en-US" sz="1450" b="1" dirty="0">
+                <a:solidFill>
+                  <a:srgbClr val="12191A"/>
+                </a:solidFill>
+                <a:latin typeface="Malgun Gothic" pitchFamily="34" charset="0"/>
+                <a:ea typeface="Malgun Gothic" pitchFamily="34" charset="-122"/>
+                <a:cs typeface="Malgun Gothic" pitchFamily="34" charset="-120"/>
+              </a:rPr>
+              <a:t>본인인증 기반 접근</a:t>
+            </a:r>
+            <a:endParaRPr lang="en-US" sz="1450" dirty="0"/>
+          </a:p>
+        </p:txBody>
+      </p:sp>
+      <p:sp>
+        <p:nvSpPr>
+          <p:cNvPr id="24" name="Text 22"/>
+          <p:cNvSpPr/>
+          <p:nvPr/>
+        </p:nvSpPr>
+        <p:spPr>
+          <a:xfrm>
+            <a:off x="4405274" y="4352544"/>
+            <a:ext cx="3198266" cy="1097280"/>
+          </a:xfrm>
+          <a:prstGeom prst="rect">
+            <a:avLst/>
+          </a:prstGeom>
+          <a:noFill/>
+          <a:ln/>
+        </p:spPr>
+        <p:txBody>
+          <a:bodyPr wrap="square" lIns="0" tIns="0" rIns="0" bIns="0" rtlCol="0" anchor="t"/>
+          <a:lstStyle/>
+          <a:p>
+            <a:pPr indent="0" marL="0">
+              <a:lnSpc>
+                <a:spcPts val="1800"/>
+              </a:lnSpc>
+              <a:buNone/>
             </a:pPr>
             <a:r>
               <a:rPr lang="en-US" sz="1150" dirty="0">
                 <a:solidFill>
-                  <a:srgbClr val="354445"/>
-                </a:solidFill>
-                <a:latin typeface="Malgun Gothic" pitchFamily="34" charset="0"/>
-                <a:ea typeface="Malgun Gothic" pitchFamily="34" charset="-122"/>
-                <a:cs typeface="Malgun Gothic" pitchFamily="34" charset="-120"/>
-              </a:rPr>
-              <a:t>AI 노쇼 예측 &amp; 오버부킹</a:t>
+                  <a:srgbClr val="5F6F70"/>
+                </a:solidFill>
+                <a:latin typeface="Malgun Gothic" pitchFamily="34" charset="0"/>
+                <a:ea typeface="Malgun Gothic" pitchFamily="34" charset="-122"/>
+                <a:cs typeface="Malgun Gothic" pitchFamily="34" charset="-120"/>
+              </a:rPr>
+              <a:t>환자 예약 조회는 휴대폰 또는 카카오 인증을 거칩니다. 이름 · 생년월일만으로 타인 예약이 조회되지 않습니다.</a:t>
             </a:r>
             <a:endParaRPr lang="en-US" sz="1150" dirty="0"/>
           </a:p>
-          <a:p>
-            <a:pPr marL="342900" indent="-342900">
-              <a:spcAft>
-                <a:spcPts val="600"/>
-              </a:spcAft>
-              <a:buSzPct val="100000"/>
-              <a:buChar char="•"/>
+        </p:txBody>
+      </p:sp>
+      <p:sp>
+        <p:nvSpPr>
+          <p:cNvPr id="25" name="Shape 23"/>
+          <p:cNvSpPr/>
+          <p:nvPr/>
+        </p:nvSpPr>
+        <p:spPr>
+          <a:xfrm>
+            <a:off x="8243621" y="3877056"/>
+            <a:ext cx="310896" cy="310896"/>
+          </a:xfrm>
+          <a:prstGeom prst="ellipse">
+            <a:avLst/>
+          </a:prstGeom>
+          <a:solidFill>
+            <a:srgbClr val="EDF3F1"/>
+          </a:solidFill>
+          <a:ln/>
+        </p:spPr>
+      </p:sp>
+      <p:sp>
+        <p:nvSpPr>
+          <p:cNvPr id="26" name="Shape 24"/>
+          <p:cNvSpPr/>
+          <p:nvPr/>
+        </p:nvSpPr>
+        <p:spPr>
+          <a:xfrm>
+            <a:off x="8348777" y="3982212"/>
+            <a:ext cx="100584" cy="100584"/>
+          </a:xfrm>
+          <a:prstGeom prst="ellipse">
+            <a:avLst/>
+          </a:prstGeom>
+          <a:solidFill>
+            <a:srgbClr val="0D5257"/>
+          </a:solidFill>
+          <a:ln/>
+        </p:spPr>
+      </p:sp>
+      <p:sp>
+        <p:nvSpPr>
+          <p:cNvPr id="27" name="Text 25"/>
+          <p:cNvSpPr/>
+          <p:nvPr/>
+        </p:nvSpPr>
+        <p:spPr>
+          <a:xfrm>
+            <a:off x="8700821" y="3849624"/>
+            <a:ext cx="2923946" cy="365760"/>
+          </a:xfrm>
+          <a:prstGeom prst="rect">
+            <a:avLst/>
+          </a:prstGeom>
+          <a:noFill/>
+          <a:ln/>
+        </p:spPr>
+        <p:txBody>
+          <a:bodyPr wrap="square" lIns="0" tIns="0" rIns="0" bIns="0" rtlCol="0" anchor="ctr"/>
+          <a:lstStyle/>
+          <a:p>
+            <a:pPr indent="0" marL="0">
+              <a:buNone/>
+            </a:pPr>
+            <a:r>
+              <a:rPr lang="en-US" sz="1450" b="1" dirty="0">
+                <a:solidFill>
+                  <a:srgbClr val="12191A"/>
+                </a:solidFill>
+                <a:latin typeface="Malgun Gothic" pitchFamily="34" charset="0"/>
+                <a:ea typeface="Malgun Gothic" pitchFamily="34" charset="-122"/>
+                <a:cs typeface="Malgun Gothic" pitchFamily="34" charset="-120"/>
+              </a:rPr>
+              <a:t>백업 &amp; 복구</a:t>
+            </a:r>
+            <a:endParaRPr lang="en-US" sz="1450" dirty="0"/>
+          </a:p>
+        </p:txBody>
+      </p:sp>
+      <p:sp>
+        <p:nvSpPr>
+          <p:cNvPr id="28" name="Text 26"/>
+          <p:cNvSpPr/>
+          <p:nvPr/>
+        </p:nvSpPr>
+        <p:spPr>
+          <a:xfrm>
+            <a:off x="8243621" y="4352544"/>
+            <a:ext cx="3198266" cy="1097280"/>
+          </a:xfrm>
+          <a:prstGeom prst="rect">
+            <a:avLst/>
+          </a:prstGeom>
+          <a:noFill/>
+          <a:ln/>
+        </p:spPr>
+        <p:txBody>
+          <a:bodyPr wrap="square" lIns="0" tIns="0" rIns="0" bIns="0" rtlCol="0" anchor="t"/>
+          <a:lstStyle/>
+          <a:p>
+            <a:pPr indent="0" marL="0">
+              <a:lnSpc>
+                <a:spcPts val="1800"/>
+              </a:lnSpc>
+              <a:buNone/>
             </a:pPr>
             <a:r>
               <a:rPr lang="en-US" sz="1150" dirty="0">
                 <a:solidFill>
-                  <a:srgbClr val="354445"/>
-                </a:solidFill>
-                <a:latin typeface="Malgun Gothic" pitchFamily="34" charset="0"/>
-                <a:ea typeface="Malgun Gothic" pitchFamily="34" charset="-122"/>
-                <a:cs typeface="Malgun Gothic" pitchFamily="34" charset="-120"/>
-              </a:rPr>
-              <a:t>24시간 AI 예약 상담</a:t>
+                  <a:srgbClr val="5F6F70"/>
+                </a:solidFill>
+                <a:latin typeface="Malgun Gothic" pitchFamily="34" charset="0"/>
+                <a:ea typeface="Malgun Gothic" pitchFamily="34" charset="-122"/>
+                <a:cs typeface="Malgun Gothic" pitchFamily="34" charset="-120"/>
+              </a:rPr>
+              <a:t>일일 자동 백업과 시점 복구를 운영하며, 장애 대응 절차와 연락 체계를 계약에 명시합니다.</a:t>
             </a:r>
             <a:endParaRPr lang="en-US" sz="1150" dirty="0"/>
           </a:p>
-          <a:p>
-            <a:pPr marL="342900" indent="-342900">
-              <a:spcAft>
-                <a:spcPts val="600"/>
-              </a:spcAft>
-              <a:buSzPct val="100000"/>
-              <a:buChar char="•"/>
-            </a:pPr>
-            <a:r>
-              <a:rPr lang="en-US" sz="1150" dirty="0">
-                <a:solidFill>
-                  <a:srgbClr val="354445"/>
-                </a:solidFill>
-                <a:latin typeface="Malgun Gothic" pitchFamily="34" charset="0"/>
-                <a:ea typeface="Malgun Gothic" pitchFamily="34" charset="-122"/>
-                <a:cs typeface="Malgun Gothic" pitchFamily="34" charset="-120"/>
-              </a:rPr>
-              <a:t>주기 기반 자동 리콜</a:t>
-            </a:r>
-            <a:endParaRPr lang="en-US" sz="1150" dirty="0"/>
-          </a:p>
-          <a:p>
-            <a:pPr marL="342900" indent="-342900">
-              <a:spcAft>
-                <a:spcPts val="600"/>
-              </a:spcAft>
-              <a:buSzPct val="100000"/>
-              <a:buChar char="•"/>
-            </a:pPr>
-            <a:r>
-              <a:rPr lang="en-US" sz="1150" dirty="0">
-                <a:solidFill>
-                  <a:srgbClr val="354445"/>
-                </a:solidFill>
-                <a:latin typeface="Malgun Gothic" pitchFamily="34" charset="0"/>
-                <a:ea typeface="Malgun Gothic" pitchFamily="34" charset="-122"/>
-                <a:cs typeface="Malgun Gothic" pitchFamily="34" charset="-120"/>
-              </a:rPr>
-              <a:t>이탈 예측 &amp; 리텐션</a:t>
-            </a:r>
-            <a:endParaRPr lang="en-US" sz="1150" dirty="0"/>
-          </a:p>
-          <a:p>
-            <a:pPr marL="342900" indent="-342900">
-              <a:spcAft>
-                <a:spcPts val="600"/>
-              </a:spcAft>
-              <a:buSzPct val="100000"/>
-              <a:buChar char="•"/>
-            </a:pPr>
-            <a:r>
-              <a:rPr lang="en-US" sz="1150" dirty="0">
-                <a:solidFill>
-                  <a:srgbClr val="354445"/>
-                </a:solidFill>
-                <a:latin typeface="Malgun Gothic" pitchFamily="34" charset="0"/>
-                <a:ea typeface="Malgun Gothic" pitchFamily="34" charset="-122"/>
-                <a:cs typeface="Malgun Gothic" pitchFamily="34" charset="-120"/>
-              </a:rPr>
-              <a:t>분기 지표 리포트</a:t>
-            </a:r>
-            <a:endParaRPr lang="en-US" sz="1150" dirty="0"/>
-          </a:p>
-        </p:txBody>
-      </p:sp>
-      <p:sp>
-        <p:nvSpPr>
-          <p:cNvPr id="17" name="Shape 15"/>
-          <p:cNvSpPr/>
-          <p:nvPr/>
-        </p:nvSpPr>
-        <p:spPr>
-          <a:xfrm>
-            <a:off x="8243621" y="2048256"/>
-            <a:ext cx="3381146" cy="3602736"/>
-          </a:xfrm>
-          <a:prstGeom prst="rect">
-            <a:avLst/>
-          </a:prstGeom>
-          <a:solidFill>
-            <a:srgbClr val="FFFFFF"/>
-          </a:solidFill>
-          <a:ln w="9525">
-            <a:solidFill>
-              <a:srgbClr val="E1E4DE"/>
-            </a:solidFill>
-            <a:prstDash val="solid"/>
-          </a:ln>
-        </p:spPr>
-      </p:sp>
-      <p:sp>
-        <p:nvSpPr>
-          <p:cNvPr id="18" name="Text 16"/>
-          <p:cNvSpPr/>
-          <p:nvPr/>
-        </p:nvSpPr>
-        <p:spPr>
-          <a:xfrm>
-            <a:off x="8572805" y="2249424"/>
-            <a:ext cx="2722778" cy="384048"/>
-          </a:xfrm>
-          <a:prstGeom prst="rect">
-            <a:avLst/>
-          </a:prstGeom>
-          <a:noFill/>
-          <a:ln/>
-        </p:spPr>
-        <p:txBody>
-          <a:bodyPr wrap="square" lIns="0" tIns="0" rIns="0" bIns="0" rtlCol="0" anchor="ctr"/>
-          <a:lstStyle/>
-          <a:p>
-            <a:pPr indent="0" marL="0">
-              <a:buNone/>
-            </a:pPr>
-            <a:r>
-              <a:rPr lang="en-US" sz="2000" b="1" dirty="0">
-                <a:solidFill>
-                  <a:srgbClr val="12191A"/>
-                </a:solidFill>
-                <a:latin typeface="Malgun Gothic" pitchFamily="34" charset="0"/>
-                <a:ea typeface="Malgun Gothic" pitchFamily="34" charset="-122"/>
-                <a:cs typeface="Malgun Gothic" pitchFamily="34" charset="-120"/>
-              </a:rPr>
-              <a:t>피움 Enterprise</a:t>
-            </a:r>
-            <a:endParaRPr lang="en-US" sz="2000" dirty="0"/>
-          </a:p>
-        </p:txBody>
-      </p:sp>
-      <p:sp>
-        <p:nvSpPr>
-          <p:cNvPr id="19" name="Text 17"/>
-          <p:cNvSpPr/>
-          <p:nvPr/>
-        </p:nvSpPr>
-        <p:spPr>
-          <a:xfrm>
-            <a:off x="8572805" y="2670048"/>
-            <a:ext cx="2722778" cy="274320"/>
-          </a:xfrm>
-          <a:prstGeom prst="rect">
-            <a:avLst/>
-          </a:prstGeom>
-          <a:noFill/>
-          <a:ln/>
-        </p:spPr>
-        <p:txBody>
-          <a:bodyPr wrap="square" lIns="0" tIns="0" rIns="0" bIns="0" rtlCol="0" anchor="ctr"/>
-          <a:lstStyle/>
-          <a:p>
-            <a:pPr indent="0" marL="0">
-              <a:buNone/>
-            </a:pPr>
-            <a:r>
-              <a:rPr lang="en-US" sz="1200" b="1" dirty="0">
-                <a:solidFill>
-                  <a:srgbClr val="8F6716"/>
-                </a:solidFill>
-                <a:latin typeface="Malgun Gothic" pitchFamily="34" charset="0"/>
-                <a:ea typeface="Malgun Gothic" pitchFamily="34" charset="-122"/>
-                <a:cs typeface="Malgun Gothic" pitchFamily="34" charset="-120"/>
-              </a:rPr>
-              <a:t>전체 별도 협의</a:t>
-            </a:r>
-            <a:endParaRPr lang="en-US" sz="1200" dirty="0"/>
-          </a:p>
-        </p:txBody>
-      </p:sp>
-      <p:sp>
-        <p:nvSpPr>
-          <p:cNvPr id="20" name="Text 18"/>
-          <p:cNvSpPr/>
-          <p:nvPr/>
-        </p:nvSpPr>
-        <p:spPr>
-          <a:xfrm>
-            <a:off x="8572805" y="2962656"/>
-            <a:ext cx="2722778" cy="512064"/>
-          </a:xfrm>
-          <a:prstGeom prst="rect">
-            <a:avLst/>
-          </a:prstGeom>
-          <a:noFill/>
-          <a:ln/>
-        </p:spPr>
-        <p:txBody>
-          <a:bodyPr wrap="square" lIns="0" tIns="0" rIns="0" bIns="0" rtlCol="0" anchor="t"/>
-          <a:lstStyle/>
-          <a:p>
-            <a:pPr indent="0" marL="0">
-              <a:lnSpc>
-                <a:spcPts val="1700"/>
-              </a:lnSpc>
-              <a:buNone/>
-            </a:pPr>
-            <a:r>
-              <a:rPr lang="en-US" sz="1100" dirty="0">
-                <a:solidFill>
-                  <a:srgbClr val="5F6F70"/>
-                </a:solidFill>
-                <a:latin typeface="Malgun Gothic" pitchFamily="34" charset="0"/>
-                <a:ea typeface="Malgun Gothic" pitchFamily="34" charset="-122"/>
-                <a:cs typeface="Malgun Gothic" pitchFamily="34" charset="-120"/>
-              </a:rPr>
-              <a:t>다지점 운영 / EMR 연계 및 전용 요건</a:t>
-            </a:r>
-            <a:endParaRPr lang="en-US" sz="1100" dirty="0"/>
-          </a:p>
-        </p:txBody>
-      </p:sp>
-      <p:sp>
-        <p:nvSpPr>
-          <p:cNvPr id="21" name="Text 19"/>
-          <p:cNvSpPr/>
-          <p:nvPr/>
-        </p:nvSpPr>
-        <p:spPr>
-          <a:xfrm>
-            <a:off x="8572805" y="3566160"/>
-            <a:ext cx="2722778" cy="1920240"/>
-          </a:xfrm>
-          <a:prstGeom prst="rect">
-            <a:avLst/>
-          </a:prstGeom>
-          <a:noFill/>
-          <a:ln/>
-        </p:spPr>
-        <p:txBody>
-          <a:bodyPr wrap="square" lIns="0" tIns="0" rIns="0" bIns="0" rtlCol="0" anchor="t"/>
-          <a:lstStyle/>
-          <a:p>
-            <a:pPr marL="342900" indent="-342900">
-              <a:spcAft>
-                <a:spcPts val="600"/>
-              </a:spcAft>
-              <a:buSzPct val="100000"/>
-              <a:buChar char="•"/>
-            </a:pPr>
-            <a:r>
-              <a:rPr lang="en-US" sz="1150" dirty="0">
-                <a:solidFill>
-                  <a:srgbClr val="354445"/>
-                </a:solidFill>
-                <a:latin typeface="Malgun Gothic" pitchFamily="34" charset="0"/>
-                <a:ea typeface="Malgun Gothic" pitchFamily="34" charset="-122"/>
-                <a:cs typeface="Malgun Gothic" pitchFamily="34" charset="-120"/>
-              </a:rPr>
-              <a:t>피움 Smart 전체 포함</a:t>
-            </a:r>
-            <a:endParaRPr lang="en-US" sz="1150" dirty="0"/>
-          </a:p>
-          <a:p>
-            <a:pPr marL="342900" indent="-342900">
-              <a:spcAft>
-                <a:spcPts val="600"/>
-              </a:spcAft>
-              <a:buSzPct val="100000"/>
-              <a:buChar char="•"/>
-            </a:pPr>
-            <a:r>
-              <a:rPr lang="en-US" sz="1150" dirty="0">
-                <a:solidFill>
-                  <a:srgbClr val="354445"/>
-                </a:solidFill>
-                <a:latin typeface="Malgun Gothic" pitchFamily="34" charset="0"/>
-                <a:ea typeface="Malgun Gothic" pitchFamily="34" charset="-122"/>
-                <a:cs typeface="Malgun Gothic" pitchFamily="34" charset="-120"/>
-              </a:rPr>
-              <a:t>AI 모듈 8종 전체</a:t>
-            </a:r>
-            <a:endParaRPr lang="en-US" sz="1150" dirty="0"/>
-          </a:p>
-          <a:p>
-            <a:pPr marL="342900" indent="-342900">
-              <a:spcAft>
-                <a:spcPts val="600"/>
-              </a:spcAft>
-              <a:buSzPct val="100000"/>
-              <a:buChar char="•"/>
-            </a:pPr>
-            <a:r>
-              <a:rPr lang="en-US" sz="1150" dirty="0">
-                <a:solidFill>
-                  <a:srgbClr val="354445"/>
-                </a:solidFill>
-                <a:latin typeface="Malgun Gothic" pitchFamily="34" charset="0"/>
-                <a:ea typeface="Malgun Gothic" pitchFamily="34" charset="-122"/>
-                <a:cs typeface="Malgun Gothic" pitchFamily="34" charset="-120"/>
-              </a:rPr>
-              <a:t>EMR 연계 개발</a:t>
-            </a:r>
-            <a:endParaRPr lang="en-US" sz="1150" dirty="0"/>
-          </a:p>
-          <a:p>
-            <a:pPr marL="342900" indent="-342900">
-              <a:spcAft>
-                <a:spcPts val="600"/>
-              </a:spcAft>
-              <a:buSzPct val="100000"/>
-              <a:buChar char="•"/>
-            </a:pPr>
-            <a:r>
-              <a:rPr lang="en-US" sz="1150" dirty="0">
-                <a:solidFill>
-                  <a:srgbClr val="354445"/>
-                </a:solidFill>
-                <a:latin typeface="Malgun Gothic" pitchFamily="34" charset="0"/>
-                <a:ea typeface="Malgun Gothic" pitchFamily="34" charset="-122"/>
-                <a:cs typeface="Malgun Gothic" pitchFamily="34" charset="-120"/>
-              </a:rPr>
-              <a:t>지점 통합 대시보드</a:t>
-            </a:r>
-            <a:endParaRPr lang="en-US" sz="1150" dirty="0"/>
-          </a:p>
-          <a:p>
-            <a:pPr marL="342900" indent="-342900">
-              <a:spcAft>
-                <a:spcPts val="600"/>
-              </a:spcAft>
-              <a:buSzPct val="100000"/>
-              <a:buChar char="•"/>
-            </a:pPr>
-            <a:r>
-              <a:rPr lang="en-US" sz="1150" dirty="0">
-                <a:solidFill>
-                  <a:srgbClr val="354445"/>
-                </a:solidFill>
-                <a:latin typeface="Malgun Gothic" pitchFamily="34" charset="0"/>
-                <a:ea typeface="Malgun Gothic" pitchFamily="34" charset="-122"/>
-                <a:cs typeface="Malgun Gothic" pitchFamily="34" charset="-120"/>
-              </a:rPr>
-              <a:t>전용 기능 개발 &amp; 전담 지원</a:t>
-            </a:r>
-            <a:endParaRPr lang="en-US" sz="1150" dirty="0"/>
-          </a:p>
-        </p:txBody>
-      </p:sp>
-      <p:sp>
-        <p:nvSpPr>
-          <p:cNvPr id="22" name="Text 20"/>
-          <p:cNvSpPr/>
-          <p:nvPr/>
-        </p:nvSpPr>
-        <p:spPr>
-          <a:xfrm>
-            <a:off x="566928" y="5833872"/>
-            <a:ext cx="11057839" cy="365760"/>
-          </a:xfrm>
-          <a:prstGeom prst="rect">
-            <a:avLst/>
-          </a:prstGeom>
-          <a:noFill/>
-          <a:ln/>
-        </p:spPr>
-        <p:txBody>
-          <a:bodyPr wrap="square" lIns="0" tIns="0" rIns="0" bIns="0" rtlCol="0" anchor="ctr"/>
-          <a:lstStyle/>
-          <a:p>
-            <a:pPr indent="0" marL="0">
-              <a:buNone/>
-            </a:pPr>
-            <a:r>
-              <a:rPr lang="en-US" sz="1100" dirty="0">
-                <a:solidFill>
-                  <a:srgbClr val="5F6F70"/>
-                </a:solidFill>
-                <a:latin typeface="Malgun Gothic" pitchFamily="34" charset="0"/>
-                <a:ea typeface="Malgun Gothic" pitchFamily="34" charset="-122"/>
-                <a:cs typeface="Malgun Gothic" pitchFamily="34" charset="-120"/>
-              </a:rPr>
-              <a:t>카카오 알림톡 발송 단가와 본인인증 건당 비용 등 외부 서비스 실비는 별도이며 사용량 기준으로 청구됩니다. 협의 항목은 병원 규모 확인 후 확정 견적으로 대체됩니다.</a:t>
-            </a:r>
-            <a:endParaRPr lang="en-US" sz="1100" dirty="0"/>
-          </a:p>
-        </p:txBody>
-      </p:sp>
-      <p:sp>
-        <p:nvSpPr>
-          <p:cNvPr id="23" name="Text 21"/>
+        </p:txBody>
+      </p:sp>
+      <p:sp>
+        <p:nvSpPr>
+          <p:cNvPr id="29" name="Text 27"/>
           <p:cNvSpPr/>
           <p:nvPr/>
         </p:nvSpPr>
@@ -9334,6 +10720,1348 @@
 <file path=ppt/slides/slide15.xml><?xml version="1.0" encoding="utf-8"?>
 <p:sld xmlns:a="http://schemas.openxmlformats.org/drawingml/2006/main" xmlns:r="http://schemas.openxmlformats.org/officeDocument/2006/relationships" xmlns:p="http://schemas.openxmlformats.org/presentationml/2006/main">
   <p:cSld name="Slide 15">
+    <p:bg>
+      <p:bgPr>
+        <a:solidFill>
+          <a:srgbClr val="FBFAF7"/>
+        </a:solidFill>
+      </p:bgPr>
+    </p:bg>
+    <p:spTree>
+      <p:nvGrpSpPr>
+        <p:cNvPr id="1" name=""/>
+        <p:cNvGrpSpPr/>
+        <p:nvPr/>
+      </p:nvGrpSpPr>
+      <p:grpSpPr>
+        <a:xfrm>
+          <a:off x="0" y="0"/>
+          <a:ext cx="0" cy="0"/>
+          <a:chOff x="0" y="0"/>
+          <a:chExt cx="0" cy="0"/>
+        </a:xfrm>
+      </p:grpSpPr>
+      <p:sp>
+        <p:nvSpPr>
+          <p:cNvPr id="2" name="Text 0"/>
+          <p:cNvSpPr/>
+          <p:nvPr/>
+        </p:nvSpPr>
+        <p:spPr>
+          <a:xfrm>
+            <a:off x="566928" y="420624"/>
+            <a:ext cx="11057839" cy="274320"/>
+          </a:xfrm>
+          <a:prstGeom prst="rect">
+            <a:avLst/>
+          </a:prstGeom>
+          <a:noFill/>
+          <a:ln/>
+        </p:spPr>
+        <p:txBody>
+          <a:bodyPr wrap="square" lIns="0" tIns="0" rIns="0" bIns="0" rtlCol="0" anchor="ctr"/>
+          <a:lstStyle/>
+          <a:p>
+            <a:pPr indent="0" marL="0">
+              <a:buNone/>
+            </a:pPr>
+            <a:r>
+              <a:rPr lang="en-US" sz="1150" b="1" spc="200" kern="0" dirty="0">
+                <a:solidFill>
+                  <a:srgbClr val="2E8F87"/>
+                </a:solidFill>
+                <a:latin typeface="Malgun Gothic" pitchFamily="34" charset="0"/>
+                <a:ea typeface="Malgun Gothic" pitchFamily="34" charset="-122"/>
+                <a:cs typeface="Malgun Gothic" pitchFamily="34" charset="-120"/>
+              </a:rPr>
+              <a:t>비용</a:t>
+            </a:r>
+            <a:endParaRPr lang="en-US" sz="1150" dirty="0"/>
+          </a:p>
+        </p:txBody>
+      </p:sp>
+      <p:sp>
+        <p:nvSpPr>
+          <p:cNvPr id="3" name="Text 1"/>
+          <p:cNvSpPr/>
+          <p:nvPr/>
+        </p:nvSpPr>
+        <p:spPr>
+          <a:xfrm>
+            <a:off x="566928" y="731520"/>
+            <a:ext cx="11057839" cy="658368"/>
+          </a:xfrm>
+          <a:prstGeom prst="rect">
+            <a:avLst/>
+          </a:prstGeom>
+          <a:noFill/>
+          <a:ln/>
+        </p:spPr>
+        <p:txBody>
+          <a:bodyPr wrap="square" lIns="0" tIns="0" rIns="0" bIns="0" rtlCol="0" anchor="ctr"/>
+          <a:lstStyle/>
+          <a:p>
+            <a:pPr indent="0" marL="0">
+              <a:buNone/>
+            </a:pPr>
+            <a:r>
+              <a:rPr lang="en-US" sz="3100" b="1" dirty="0">
+                <a:solidFill>
+                  <a:srgbClr val="12191A"/>
+                </a:solidFill>
+                <a:latin typeface="Malgun Gothic" pitchFamily="34" charset="0"/>
+                <a:ea typeface="Malgun Gothic" pitchFamily="34" charset="-122"/>
+                <a:cs typeface="Malgun Gothic" pitchFamily="34" charset="-120"/>
+              </a:rPr>
+              <a:t>월 구독료와 구축비</a:t>
+            </a:r>
+            <a:endParaRPr lang="en-US" sz="3100" dirty="0"/>
+          </a:p>
+        </p:txBody>
+      </p:sp>
+      <p:sp>
+        <p:nvSpPr>
+          <p:cNvPr id="4" name="Text 2"/>
+          <p:cNvSpPr/>
+          <p:nvPr/>
+        </p:nvSpPr>
+        <p:spPr>
+          <a:xfrm>
+            <a:off x="566928" y="1426464"/>
+            <a:ext cx="10241280" cy="475488"/>
+          </a:xfrm>
+          <a:prstGeom prst="rect">
+            <a:avLst/>
+          </a:prstGeom>
+          <a:noFill/>
+          <a:ln/>
+        </p:spPr>
+        <p:txBody>
+          <a:bodyPr wrap="square" lIns="0" tIns="0" rIns="0" bIns="0" rtlCol="0" anchor="t"/>
+          <a:lstStyle/>
+          <a:p>
+            <a:pPr indent="0" marL="0">
+              <a:lnSpc>
+                <a:spcPts val="2000"/>
+              </a:lnSpc>
+              <a:buNone/>
+            </a:pPr>
+            <a:r>
+              <a:rPr lang="en-US" sz="1350" dirty="0">
+                <a:solidFill>
+                  <a:srgbClr val="5F6F70"/>
+                </a:solidFill>
+                <a:latin typeface="Malgun Gothic" pitchFamily="34" charset="0"/>
+                <a:ea typeface="Malgun Gothic" pitchFamily="34" charset="-122"/>
+                <a:cs typeface="Malgun Gothic" pitchFamily="34" charset="-120"/>
+              </a:rPr>
+              <a:t>1회 구축비와 월 구독료로 구성합니다. 구간은 동시 진료 의료진 수로만 나뉘며, 월 예약 건수에 따른 추가 과금은 없습니다.</a:t>
+            </a:r>
+            <a:endParaRPr lang="en-US" sz="1350" dirty="0"/>
+          </a:p>
+        </p:txBody>
+      </p:sp>
+      <p:sp>
+        <p:nvSpPr>
+          <p:cNvPr id="5" name="Shape 3"/>
+          <p:cNvSpPr/>
+          <p:nvPr/>
+        </p:nvSpPr>
+        <p:spPr>
+          <a:xfrm>
+            <a:off x="566928" y="2011680"/>
+            <a:ext cx="3381146" cy="3712464"/>
+          </a:xfrm>
+          <a:prstGeom prst="rect">
+            <a:avLst/>
+          </a:prstGeom>
+          <a:solidFill>
+            <a:srgbClr val="FFFFFF"/>
+          </a:solidFill>
+          <a:ln w="9525">
+            <a:solidFill>
+              <a:srgbClr val="E1E4DE"/>
+            </a:solidFill>
+            <a:prstDash val="solid"/>
+          </a:ln>
+        </p:spPr>
+      </p:sp>
+      <p:sp>
+        <p:nvSpPr>
+          <p:cNvPr id="6" name="Text 4"/>
+          <p:cNvSpPr/>
+          <p:nvPr/>
+        </p:nvSpPr>
+        <p:spPr>
+          <a:xfrm>
+            <a:off x="877824" y="2194560"/>
+            <a:ext cx="2759354" cy="347472"/>
+          </a:xfrm>
+          <a:prstGeom prst="rect">
+            <a:avLst/>
+          </a:prstGeom>
+          <a:noFill/>
+          <a:ln/>
+        </p:spPr>
+        <p:txBody>
+          <a:bodyPr wrap="square" lIns="0" tIns="0" rIns="0" bIns="0" rtlCol="0" anchor="ctr"/>
+          <a:lstStyle/>
+          <a:p>
+            <a:pPr indent="0" marL="0">
+              <a:buNone/>
+            </a:pPr>
+            <a:r>
+              <a:rPr lang="en-US" sz="1800" b="1" dirty="0">
+                <a:solidFill>
+                  <a:srgbClr val="12191A"/>
+                </a:solidFill>
+                <a:latin typeface="Malgun Gothic" pitchFamily="34" charset="0"/>
+                <a:ea typeface="Malgun Gothic" pitchFamily="34" charset="-122"/>
+                <a:cs typeface="Malgun Gothic" pitchFamily="34" charset="-120"/>
+              </a:rPr>
+              <a:t>피움 Core</a:t>
+            </a:r>
+            <a:endParaRPr lang="en-US" sz="1800" dirty="0"/>
+          </a:p>
+        </p:txBody>
+      </p:sp>
+      <p:sp>
+        <p:nvSpPr>
+          <p:cNvPr id="7" name="Text 5"/>
+          <p:cNvSpPr/>
+          <p:nvPr/>
+        </p:nvSpPr>
+        <p:spPr>
+          <a:xfrm>
+            <a:off x="877824" y="2578608"/>
+            <a:ext cx="2759354" cy="420624"/>
+          </a:xfrm>
+          <a:prstGeom prst="rect">
+            <a:avLst/>
+          </a:prstGeom>
+          <a:noFill/>
+          <a:ln/>
+        </p:spPr>
+        <p:txBody>
+          <a:bodyPr wrap="square" lIns="0" tIns="0" rIns="0" bIns="0" rtlCol="0" anchor="ctr"/>
+          <a:lstStyle/>
+          <a:p>
+            <a:pPr indent="0" marL="0">
+              <a:buNone/>
+            </a:pPr>
+            <a:r>
+              <a:rPr lang="en-US" sz="2600" b="1" dirty="0">
+                <a:solidFill>
+                  <a:srgbClr val="0D5257"/>
+                </a:solidFill>
+                <a:latin typeface="Malgun Gothic" pitchFamily="34" charset="0"/>
+                <a:ea typeface="Malgun Gothic" pitchFamily="34" charset="-122"/>
+                <a:cs typeface="Malgun Gothic" pitchFamily="34" charset="-120"/>
+              </a:rPr>
+              <a:t>월 79만원</a:t>
+            </a:r>
+            <a:endParaRPr lang="en-US" sz="2600" dirty="0"/>
+          </a:p>
+        </p:txBody>
+      </p:sp>
+      <p:sp>
+        <p:nvSpPr>
+          <p:cNvPr id="8" name="Text 6"/>
+          <p:cNvSpPr/>
+          <p:nvPr/>
+        </p:nvSpPr>
+        <p:spPr>
+          <a:xfrm>
+            <a:off x="877824" y="2980944"/>
+            <a:ext cx="2759354" cy="256032"/>
+          </a:xfrm>
+          <a:prstGeom prst="rect">
+            <a:avLst/>
+          </a:prstGeom>
+          <a:noFill/>
+          <a:ln/>
+        </p:spPr>
+        <p:txBody>
+          <a:bodyPr wrap="square" lIns="0" tIns="0" rIns="0" bIns="0" rtlCol="0" anchor="ctr"/>
+          <a:lstStyle/>
+          <a:p>
+            <a:pPr indent="0" marL="0">
+              <a:buNone/>
+            </a:pPr>
+            <a:r>
+              <a:rPr lang="en-US" sz="1100" b="1" dirty="0">
+                <a:solidFill>
+                  <a:srgbClr val="8F6716"/>
+                </a:solidFill>
+                <a:latin typeface="Malgun Gothic" pitchFamily="34" charset="0"/>
+                <a:ea typeface="Malgun Gothic" pitchFamily="34" charset="-122"/>
+                <a:cs typeface="Malgun Gothic" pitchFamily="34" charset="-120"/>
+              </a:rPr>
+              <a:t>구축비 1,200만원 · 1회</a:t>
+            </a:r>
+            <a:endParaRPr lang="en-US" sz="1100" dirty="0"/>
+          </a:p>
+        </p:txBody>
+      </p:sp>
+      <p:sp>
+        <p:nvSpPr>
+          <p:cNvPr id="9" name="Text 7"/>
+          <p:cNvSpPr/>
+          <p:nvPr/>
+        </p:nvSpPr>
+        <p:spPr>
+          <a:xfrm>
+            <a:off x="877824" y="3255264"/>
+            <a:ext cx="2759354" cy="402336"/>
+          </a:xfrm>
+          <a:prstGeom prst="rect">
+            <a:avLst/>
+          </a:prstGeom>
+          <a:noFill/>
+          <a:ln/>
+        </p:spPr>
+        <p:txBody>
+          <a:bodyPr wrap="square" lIns="0" tIns="0" rIns="0" bIns="0" rtlCol="0" anchor="t"/>
+          <a:lstStyle/>
+          <a:p>
+            <a:pPr indent="0" marL="0">
+              <a:lnSpc>
+                <a:spcPts val="1500"/>
+              </a:lnSpc>
+              <a:buNone/>
+            </a:pPr>
+            <a:r>
+              <a:rPr lang="en-US" sz="1050" dirty="0">
+                <a:solidFill>
+                  <a:srgbClr val="5F6F70"/>
+                </a:solidFill>
+                <a:latin typeface="Malgun Gothic" pitchFamily="34" charset="0"/>
+                <a:ea typeface="Malgun Gothic" pitchFamily="34" charset="-122"/>
+                <a:cs typeface="Malgun Gothic" pitchFamily="34" charset="-120"/>
+              </a:rPr>
+              <a:t>의료진 3인 이하 · 예약 시스템 첫 도입</a:t>
+            </a:r>
+            <a:endParaRPr lang="en-US" sz="1050" dirty="0"/>
+          </a:p>
+        </p:txBody>
+      </p:sp>
+      <p:sp>
+        <p:nvSpPr>
+          <p:cNvPr id="10" name="Text 8"/>
+          <p:cNvSpPr/>
+          <p:nvPr/>
+        </p:nvSpPr>
+        <p:spPr>
+          <a:xfrm>
+            <a:off x="877824" y="3730752"/>
+            <a:ext cx="2759354" cy="1828800"/>
+          </a:xfrm>
+          <a:prstGeom prst="rect">
+            <a:avLst/>
+          </a:prstGeom>
+          <a:noFill/>
+          <a:ln/>
+        </p:spPr>
+        <p:txBody>
+          <a:bodyPr wrap="square" lIns="0" tIns="0" rIns="0" bIns="0" rtlCol="0" anchor="t"/>
+          <a:lstStyle/>
+          <a:p>
+            <a:pPr marL="342900" indent="-342900">
+              <a:spcAft>
+                <a:spcPts val="400"/>
+              </a:spcAft>
+              <a:buSzPct val="100000"/>
+              <a:buChar char="•"/>
+            </a:pPr>
+            <a:r>
+              <a:rPr lang="en-US" sz="1050" dirty="0">
+                <a:solidFill>
+                  <a:srgbClr val="354445"/>
+                </a:solidFill>
+                <a:latin typeface="Malgun Gothic" pitchFamily="34" charset="0"/>
+                <a:ea typeface="Malgun Gothic" pitchFamily="34" charset="-122"/>
+                <a:cs typeface="Malgun Gothic" pitchFamily="34" charset="-120"/>
+              </a:rPr>
+              <a:t>환자 예약 웹 &amp; 데스크 관리자</a:t>
+            </a:r>
+            <a:endParaRPr lang="en-US" sz="1050" dirty="0"/>
+          </a:p>
+          <a:p>
+            <a:pPr marL="342900" indent="-342900">
+              <a:spcAft>
+                <a:spcPts val="400"/>
+              </a:spcAft>
+              <a:buSzPct val="100000"/>
+              <a:buChar char="•"/>
+            </a:pPr>
+            <a:r>
+              <a:rPr lang="en-US" sz="1050" dirty="0">
+                <a:solidFill>
+                  <a:srgbClr val="354445"/>
+                </a:solidFill>
+                <a:latin typeface="Malgun Gothic" pitchFamily="34" charset="0"/>
+                <a:ea typeface="Malgun Gothic" pitchFamily="34" charset="-122"/>
+                <a:cs typeface="Malgun Gothic" pitchFamily="34" charset="-120"/>
+              </a:rPr>
+              <a:t>의료진 스케줄 &amp; 예외일 관리</a:t>
+            </a:r>
+            <a:endParaRPr lang="en-US" sz="1050" dirty="0"/>
+          </a:p>
+          <a:p>
+            <a:pPr marL="342900" indent="-342900">
+              <a:spcAft>
+                <a:spcPts val="400"/>
+              </a:spcAft>
+              <a:buSzPct val="100000"/>
+              <a:buChar char="•"/>
+            </a:pPr>
+            <a:r>
+              <a:rPr lang="en-US" sz="1050" dirty="0">
+                <a:solidFill>
+                  <a:srgbClr val="354445"/>
+                </a:solidFill>
+                <a:latin typeface="Malgun Gothic" pitchFamily="34" charset="0"/>
+                <a:ea typeface="Malgun Gothic" pitchFamily="34" charset="-122"/>
+                <a:cs typeface="Malgun Gothic" pitchFamily="34" charset="-120"/>
+              </a:rPr>
+              <a:t>변경 · 취소 요청 승인 흐름</a:t>
+            </a:r>
+            <a:endParaRPr lang="en-US" sz="1050" dirty="0"/>
+          </a:p>
+          <a:p>
+            <a:pPr marL="342900" indent="-342900">
+              <a:spcAft>
+                <a:spcPts val="400"/>
+              </a:spcAft>
+              <a:buSzPct val="100000"/>
+              <a:buChar char="•"/>
+            </a:pPr>
+            <a:r>
+              <a:rPr lang="en-US" sz="1050" dirty="0">
+                <a:solidFill>
+                  <a:srgbClr val="354445"/>
+                </a:solidFill>
+                <a:latin typeface="Malgun Gothic" pitchFamily="34" charset="0"/>
+                <a:ea typeface="Malgun Gothic" pitchFamily="34" charset="-122"/>
+                <a:cs typeface="Malgun Gothic" pitchFamily="34" charset="-120"/>
+              </a:rPr>
+              <a:t>카카오 알림톡 7종</a:t>
+            </a:r>
+            <a:endParaRPr lang="en-US" sz="1050" dirty="0"/>
+          </a:p>
+          <a:p>
+            <a:pPr marL="342900" indent="-342900">
+              <a:spcAft>
+                <a:spcPts val="400"/>
+              </a:spcAft>
+              <a:buSzPct val="100000"/>
+              <a:buChar char="•"/>
+            </a:pPr>
+            <a:r>
+              <a:rPr lang="en-US" sz="1050" dirty="0">
+                <a:solidFill>
+                  <a:srgbClr val="354445"/>
+                </a:solidFill>
+                <a:latin typeface="Malgun Gothic" pitchFamily="34" charset="0"/>
+                <a:ea typeface="Malgun Gothic" pitchFamily="34" charset="-122"/>
+                <a:cs typeface="Malgun Gothic" pitchFamily="34" charset="-120"/>
+              </a:rPr>
+              <a:t>기본 통계 대시보드</a:t>
+            </a:r>
+            <a:endParaRPr lang="en-US" sz="1050" dirty="0"/>
+          </a:p>
+          <a:p>
+            <a:pPr marL="342900" indent="-342900">
+              <a:spcAft>
+                <a:spcPts val="400"/>
+              </a:spcAft>
+              <a:buSzPct val="100000"/>
+              <a:buChar char="•"/>
+            </a:pPr>
+            <a:r>
+              <a:rPr lang="en-US" sz="1050" dirty="0">
+                <a:solidFill>
+                  <a:srgbClr val="354445"/>
+                </a:solidFill>
+                <a:latin typeface="Malgun Gothic" pitchFamily="34" charset="0"/>
+                <a:ea typeface="Malgun Gothic" pitchFamily="34" charset="-122"/>
+                <a:cs typeface="Malgun Gothic" pitchFamily="34" charset="-120"/>
+              </a:rPr>
+              <a:t>평일 09–18시 지원</a:t>
+            </a:r>
+            <a:endParaRPr lang="en-US" sz="1050" dirty="0"/>
+          </a:p>
+        </p:txBody>
+      </p:sp>
+      <p:sp>
+        <p:nvSpPr>
+          <p:cNvPr id="11" name="Shape 9"/>
+          <p:cNvSpPr/>
+          <p:nvPr/>
+        </p:nvSpPr>
+        <p:spPr>
+          <a:xfrm>
+            <a:off x="4405274" y="2011680"/>
+            <a:ext cx="3381146" cy="3712464"/>
+          </a:xfrm>
+          <a:prstGeom prst="rect">
+            <a:avLst/>
+          </a:prstGeom>
+          <a:solidFill>
+            <a:srgbClr val="EDF3F1"/>
+          </a:solidFill>
+          <a:ln/>
+        </p:spPr>
+      </p:sp>
+      <p:sp>
+        <p:nvSpPr>
+          <p:cNvPr id="12" name="Text 10"/>
+          <p:cNvSpPr/>
+          <p:nvPr/>
+        </p:nvSpPr>
+        <p:spPr>
+          <a:xfrm>
+            <a:off x="4716170" y="2194560"/>
+            <a:ext cx="2759354" cy="347472"/>
+          </a:xfrm>
+          <a:prstGeom prst="rect">
+            <a:avLst/>
+          </a:prstGeom>
+          <a:noFill/>
+          <a:ln/>
+        </p:spPr>
+        <p:txBody>
+          <a:bodyPr wrap="square" lIns="0" tIns="0" rIns="0" bIns="0" rtlCol="0" anchor="ctr"/>
+          <a:lstStyle/>
+          <a:p>
+            <a:pPr indent="0" marL="0">
+              <a:buNone/>
+            </a:pPr>
+            <a:r>
+              <a:rPr lang="en-US" sz="1800" b="1" dirty="0">
+                <a:solidFill>
+                  <a:srgbClr val="0D5257"/>
+                </a:solidFill>
+                <a:latin typeface="Malgun Gothic" pitchFamily="34" charset="0"/>
+                <a:ea typeface="Malgun Gothic" pitchFamily="34" charset="-122"/>
+                <a:cs typeface="Malgun Gothic" pitchFamily="34" charset="-120"/>
+              </a:rPr>
+              <a:t>피움 Smart</a:t>
+            </a:r>
+            <a:endParaRPr lang="en-US" sz="1800" dirty="0"/>
+          </a:p>
+        </p:txBody>
+      </p:sp>
+      <p:sp>
+        <p:nvSpPr>
+          <p:cNvPr id="13" name="Shape 11"/>
+          <p:cNvSpPr/>
+          <p:nvPr/>
+        </p:nvSpPr>
+        <p:spPr>
+          <a:xfrm>
+            <a:off x="6780581" y="2249424"/>
+            <a:ext cx="713232" cy="274320"/>
+          </a:xfrm>
+          <a:prstGeom prst="roundRect">
+            <a:avLst>
+              <a:gd name="adj" fmla="val 46667"/>
+            </a:avLst>
+          </a:prstGeom>
+          <a:solidFill>
+            <a:srgbClr val="F7F1E2"/>
+          </a:solidFill>
+          <a:ln/>
+        </p:spPr>
+      </p:sp>
+      <p:sp>
+        <p:nvSpPr>
+          <p:cNvPr id="14" name="Text 12"/>
+          <p:cNvSpPr/>
+          <p:nvPr/>
+        </p:nvSpPr>
+        <p:spPr>
+          <a:xfrm>
+            <a:off x="6780581" y="2249424"/>
+            <a:ext cx="713232" cy="274320"/>
+          </a:xfrm>
+          <a:prstGeom prst="rect">
+            <a:avLst/>
+          </a:prstGeom>
+          <a:noFill/>
+          <a:ln/>
+        </p:spPr>
+        <p:txBody>
+          <a:bodyPr wrap="square" lIns="0" tIns="0" rIns="0" bIns="0" rtlCol="0" anchor="ctr"/>
+          <a:lstStyle/>
+          <a:p>
+            <a:pPr algn="ctr" indent="0" marL="0">
+              <a:buNone/>
+            </a:pPr>
+            <a:r>
+              <a:rPr lang="en-US" sz="950" b="1" dirty="0">
+                <a:solidFill>
+                  <a:srgbClr val="8F6716"/>
+                </a:solidFill>
+                <a:latin typeface="Malgun Gothic" pitchFamily="34" charset="0"/>
+                <a:ea typeface="Malgun Gothic" pitchFamily="34" charset="-122"/>
+                <a:cs typeface="Malgun Gothic" pitchFamily="34" charset="-120"/>
+              </a:rPr>
+              <a:t>권장</a:t>
+            </a:r>
+            <a:endParaRPr lang="en-US" sz="950" dirty="0"/>
+          </a:p>
+        </p:txBody>
+      </p:sp>
+      <p:sp>
+        <p:nvSpPr>
+          <p:cNvPr id="15" name="Text 13"/>
+          <p:cNvSpPr/>
+          <p:nvPr/>
+        </p:nvSpPr>
+        <p:spPr>
+          <a:xfrm>
+            <a:off x="4716170" y="2578608"/>
+            <a:ext cx="2759354" cy="420624"/>
+          </a:xfrm>
+          <a:prstGeom prst="rect">
+            <a:avLst/>
+          </a:prstGeom>
+          <a:noFill/>
+          <a:ln/>
+        </p:spPr>
+        <p:txBody>
+          <a:bodyPr wrap="square" lIns="0" tIns="0" rIns="0" bIns="0" rtlCol="0" anchor="ctr"/>
+          <a:lstStyle/>
+          <a:p>
+            <a:pPr indent="0" marL="0">
+              <a:buNone/>
+            </a:pPr>
+            <a:r>
+              <a:rPr lang="en-US" sz="2600" b="1" dirty="0">
+                <a:solidFill>
+                  <a:srgbClr val="0D5257"/>
+                </a:solidFill>
+                <a:latin typeface="Malgun Gothic" pitchFamily="34" charset="0"/>
+                <a:ea typeface="Malgun Gothic" pitchFamily="34" charset="-122"/>
+                <a:cs typeface="Malgun Gothic" pitchFamily="34" charset="-120"/>
+              </a:rPr>
+              <a:t>월 169만원</a:t>
+            </a:r>
+            <a:endParaRPr lang="en-US" sz="2600" dirty="0"/>
+          </a:p>
+        </p:txBody>
+      </p:sp>
+      <p:sp>
+        <p:nvSpPr>
+          <p:cNvPr id="16" name="Text 14"/>
+          <p:cNvSpPr/>
+          <p:nvPr/>
+        </p:nvSpPr>
+        <p:spPr>
+          <a:xfrm>
+            <a:off x="4716170" y="2980944"/>
+            <a:ext cx="2759354" cy="256032"/>
+          </a:xfrm>
+          <a:prstGeom prst="rect">
+            <a:avLst/>
+          </a:prstGeom>
+          <a:noFill/>
+          <a:ln/>
+        </p:spPr>
+        <p:txBody>
+          <a:bodyPr wrap="square" lIns="0" tIns="0" rIns="0" bIns="0" rtlCol="0" anchor="ctr"/>
+          <a:lstStyle/>
+          <a:p>
+            <a:pPr indent="0" marL="0">
+              <a:buNone/>
+            </a:pPr>
+            <a:r>
+              <a:rPr lang="en-US" sz="1100" b="1" dirty="0">
+                <a:solidFill>
+                  <a:srgbClr val="8F6716"/>
+                </a:solidFill>
+                <a:latin typeface="Malgun Gothic" pitchFamily="34" charset="0"/>
+                <a:ea typeface="Malgun Gothic" pitchFamily="34" charset="-122"/>
+                <a:cs typeface="Malgun Gothic" pitchFamily="34" charset="-120"/>
+              </a:rPr>
+              <a:t>구축비 2,400만원 · 1회</a:t>
+            </a:r>
+            <a:endParaRPr lang="en-US" sz="1100" dirty="0"/>
+          </a:p>
+        </p:txBody>
+      </p:sp>
+      <p:sp>
+        <p:nvSpPr>
+          <p:cNvPr id="17" name="Text 15"/>
+          <p:cNvSpPr/>
+          <p:nvPr/>
+        </p:nvSpPr>
+        <p:spPr>
+          <a:xfrm>
+            <a:off x="4716170" y="3255264"/>
+            <a:ext cx="2759354" cy="402336"/>
+          </a:xfrm>
+          <a:prstGeom prst="rect">
+            <a:avLst/>
+          </a:prstGeom>
+          <a:noFill/>
+          <a:ln/>
+        </p:spPr>
+        <p:txBody>
+          <a:bodyPr wrap="square" lIns="0" tIns="0" rIns="0" bIns="0" rtlCol="0" anchor="t"/>
+          <a:lstStyle/>
+          <a:p>
+            <a:pPr indent="0" marL="0">
+              <a:lnSpc>
+                <a:spcPts val="1500"/>
+              </a:lnSpc>
+              <a:buNone/>
+            </a:pPr>
+            <a:r>
+              <a:rPr lang="en-US" sz="1050" dirty="0">
+                <a:solidFill>
+                  <a:srgbClr val="5F6F70"/>
+                </a:solidFill>
+                <a:latin typeface="Malgun Gothic" pitchFamily="34" charset="0"/>
+                <a:ea typeface="Malgun Gothic" pitchFamily="34" charset="-122"/>
+                <a:cs typeface="Malgun Gothic" pitchFamily="34" charset="-120"/>
+              </a:rPr>
+              <a:t>의료진 4–10인 · 노쇼와 콜 부하가 큰 병원</a:t>
+            </a:r>
+            <a:endParaRPr lang="en-US" sz="1050" dirty="0"/>
+          </a:p>
+        </p:txBody>
+      </p:sp>
+      <p:sp>
+        <p:nvSpPr>
+          <p:cNvPr id="18" name="Text 16"/>
+          <p:cNvSpPr/>
+          <p:nvPr/>
+        </p:nvSpPr>
+        <p:spPr>
+          <a:xfrm>
+            <a:off x="4716170" y="3730752"/>
+            <a:ext cx="2759354" cy="1828800"/>
+          </a:xfrm>
+          <a:prstGeom prst="rect">
+            <a:avLst/>
+          </a:prstGeom>
+          <a:noFill/>
+          <a:ln/>
+        </p:spPr>
+        <p:txBody>
+          <a:bodyPr wrap="square" lIns="0" tIns="0" rIns="0" bIns="0" rtlCol="0" anchor="t"/>
+          <a:lstStyle/>
+          <a:p>
+            <a:pPr marL="342900" indent="-342900">
+              <a:spcAft>
+                <a:spcPts val="400"/>
+              </a:spcAft>
+              <a:buSzPct val="100000"/>
+              <a:buChar char="•"/>
+            </a:pPr>
+            <a:r>
+              <a:rPr lang="en-US" sz="1050" dirty="0">
+                <a:solidFill>
+                  <a:srgbClr val="354445"/>
+                </a:solidFill>
+                <a:latin typeface="Malgun Gothic" pitchFamily="34" charset="0"/>
+                <a:ea typeface="Malgun Gothic" pitchFamily="34" charset="-122"/>
+                <a:cs typeface="Malgun Gothic" pitchFamily="34" charset="-120"/>
+              </a:rPr>
+              <a:t>피움 Core 전체 포함</a:t>
+            </a:r>
+            <a:endParaRPr lang="en-US" sz="1050" dirty="0"/>
+          </a:p>
+          <a:p>
+            <a:pPr marL="342900" indent="-342900">
+              <a:spcAft>
+                <a:spcPts val="400"/>
+              </a:spcAft>
+              <a:buSzPct val="100000"/>
+              <a:buChar char="•"/>
+            </a:pPr>
+            <a:r>
+              <a:rPr lang="en-US" sz="1050" dirty="0">
+                <a:solidFill>
+                  <a:srgbClr val="354445"/>
+                </a:solidFill>
+                <a:latin typeface="Malgun Gothic" pitchFamily="34" charset="0"/>
+                <a:ea typeface="Malgun Gothic" pitchFamily="34" charset="-122"/>
+                <a:cs typeface="Malgun Gothic" pitchFamily="34" charset="-120"/>
+              </a:rPr>
+              <a:t>AI 노쇼 예측 &amp; 오버부킹</a:t>
+            </a:r>
+            <a:endParaRPr lang="en-US" sz="1050" dirty="0"/>
+          </a:p>
+          <a:p>
+            <a:pPr marL="342900" indent="-342900">
+              <a:spcAft>
+                <a:spcPts val="400"/>
+              </a:spcAft>
+              <a:buSzPct val="100000"/>
+              <a:buChar char="•"/>
+            </a:pPr>
+            <a:r>
+              <a:rPr lang="en-US" sz="1050" dirty="0">
+                <a:solidFill>
+                  <a:srgbClr val="354445"/>
+                </a:solidFill>
+                <a:latin typeface="Malgun Gothic" pitchFamily="34" charset="0"/>
+                <a:ea typeface="Malgun Gothic" pitchFamily="34" charset="-122"/>
+                <a:cs typeface="Malgun Gothic" pitchFamily="34" charset="-120"/>
+              </a:rPr>
+              <a:t>24시간 AI 예약 상담</a:t>
+            </a:r>
+            <a:endParaRPr lang="en-US" sz="1050" dirty="0"/>
+          </a:p>
+          <a:p>
+            <a:pPr marL="342900" indent="-342900">
+              <a:spcAft>
+                <a:spcPts val="400"/>
+              </a:spcAft>
+              <a:buSzPct val="100000"/>
+              <a:buChar char="•"/>
+            </a:pPr>
+            <a:r>
+              <a:rPr lang="en-US" sz="1050" dirty="0">
+                <a:solidFill>
+                  <a:srgbClr val="354445"/>
+                </a:solidFill>
+                <a:latin typeface="Malgun Gothic" pitchFamily="34" charset="0"/>
+                <a:ea typeface="Malgun Gothic" pitchFamily="34" charset="-122"/>
+                <a:cs typeface="Malgun Gothic" pitchFamily="34" charset="-120"/>
+              </a:rPr>
+              <a:t>주기 기반 자동 리콜</a:t>
+            </a:r>
+            <a:endParaRPr lang="en-US" sz="1050" dirty="0"/>
+          </a:p>
+          <a:p>
+            <a:pPr marL="342900" indent="-342900">
+              <a:spcAft>
+                <a:spcPts val="400"/>
+              </a:spcAft>
+              <a:buSzPct val="100000"/>
+              <a:buChar char="•"/>
+            </a:pPr>
+            <a:r>
+              <a:rPr lang="en-US" sz="1050" dirty="0">
+                <a:solidFill>
+                  <a:srgbClr val="354445"/>
+                </a:solidFill>
+                <a:latin typeface="Malgun Gothic" pitchFamily="34" charset="0"/>
+                <a:ea typeface="Malgun Gothic" pitchFamily="34" charset="-122"/>
+                <a:cs typeface="Malgun Gothic" pitchFamily="34" charset="-120"/>
+              </a:rPr>
+              <a:t>이탈 예측 &amp; 리텐션</a:t>
+            </a:r>
+            <a:endParaRPr lang="en-US" sz="1050" dirty="0"/>
+          </a:p>
+          <a:p>
+            <a:pPr marL="342900" indent="-342900">
+              <a:spcAft>
+                <a:spcPts val="400"/>
+              </a:spcAft>
+              <a:buSzPct val="100000"/>
+              <a:buChar char="•"/>
+            </a:pPr>
+            <a:r>
+              <a:rPr lang="en-US" sz="1050" dirty="0">
+                <a:solidFill>
+                  <a:srgbClr val="354445"/>
+                </a:solidFill>
+                <a:latin typeface="Malgun Gothic" pitchFamily="34" charset="0"/>
+                <a:ea typeface="Malgun Gothic" pitchFamily="34" charset="-122"/>
+                <a:cs typeface="Malgun Gothic" pitchFamily="34" charset="-120"/>
+              </a:rPr>
+              <a:t>분기 성과 리포트</a:t>
+            </a:r>
+            <a:endParaRPr lang="en-US" sz="1050" dirty="0"/>
+          </a:p>
+          <a:p>
+            <a:pPr marL="342900" indent="-342900">
+              <a:spcAft>
+                <a:spcPts val="400"/>
+              </a:spcAft>
+              <a:buSzPct val="100000"/>
+              <a:buChar char="•"/>
+            </a:pPr>
+            <a:r>
+              <a:rPr lang="en-US" sz="1050" dirty="0">
+                <a:solidFill>
+                  <a:srgbClr val="354445"/>
+                </a:solidFill>
+                <a:latin typeface="Malgun Gothic" pitchFamily="34" charset="0"/>
+                <a:ea typeface="Malgun Gothic" pitchFamily="34" charset="-122"/>
+                <a:cs typeface="Malgun Gothic" pitchFamily="34" charset="-120"/>
+              </a:rPr>
+              <a:t>평일 09–20시 · 토 오전</a:t>
+            </a:r>
+            <a:endParaRPr lang="en-US" sz="1050" dirty="0"/>
+          </a:p>
+        </p:txBody>
+      </p:sp>
+      <p:sp>
+        <p:nvSpPr>
+          <p:cNvPr id="19" name="Shape 17"/>
+          <p:cNvSpPr/>
+          <p:nvPr/>
+        </p:nvSpPr>
+        <p:spPr>
+          <a:xfrm>
+            <a:off x="8243621" y="2011680"/>
+            <a:ext cx="3381146" cy="3712464"/>
+          </a:xfrm>
+          <a:prstGeom prst="rect">
+            <a:avLst/>
+          </a:prstGeom>
+          <a:solidFill>
+            <a:srgbClr val="FFFFFF"/>
+          </a:solidFill>
+          <a:ln w="9525">
+            <a:solidFill>
+              <a:srgbClr val="E1E4DE"/>
+            </a:solidFill>
+            <a:prstDash val="solid"/>
+          </a:ln>
+        </p:spPr>
+      </p:sp>
+      <p:sp>
+        <p:nvSpPr>
+          <p:cNvPr id="20" name="Text 18"/>
+          <p:cNvSpPr/>
+          <p:nvPr/>
+        </p:nvSpPr>
+        <p:spPr>
+          <a:xfrm>
+            <a:off x="8554517" y="2194560"/>
+            <a:ext cx="2759354" cy="347472"/>
+          </a:xfrm>
+          <a:prstGeom prst="rect">
+            <a:avLst/>
+          </a:prstGeom>
+          <a:noFill/>
+          <a:ln/>
+        </p:spPr>
+        <p:txBody>
+          <a:bodyPr wrap="square" lIns="0" tIns="0" rIns="0" bIns="0" rtlCol="0" anchor="ctr"/>
+          <a:lstStyle/>
+          <a:p>
+            <a:pPr indent="0" marL="0">
+              <a:buNone/>
+            </a:pPr>
+            <a:r>
+              <a:rPr lang="en-US" sz="1800" b="1" dirty="0">
+                <a:solidFill>
+                  <a:srgbClr val="12191A"/>
+                </a:solidFill>
+                <a:latin typeface="Malgun Gothic" pitchFamily="34" charset="0"/>
+                <a:ea typeface="Malgun Gothic" pitchFamily="34" charset="-122"/>
+                <a:cs typeface="Malgun Gothic" pitchFamily="34" charset="-120"/>
+              </a:rPr>
+              <a:t>피움 Enterprise</a:t>
+            </a:r>
+            <a:endParaRPr lang="en-US" sz="1800" dirty="0"/>
+          </a:p>
+        </p:txBody>
+      </p:sp>
+      <p:sp>
+        <p:nvSpPr>
+          <p:cNvPr id="21" name="Text 19"/>
+          <p:cNvSpPr/>
+          <p:nvPr/>
+        </p:nvSpPr>
+        <p:spPr>
+          <a:xfrm>
+            <a:off x="8554517" y="2578608"/>
+            <a:ext cx="2759354" cy="420624"/>
+          </a:xfrm>
+          <a:prstGeom prst="rect">
+            <a:avLst/>
+          </a:prstGeom>
+          <a:noFill/>
+          <a:ln/>
+        </p:spPr>
+        <p:txBody>
+          <a:bodyPr wrap="square" lIns="0" tIns="0" rIns="0" bIns="0" rtlCol="0" anchor="ctr"/>
+          <a:lstStyle/>
+          <a:p>
+            <a:pPr indent="0" marL="0">
+              <a:buNone/>
+            </a:pPr>
+            <a:r>
+              <a:rPr lang="en-US" sz="2600" b="1" dirty="0">
+                <a:solidFill>
+                  <a:srgbClr val="0D5257"/>
+                </a:solidFill>
+                <a:latin typeface="Malgun Gothic" pitchFamily="34" charset="0"/>
+                <a:ea typeface="Malgun Gothic" pitchFamily="34" charset="-122"/>
+                <a:cs typeface="Malgun Gothic" pitchFamily="34" charset="-120"/>
+              </a:rPr>
+              <a:t>월 320만원~</a:t>
+            </a:r>
+            <a:endParaRPr lang="en-US" sz="2600" dirty="0"/>
+          </a:p>
+        </p:txBody>
+      </p:sp>
+      <p:sp>
+        <p:nvSpPr>
+          <p:cNvPr id="22" name="Text 20"/>
+          <p:cNvSpPr/>
+          <p:nvPr/>
+        </p:nvSpPr>
+        <p:spPr>
+          <a:xfrm>
+            <a:off x="8554517" y="2980944"/>
+            <a:ext cx="2759354" cy="256032"/>
+          </a:xfrm>
+          <a:prstGeom prst="rect">
+            <a:avLst/>
+          </a:prstGeom>
+          <a:noFill/>
+          <a:ln/>
+        </p:spPr>
+        <p:txBody>
+          <a:bodyPr wrap="square" lIns="0" tIns="0" rIns="0" bIns="0" rtlCol="0" anchor="ctr"/>
+          <a:lstStyle/>
+          <a:p>
+            <a:pPr indent="0" marL="0">
+              <a:buNone/>
+            </a:pPr>
+            <a:r>
+              <a:rPr lang="en-US" sz="1100" b="1" dirty="0">
+                <a:solidFill>
+                  <a:srgbClr val="8F6716"/>
+                </a:solidFill>
+                <a:latin typeface="Malgun Gothic" pitchFamily="34" charset="0"/>
+                <a:ea typeface="Malgun Gothic" pitchFamily="34" charset="-122"/>
+                <a:cs typeface="Malgun Gothic" pitchFamily="34" charset="-120"/>
+              </a:rPr>
+              <a:t>구축비 4,000만원~ · 범위별 산정</a:t>
+            </a:r>
+            <a:endParaRPr lang="en-US" sz="1100" dirty="0"/>
+          </a:p>
+        </p:txBody>
+      </p:sp>
+      <p:sp>
+        <p:nvSpPr>
+          <p:cNvPr id="23" name="Text 21"/>
+          <p:cNvSpPr/>
+          <p:nvPr/>
+        </p:nvSpPr>
+        <p:spPr>
+          <a:xfrm>
+            <a:off x="8554517" y="3255264"/>
+            <a:ext cx="2759354" cy="402336"/>
+          </a:xfrm>
+          <a:prstGeom prst="rect">
+            <a:avLst/>
+          </a:prstGeom>
+          <a:noFill/>
+          <a:ln/>
+        </p:spPr>
+        <p:txBody>
+          <a:bodyPr wrap="square" lIns="0" tIns="0" rIns="0" bIns="0" rtlCol="0" anchor="t"/>
+          <a:lstStyle/>
+          <a:p>
+            <a:pPr indent="0" marL="0">
+              <a:lnSpc>
+                <a:spcPts val="1500"/>
+              </a:lnSpc>
+              <a:buNone/>
+            </a:pPr>
+            <a:r>
+              <a:rPr lang="en-US" sz="1050" dirty="0">
+                <a:solidFill>
+                  <a:srgbClr val="5F6F70"/>
+                </a:solidFill>
+                <a:latin typeface="Malgun Gothic" pitchFamily="34" charset="0"/>
+                <a:ea typeface="Malgun Gothic" pitchFamily="34" charset="-122"/>
+                <a:cs typeface="Malgun Gothic" pitchFamily="34" charset="-120"/>
+              </a:rPr>
+              <a:t>의료진 11인 이상 · 다지점 또는 EMR 연계</a:t>
+            </a:r>
+            <a:endParaRPr lang="en-US" sz="1050" dirty="0"/>
+          </a:p>
+        </p:txBody>
+      </p:sp>
+      <p:sp>
+        <p:nvSpPr>
+          <p:cNvPr id="24" name="Text 22"/>
+          <p:cNvSpPr/>
+          <p:nvPr/>
+        </p:nvSpPr>
+        <p:spPr>
+          <a:xfrm>
+            <a:off x="8554517" y="3730752"/>
+            <a:ext cx="2759354" cy="1828800"/>
+          </a:xfrm>
+          <a:prstGeom prst="rect">
+            <a:avLst/>
+          </a:prstGeom>
+          <a:noFill/>
+          <a:ln/>
+        </p:spPr>
+        <p:txBody>
+          <a:bodyPr wrap="square" lIns="0" tIns="0" rIns="0" bIns="0" rtlCol="0" anchor="t"/>
+          <a:lstStyle/>
+          <a:p>
+            <a:pPr marL="342900" indent="-342900">
+              <a:spcAft>
+                <a:spcPts val="400"/>
+              </a:spcAft>
+              <a:buSzPct val="100000"/>
+              <a:buChar char="•"/>
+            </a:pPr>
+            <a:r>
+              <a:rPr lang="en-US" sz="1050" dirty="0">
+                <a:solidFill>
+                  <a:srgbClr val="354445"/>
+                </a:solidFill>
+                <a:latin typeface="Malgun Gothic" pitchFamily="34" charset="0"/>
+                <a:ea typeface="Malgun Gothic" pitchFamily="34" charset="-122"/>
+                <a:cs typeface="Malgun Gothic" pitchFamily="34" charset="-120"/>
+              </a:rPr>
+              <a:t>피움 Smart 전체 포함</a:t>
+            </a:r>
+            <a:endParaRPr lang="en-US" sz="1050" dirty="0"/>
+          </a:p>
+          <a:p>
+            <a:pPr marL="342900" indent="-342900">
+              <a:spcAft>
+                <a:spcPts val="400"/>
+              </a:spcAft>
+              <a:buSzPct val="100000"/>
+              <a:buChar char="•"/>
+            </a:pPr>
+            <a:r>
+              <a:rPr lang="en-US" sz="1050" dirty="0">
+                <a:solidFill>
+                  <a:srgbClr val="354445"/>
+                </a:solidFill>
+                <a:latin typeface="Malgun Gothic" pitchFamily="34" charset="0"/>
+                <a:ea typeface="Malgun Gothic" pitchFamily="34" charset="-122"/>
+                <a:cs typeface="Malgun Gothic" pitchFamily="34" charset="-120"/>
+              </a:rPr>
+              <a:t>AI 모듈 8종 전체</a:t>
+            </a:r>
+            <a:endParaRPr lang="en-US" sz="1050" dirty="0"/>
+          </a:p>
+          <a:p>
+            <a:pPr marL="342900" indent="-342900">
+              <a:spcAft>
+                <a:spcPts val="400"/>
+              </a:spcAft>
+              <a:buSzPct val="100000"/>
+              <a:buChar char="•"/>
+            </a:pPr>
+            <a:r>
+              <a:rPr lang="en-US" sz="1050" dirty="0">
+                <a:solidFill>
+                  <a:srgbClr val="354445"/>
+                </a:solidFill>
+                <a:latin typeface="Malgun Gothic" pitchFamily="34" charset="0"/>
+                <a:ea typeface="Malgun Gothic" pitchFamily="34" charset="-122"/>
+                <a:cs typeface="Malgun Gothic" pitchFamily="34" charset="-120"/>
+              </a:rPr>
+              <a:t>EMR 연계 개발</a:t>
+            </a:r>
+            <a:endParaRPr lang="en-US" sz="1050" dirty="0"/>
+          </a:p>
+          <a:p>
+            <a:pPr marL="342900" indent="-342900">
+              <a:spcAft>
+                <a:spcPts val="400"/>
+              </a:spcAft>
+              <a:buSzPct val="100000"/>
+              <a:buChar char="•"/>
+            </a:pPr>
+            <a:r>
+              <a:rPr lang="en-US" sz="1050" dirty="0">
+                <a:solidFill>
+                  <a:srgbClr val="354445"/>
+                </a:solidFill>
+                <a:latin typeface="Malgun Gothic" pitchFamily="34" charset="0"/>
+                <a:ea typeface="Malgun Gothic" pitchFamily="34" charset="-122"/>
+                <a:cs typeface="Malgun Gothic" pitchFamily="34" charset="-120"/>
+              </a:rPr>
+              <a:t>지점 통합 대시보드</a:t>
+            </a:r>
+            <a:endParaRPr lang="en-US" sz="1050" dirty="0"/>
+          </a:p>
+          <a:p>
+            <a:pPr marL="342900" indent="-342900">
+              <a:spcAft>
+                <a:spcPts val="400"/>
+              </a:spcAft>
+              <a:buSzPct val="100000"/>
+              <a:buChar char="•"/>
+            </a:pPr>
+            <a:r>
+              <a:rPr lang="en-US" sz="1050" dirty="0">
+                <a:solidFill>
+                  <a:srgbClr val="354445"/>
+                </a:solidFill>
+                <a:latin typeface="Malgun Gothic" pitchFamily="34" charset="0"/>
+                <a:ea typeface="Malgun Gothic" pitchFamily="34" charset="-122"/>
+                <a:cs typeface="Malgun Gothic" pitchFamily="34" charset="-120"/>
+              </a:rPr>
+              <a:t>전용 기능 개발</a:t>
+            </a:r>
+            <a:endParaRPr lang="en-US" sz="1050" dirty="0"/>
+          </a:p>
+          <a:p>
+            <a:pPr marL="342900" indent="-342900">
+              <a:spcAft>
+                <a:spcPts val="400"/>
+              </a:spcAft>
+              <a:buSzPct val="100000"/>
+              <a:buChar char="•"/>
+            </a:pPr>
+            <a:r>
+              <a:rPr lang="en-US" sz="1050" dirty="0">
+                <a:solidFill>
+                  <a:srgbClr val="354445"/>
+                </a:solidFill>
+                <a:latin typeface="Malgun Gothic" pitchFamily="34" charset="0"/>
+                <a:ea typeface="Malgun Gothic" pitchFamily="34" charset="-122"/>
+                <a:cs typeface="Malgun Gothic" pitchFamily="34" charset="-120"/>
+              </a:rPr>
+              <a:t>전담 매니저 · 24시간 대응</a:t>
+            </a:r>
+            <a:endParaRPr lang="en-US" sz="1050" dirty="0"/>
+          </a:p>
+        </p:txBody>
+      </p:sp>
+      <p:sp>
+        <p:nvSpPr>
+          <p:cNvPr id="25" name="Text 23"/>
+          <p:cNvSpPr/>
+          <p:nvPr/>
+        </p:nvSpPr>
+        <p:spPr>
+          <a:xfrm>
+            <a:off x="566928" y="5815584"/>
+            <a:ext cx="10234879" cy="237744"/>
+          </a:xfrm>
+          <a:prstGeom prst="rect">
+            <a:avLst/>
+          </a:prstGeom>
+          <a:noFill/>
+          <a:ln/>
+        </p:spPr>
+        <p:txBody>
+          <a:bodyPr wrap="square" lIns="0" tIns="0" rIns="0" bIns="0" rtlCol="0" anchor="ctr"/>
+          <a:lstStyle/>
+          <a:p>
+            <a:pPr indent="0" marL="0">
+              <a:buNone/>
+            </a:pPr>
+            <a:r>
+              <a:rPr lang="en-US" sz="1050" dirty="0">
+                <a:solidFill>
+                  <a:srgbClr val="354445"/>
+                </a:solidFill>
+                <a:latin typeface="Malgun Gothic" pitchFamily="34" charset="0"/>
+                <a:ea typeface="Malgun Gothic" pitchFamily="34" charset="-122"/>
+                <a:cs typeface="Malgun Gothic" pitchFamily="34" charset="-120"/>
+              </a:rPr>
+              <a:t>실비 — 카카오 알림톡 건당 9원, 휴대폰 본인인증 건당 55원. 마진 없이 사용량 실비로 청구합니다 (월 예약 2,400건 기준 약 10만원).</a:t>
+            </a:r>
+            <a:endParaRPr lang="en-US" sz="1050" dirty="0"/>
+          </a:p>
+        </p:txBody>
+      </p:sp>
+      <p:sp>
+        <p:nvSpPr>
+          <p:cNvPr id="26" name="Text 24"/>
+          <p:cNvSpPr/>
+          <p:nvPr/>
+        </p:nvSpPr>
+        <p:spPr>
+          <a:xfrm>
+            <a:off x="566928" y="6053328"/>
+            <a:ext cx="10234879" cy="237744"/>
+          </a:xfrm>
+          <a:prstGeom prst="rect">
+            <a:avLst/>
+          </a:prstGeom>
+          <a:noFill/>
+          <a:ln/>
+        </p:spPr>
+        <p:txBody>
+          <a:bodyPr wrap="square" lIns="0" tIns="0" rIns="0" bIns="0" rtlCol="0" anchor="ctr"/>
+          <a:lstStyle/>
+          <a:p>
+            <a:pPr indent="0" marL="0">
+              <a:buNone/>
+            </a:pPr>
+            <a:r>
+              <a:rPr lang="en-US" sz="1050" dirty="0">
+                <a:solidFill>
+                  <a:srgbClr val="5F6F70"/>
+                </a:solidFill>
+                <a:latin typeface="Malgun Gothic" pitchFamily="34" charset="0"/>
+                <a:ea typeface="Malgun Gothic" pitchFamily="34" charset="-122"/>
+                <a:cs typeface="Malgun Gothic" pitchFamily="34" charset="-120"/>
+              </a:rPr>
+              <a:t>계약 — 정식 오픈일로부터 12개월, 이후 월 단위 연장. 구독료는 오픈 다음 달부터 청구되며 구축 12주 동안은 발생하지 않습니다. 연 선납 시 10% 할인. 부가세 별도.</a:t>
+            </a:r>
+            <a:endParaRPr lang="en-US" sz="1050" dirty="0"/>
+          </a:p>
+        </p:txBody>
+      </p:sp>
+      <p:sp>
+        <p:nvSpPr>
+          <p:cNvPr id="27" name="Text 25"/>
+          <p:cNvSpPr/>
+          <p:nvPr/>
+        </p:nvSpPr>
+        <p:spPr>
+          <a:xfrm>
+            <a:off x="10984687" y="6291072"/>
+            <a:ext cx="640080" cy="274320"/>
+          </a:xfrm>
+          <a:prstGeom prst="rect">
+            <a:avLst/>
+          </a:prstGeom>
+          <a:noFill/>
+          <a:ln/>
+        </p:spPr>
+        <p:txBody>
+          <a:bodyPr wrap="square" lIns="0" tIns="0" rIns="0" bIns="0" rtlCol="0" anchor="ctr"/>
+          <a:lstStyle/>
+          <a:p>
+            <a:pPr algn="r" indent="0" marL="0">
+              <a:buNone/>
+            </a:pPr>
+            <a:r>
+              <a:rPr lang="en-US" sz="1000" dirty="0">
+                <a:solidFill>
+                  <a:srgbClr val="8C9A99"/>
+                </a:solidFill>
+                <a:latin typeface="Malgun Gothic" pitchFamily="34" charset="0"/>
+                <a:ea typeface="Malgun Gothic" pitchFamily="34" charset="-122"/>
+                <a:cs typeface="Malgun Gothic" pitchFamily="34" charset="-120"/>
+              </a:rPr>
+              <a:t>15</a:t>
+            </a:r>
+            <a:endParaRPr lang="en-US" sz="1000" dirty="0"/>
+          </a:p>
+        </p:txBody>
+      </p:sp>
+    </p:spTree>
+  </p:cSld>
+  <p:clrMapOvr>
+    <a:masterClrMapping/>
+  </p:clrMapOvr>
+</p:sld>
+</file>
+
+<file path=ppt/slides/slide16.xml><?xml version="1.0" encoding="utf-8"?>
+<p:sld xmlns:a="http://schemas.openxmlformats.org/drawingml/2006/main" xmlns:r="http://schemas.openxmlformats.org/officeDocument/2006/relationships" xmlns:p="http://schemas.openxmlformats.org/presentationml/2006/main">
+  <p:cSld name="Slide 16">
     <p:bg>
       <p:bgPr>
         <a:solidFill>
@@ -10297,7 +13025,7 @@
                 <a:ea typeface="Malgun Gothic" pitchFamily="34" charset="-122"/>
                 <a:cs typeface="Malgun Gothic" pitchFamily="34" charset="-120"/>
               </a:rPr>
-              <a:t>피움 (Pium) · 난임 전문병원 AI 스마트 CRM · 사업 소개서 · Rev. 1.0</a:t>
+              <a:t>피움 (Pium) · 난임 전문병원 AI 스마트 CRM · 사업 소개서 · Rev. 1.1</a:t>
             </a:r>
             <a:endParaRPr lang="en-US" sz="1000" dirty="0"/>
           </a:p>
